--- a/docs/assets/Caroline_drawings.pptx
+++ b/docs/assets/Caroline_drawings.pptx
@@ -260,7 +260,7 @@
           <a:p>
             <a:fld id="{9BFBA175-CEA6-974F-BECD-C1A384BB3024}" type="datetimeFigureOut">
               <a:rPr lang="en-US" smtClean="0"/>
-              <a:t>7/3/25</a:t>
+              <a:t>3/30/26</a:t>
             </a:fld>
             <a:endParaRPr lang="en-US"/>
           </a:p>
@@ -458,7 +458,7 @@
           <a:p>
             <a:fld id="{9BFBA175-CEA6-974F-BECD-C1A384BB3024}" type="datetimeFigureOut">
               <a:rPr lang="en-US" smtClean="0"/>
-              <a:t>7/3/25</a:t>
+              <a:t>3/30/26</a:t>
             </a:fld>
             <a:endParaRPr lang="en-US"/>
           </a:p>
@@ -666,7 +666,7 @@
           <a:p>
             <a:fld id="{9BFBA175-CEA6-974F-BECD-C1A384BB3024}" type="datetimeFigureOut">
               <a:rPr lang="en-US" smtClean="0"/>
-              <a:t>7/3/25</a:t>
+              <a:t>3/30/26</a:t>
             </a:fld>
             <a:endParaRPr lang="en-US"/>
           </a:p>
@@ -864,7 +864,7 @@
           <a:p>
             <a:fld id="{9BFBA175-CEA6-974F-BECD-C1A384BB3024}" type="datetimeFigureOut">
               <a:rPr lang="en-US" smtClean="0"/>
-              <a:t>7/3/25</a:t>
+              <a:t>3/30/26</a:t>
             </a:fld>
             <a:endParaRPr lang="en-US"/>
           </a:p>
@@ -1139,7 +1139,7 @@
           <a:p>
             <a:fld id="{9BFBA175-CEA6-974F-BECD-C1A384BB3024}" type="datetimeFigureOut">
               <a:rPr lang="en-US" smtClean="0"/>
-              <a:t>7/3/25</a:t>
+              <a:t>3/30/26</a:t>
             </a:fld>
             <a:endParaRPr lang="en-US"/>
           </a:p>
@@ -1404,7 +1404,7 @@
           <a:p>
             <a:fld id="{9BFBA175-CEA6-974F-BECD-C1A384BB3024}" type="datetimeFigureOut">
               <a:rPr lang="en-US" smtClean="0"/>
-              <a:t>7/3/25</a:t>
+              <a:t>3/30/26</a:t>
             </a:fld>
             <a:endParaRPr lang="en-US"/>
           </a:p>
@@ -1816,7 +1816,7 @@
           <a:p>
             <a:fld id="{9BFBA175-CEA6-974F-BECD-C1A384BB3024}" type="datetimeFigureOut">
               <a:rPr lang="en-US" smtClean="0"/>
-              <a:t>7/3/25</a:t>
+              <a:t>3/30/26</a:t>
             </a:fld>
             <a:endParaRPr lang="en-US"/>
           </a:p>
@@ -1957,7 +1957,7 @@
           <a:p>
             <a:fld id="{9BFBA175-CEA6-974F-BECD-C1A384BB3024}" type="datetimeFigureOut">
               <a:rPr lang="en-US" smtClean="0"/>
-              <a:t>7/3/25</a:t>
+              <a:t>3/30/26</a:t>
             </a:fld>
             <a:endParaRPr lang="en-US"/>
           </a:p>
@@ -2070,7 +2070,7 @@
           <a:p>
             <a:fld id="{9BFBA175-CEA6-974F-BECD-C1A384BB3024}" type="datetimeFigureOut">
               <a:rPr lang="en-US" smtClean="0"/>
-              <a:t>7/3/25</a:t>
+              <a:t>3/30/26</a:t>
             </a:fld>
             <a:endParaRPr lang="en-US"/>
           </a:p>
@@ -2381,7 +2381,7 @@
           <a:p>
             <a:fld id="{9BFBA175-CEA6-974F-BECD-C1A384BB3024}" type="datetimeFigureOut">
               <a:rPr lang="en-US" smtClean="0"/>
-              <a:t>7/3/25</a:t>
+              <a:t>3/30/26</a:t>
             </a:fld>
             <a:endParaRPr lang="en-US"/>
           </a:p>
@@ -2669,7 +2669,7 @@
           <a:p>
             <a:fld id="{9BFBA175-CEA6-974F-BECD-C1A384BB3024}" type="datetimeFigureOut">
               <a:rPr lang="en-US" smtClean="0"/>
-              <a:t>7/3/25</a:t>
+              <a:t>3/30/26</a:t>
             </a:fld>
             <a:endParaRPr lang="en-US"/>
           </a:p>
@@ -2910,7 +2910,7 @@
           <a:p>
             <a:fld id="{9BFBA175-CEA6-974F-BECD-C1A384BB3024}" type="datetimeFigureOut">
               <a:rPr lang="en-US" smtClean="0"/>
-              <a:t>7/3/25</a:t>
+              <a:t>3/30/26</a:t>
             </a:fld>
             <a:endParaRPr lang="en-US"/>
           </a:p>
@@ -3828,10 +3828,10 @@
           <p:nvPr/>
         </p:nvPicPr>
         <p:blipFill>
-          <a:blip r:embed="rId2">
+          <a:blip>
             <a:extLst>
               <a:ext uri="{96DAC541-7B7A-43D3-8B79-37D633B846F1}">
-                <asvg:svgBlip xmlns:asvg="http://schemas.microsoft.com/office/drawing/2016/SVG/main" r:embed="rId3"/>
+                <asvg:svgBlip xmlns:asvg="http://schemas.microsoft.com/office/drawing/2016/SVG/main" r:embed="rId2"/>
               </a:ext>
             </a:extLst>
           </a:blip>
@@ -3863,8 +3863,8 @@
         </p:nvSpPr>
         <p:spPr>
           <a:xfrm>
-            <a:off x="3296839" y="1424480"/>
-            <a:ext cx="1442598" cy="1607580"/>
+            <a:off x="3296838" y="1085850"/>
+            <a:ext cx="1711127" cy="2083340"/>
           </a:xfrm>
           <a:prstGeom prst="rect">
             <a:avLst/>
@@ -4003,7 +4003,7 @@
         <p:spPr>
           <a:xfrm>
             <a:off x="1361938" y="414893"/>
-            <a:ext cx="1843837" cy="276998"/>
+            <a:ext cx="1531683" cy="276998"/>
           </a:xfrm>
           <a:prstGeom prst="rect">
             <a:avLst/>
@@ -4090,10 +4090,10 @@
           <p:nvPr/>
         </p:nvPicPr>
         <p:blipFill>
-          <a:blip r:embed="rId2">
+          <a:blip>
             <a:extLst>
               <a:ext uri="{96DAC541-7B7A-43D3-8B79-37D633B846F1}">
-                <asvg:svgBlip xmlns:asvg="http://schemas.microsoft.com/office/drawing/2016/SVG/main" r:embed="rId3"/>
+                <asvg:svgBlip xmlns:asvg="http://schemas.microsoft.com/office/drawing/2016/SVG/main" r:embed="rId2"/>
               </a:ext>
             </a:extLst>
           </a:blip>
@@ -4176,13 +4176,13 @@
         <p:spPr>
           <a:xfrm flipH="1">
             <a:off x="959222" y="553392"/>
-            <a:ext cx="2246553" cy="1460405"/>
+            <a:ext cx="1934399" cy="1460405"/>
           </a:xfrm>
           <a:prstGeom prst="bentConnector5">
             <a:avLst>
-              <a:gd name="adj1" fmla="val -2036"/>
-              <a:gd name="adj2" fmla="val 22978"/>
-              <a:gd name="adj3" fmla="val 116174"/>
+              <a:gd name="adj1" fmla="val -11818"/>
+              <a:gd name="adj2" fmla="val 15650"/>
+              <a:gd name="adj3" fmla="val 121009"/>
             </a:avLst>
           </a:prstGeom>
           <a:ln w="38100">
@@ -4218,8 +4218,8 @@
         </p:nvSpPr>
         <p:spPr>
           <a:xfrm>
-            <a:off x="3470650" y="1864660"/>
-            <a:ext cx="740163" cy="276998"/>
+            <a:off x="3411989" y="1515410"/>
+            <a:ext cx="678174" cy="276998"/>
           </a:xfrm>
           <a:prstGeom prst="rect">
             <a:avLst/>
@@ -4270,8 +4270,43 @@
         </p:nvSpPr>
         <p:spPr>
           <a:xfrm>
-            <a:off x="3442808" y="1867422"/>
-            <a:ext cx="538930" cy="276999"/>
+            <a:off x="3425942" y="1518172"/>
+            <a:ext cx="662644" cy="276999"/>
+          </a:xfrm>
+          <a:prstGeom prst="rect">
+            <a:avLst/>
+          </a:prstGeom>
+          <a:noFill/>
+        </p:spPr>
+        <p:txBody>
+          <a:bodyPr wrap="square" rtlCol="0">
+            <a:spAutoFit/>
+          </a:bodyPr>
+          <a:lstStyle/>
+          <a:p>
+            <a:r>
+              <a:rPr lang="en-US" sz="1200" noProof="1"/>
+              <a:t>Doris</a:t>
+            </a:r>
+          </a:p>
+        </p:txBody>
+      </p:sp>
+      <p:sp>
+        <p:nvSpPr>
+          <p:cNvPr id="39" name="TextBox 38">
+            <a:extLst>
+              <a:ext uri="{FF2B5EF4-FFF2-40B4-BE49-F238E27FC236}">
+                <a16:creationId xmlns:a16="http://schemas.microsoft.com/office/drawing/2014/main" id="{538E1BAF-01BE-3173-DF7A-A11580DA9B1A}"/>
+              </a:ext>
+            </a:extLst>
+          </p:cNvPr>
+          <p:cNvSpPr txBox="1"/>
+          <p:nvPr/>
+        </p:nvSpPr>
+        <p:spPr>
+          <a:xfrm>
+            <a:off x="3229998" y="1062000"/>
+            <a:ext cx="1158394" cy="461665"/>
           </a:xfrm>
           <a:prstGeom prst="rect">
             <a:avLst/>
@@ -4286,41 +4321,6 @@
           <a:p>
             <a:r>
               <a:rPr lang="en-US" sz="1200" noProof="1"/>
-              <a:t>Doris</a:t>
-            </a:r>
-          </a:p>
-        </p:txBody>
-      </p:sp>
-      <p:sp>
-        <p:nvSpPr>
-          <p:cNvPr id="39" name="TextBox 38">
-            <a:extLst>
-              <a:ext uri="{FF2B5EF4-FFF2-40B4-BE49-F238E27FC236}">
-                <a16:creationId xmlns:a16="http://schemas.microsoft.com/office/drawing/2014/main" id="{538E1BAF-01BE-3173-DF7A-A11580DA9B1A}"/>
-              </a:ext>
-            </a:extLst>
-          </p:cNvPr>
-          <p:cNvSpPr txBox="1"/>
-          <p:nvPr/>
-        </p:nvSpPr>
-        <p:spPr>
-          <a:xfrm>
-            <a:off x="3293181" y="1424479"/>
-            <a:ext cx="1158394" cy="461665"/>
-          </a:xfrm>
-          <a:prstGeom prst="rect">
-            <a:avLst/>
-          </a:prstGeom>
-          <a:noFill/>
-        </p:spPr>
-        <p:txBody>
-          <a:bodyPr wrap="none" rtlCol="0">
-            <a:spAutoFit/>
-          </a:bodyPr>
-          <a:lstStyle/>
-          <a:p>
-            <a:r>
-              <a:rPr lang="en-US" sz="1200" noProof="1"/>
               <a:t>Coregistration </a:t>
             </a:r>
           </a:p>
@@ -4346,7 +4346,7 @@
         </p:nvSpPr>
         <p:spPr>
           <a:xfrm>
-            <a:off x="3454713" y="2671936"/>
+            <a:off x="3416988" y="1858796"/>
             <a:ext cx="763801" cy="276998"/>
           </a:xfrm>
           <a:prstGeom prst="rect">
@@ -4398,8 +4398,8 @@
         </p:nvSpPr>
         <p:spPr>
           <a:xfrm>
-            <a:off x="3454712" y="2671935"/>
-            <a:ext cx="760144" cy="276999"/>
+            <a:off x="3427119" y="1851467"/>
+            <a:ext cx="782189" cy="276999"/>
           </a:xfrm>
           <a:prstGeom prst="rect">
             <a:avLst/>
@@ -4407,7 +4407,7 @@
           <a:noFill/>
         </p:spPr>
         <p:txBody>
-          <a:bodyPr wrap="none" rtlCol="0">
+          <a:bodyPr wrap="square" rtlCol="0">
             <a:spAutoFit/>
           </a:bodyPr>
           <a:lstStyle/>
@@ -4433,8 +4433,8 @@
         </p:nvSpPr>
         <p:spPr>
           <a:xfrm>
-            <a:off x="3454716" y="2256439"/>
-            <a:ext cx="1273195" cy="276998"/>
+            <a:off x="4293638" y="1165679"/>
+            <a:ext cx="681168" cy="387525"/>
           </a:xfrm>
           <a:prstGeom prst="rect">
             <a:avLst/>
@@ -4485,8 +4485,8 @@
         </p:nvSpPr>
         <p:spPr>
           <a:xfrm>
-            <a:off x="3442539" y="2252707"/>
-            <a:ext cx="1467469" cy="276999"/>
+            <a:off x="4266469" y="1132898"/>
+            <a:ext cx="785106" cy="461665"/>
           </a:xfrm>
           <a:prstGeom prst="rect">
             <a:avLst/>
@@ -4501,7 +4501,13 @@
           <a:p>
             <a:r>
               <a:rPr lang="en-US" sz="1200" noProof="1"/>
-              <a:t>Doris_cleanup</a:t>
+              <a:t>Doris_</a:t>
+            </a:r>
+          </a:p>
+          <a:p>
+            <a:r>
+              <a:rPr lang="en-US" sz="1200" noProof="1"/>
+              <a:t>cleanup</a:t>
             </a:r>
           </a:p>
         </p:txBody>
@@ -4524,8 +4530,8 @@
         </p:nvCxnSpPr>
         <p:spPr>
           <a:xfrm flipV="1">
-            <a:off x="2030477" y="2005922"/>
-            <a:ext cx="1412331" cy="7875"/>
+            <a:off x="2030477" y="1656672"/>
+            <a:ext cx="1395465" cy="357125"/>
           </a:xfrm>
           <a:prstGeom prst="bentConnector3">
             <a:avLst>
@@ -4569,12 +4575,12 @@
         </p:nvCxnSpPr>
         <p:spPr>
           <a:xfrm>
-            <a:off x="3205775" y="553392"/>
-            <a:ext cx="248937" cy="2257043"/>
+            <a:off x="2893621" y="553392"/>
+            <a:ext cx="533498" cy="1436575"/>
           </a:xfrm>
           <a:prstGeom prst="bentConnector3">
             <a:avLst>
-              <a:gd name="adj1" fmla="val 15717"/>
+              <a:gd name="adj1" fmla="val 44049"/>
             </a:avLst>
           </a:prstGeom>
           <a:ln w="38100">
@@ -4613,15 +4619,13 @@
           <p:nvPr/>
         </p:nvCxnSpPr>
         <p:spPr>
-          <a:xfrm flipH="1">
-            <a:off x="3442539" y="2005922"/>
-            <a:ext cx="539199" cy="385285"/>
-          </a:xfrm>
-          <a:prstGeom prst="bentConnector5">
+          <a:xfrm flipV="1">
+            <a:off x="4088586" y="1363731"/>
+            <a:ext cx="177883" cy="292941"/>
+          </a:xfrm>
+          <a:prstGeom prst="bentConnector3">
             <a:avLst>
-              <a:gd name="adj1" fmla="val -42396"/>
-              <a:gd name="adj2" fmla="val 50000"/>
-              <a:gd name="adj3" fmla="val 142396"/>
+              <a:gd name="adj1" fmla="val 17873"/>
             </a:avLst>
           </a:prstGeom>
           <a:ln w="38100">
@@ -4657,8 +4661,8 @@
         </p:nvSpPr>
         <p:spPr>
           <a:xfrm>
-            <a:off x="4959049" y="1423746"/>
-            <a:ext cx="1562006" cy="1607580"/>
+            <a:off x="5185847" y="1423746"/>
+            <a:ext cx="1335208" cy="1607580"/>
           </a:xfrm>
           <a:prstGeom prst="rect">
             <a:avLst/>
@@ -4709,8 +4713,8 @@
         </p:nvSpPr>
         <p:spPr>
           <a:xfrm>
-            <a:off x="5041715" y="1871922"/>
-            <a:ext cx="1370035" cy="276998"/>
+            <a:off x="5276654" y="1871922"/>
+            <a:ext cx="1135096" cy="276998"/>
           </a:xfrm>
           <a:prstGeom prst="rect">
             <a:avLst/>
@@ -4761,8 +4765,8 @@
         </p:nvSpPr>
         <p:spPr>
           <a:xfrm>
-            <a:off x="4982546" y="1876997"/>
-            <a:ext cx="1483227" cy="276999"/>
+            <a:off x="5255827" y="1876997"/>
+            <a:ext cx="1155923" cy="276999"/>
           </a:xfrm>
           <a:prstGeom prst="rect">
             <a:avLst/>
@@ -4796,7 +4800,7 @@
         </p:nvSpPr>
         <p:spPr>
           <a:xfrm>
-            <a:off x="4898509" y="1424479"/>
+            <a:off x="5203011" y="1424514"/>
             <a:ext cx="944489" cy="461665"/>
           </a:xfrm>
           <a:prstGeom prst="rect">
@@ -4837,8 +4841,8 @@
         </p:nvSpPr>
         <p:spPr>
           <a:xfrm>
-            <a:off x="5033749" y="2255705"/>
-            <a:ext cx="1390722" cy="276998"/>
+            <a:off x="5278701" y="2255705"/>
+            <a:ext cx="1145770" cy="276998"/>
           </a:xfrm>
           <a:prstGeom prst="rect">
             <a:avLst/>
@@ -4889,8 +4893,8 @@
         </p:nvSpPr>
         <p:spPr>
           <a:xfrm>
-            <a:off x="4993959" y="2263050"/>
-            <a:ext cx="1011367" cy="276999"/>
+            <a:off x="5275043" y="2273990"/>
+            <a:ext cx="1022204" cy="276999"/>
           </a:xfrm>
           <a:prstGeom prst="rect">
             <a:avLst/>
@@ -4898,7 +4902,7 @@
           <a:noFill/>
         </p:spPr>
         <p:txBody>
-          <a:bodyPr wrap="none" rtlCol="0">
+          <a:bodyPr wrap="square" rtlCol="0">
             <a:spAutoFit/>
           </a:bodyPr>
           <a:lstStyle/>
@@ -4928,12 +4932,12 @@
         </p:nvCxnSpPr>
         <p:spPr>
           <a:xfrm>
-            <a:off x="3981738" y="2005922"/>
-            <a:ext cx="1000808" cy="9575"/>
+            <a:off x="4088586" y="1656672"/>
+            <a:ext cx="1167241" cy="358825"/>
           </a:xfrm>
           <a:prstGeom prst="bentConnector3">
             <a:avLst>
-              <a:gd name="adj1" fmla="val 50000"/>
+              <a:gd name="adj1" fmla="val 84817"/>
             </a:avLst>
           </a:prstGeom>
           <a:ln w="38100">
@@ -4973,12 +4977,12 @@
         </p:nvCxnSpPr>
         <p:spPr>
           <a:xfrm>
-            <a:off x="3981738" y="2005922"/>
-            <a:ext cx="1012221" cy="395628"/>
+            <a:off x="4088586" y="1656672"/>
+            <a:ext cx="1186457" cy="755818"/>
           </a:xfrm>
           <a:prstGeom prst="bentConnector3">
             <a:avLst>
-              <a:gd name="adj1" fmla="val 50000"/>
+              <a:gd name="adj1" fmla="val 69267"/>
             </a:avLst>
           </a:prstGeom>
           <a:ln w="38100">
@@ -5017,13 +5021,13 @@
           <p:nvPr/>
         </p:nvCxnSpPr>
         <p:spPr>
-          <a:xfrm flipV="1">
-            <a:off x="4218514" y="2015497"/>
-            <a:ext cx="764032" cy="794938"/>
+          <a:xfrm>
+            <a:off x="4180789" y="1997295"/>
+            <a:ext cx="1075038" cy="18202"/>
           </a:xfrm>
           <a:prstGeom prst="bentConnector3">
             <a:avLst>
-              <a:gd name="adj1" fmla="val 77926"/>
+              <a:gd name="adj1" fmla="val 57679"/>
             </a:avLst>
           </a:prstGeom>
           <a:ln w="38100">
@@ -5062,13 +5066,13 @@
           <p:nvPr/>
         </p:nvCxnSpPr>
         <p:spPr>
-          <a:xfrm flipV="1">
-            <a:off x="4218514" y="2401550"/>
-            <a:ext cx="775445" cy="408885"/>
+          <a:xfrm>
+            <a:off x="4180789" y="1997295"/>
+            <a:ext cx="1094254" cy="415195"/>
           </a:xfrm>
           <a:prstGeom prst="bentConnector3">
             <a:avLst>
-              <a:gd name="adj1" fmla="val 50000"/>
+              <a:gd name="adj1" fmla="val 56383"/>
             </a:avLst>
           </a:prstGeom>
           <a:ln w="38100">
@@ -5494,10 +5498,10 @@
           <p:nvPr/>
         </p:nvPicPr>
         <p:blipFill>
-          <a:blip r:embed="rId2">
+          <a:blip>
             <a:extLst>
               <a:ext uri="{96DAC541-7B7A-43D3-8B79-37D633B846F1}">
-                <asvg:svgBlip xmlns:asvg="http://schemas.microsoft.com/office/drawing/2016/SVG/main" r:embed="rId3"/>
+                <asvg:svgBlip xmlns:asvg="http://schemas.microsoft.com/office/drawing/2016/SVG/main" r:embed="rId2"/>
               </a:ext>
             </a:extLst>
           </a:blip>
@@ -5737,8 +5741,8 @@
         </p:nvCxnSpPr>
         <p:spPr>
           <a:xfrm rot="10800000" flipV="1">
-            <a:off x="5740052" y="423098"/>
-            <a:ext cx="1156262" cy="1000647"/>
+            <a:off x="5853452" y="423098"/>
+            <a:ext cx="1042863" cy="1000647"/>
           </a:xfrm>
           <a:prstGeom prst="bentConnector2">
             <a:avLst/>
@@ -6051,12 +6055,12 @@
         </p:nvCxnSpPr>
         <p:spPr>
           <a:xfrm>
-            <a:off x="6465773" y="2015497"/>
-            <a:ext cx="1287765" cy="408756"/>
+            <a:off x="6411750" y="2015497"/>
+            <a:ext cx="1341788" cy="408756"/>
           </a:xfrm>
           <a:prstGeom prst="bentConnector3">
             <a:avLst>
-              <a:gd name="adj1" fmla="val 34379"/>
+              <a:gd name="adj1" fmla="val 39589"/>
             </a:avLst>
           </a:prstGeom>
           <a:ln w="38100">
@@ -7207,10 +7211,10 @@
           <p:nvPr/>
         </p:nvPicPr>
         <p:blipFill>
-          <a:blip r:embed="rId2">
+          <a:blip>
             <a:extLst>
               <a:ext uri="{96DAC541-7B7A-43D3-8B79-37D633B846F1}">
-                <asvg:svgBlip xmlns:asvg="http://schemas.microsoft.com/office/drawing/2016/SVG/main" r:embed="rId3"/>
+                <asvg:svgBlip xmlns:asvg="http://schemas.microsoft.com/office/drawing/2016/SVG/main" r:embed="rId2"/>
               </a:ext>
             </a:extLst>
           </a:blip>
@@ -8121,139 +8125,10 @@
       </p:sp>
       <p:sp>
         <p:nvSpPr>
-          <p:cNvPr id="235" name="TextBox 234">
-            <a:extLst>
-              <a:ext uri="{FF2B5EF4-FFF2-40B4-BE49-F238E27FC236}">
-                <a16:creationId xmlns:a16="http://schemas.microsoft.com/office/drawing/2014/main" id="{6C41EAC6-8BA9-F9C0-D2B2-B94F85BEEC94}"/>
-              </a:ext>
-            </a:extLst>
-          </p:cNvPr>
-          <p:cNvSpPr txBox="1"/>
-          <p:nvPr/>
-        </p:nvSpPr>
-        <p:spPr>
-          <a:xfrm>
-            <a:off x="2196139" y="6525711"/>
-            <a:ext cx="1678986" cy="276999"/>
-          </a:xfrm>
-          <a:prstGeom prst="rect">
-            <a:avLst/>
-          </a:prstGeom>
-          <a:noFill/>
-        </p:spPr>
-        <p:txBody>
-          <a:bodyPr wrap="none" rtlCol="0">
-            <a:spAutoFit/>
-          </a:bodyPr>
-          <a:lstStyle/>
-          <a:p>
-            <a:r>
-              <a:rPr lang="en-US" sz="1200" noProof="1"/>
-              <a:t>caroline-download.log</a:t>
-            </a:r>
-          </a:p>
-        </p:txBody>
-      </p:sp>
-      <p:cxnSp>
-        <p:nvCxnSpPr>
-          <p:cNvPr id="236" name="Elbow Connector 235">
-            <a:extLst>
-              <a:ext uri="{FF2B5EF4-FFF2-40B4-BE49-F238E27FC236}">
-                <a16:creationId xmlns:a16="http://schemas.microsoft.com/office/drawing/2014/main" id="{E25ECFBC-DD90-6998-C466-10A38D14D511}"/>
-              </a:ext>
-            </a:extLst>
-          </p:cNvPr>
-          <p:cNvCxnSpPr>
-            <a:cxnSpLocks/>
-            <a:stCxn id="24" idx="3"/>
-            <a:endCxn id="233" idx="1"/>
-          </p:cNvCxnSpPr>
-          <p:nvPr/>
-        </p:nvCxnSpPr>
-        <p:spPr>
-          <a:xfrm flipH="1">
-            <a:off x="2212724" y="553392"/>
-            <a:ext cx="993051" cy="5751216"/>
-          </a:xfrm>
-          <a:prstGeom prst="bentConnector5">
-            <a:avLst>
-              <a:gd name="adj1" fmla="val -3613"/>
-              <a:gd name="adj2" fmla="val 47554"/>
-              <a:gd name="adj3" fmla="val 202350"/>
-            </a:avLst>
-          </a:prstGeom>
-          <a:ln w="38100">
-            <a:tailEnd type="triangle"/>
-          </a:ln>
-        </p:spPr>
-        <p:style>
-          <a:lnRef idx="2">
-            <a:schemeClr val="dk1"/>
-          </a:lnRef>
-          <a:fillRef idx="0">
-            <a:schemeClr val="dk1"/>
-          </a:fillRef>
-          <a:effectRef idx="1">
-            <a:schemeClr val="dk1"/>
-          </a:effectRef>
-          <a:fontRef idx="minor">
-            <a:schemeClr val="tx1"/>
-          </a:fontRef>
-        </p:style>
-      </p:cxnSp>
-      <p:cxnSp>
-        <p:nvCxnSpPr>
-          <p:cNvPr id="245" name="Elbow Connector 244">
-            <a:extLst>
-              <a:ext uri="{FF2B5EF4-FFF2-40B4-BE49-F238E27FC236}">
-                <a16:creationId xmlns:a16="http://schemas.microsoft.com/office/drawing/2014/main" id="{2BAB6FC4-08EF-3B2E-4E28-66AC35CA0206}"/>
-              </a:ext>
-            </a:extLst>
-          </p:cNvPr>
-          <p:cNvCxnSpPr>
-            <a:cxnSpLocks/>
-            <a:stCxn id="24" idx="3"/>
-            <a:endCxn id="230" idx="1"/>
-          </p:cNvCxnSpPr>
-          <p:nvPr/>
-        </p:nvCxnSpPr>
-        <p:spPr>
-          <a:xfrm flipH="1">
-            <a:off x="2211057" y="553392"/>
-            <a:ext cx="994718" cy="5419851"/>
-          </a:xfrm>
-          <a:prstGeom prst="bentConnector5">
-            <a:avLst>
-              <a:gd name="adj1" fmla="val -3700"/>
-              <a:gd name="adj2" fmla="val 50513"/>
-              <a:gd name="adj3" fmla="val 200764"/>
-            </a:avLst>
-          </a:prstGeom>
-          <a:ln w="38100">
-            <a:tailEnd type="triangle"/>
-          </a:ln>
-        </p:spPr>
-        <p:style>
-          <a:lnRef idx="2">
-            <a:schemeClr val="dk1"/>
-          </a:lnRef>
-          <a:fillRef idx="0">
-            <a:schemeClr val="dk1"/>
-          </a:fillRef>
-          <a:effectRef idx="1">
-            <a:schemeClr val="dk1"/>
-          </a:effectRef>
-          <a:fontRef idx="minor">
-            <a:schemeClr val="tx1"/>
-          </a:fontRef>
-        </p:style>
-      </p:cxnSp>
-      <p:sp>
-        <p:nvSpPr>
-          <p:cNvPr id="251" name="Rectangle 250">
-            <a:extLst>
-              <a:ext uri="{FF2B5EF4-FFF2-40B4-BE49-F238E27FC236}">
-                <a16:creationId xmlns:a16="http://schemas.microsoft.com/office/drawing/2014/main" id="{0DE18C41-7D69-C3A8-2E4C-550B0C257405}"/>
+          <p:cNvPr id="12" name="Rectangle 11">
+            <a:extLst>
+              <a:ext uri="{FF2B5EF4-FFF2-40B4-BE49-F238E27FC236}">
+                <a16:creationId xmlns:a16="http://schemas.microsoft.com/office/drawing/2014/main" id="{C8E75110-E5A2-86E9-F389-F50AFA3FB93B}"/>
               </a:ext>
             </a:extLst>
           </p:cNvPr>
@@ -8262,16 +8137,15 @@
         </p:nvSpPr>
         <p:spPr>
           <a:xfrm>
-            <a:off x="4241656" y="5820809"/>
-            <a:ext cx="1002645" cy="235607"/>
+            <a:off x="2190654" y="6869131"/>
+            <a:ext cx="1798521" cy="276999"/>
           </a:xfrm>
           <a:prstGeom prst="rect">
             <a:avLst/>
           </a:prstGeom>
           <a:solidFill>
-            <a:schemeClr val="accent2">
-              <a:lumMod val="60000"/>
-              <a:lumOff val="40000"/>
+            <a:schemeClr val="bg2">
+              <a:lumMod val="90000"/>
             </a:schemeClr>
           </a:solidFill>
         </p:spPr>
@@ -8300,48 +8174,12 @@
           </a:p>
         </p:txBody>
       </p:sp>
-      <p:pic>
-        <p:nvPicPr>
-          <p:cNvPr id="252" name="Graphic 251" descr="Repeat with solid fill">
-            <a:extLst>
-              <a:ext uri="{FF2B5EF4-FFF2-40B4-BE49-F238E27FC236}">
-                <a16:creationId xmlns:a16="http://schemas.microsoft.com/office/drawing/2014/main" id="{67A996B4-F823-EC67-0AE1-4EE31A3646EC}"/>
-              </a:ext>
-            </a:extLst>
-          </p:cNvPr>
-          <p:cNvPicPr>
-            <a:picLocks noChangeAspect="1"/>
-          </p:cNvPicPr>
-          <p:nvPr/>
-        </p:nvPicPr>
-        <p:blipFill>
-          <a:blip r:embed="rId2">
-            <a:extLst>
-              <a:ext uri="{96DAC541-7B7A-43D3-8B79-37D633B846F1}">
-                <asvg:svgBlip xmlns:asvg="http://schemas.microsoft.com/office/drawing/2016/SVG/main" r:embed="rId3"/>
-              </a:ext>
-            </a:extLst>
-          </a:blip>
-          <a:stretch>
-            <a:fillRect/>
-          </a:stretch>
-        </p:blipFill>
-        <p:spPr>
-          <a:xfrm>
-            <a:off x="4103691" y="5607275"/>
-            <a:ext cx="366563" cy="366563"/>
-          </a:xfrm>
-          <a:prstGeom prst="rect">
-            <a:avLst/>
-          </a:prstGeom>
-        </p:spPr>
-      </p:pic>
-      <p:sp>
-        <p:nvSpPr>
-          <p:cNvPr id="253" name="TextBox 252">
-            <a:extLst>
-              <a:ext uri="{FF2B5EF4-FFF2-40B4-BE49-F238E27FC236}">
-                <a16:creationId xmlns:a16="http://schemas.microsoft.com/office/drawing/2014/main" id="{7CDEFB63-7160-738C-F4FD-61210C50AEF9}"/>
+      <p:sp>
+        <p:nvSpPr>
+          <p:cNvPr id="235" name="TextBox 234">
+            <a:extLst>
+              <a:ext uri="{FF2B5EF4-FFF2-40B4-BE49-F238E27FC236}">
+                <a16:creationId xmlns:a16="http://schemas.microsoft.com/office/drawing/2014/main" id="{6C41EAC6-8BA9-F9C0-D2B2-B94F85BEEC94}"/>
               </a:ext>
             </a:extLst>
           </p:cNvPr>
@@ -8350,8 +8188,8 @@
         </p:nvSpPr>
         <p:spPr>
           <a:xfrm>
-            <a:off x="4179018" y="5810866"/>
-            <a:ext cx="1011302" cy="276999"/>
+            <a:off x="2196500" y="6869131"/>
+            <a:ext cx="1678986" cy="276999"/>
           </a:xfrm>
           <a:prstGeom prst="rect">
             <a:avLst/>
@@ -8366,17 +8204,111 @@
           <a:p>
             <a:r>
               <a:rPr lang="en-US" sz="1200" noProof="1"/>
-              <a:t>email-log.sh</a:t>
-            </a:r>
-          </a:p>
-        </p:txBody>
-      </p:sp>
-      <p:sp>
-        <p:nvSpPr>
-          <p:cNvPr id="254" name="Rectangle 253">
-            <a:extLst>
-              <a:ext uri="{FF2B5EF4-FFF2-40B4-BE49-F238E27FC236}">
-                <a16:creationId xmlns:a16="http://schemas.microsoft.com/office/drawing/2014/main" id="{1F4EA00B-6D53-7E05-F41D-830F9BDC1505}"/>
+              <a:t>caroline-download.log</a:t>
+            </a:r>
+          </a:p>
+        </p:txBody>
+      </p:sp>
+      <p:cxnSp>
+        <p:nvCxnSpPr>
+          <p:cNvPr id="236" name="Elbow Connector 235">
+            <a:extLst>
+              <a:ext uri="{FF2B5EF4-FFF2-40B4-BE49-F238E27FC236}">
+                <a16:creationId xmlns:a16="http://schemas.microsoft.com/office/drawing/2014/main" id="{E25ECFBC-DD90-6998-C466-10A38D14D511}"/>
+              </a:ext>
+            </a:extLst>
+          </p:cNvPr>
+          <p:cNvCxnSpPr>
+            <a:cxnSpLocks/>
+            <a:stCxn id="24" idx="3"/>
+            <a:endCxn id="233" idx="1"/>
+          </p:cNvCxnSpPr>
+          <p:nvPr/>
+        </p:nvCxnSpPr>
+        <p:spPr>
+          <a:xfrm flipH="1">
+            <a:off x="2212724" y="553392"/>
+            <a:ext cx="680897" cy="5751216"/>
+          </a:xfrm>
+          <a:prstGeom prst="bentConnector5">
+            <a:avLst>
+              <a:gd name="adj1" fmla="val -33573"/>
+              <a:gd name="adj2" fmla="val 45473"/>
+              <a:gd name="adj3" fmla="val 253878"/>
+            </a:avLst>
+          </a:prstGeom>
+          <a:ln w="38100">
+            <a:tailEnd type="triangle"/>
+          </a:ln>
+        </p:spPr>
+        <p:style>
+          <a:lnRef idx="2">
+            <a:schemeClr val="dk1"/>
+          </a:lnRef>
+          <a:fillRef idx="0">
+            <a:schemeClr val="dk1"/>
+          </a:fillRef>
+          <a:effectRef idx="1">
+            <a:schemeClr val="dk1"/>
+          </a:effectRef>
+          <a:fontRef idx="minor">
+            <a:schemeClr val="tx1"/>
+          </a:fontRef>
+        </p:style>
+      </p:cxnSp>
+      <p:cxnSp>
+        <p:nvCxnSpPr>
+          <p:cNvPr id="245" name="Elbow Connector 244">
+            <a:extLst>
+              <a:ext uri="{FF2B5EF4-FFF2-40B4-BE49-F238E27FC236}">
+                <a16:creationId xmlns:a16="http://schemas.microsoft.com/office/drawing/2014/main" id="{2BAB6FC4-08EF-3B2E-4E28-66AC35CA0206}"/>
+              </a:ext>
+            </a:extLst>
+          </p:cNvPr>
+          <p:cNvCxnSpPr>
+            <a:cxnSpLocks/>
+            <a:stCxn id="24" idx="3"/>
+            <a:endCxn id="230" idx="1"/>
+          </p:cNvCxnSpPr>
+          <p:nvPr/>
+        </p:nvCxnSpPr>
+        <p:spPr>
+          <a:xfrm flipH="1">
+            <a:off x="2211057" y="553392"/>
+            <a:ext cx="682564" cy="5419851"/>
+          </a:xfrm>
+          <a:prstGeom prst="bentConnector5">
+            <a:avLst>
+              <a:gd name="adj1" fmla="val -33491"/>
+              <a:gd name="adj2" fmla="val 48211"/>
+              <a:gd name="adj3" fmla="val 252571"/>
+            </a:avLst>
+          </a:prstGeom>
+          <a:ln w="38100">
+            <a:tailEnd type="triangle"/>
+          </a:ln>
+        </p:spPr>
+        <p:style>
+          <a:lnRef idx="2">
+            <a:schemeClr val="dk1"/>
+          </a:lnRef>
+          <a:fillRef idx="0">
+            <a:schemeClr val="dk1"/>
+          </a:fillRef>
+          <a:effectRef idx="1">
+            <a:schemeClr val="dk1"/>
+          </a:effectRef>
+          <a:fontRef idx="minor">
+            <a:schemeClr val="tx1"/>
+          </a:fontRef>
+        </p:style>
+      </p:cxnSp>
+      <p:sp>
+        <p:nvSpPr>
+          <p:cNvPr id="251" name="Rectangle 250">
+            <a:extLst>
+              <a:ext uri="{FF2B5EF4-FFF2-40B4-BE49-F238E27FC236}">
+                <a16:creationId xmlns:a16="http://schemas.microsoft.com/office/drawing/2014/main" id="{0DE18C41-7D69-C3A8-2E4C-550B0C257405}"/>
               </a:ext>
             </a:extLst>
           </p:cNvPr>
@@ -8385,8 +8317,8 @@
         </p:nvSpPr>
         <p:spPr>
           <a:xfrm>
-            <a:off x="4261475" y="6205437"/>
-            <a:ext cx="1652437" cy="242864"/>
+            <a:off x="4241656" y="5820809"/>
+            <a:ext cx="1002645" cy="235607"/>
           </a:xfrm>
           <a:prstGeom prst="rect">
             <a:avLst/>
@@ -8425,10 +8357,10 @@
       </p:sp>
       <p:pic>
         <p:nvPicPr>
-          <p:cNvPr id="255" name="Graphic 254" descr="Repeat with solid fill">
-            <a:extLst>
-              <a:ext uri="{FF2B5EF4-FFF2-40B4-BE49-F238E27FC236}">
-                <a16:creationId xmlns:a16="http://schemas.microsoft.com/office/drawing/2014/main" id="{38DDCA80-E0E1-7C0E-EB15-733B8914F936}"/>
+          <p:cNvPr id="252" name="Graphic 251" descr="Repeat with solid fill">
+            <a:extLst>
+              <a:ext uri="{FF2B5EF4-FFF2-40B4-BE49-F238E27FC236}">
+                <a16:creationId xmlns:a16="http://schemas.microsoft.com/office/drawing/2014/main" id="{67A996B4-F823-EC67-0AE1-4EE31A3646EC}"/>
               </a:ext>
             </a:extLst>
           </p:cNvPr>
@@ -8438,10 +8370,10 @@
           <p:nvPr/>
         </p:nvPicPr>
         <p:blipFill>
-          <a:blip r:embed="rId2">
+          <a:blip>
             <a:extLst>
               <a:ext uri="{96DAC541-7B7A-43D3-8B79-37D633B846F1}">
-                <asvg:svgBlip xmlns:asvg="http://schemas.microsoft.com/office/drawing/2016/SVG/main" r:embed="rId3"/>
+                <asvg:svgBlip xmlns:asvg="http://schemas.microsoft.com/office/drawing/2016/SVG/main" r:embed="rId2"/>
               </a:ext>
             </a:extLst>
           </a:blip>
@@ -8451,7 +8383,7 @@
         </p:blipFill>
         <p:spPr>
           <a:xfrm>
-            <a:off x="4123510" y="5991903"/>
+            <a:off x="4103691" y="5607275"/>
             <a:ext cx="366563" cy="366563"/>
           </a:xfrm>
           <a:prstGeom prst="rect">
@@ -8461,10 +8393,10 @@
       </p:pic>
       <p:sp>
         <p:nvSpPr>
-          <p:cNvPr id="256" name="TextBox 255">
-            <a:extLst>
-              <a:ext uri="{FF2B5EF4-FFF2-40B4-BE49-F238E27FC236}">
-                <a16:creationId xmlns:a16="http://schemas.microsoft.com/office/drawing/2014/main" id="{CB709F97-5D18-8E1F-EB03-274F995138A7}"/>
+          <p:cNvPr id="253" name="TextBox 252">
+            <a:extLst>
+              <a:ext uri="{FF2B5EF4-FFF2-40B4-BE49-F238E27FC236}">
+                <a16:creationId xmlns:a16="http://schemas.microsoft.com/office/drawing/2014/main" id="{7CDEFB63-7160-738C-F4FD-61210C50AEF9}"/>
               </a:ext>
             </a:extLst>
           </p:cNvPr>
@@ -8473,8 +8405,8 @@
         </p:nvSpPr>
         <p:spPr>
           <a:xfrm>
-            <a:off x="4202156" y="6195494"/>
-            <a:ext cx="1745286" cy="276999"/>
+            <a:off x="4179018" y="5810866"/>
+            <a:ext cx="1011302" cy="276999"/>
           </a:xfrm>
           <a:prstGeom prst="rect">
             <a:avLst/>
@@ -8489,196 +8421,17 @@
           <a:p>
             <a:r>
               <a:rPr lang="en-US" sz="1200" noProof="1"/>
-              <a:t>create-overview-kml.sh</a:t>
-            </a:r>
-          </a:p>
-        </p:txBody>
-      </p:sp>
-      <p:cxnSp>
-        <p:nvCxnSpPr>
-          <p:cNvPr id="257" name="Elbow Connector 256">
-            <a:extLst>
-              <a:ext uri="{FF2B5EF4-FFF2-40B4-BE49-F238E27FC236}">
-                <a16:creationId xmlns:a16="http://schemas.microsoft.com/office/drawing/2014/main" id="{1AE0C03A-E3D0-6F9B-8F09-C0B4EE6E3133}"/>
-              </a:ext>
-            </a:extLst>
-          </p:cNvPr>
-          <p:cNvCxnSpPr>
-            <a:cxnSpLocks/>
-            <a:stCxn id="230" idx="3"/>
-          </p:cNvCxnSpPr>
-          <p:nvPr/>
-        </p:nvCxnSpPr>
-        <p:spPr>
-          <a:xfrm flipV="1">
-            <a:off x="3835730" y="5964661"/>
-            <a:ext cx="387013" cy="8582"/>
-          </a:xfrm>
-          <a:prstGeom prst="bentConnector3">
-            <a:avLst>
-              <a:gd name="adj1" fmla="val 50000"/>
-            </a:avLst>
-          </a:prstGeom>
-          <a:ln w="38100">
-            <a:tailEnd type="triangle"/>
-          </a:ln>
-        </p:spPr>
-        <p:style>
-          <a:lnRef idx="2">
-            <a:schemeClr val="dk1"/>
-          </a:lnRef>
-          <a:fillRef idx="0">
-            <a:schemeClr val="dk1"/>
-          </a:fillRef>
-          <a:effectRef idx="1">
-            <a:schemeClr val="dk1"/>
-          </a:effectRef>
-          <a:fontRef idx="minor">
-            <a:schemeClr val="tx1"/>
-          </a:fontRef>
-        </p:style>
-      </p:cxnSp>
-      <p:cxnSp>
-        <p:nvCxnSpPr>
-          <p:cNvPr id="262" name="Elbow Connector 261">
-            <a:extLst>
-              <a:ext uri="{FF2B5EF4-FFF2-40B4-BE49-F238E27FC236}">
-                <a16:creationId xmlns:a16="http://schemas.microsoft.com/office/drawing/2014/main" id="{E7DDF635-308E-C78A-FAEC-8636C3FF0A9B}"/>
-              </a:ext>
-            </a:extLst>
-          </p:cNvPr>
-          <p:cNvCxnSpPr>
-            <a:cxnSpLocks/>
-            <a:stCxn id="4" idx="2"/>
-            <a:endCxn id="256" idx="1"/>
-          </p:cNvCxnSpPr>
-          <p:nvPr/>
-        </p:nvCxnSpPr>
-        <p:spPr>
-          <a:xfrm rot="16200000" flipH="1">
-            <a:off x="2414112" y="4545950"/>
-            <a:ext cx="3087254" cy="488833"/>
-          </a:xfrm>
-          <a:prstGeom prst="bentConnector2">
-            <a:avLst/>
-          </a:prstGeom>
-          <a:ln w="38100">
-            <a:tailEnd type="triangle"/>
-          </a:ln>
-        </p:spPr>
-        <p:style>
-          <a:lnRef idx="2">
-            <a:schemeClr val="dk1"/>
-          </a:lnRef>
-          <a:fillRef idx="0">
-            <a:schemeClr val="dk1"/>
-          </a:fillRef>
-          <a:effectRef idx="1">
-            <a:schemeClr val="dk1"/>
-          </a:effectRef>
-          <a:fontRef idx="minor">
-            <a:schemeClr val="tx1"/>
-          </a:fontRef>
-        </p:style>
-      </p:cxnSp>
-      <p:cxnSp>
-        <p:nvCxnSpPr>
-          <p:cNvPr id="265" name="Elbow Connector 264">
-            <a:extLst>
-              <a:ext uri="{FF2B5EF4-FFF2-40B4-BE49-F238E27FC236}">
-                <a16:creationId xmlns:a16="http://schemas.microsoft.com/office/drawing/2014/main" id="{03AF12DC-32B0-6A0E-BAD3-2B75F19ADEEB}"/>
-              </a:ext>
-            </a:extLst>
-          </p:cNvPr>
-          <p:cNvCxnSpPr>
-            <a:cxnSpLocks/>
-            <a:stCxn id="4" idx="2"/>
-            <a:endCxn id="230" idx="1"/>
-          </p:cNvCxnSpPr>
-          <p:nvPr/>
-        </p:nvCxnSpPr>
-        <p:spPr>
-          <a:xfrm rot="5400000">
-            <a:off x="1598939" y="3858858"/>
-            <a:ext cx="2726503" cy="1502266"/>
-          </a:xfrm>
-          <a:prstGeom prst="bentConnector4">
-            <a:avLst>
-              <a:gd name="adj1" fmla="val 56098"/>
-              <a:gd name="adj2" fmla="val 115217"/>
-            </a:avLst>
-          </a:prstGeom>
-          <a:ln w="38100">
-            <a:tailEnd type="triangle"/>
-          </a:ln>
-        </p:spPr>
-        <p:style>
-          <a:lnRef idx="2">
-            <a:schemeClr val="dk1"/>
-          </a:lnRef>
-          <a:fillRef idx="0">
-            <a:schemeClr val="dk1"/>
-          </a:fillRef>
-          <a:effectRef idx="1">
-            <a:schemeClr val="dk1"/>
-          </a:effectRef>
-          <a:fontRef idx="minor">
-            <a:schemeClr val="tx1"/>
-          </a:fontRef>
-        </p:style>
-      </p:cxnSp>
-      <p:cxnSp>
-        <p:nvCxnSpPr>
-          <p:cNvPr id="278" name="Elbow Connector 277">
-            <a:extLst>
-              <a:ext uri="{FF2B5EF4-FFF2-40B4-BE49-F238E27FC236}">
-                <a16:creationId xmlns:a16="http://schemas.microsoft.com/office/drawing/2014/main" id="{60EE083B-F0F2-219E-FD1C-938D14EBE610}"/>
-              </a:ext>
-            </a:extLst>
-          </p:cNvPr>
-          <p:cNvCxnSpPr>
-            <a:cxnSpLocks/>
-            <a:stCxn id="8" idx="0"/>
-            <a:endCxn id="235" idx="1"/>
-          </p:cNvCxnSpPr>
-          <p:nvPr/>
-        </p:nvCxnSpPr>
-        <p:spPr>
-          <a:xfrm rot="16200000" flipH="1">
-            <a:off x="-554281" y="3913792"/>
-            <a:ext cx="4799551" cy="701287"/>
-          </a:xfrm>
-          <a:prstGeom prst="bentConnector4">
-            <a:avLst>
-              <a:gd name="adj1" fmla="val -2536"/>
-              <a:gd name="adj2" fmla="val -232168"/>
-            </a:avLst>
-          </a:prstGeom>
-          <a:ln w="38100">
-            <a:tailEnd type="triangle"/>
-          </a:ln>
-        </p:spPr>
-        <p:style>
-          <a:lnRef idx="2">
-            <a:schemeClr val="dk1"/>
-          </a:lnRef>
-          <a:fillRef idx="0">
-            <a:schemeClr val="dk1"/>
-          </a:fillRef>
-          <a:effectRef idx="1">
-            <a:schemeClr val="dk1"/>
-          </a:effectRef>
-          <a:fontRef idx="minor">
-            <a:schemeClr val="tx1"/>
-          </a:fontRef>
-        </p:style>
-      </p:cxnSp>
-      <p:sp>
-        <p:nvSpPr>
-          <p:cNvPr id="289" name="Rectangle 288">
-            <a:extLst>
-              <a:ext uri="{FF2B5EF4-FFF2-40B4-BE49-F238E27FC236}">
-                <a16:creationId xmlns:a16="http://schemas.microsoft.com/office/drawing/2014/main" id="{0CAA2824-AD66-7A27-E452-E3299C00B2E5}"/>
+              <a:t>email-log.sh</a:t>
+            </a:r>
+          </a:p>
+        </p:txBody>
+      </p:sp>
+      <p:sp>
+        <p:nvSpPr>
+          <p:cNvPr id="254" name="Rectangle 253">
+            <a:extLst>
+              <a:ext uri="{FF2B5EF4-FFF2-40B4-BE49-F238E27FC236}">
+                <a16:creationId xmlns:a16="http://schemas.microsoft.com/office/drawing/2014/main" id="{1F4EA00B-6D53-7E05-F41D-830F9BDC1505}"/>
               </a:ext>
             </a:extLst>
           </p:cNvPr>
@@ -8687,14 +8440,17 @@
         </p:nvSpPr>
         <p:spPr>
           <a:xfrm>
-            <a:off x="6518976" y="5521900"/>
-            <a:ext cx="1342489" cy="674380"/>
+            <a:off x="4261475" y="6205437"/>
+            <a:ext cx="1652437" cy="242864"/>
           </a:xfrm>
           <a:prstGeom prst="rect">
             <a:avLst/>
           </a:prstGeom>
           <a:solidFill>
-            <a:srgbClr val="FFC000"/>
+            <a:schemeClr val="accent2">
+              <a:lumMod val="60000"/>
+              <a:lumOff val="40000"/>
+            </a:schemeClr>
           </a:solidFill>
         </p:spPr>
         <p:style>
@@ -8722,12 +8478,48 @@
           </a:p>
         </p:txBody>
       </p:sp>
-      <p:sp>
-        <p:nvSpPr>
-          <p:cNvPr id="290" name="TextBox 289">
-            <a:extLst>
-              <a:ext uri="{FF2B5EF4-FFF2-40B4-BE49-F238E27FC236}">
-                <a16:creationId xmlns:a16="http://schemas.microsoft.com/office/drawing/2014/main" id="{29625248-F791-B6AA-F224-3FC10DF36286}"/>
+      <p:pic>
+        <p:nvPicPr>
+          <p:cNvPr id="255" name="Graphic 254" descr="Repeat with solid fill">
+            <a:extLst>
+              <a:ext uri="{FF2B5EF4-FFF2-40B4-BE49-F238E27FC236}">
+                <a16:creationId xmlns:a16="http://schemas.microsoft.com/office/drawing/2014/main" id="{38DDCA80-E0E1-7C0E-EB15-733B8914F936}"/>
+              </a:ext>
+            </a:extLst>
+          </p:cNvPr>
+          <p:cNvPicPr>
+            <a:picLocks noChangeAspect="1"/>
+          </p:cNvPicPr>
+          <p:nvPr/>
+        </p:nvPicPr>
+        <p:blipFill>
+          <a:blip>
+            <a:extLst>
+              <a:ext uri="{96DAC541-7B7A-43D3-8B79-37D633B846F1}">
+                <asvg:svgBlip xmlns:asvg="http://schemas.microsoft.com/office/drawing/2016/SVG/main" r:embed="rId2"/>
+              </a:ext>
+            </a:extLst>
+          </a:blip>
+          <a:stretch>
+            <a:fillRect/>
+          </a:stretch>
+        </p:blipFill>
+        <p:spPr>
+          <a:xfrm>
+            <a:off x="4123510" y="5991903"/>
+            <a:ext cx="366563" cy="366563"/>
+          </a:xfrm>
+          <a:prstGeom prst="rect">
+            <a:avLst/>
+          </a:prstGeom>
+        </p:spPr>
+      </p:pic>
+      <p:sp>
+        <p:nvSpPr>
+          <p:cNvPr id="256" name="TextBox 255">
+            <a:extLst>
+              <a:ext uri="{FF2B5EF4-FFF2-40B4-BE49-F238E27FC236}">
+                <a16:creationId xmlns:a16="http://schemas.microsoft.com/office/drawing/2014/main" id="{CB709F97-5D18-8E1F-EB03-274F995138A7}"/>
               </a:ext>
             </a:extLst>
           </p:cNvPr>
@@ -8736,8 +8528,8 @@
         </p:nvSpPr>
         <p:spPr>
           <a:xfrm>
-            <a:off x="6502981" y="5580220"/>
-            <a:ext cx="1008609" cy="276999"/>
+            <a:off x="4202156" y="6195494"/>
+            <a:ext cx="1745286" cy="276999"/>
           </a:xfrm>
           <a:prstGeom prst="rect">
             <a:avLst/>
@@ -8752,41 +8544,38 @@
           <a:p>
             <a:r>
               <a:rPr lang="en-US" sz="1200" noProof="1"/>
-              <a:t>Risk module</a:t>
+              <a:t>create-overview-kml.sh</a:t>
             </a:r>
           </a:p>
         </p:txBody>
       </p:sp>
       <p:cxnSp>
         <p:nvCxnSpPr>
-          <p:cNvPr id="298" name="Elbow Connector 297">
-            <a:extLst>
-              <a:ext uri="{FF2B5EF4-FFF2-40B4-BE49-F238E27FC236}">
-                <a16:creationId xmlns:a16="http://schemas.microsoft.com/office/drawing/2014/main" id="{3CD32CFC-B131-B4C0-37F1-F50938DF9027}"/>
+          <p:cNvPr id="257" name="Elbow Connector 256">
+            <a:extLst>
+              <a:ext uri="{FF2B5EF4-FFF2-40B4-BE49-F238E27FC236}">
+                <a16:creationId xmlns:a16="http://schemas.microsoft.com/office/drawing/2014/main" id="{1AE0C03A-E3D0-6F9B-8F09-C0B4EE6E3133}"/>
               </a:ext>
             </a:extLst>
           </p:cNvPr>
           <p:cNvCxnSpPr>
             <a:cxnSpLocks/>
-            <a:stCxn id="105" idx="2"/>
-            <a:endCxn id="203" idx="0"/>
+            <a:stCxn id="230" idx="3"/>
           </p:cNvCxnSpPr>
           <p:nvPr/>
         </p:nvCxnSpPr>
         <p:spPr>
-          <a:xfrm rot="5400000">
-            <a:off x="6338678" y="1605697"/>
-            <a:ext cx="2521219" cy="996120"/>
+          <a:xfrm flipV="1">
+            <a:off x="3835730" y="5964661"/>
+            <a:ext cx="387013" cy="8582"/>
           </a:xfrm>
           <a:prstGeom prst="bentConnector3">
             <a:avLst>
-              <a:gd name="adj1" fmla="val 11848"/>
+              <a:gd name="adj1" fmla="val 50000"/>
             </a:avLst>
           </a:prstGeom>
           <a:ln w="38100">
-            <a:prstDash val="dash"/>
-            <a:headEnd type="triangle" w="med" len="med"/>
-            <a:tailEnd type="triangle" w="med" len="med"/>
+            <a:tailEnd type="triangle"/>
           </a:ln>
         </p:spPr>
         <p:style>
@@ -8806,32 +8595,30 @@
       </p:cxnSp>
       <p:cxnSp>
         <p:nvCxnSpPr>
-          <p:cNvPr id="306" name="Elbow Connector 305">
-            <a:extLst>
-              <a:ext uri="{FF2B5EF4-FFF2-40B4-BE49-F238E27FC236}">
-                <a16:creationId xmlns:a16="http://schemas.microsoft.com/office/drawing/2014/main" id="{A2BD6CC8-010E-C75F-9045-58E249025B12}"/>
+          <p:cNvPr id="262" name="Elbow Connector 261">
+            <a:extLst>
+              <a:ext uri="{FF2B5EF4-FFF2-40B4-BE49-F238E27FC236}">
+                <a16:creationId xmlns:a16="http://schemas.microsoft.com/office/drawing/2014/main" id="{E7DDF635-308E-C78A-FAEC-8636C3FF0A9B}"/>
               </a:ext>
             </a:extLst>
           </p:cNvPr>
           <p:cNvCxnSpPr>
             <a:cxnSpLocks/>
-            <a:stCxn id="124" idx="1"/>
-            <a:endCxn id="203" idx="0"/>
+            <a:stCxn id="4" idx="2"/>
+            <a:endCxn id="256" idx="1"/>
           </p:cNvCxnSpPr>
           <p:nvPr/>
         </p:nvCxnSpPr>
         <p:spPr>
-          <a:xfrm rot="10800000" flipV="1">
-            <a:off x="7101228" y="2096827"/>
-            <a:ext cx="133597" cy="1267539"/>
+          <a:xfrm rot="16200000" flipH="1">
+            <a:off x="2414112" y="4545950"/>
+            <a:ext cx="3087254" cy="488833"/>
           </a:xfrm>
           <a:prstGeom prst="bentConnector2">
             <a:avLst/>
           </a:prstGeom>
           <a:ln w="38100">
-            <a:prstDash val="dash"/>
-            <a:headEnd type="triangle" w="med" len="med"/>
-            <a:tailEnd type="triangle" w="med" len="med"/>
+            <a:tailEnd type="triangle"/>
           </a:ln>
         </p:spPr>
         <p:style>
@@ -8851,33 +8638,33 @@
       </p:cxnSp>
       <p:cxnSp>
         <p:nvCxnSpPr>
-          <p:cNvPr id="318" name="Elbow Connector 317">
-            <a:extLst>
-              <a:ext uri="{FF2B5EF4-FFF2-40B4-BE49-F238E27FC236}">
-                <a16:creationId xmlns:a16="http://schemas.microsoft.com/office/drawing/2014/main" id="{F16A25D0-3C85-6841-BBF3-CF40983677B6}"/>
+          <p:cNvPr id="265" name="Elbow Connector 264">
+            <a:extLst>
+              <a:ext uri="{FF2B5EF4-FFF2-40B4-BE49-F238E27FC236}">
+                <a16:creationId xmlns:a16="http://schemas.microsoft.com/office/drawing/2014/main" id="{03AF12DC-32B0-6A0E-BAD3-2B75F19ADEEB}"/>
               </a:ext>
             </a:extLst>
           </p:cNvPr>
           <p:cNvCxnSpPr>
             <a:cxnSpLocks/>
-            <a:stCxn id="204" idx="3"/>
+            <a:stCxn id="4" idx="2"/>
+            <a:endCxn id="230" idx="1"/>
           </p:cNvCxnSpPr>
           <p:nvPr/>
         </p:nvCxnSpPr>
         <p:spPr>
-          <a:xfrm flipV="1">
-            <a:off x="3293181" y="3713482"/>
-            <a:ext cx="2726105" cy="364626"/>
-          </a:xfrm>
-          <a:prstGeom prst="bentConnector3">
+          <a:xfrm rot="5400000">
+            <a:off x="1598939" y="3858858"/>
+            <a:ext cx="2726503" cy="1502266"/>
+          </a:xfrm>
+          <a:prstGeom prst="bentConnector4">
             <a:avLst>
-              <a:gd name="adj1" fmla="val 50000"/>
+              <a:gd name="adj1" fmla="val 56098"/>
+              <a:gd name="adj2" fmla="val 115217"/>
             </a:avLst>
           </a:prstGeom>
           <a:ln w="38100">
-            <a:prstDash val="dash"/>
-            <a:headEnd type="none" w="med" len="med"/>
-            <a:tailEnd type="triangle" w="med" len="med"/>
+            <a:tailEnd type="triangle"/>
           </a:ln>
         </p:spPr>
         <p:style>
@@ -8897,35 +8684,33 @@
       </p:cxnSp>
       <p:cxnSp>
         <p:nvCxnSpPr>
-          <p:cNvPr id="323" name="Elbow Connector 322">
-            <a:extLst>
-              <a:ext uri="{FF2B5EF4-FFF2-40B4-BE49-F238E27FC236}">
-                <a16:creationId xmlns:a16="http://schemas.microsoft.com/office/drawing/2014/main" id="{290FC449-2309-C9B3-D4D9-AD89940C3FDF}"/>
+          <p:cNvPr id="278" name="Elbow Connector 277">
+            <a:extLst>
+              <a:ext uri="{FF2B5EF4-FFF2-40B4-BE49-F238E27FC236}">
+                <a16:creationId xmlns:a16="http://schemas.microsoft.com/office/drawing/2014/main" id="{60EE083B-F0F2-219E-FD1C-938D14EBE610}"/>
               </a:ext>
             </a:extLst>
           </p:cNvPr>
           <p:cNvCxnSpPr>
             <a:cxnSpLocks/>
-            <a:stCxn id="124" idx="3"/>
-            <a:endCxn id="289" idx="0"/>
+            <a:stCxn id="8" idx="0"/>
+            <a:endCxn id="235" idx="1"/>
           </p:cNvCxnSpPr>
           <p:nvPr/>
         </p:nvCxnSpPr>
         <p:spPr>
-          <a:xfrm flipH="1">
-            <a:off x="7190221" y="2096828"/>
-            <a:ext cx="2255307" cy="3425072"/>
+          <a:xfrm rot="16200000" flipH="1">
+            <a:off x="-725810" y="4085321"/>
+            <a:ext cx="5142971" cy="701648"/>
           </a:xfrm>
           <a:prstGeom prst="bentConnector4">
             <a:avLst>
-              <a:gd name="adj1" fmla="val -7503"/>
-              <a:gd name="adj2" fmla="val 66294"/>
+              <a:gd name="adj1" fmla="val -2716"/>
+              <a:gd name="adj2" fmla="val -234920"/>
             </a:avLst>
           </a:prstGeom>
           <a:ln w="38100">
-            <a:prstDash val="dash"/>
-            <a:headEnd type="triangle" w="med" len="med"/>
-            <a:tailEnd type="triangle" w="med" len="med"/>
+            <a:tailEnd type="triangle"/>
           </a:ln>
         </p:spPr>
         <p:style>
@@ -8943,291 +8728,12 @@
           </a:fontRef>
         </p:style>
       </p:cxnSp>
-      <p:cxnSp>
-        <p:nvCxnSpPr>
-          <p:cNvPr id="330" name="Elbow Connector 329">
-            <a:extLst>
-              <a:ext uri="{FF2B5EF4-FFF2-40B4-BE49-F238E27FC236}">
-                <a16:creationId xmlns:a16="http://schemas.microsoft.com/office/drawing/2014/main" id="{D145EBC3-6A0E-CB95-C9FF-C8370282382E}"/>
-              </a:ext>
-            </a:extLst>
-          </p:cNvPr>
-          <p:cNvCxnSpPr>
-            <a:cxnSpLocks/>
-            <a:stCxn id="202" idx="2"/>
-            <a:endCxn id="289" idx="0"/>
-          </p:cNvCxnSpPr>
-          <p:nvPr/>
-        </p:nvCxnSpPr>
-        <p:spPr>
-          <a:xfrm rot="16200000" flipH="1">
-            <a:off x="6432051" y="4763730"/>
-            <a:ext cx="1471370" cy="44970"/>
-          </a:xfrm>
-          <a:prstGeom prst="bentConnector3">
-            <a:avLst>
-              <a:gd name="adj1" fmla="val 50000"/>
-            </a:avLst>
-          </a:prstGeom>
-          <a:ln w="38100">
-            <a:prstDash val="dash"/>
-            <a:headEnd type="triangle" w="med" len="med"/>
-            <a:tailEnd type="triangle" w="med" len="med"/>
-          </a:ln>
-        </p:spPr>
-        <p:style>
-          <a:lnRef idx="2">
-            <a:schemeClr val="dk1"/>
-          </a:lnRef>
-          <a:fillRef idx="0">
-            <a:schemeClr val="dk1"/>
-          </a:fillRef>
-          <a:effectRef idx="1">
-            <a:schemeClr val="dk1"/>
-          </a:effectRef>
-          <a:fontRef idx="minor">
-            <a:schemeClr val="tx1"/>
-          </a:fontRef>
-        </p:style>
-      </p:cxnSp>
-      <p:cxnSp>
-        <p:nvCxnSpPr>
-          <p:cNvPr id="334" name="Elbow Connector 333">
-            <a:extLst>
-              <a:ext uri="{FF2B5EF4-FFF2-40B4-BE49-F238E27FC236}">
-                <a16:creationId xmlns:a16="http://schemas.microsoft.com/office/drawing/2014/main" id="{760BFCB2-3D62-F50C-E73E-78B7EE7581DB}"/>
-              </a:ext>
-            </a:extLst>
-          </p:cNvPr>
-          <p:cNvCxnSpPr>
-            <a:cxnSpLocks/>
-            <a:stCxn id="204" idx="3"/>
-            <a:endCxn id="289" idx="1"/>
-          </p:cNvCxnSpPr>
-          <p:nvPr/>
-        </p:nvCxnSpPr>
-        <p:spPr>
-          <a:xfrm>
-            <a:off x="3293181" y="4078108"/>
-            <a:ext cx="3225795" cy="1780982"/>
-          </a:xfrm>
-          <a:prstGeom prst="bentConnector3">
-            <a:avLst>
-              <a:gd name="adj1" fmla="val 73140"/>
-            </a:avLst>
-          </a:prstGeom>
-          <a:ln w="38100">
-            <a:prstDash val="dash"/>
-            <a:headEnd type="none" w="med" len="med"/>
-            <a:tailEnd type="triangle" w="med" len="med"/>
-          </a:ln>
-        </p:spPr>
-        <p:style>
-          <a:lnRef idx="2">
-            <a:schemeClr val="dk1"/>
-          </a:lnRef>
-          <a:fillRef idx="0">
-            <a:schemeClr val="dk1"/>
-          </a:fillRef>
-          <a:effectRef idx="1">
-            <a:schemeClr val="dk1"/>
-          </a:effectRef>
-          <a:fontRef idx="minor">
-            <a:schemeClr val="tx1"/>
-          </a:fontRef>
-        </p:style>
-      </p:cxnSp>
-      <p:cxnSp>
-        <p:nvCxnSpPr>
-          <p:cNvPr id="341" name="Elbow Connector 340">
-            <a:extLst>
-              <a:ext uri="{FF2B5EF4-FFF2-40B4-BE49-F238E27FC236}">
-                <a16:creationId xmlns:a16="http://schemas.microsoft.com/office/drawing/2014/main" id="{24005D6A-4DC3-B548-8E21-828250BBEDDB}"/>
-              </a:ext>
-            </a:extLst>
-          </p:cNvPr>
-          <p:cNvCxnSpPr>
-            <a:cxnSpLocks/>
-            <a:stCxn id="289" idx="3"/>
-            <a:endCxn id="167" idx="1"/>
-          </p:cNvCxnSpPr>
-          <p:nvPr/>
-        </p:nvCxnSpPr>
-        <p:spPr>
-          <a:xfrm flipV="1">
-            <a:off x="7861465" y="5542150"/>
-            <a:ext cx="1975283" cy="316940"/>
-          </a:xfrm>
-          <a:prstGeom prst="bentConnector3">
-            <a:avLst>
-              <a:gd name="adj1" fmla="val 50000"/>
-            </a:avLst>
-          </a:prstGeom>
-          <a:ln w="38100">
-            <a:prstDash val="dash"/>
-            <a:headEnd type="none" w="med" len="med"/>
-            <a:tailEnd type="triangle" w="med" len="med"/>
-          </a:ln>
-        </p:spPr>
-        <p:style>
-          <a:lnRef idx="2">
-            <a:schemeClr val="dk1"/>
-          </a:lnRef>
-          <a:fillRef idx="0">
-            <a:schemeClr val="dk1"/>
-          </a:fillRef>
-          <a:effectRef idx="1">
-            <a:schemeClr val="dk1"/>
-          </a:effectRef>
-          <a:fontRef idx="minor">
-            <a:schemeClr val="tx1"/>
-          </a:fontRef>
-        </p:style>
-      </p:cxnSp>
-      <p:cxnSp>
-        <p:nvCxnSpPr>
-          <p:cNvPr id="344" name="Elbow Connector 343">
-            <a:extLst>
-              <a:ext uri="{FF2B5EF4-FFF2-40B4-BE49-F238E27FC236}">
-                <a16:creationId xmlns:a16="http://schemas.microsoft.com/office/drawing/2014/main" id="{2784287A-736E-68DE-209D-219212CEB8E3}"/>
-              </a:ext>
-            </a:extLst>
-          </p:cNvPr>
-          <p:cNvCxnSpPr>
-            <a:cxnSpLocks/>
-            <a:stCxn id="289" idx="3"/>
-            <a:endCxn id="228" idx="3"/>
-          </p:cNvCxnSpPr>
-          <p:nvPr/>
-        </p:nvCxnSpPr>
-        <p:spPr>
-          <a:xfrm flipH="1">
-            <a:off x="6019288" y="5859090"/>
-            <a:ext cx="1842177" cy="502003"/>
-          </a:xfrm>
-          <a:prstGeom prst="bentConnector3">
-            <a:avLst>
-              <a:gd name="adj1" fmla="val -12409"/>
-            </a:avLst>
-          </a:prstGeom>
-          <a:ln w="38100">
-            <a:prstDash val="dash"/>
-            <a:headEnd type="none" w="med" len="med"/>
-            <a:tailEnd type="triangle" w="med" len="med"/>
-          </a:ln>
-        </p:spPr>
-        <p:style>
-          <a:lnRef idx="2">
-            <a:schemeClr val="dk1"/>
-          </a:lnRef>
-          <a:fillRef idx="0">
-            <a:schemeClr val="dk1"/>
-          </a:fillRef>
-          <a:effectRef idx="1">
-            <a:schemeClr val="dk1"/>
-          </a:effectRef>
-          <a:fontRef idx="minor">
-            <a:schemeClr val="tx1"/>
-          </a:fontRef>
-        </p:style>
-      </p:cxnSp>
-      <p:cxnSp>
-        <p:nvCxnSpPr>
-          <p:cNvPr id="356" name="Elbow Connector 355">
-            <a:extLst>
-              <a:ext uri="{FF2B5EF4-FFF2-40B4-BE49-F238E27FC236}">
-                <a16:creationId xmlns:a16="http://schemas.microsoft.com/office/drawing/2014/main" id="{A0F63EF9-019B-28D7-1FF7-EABE30B73796}"/>
-              </a:ext>
-            </a:extLst>
-          </p:cNvPr>
-          <p:cNvCxnSpPr>
-            <a:cxnSpLocks/>
-            <a:stCxn id="151" idx="3"/>
-            <a:endCxn id="190" idx="3"/>
-          </p:cNvCxnSpPr>
-          <p:nvPr/>
-        </p:nvCxnSpPr>
-        <p:spPr>
-          <a:xfrm>
-            <a:off x="11412875" y="3314444"/>
-            <a:ext cx="57357" cy="3013978"/>
-          </a:xfrm>
-          <a:prstGeom prst="bentConnector3">
-            <a:avLst>
-              <a:gd name="adj1" fmla="val 498556"/>
-            </a:avLst>
-          </a:prstGeom>
-          <a:ln w="38100">
-            <a:tailEnd type="triangle"/>
-          </a:ln>
-        </p:spPr>
-        <p:style>
-          <a:lnRef idx="2">
-            <a:schemeClr val="dk1"/>
-          </a:lnRef>
-          <a:fillRef idx="0">
-            <a:schemeClr val="dk1"/>
-          </a:fillRef>
-          <a:effectRef idx="1">
-            <a:schemeClr val="dk1"/>
-          </a:effectRef>
-          <a:fontRef idx="minor">
-            <a:schemeClr val="tx1"/>
-          </a:fontRef>
-        </p:style>
-      </p:cxnSp>
-      <p:cxnSp>
-        <p:nvCxnSpPr>
-          <p:cNvPr id="361" name="Elbow Connector 360">
-            <a:extLst>
-              <a:ext uri="{FF2B5EF4-FFF2-40B4-BE49-F238E27FC236}">
-                <a16:creationId xmlns:a16="http://schemas.microsoft.com/office/drawing/2014/main" id="{F9AC13C7-350C-1DC2-5BDE-3F9AD781F1FD}"/>
-              </a:ext>
-            </a:extLst>
-          </p:cNvPr>
-          <p:cNvCxnSpPr>
-            <a:cxnSpLocks/>
-            <a:stCxn id="232" idx="2"/>
-            <a:endCxn id="172" idx="1"/>
-          </p:cNvCxnSpPr>
-          <p:nvPr/>
-        </p:nvCxnSpPr>
-        <p:spPr>
-          <a:xfrm rot="5400000" flipH="1" flipV="1">
-            <a:off x="6041092" y="2137041"/>
-            <a:ext cx="1287043" cy="7325090"/>
-          </a:xfrm>
-          <a:prstGeom prst="bentConnector4">
-            <a:avLst>
-              <a:gd name="adj1" fmla="val -4578"/>
-              <a:gd name="adj2" fmla="val 76531"/>
-            </a:avLst>
-          </a:prstGeom>
-          <a:ln w="38100">
-            <a:tailEnd type="triangle"/>
-          </a:ln>
-        </p:spPr>
-        <p:style>
-          <a:lnRef idx="2">
-            <a:schemeClr val="dk1"/>
-          </a:lnRef>
-          <a:fillRef idx="0">
-            <a:schemeClr val="dk1"/>
-          </a:fillRef>
-          <a:effectRef idx="1">
-            <a:schemeClr val="dk1"/>
-          </a:effectRef>
-          <a:fontRef idx="minor">
-            <a:schemeClr val="tx1"/>
-          </a:fontRef>
-        </p:style>
-      </p:cxnSp>
-      <p:sp>
-        <p:nvSpPr>
-          <p:cNvPr id="411" name="Rectangle 410">
-            <a:extLst>
-              <a:ext uri="{FF2B5EF4-FFF2-40B4-BE49-F238E27FC236}">
-                <a16:creationId xmlns:a16="http://schemas.microsoft.com/office/drawing/2014/main" id="{73015C36-0E66-77F0-222A-AF2B22DB0131}"/>
+      <p:sp>
+        <p:nvSpPr>
+          <p:cNvPr id="289" name="Rectangle 288">
+            <a:extLst>
+              <a:ext uri="{FF2B5EF4-FFF2-40B4-BE49-F238E27FC236}">
+                <a16:creationId xmlns:a16="http://schemas.microsoft.com/office/drawing/2014/main" id="{0CAA2824-AD66-7A27-E452-E3299C00B2E5}"/>
               </a:ext>
             </a:extLst>
           </p:cNvPr>
@@ -9236,16 +8742,14 @@
         </p:nvSpPr>
         <p:spPr>
           <a:xfrm>
-            <a:off x="1416618" y="4260526"/>
-            <a:ext cx="1798521" cy="276999"/>
+            <a:off x="6518976" y="5521900"/>
+            <a:ext cx="1342489" cy="674380"/>
           </a:xfrm>
           <a:prstGeom prst="rect">
             <a:avLst/>
           </a:prstGeom>
           <a:solidFill>
-            <a:schemeClr val="bg2">
-              <a:lumMod val="90000"/>
-            </a:schemeClr>
+            <a:srgbClr val="FFC000"/>
           </a:solidFill>
         </p:spPr>
         <p:style>
@@ -9275,10 +8779,10 @@
       </p:sp>
       <p:sp>
         <p:nvSpPr>
-          <p:cNvPr id="412" name="TextBox 411">
-            <a:extLst>
-              <a:ext uri="{FF2B5EF4-FFF2-40B4-BE49-F238E27FC236}">
-                <a16:creationId xmlns:a16="http://schemas.microsoft.com/office/drawing/2014/main" id="{4B057196-5C1F-6BBE-C721-6AE09DC38A8F}"/>
+          <p:cNvPr id="290" name="TextBox 289">
+            <a:extLst>
+              <a:ext uri="{FF2B5EF4-FFF2-40B4-BE49-F238E27FC236}">
+                <a16:creationId xmlns:a16="http://schemas.microsoft.com/office/drawing/2014/main" id="{29625248-F791-B6AA-F224-3FC10DF36286}"/>
               </a:ext>
             </a:extLst>
           </p:cNvPr>
@@ -9287,8 +8791,8 @@
         </p:nvSpPr>
         <p:spPr>
           <a:xfrm>
-            <a:off x="1420935" y="4242051"/>
-            <a:ext cx="1721305" cy="276999"/>
+            <a:off x="6502981" y="5580220"/>
+            <a:ext cx="1008609" cy="276999"/>
           </a:xfrm>
           <a:prstGeom prst="rect">
             <a:avLst/>
@@ -9303,40 +8807,41 @@
           <a:p>
             <a:r>
               <a:rPr lang="en-US" sz="1200" noProof="1"/>
-              <a:t>parameter files (config)</a:t>
+              <a:t>Risk module</a:t>
             </a:r>
           </a:p>
         </p:txBody>
       </p:sp>
       <p:cxnSp>
         <p:nvCxnSpPr>
-          <p:cNvPr id="271" name="Elbow Connector 270">
-            <a:extLst>
-              <a:ext uri="{FF2B5EF4-FFF2-40B4-BE49-F238E27FC236}">
-                <a16:creationId xmlns:a16="http://schemas.microsoft.com/office/drawing/2014/main" id="{F1DCB39C-7841-7600-DE7A-8484CEBCFC65}"/>
+          <p:cNvPr id="298" name="Elbow Connector 297">
+            <a:extLst>
+              <a:ext uri="{FF2B5EF4-FFF2-40B4-BE49-F238E27FC236}">
+                <a16:creationId xmlns:a16="http://schemas.microsoft.com/office/drawing/2014/main" id="{3CD32CFC-B131-B4C0-37F1-F50938DF9027}"/>
               </a:ext>
             </a:extLst>
           </p:cNvPr>
           <p:cNvCxnSpPr>
             <a:cxnSpLocks/>
-            <a:stCxn id="10" idx="0"/>
-            <a:endCxn id="235" idx="1"/>
+            <a:stCxn id="105" idx="2"/>
+            <a:endCxn id="203" idx="0"/>
           </p:cNvCxnSpPr>
           <p:nvPr/>
         </p:nvCxnSpPr>
         <p:spPr>
-          <a:xfrm rot="16200000" flipH="1">
-            <a:off x="-107885" y="4360188"/>
-            <a:ext cx="4293048" cy="314999"/>
-          </a:xfrm>
-          <a:prstGeom prst="bentConnector4">
+          <a:xfrm rot="5400000">
+            <a:off x="6338678" y="1605697"/>
+            <a:ext cx="2521219" cy="996120"/>
+          </a:xfrm>
+          <a:prstGeom prst="bentConnector3">
             <a:avLst>
-              <a:gd name="adj1" fmla="val -4204"/>
-              <a:gd name="adj2" fmla="val -614790"/>
+              <a:gd name="adj1" fmla="val 11848"/>
             </a:avLst>
           </a:prstGeom>
           <a:ln w="38100">
-            <a:tailEnd type="triangle"/>
+            <a:prstDash val="dash"/>
+            <a:headEnd type="triangle" w="med" len="med"/>
+            <a:tailEnd type="triangle" w="med" len="med"/>
           </a:ln>
         </p:spPr>
         <p:style>
@@ -9356,34 +8861,32 @@
       </p:cxnSp>
       <p:cxnSp>
         <p:nvCxnSpPr>
-          <p:cNvPr id="413" name="Elbow Connector 412">
-            <a:extLst>
-              <a:ext uri="{FF2B5EF4-FFF2-40B4-BE49-F238E27FC236}">
-                <a16:creationId xmlns:a16="http://schemas.microsoft.com/office/drawing/2014/main" id="{A0C3B407-F4DE-374D-3AD3-97DFF9517D13}"/>
+          <p:cNvPr id="306" name="Elbow Connector 305">
+            <a:extLst>
+              <a:ext uri="{FF2B5EF4-FFF2-40B4-BE49-F238E27FC236}">
+                <a16:creationId xmlns:a16="http://schemas.microsoft.com/office/drawing/2014/main" id="{A2BD6CC8-010E-C75F-9045-58E249025B12}"/>
               </a:ext>
             </a:extLst>
           </p:cNvPr>
           <p:cNvCxnSpPr>
             <a:cxnSpLocks/>
-            <a:stCxn id="411" idx="3"/>
-            <a:endCxn id="207" idx="1"/>
+            <a:stCxn id="124" idx="1"/>
+            <a:endCxn id="203" idx="0"/>
           </p:cNvCxnSpPr>
           <p:nvPr/>
         </p:nvCxnSpPr>
         <p:spPr>
-          <a:xfrm flipH="1" flipV="1">
-            <a:off x="1411570" y="3931627"/>
-            <a:ext cx="1803569" cy="467399"/>
-          </a:xfrm>
-          <a:prstGeom prst="bentConnector5">
-            <a:avLst>
-              <a:gd name="adj1" fmla="val -6929"/>
-              <a:gd name="adj2" fmla="val 50000"/>
-              <a:gd name="adj3" fmla="val 107943"/>
-            </a:avLst>
+          <a:xfrm rot="10800000" flipV="1">
+            <a:off x="7101228" y="2096827"/>
+            <a:ext cx="133597" cy="1267539"/>
+          </a:xfrm>
+          <a:prstGeom prst="bentConnector2">
+            <a:avLst/>
           </a:prstGeom>
           <a:ln w="38100">
-            <a:tailEnd type="triangle"/>
+            <a:prstDash val="dash"/>
+            <a:headEnd type="triangle" w="med" len="med"/>
+            <a:tailEnd type="triangle" w="med" len="med"/>
           </a:ln>
         </p:spPr>
         <p:style>
@@ -9403,34 +8906,33 @@
       </p:cxnSp>
       <p:cxnSp>
         <p:nvCxnSpPr>
-          <p:cNvPr id="418" name="Elbow Connector 417">
-            <a:extLst>
-              <a:ext uri="{FF2B5EF4-FFF2-40B4-BE49-F238E27FC236}">
-                <a16:creationId xmlns:a16="http://schemas.microsoft.com/office/drawing/2014/main" id="{93D336B5-376D-08F8-7200-9DBE305EAF6C}"/>
+          <p:cNvPr id="318" name="Elbow Connector 317">
+            <a:extLst>
+              <a:ext uri="{FF2B5EF4-FFF2-40B4-BE49-F238E27FC236}">
+                <a16:creationId xmlns:a16="http://schemas.microsoft.com/office/drawing/2014/main" id="{F16A25D0-3C85-6841-BBF3-CF40983677B6}"/>
               </a:ext>
             </a:extLst>
           </p:cNvPr>
           <p:cNvCxnSpPr>
             <a:cxnSpLocks/>
-            <a:stCxn id="411" idx="3"/>
-            <a:endCxn id="10" idx="1"/>
+            <a:stCxn id="204" idx="3"/>
           </p:cNvCxnSpPr>
           <p:nvPr/>
         </p:nvCxnSpPr>
         <p:spPr>
-          <a:xfrm flipH="1" flipV="1">
-            <a:off x="959221" y="2509663"/>
-            <a:ext cx="2255918" cy="1889363"/>
-          </a:xfrm>
-          <a:prstGeom prst="bentConnector5">
+          <a:xfrm flipV="1">
+            <a:off x="3293181" y="3713482"/>
+            <a:ext cx="2726105" cy="364626"/>
+          </a:xfrm>
+          <a:prstGeom prst="bentConnector3">
             <a:avLst>
-              <a:gd name="adj1" fmla="val -10403"/>
-              <a:gd name="adj2" fmla="val 54517"/>
-              <a:gd name="adj3" fmla="val 115537"/>
+              <a:gd name="adj1" fmla="val 50000"/>
             </a:avLst>
           </a:prstGeom>
           <a:ln w="38100">
-            <a:tailEnd type="triangle"/>
+            <a:prstDash val="dash"/>
+            <a:headEnd type="none" w="med" len="med"/>
+            <a:tailEnd type="triangle" w="med" len="med"/>
           </a:ln>
         </p:spPr>
         <p:style>
@@ -9450,34 +8952,34 @@
       </p:cxnSp>
       <p:cxnSp>
         <p:nvCxnSpPr>
-          <p:cNvPr id="445" name="Elbow Connector 444">
-            <a:extLst>
-              <a:ext uri="{FF2B5EF4-FFF2-40B4-BE49-F238E27FC236}">
-                <a16:creationId xmlns:a16="http://schemas.microsoft.com/office/drawing/2014/main" id="{D401A50A-EE39-5ABB-0CC8-D3A02E1998A9}"/>
+          <p:cNvPr id="323" name="Elbow Connector 322">
+            <a:extLst>
+              <a:ext uri="{FF2B5EF4-FFF2-40B4-BE49-F238E27FC236}">
+                <a16:creationId xmlns:a16="http://schemas.microsoft.com/office/drawing/2014/main" id="{290FC449-2309-C9B3-D4D9-AD89940C3FDF}"/>
               </a:ext>
             </a:extLst>
           </p:cNvPr>
           <p:cNvCxnSpPr>
             <a:cxnSpLocks/>
-            <a:stCxn id="22" idx="0"/>
-            <a:endCxn id="25" idx="1"/>
+            <a:stCxn id="124" idx="3"/>
+            <a:endCxn id="289" idx="0"/>
           </p:cNvCxnSpPr>
           <p:nvPr/>
         </p:nvCxnSpPr>
         <p:spPr>
-          <a:xfrm rot="16200000" flipV="1">
-            <a:off x="488485" y="1426845"/>
-            <a:ext cx="2201669" cy="454763"/>
+          <a:xfrm flipH="1">
+            <a:off x="7190221" y="2096828"/>
+            <a:ext cx="2255307" cy="3425072"/>
           </a:xfrm>
           <a:prstGeom prst="bentConnector4">
             <a:avLst>
-              <a:gd name="adj1" fmla="val 2277"/>
-              <a:gd name="adj2" fmla="val 360806"/>
+              <a:gd name="adj1" fmla="val -7503"/>
+              <a:gd name="adj2" fmla="val 66294"/>
             </a:avLst>
           </a:prstGeom>
           <a:ln w="38100">
             <a:prstDash val="dash"/>
-            <a:headEnd type="none" w="med" len="med"/>
+            <a:headEnd type="triangle" w="med" len="med"/>
             <a:tailEnd type="triangle" w="med" len="med"/>
           </a:ln>
         </p:spPr>
@@ -9496,48 +8998,291 @@
           </a:fontRef>
         </p:style>
       </p:cxnSp>
-      <p:pic>
-        <p:nvPicPr>
-          <p:cNvPr id="23" name="Graphic 22" descr="Repeat with solid fill">
-            <a:extLst>
-              <a:ext uri="{FF2B5EF4-FFF2-40B4-BE49-F238E27FC236}">
-                <a16:creationId xmlns:a16="http://schemas.microsoft.com/office/drawing/2014/main" id="{09551D4D-6A79-39C2-445F-B6C40EAEA47E}"/>
-              </a:ext>
-            </a:extLst>
-          </p:cNvPr>
-          <p:cNvPicPr>
-            <a:picLocks noChangeAspect="1"/>
-          </p:cNvPicPr>
-          <p:nvPr/>
-        </p:nvPicPr>
-        <p:blipFill>
-          <a:blip r:embed="rId2">
-            <a:extLst>
-              <a:ext uri="{96DAC541-7B7A-43D3-8B79-37D633B846F1}">
-                <asvg:svgBlip xmlns:asvg="http://schemas.microsoft.com/office/drawing/2016/SVG/main" r:embed="rId3"/>
-              </a:ext>
-            </a:extLst>
-          </a:blip>
-          <a:stretch>
-            <a:fillRect/>
-          </a:stretch>
-        </p:blipFill>
-        <p:spPr>
-          <a:xfrm>
-            <a:off x="821257" y="2561410"/>
-            <a:ext cx="366563" cy="366563"/>
-          </a:xfrm>
-          <a:prstGeom prst="rect">
-            <a:avLst/>
-          </a:prstGeom>
-        </p:spPr>
-      </p:pic>
-      <p:sp>
-        <p:nvSpPr>
-          <p:cNvPr id="12" name="Rectangle 11">
-            <a:extLst>
-              <a:ext uri="{FF2B5EF4-FFF2-40B4-BE49-F238E27FC236}">
-                <a16:creationId xmlns:a16="http://schemas.microsoft.com/office/drawing/2014/main" id="{C8E75110-E5A2-86E9-F389-F50AFA3FB93B}"/>
+      <p:cxnSp>
+        <p:nvCxnSpPr>
+          <p:cNvPr id="330" name="Elbow Connector 329">
+            <a:extLst>
+              <a:ext uri="{FF2B5EF4-FFF2-40B4-BE49-F238E27FC236}">
+                <a16:creationId xmlns:a16="http://schemas.microsoft.com/office/drawing/2014/main" id="{D145EBC3-6A0E-CB95-C9FF-C8370282382E}"/>
+              </a:ext>
+            </a:extLst>
+          </p:cNvPr>
+          <p:cNvCxnSpPr>
+            <a:cxnSpLocks/>
+            <a:stCxn id="202" idx="2"/>
+            <a:endCxn id="289" idx="0"/>
+          </p:cNvCxnSpPr>
+          <p:nvPr/>
+        </p:nvCxnSpPr>
+        <p:spPr>
+          <a:xfrm rot="16200000" flipH="1">
+            <a:off x="6432051" y="4763730"/>
+            <a:ext cx="1471370" cy="44970"/>
+          </a:xfrm>
+          <a:prstGeom prst="bentConnector3">
+            <a:avLst>
+              <a:gd name="adj1" fmla="val 50000"/>
+            </a:avLst>
+          </a:prstGeom>
+          <a:ln w="38100">
+            <a:prstDash val="dash"/>
+            <a:headEnd type="triangle" w="med" len="med"/>
+            <a:tailEnd type="triangle" w="med" len="med"/>
+          </a:ln>
+        </p:spPr>
+        <p:style>
+          <a:lnRef idx="2">
+            <a:schemeClr val="dk1"/>
+          </a:lnRef>
+          <a:fillRef idx="0">
+            <a:schemeClr val="dk1"/>
+          </a:fillRef>
+          <a:effectRef idx="1">
+            <a:schemeClr val="dk1"/>
+          </a:effectRef>
+          <a:fontRef idx="minor">
+            <a:schemeClr val="tx1"/>
+          </a:fontRef>
+        </p:style>
+      </p:cxnSp>
+      <p:cxnSp>
+        <p:nvCxnSpPr>
+          <p:cNvPr id="334" name="Elbow Connector 333">
+            <a:extLst>
+              <a:ext uri="{FF2B5EF4-FFF2-40B4-BE49-F238E27FC236}">
+                <a16:creationId xmlns:a16="http://schemas.microsoft.com/office/drawing/2014/main" id="{760BFCB2-3D62-F50C-E73E-78B7EE7581DB}"/>
+              </a:ext>
+            </a:extLst>
+          </p:cNvPr>
+          <p:cNvCxnSpPr>
+            <a:cxnSpLocks/>
+            <a:stCxn id="204" idx="3"/>
+            <a:endCxn id="289" idx="1"/>
+          </p:cNvCxnSpPr>
+          <p:nvPr/>
+        </p:nvCxnSpPr>
+        <p:spPr>
+          <a:xfrm>
+            <a:off x="3293181" y="4078108"/>
+            <a:ext cx="3225795" cy="1780982"/>
+          </a:xfrm>
+          <a:prstGeom prst="bentConnector3">
+            <a:avLst>
+              <a:gd name="adj1" fmla="val 73140"/>
+            </a:avLst>
+          </a:prstGeom>
+          <a:ln w="38100">
+            <a:prstDash val="dash"/>
+            <a:headEnd type="none" w="med" len="med"/>
+            <a:tailEnd type="triangle" w="med" len="med"/>
+          </a:ln>
+        </p:spPr>
+        <p:style>
+          <a:lnRef idx="2">
+            <a:schemeClr val="dk1"/>
+          </a:lnRef>
+          <a:fillRef idx="0">
+            <a:schemeClr val="dk1"/>
+          </a:fillRef>
+          <a:effectRef idx="1">
+            <a:schemeClr val="dk1"/>
+          </a:effectRef>
+          <a:fontRef idx="minor">
+            <a:schemeClr val="tx1"/>
+          </a:fontRef>
+        </p:style>
+      </p:cxnSp>
+      <p:cxnSp>
+        <p:nvCxnSpPr>
+          <p:cNvPr id="341" name="Elbow Connector 340">
+            <a:extLst>
+              <a:ext uri="{FF2B5EF4-FFF2-40B4-BE49-F238E27FC236}">
+                <a16:creationId xmlns:a16="http://schemas.microsoft.com/office/drawing/2014/main" id="{24005D6A-4DC3-B548-8E21-828250BBEDDB}"/>
+              </a:ext>
+            </a:extLst>
+          </p:cNvPr>
+          <p:cNvCxnSpPr>
+            <a:cxnSpLocks/>
+            <a:stCxn id="289" idx="3"/>
+            <a:endCxn id="167" idx="1"/>
+          </p:cNvCxnSpPr>
+          <p:nvPr/>
+        </p:nvCxnSpPr>
+        <p:spPr>
+          <a:xfrm flipV="1">
+            <a:off x="7861465" y="5542150"/>
+            <a:ext cx="1975283" cy="316940"/>
+          </a:xfrm>
+          <a:prstGeom prst="bentConnector3">
+            <a:avLst>
+              <a:gd name="adj1" fmla="val 50000"/>
+            </a:avLst>
+          </a:prstGeom>
+          <a:ln w="38100">
+            <a:prstDash val="dash"/>
+            <a:headEnd type="none" w="med" len="med"/>
+            <a:tailEnd type="triangle" w="med" len="med"/>
+          </a:ln>
+        </p:spPr>
+        <p:style>
+          <a:lnRef idx="2">
+            <a:schemeClr val="dk1"/>
+          </a:lnRef>
+          <a:fillRef idx="0">
+            <a:schemeClr val="dk1"/>
+          </a:fillRef>
+          <a:effectRef idx="1">
+            <a:schemeClr val="dk1"/>
+          </a:effectRef>
+          <a:fontRef idx="minor">
+            <a:schemeClr val="tx1"/>
+          </a:fontRef>
+        </p:style>
+      </p:cxnSp>
+      <p:cxnSp>
+        <p:nvCxnSpPr>
+          <p:cNvPr id="344" name="Elbow Connector 343">
+            <a:extLst>
+              <a:ext uri="{FF2B5EF4-FFF2-40B4-BE49-F238E27FC236}">
+                <a16:creationId xmlns:a16="http://schemas.microsoft.com/office/drawing/2014/main" id="{2784287A-736E-68DE-209D-219212CEB8E3}"/>
+              </a:ext>
+            </a:extLst>
+          </p:cNvPr>
+          <p:cNvCxnSpPr>
+            <a:cxnSpLocks/>
+            <a:stCxn id="289" idx="3"/>
+            <a:endCxn id="228" idx="3"/>
+          </p:cNvCxnSpPr>
+          <p:nvPr/>
+        </p:nvCxnSpPr>
+        <p:spPr>
+          <a:xfrm flipH="1">
+            <a:off x="6019288" y="5859090"/>
+            <a:ext cx="1842177" cy="502003"/>
+          </a:xfrm>
+          <a:prstGeom prst="bentConnector3">
+            <a:avLst>
+              <a:gd name="adj1" fmla="val -12409"/>
+            </a:avLst>
+          </a:prstGeom>
+          <a:ln w="38100">
+            <a:prstDash val="dash"/>
+            <a:headEnd type="none" w="med" len="med"/>
+            <a:tailEnd type="triangle" w="med" len="med"/>
+          </a:ln>
+        </p:spPr>
+        <p:style>
+          <a:lnRef idx="2">
+            <a:schemeClr val="dk1"/>
+          </a:lnRef>
+          <a:fillRef idx="0">
+            <a:schemeClr val="dk1"/>
+          </a:fillRef>
+          <a:effectRef idx="1">
+            <a:schemeClr val="dk1"/>
+          </a:effectRef>
+          <a:fontRef idx="minor">
+            <a:schemeClr val="tx1"/>
+          </a:fontRef>
+        </p:style>
+      </p:cxnSp>
+      <p:cxnSp>
+        <p:nvCxnSpPr>
+          <p:cNvPr id="356" name="Elbow Connector 355">
+            <a:extLst>
+              <a:ext uri="{FF2B5EF4-FFF2-40B4-BE49-F238E27FC236}">
+                <a16:creationId xmlns:a16="http://schemas.microsoft.com/office/drawing/2014/main" id="{A0F63EF9-019B-28D7-1FF7-EABE30B73796}"/>
+              </a:ext>
+            </a:extLst>
+          </p:cNvPr>
+          <p:cNvCxnSpPr>
+            <a:cxnSpLocks/>
+            <a:stCxn id="151" idx="3"/>
+            <a:endCxn id="190" idx="3"/>
+          </p:cNvCxnSpPr>
+          <p:nvPr/>
+        </p:nvCxnSpPr>
+        <p:spPr>
+          <a:xfrm>
+            <a:off x="11412875" y="3314444"/>
+            <a:ext cx="57357" cy="3013978"/>
+          </a:xfrm>
+          <a:prstGeom prst="bentConnector3">
+            <a:avLst>
+              <a:gd name="adj1" fmla="val 498556"/>
+            </a:avLst>
+          </a:prstGeom>
+          <a:ln w="38100">
+            <a:tailEnd type="triangle"/>
+          </a:ln>
+        </p:spPr>
+        <p:style>
+          <a:lnRef idx="2">
+            <a:schemeClr val="dk1"/>
+          </a:lnRef>
+          <a:fillRef idx="0">
+            <a:schemeClr val="dk1"/>
+          </a:fillRef>
+          <a:effectRef idx="1">
+            <a:schemeClr val="dk1"/>
+          </a:effectRef>
+          <a:fontRef idx="minor">
+            <a:schemeClr val="tx1"/>
+          </a:fontRef>
+        </p:style>
+      </p:cxnSp>
+      <p:cxnSp>
+        <p:nvCxnSpPr>
+          <p:cNvPr id="361" name="Elbow Connector 360">
+            <a:extLst>
+              <a:ext uri="{FF2B5EF4-FFF2-40B4-BE49-F238E27FC236}">
+                <a16:creationId xmlns:a16="http://schemas.microsoft.com/office/drawing/2014/main" id="{F9AC13C7-350C-1DC2-5BDE-3F9AD781F1FD}"/>
+              </a:ext>
+            </a:extLst>
+          </p:cNvPr>
+          <p:cNvCxnSpPr>
+            <a:cxnSpLocks/>
+            <a:stCxn id="232" idx="2"/>
+            <a:endCxn id="172" idx="1"/>
+          </p:cNvCxnSpPr>
+          <p:nvPr/>
+        </p:nvCxnSpPr>
+        <p:spPr>
+          <a:xfrm rot="5400000" flipH="1" flipV="1">
+            <a:off x="6041092" y="2137041"/>
+            <a:ext cx="1287043" cy="7325090"/>
+          </a:xfrm>
+          <a:prstGeom prst="bentConnector4">
+            <a:avLst>
+              <a:gd name="adj1" fmla="val -4578"/>
+              <a:gd name="adj2" fmla="val 76531"/>
+            </a:avLst>
+          </a:prstGeom>
+          <a:ln w="38100">
+            <a:tailEnd type="triangle"/>
+          </a:ln>
+        </p:spPr>
+        <p:style>
+          <a:lnRef idx="2">
+            <a:schemeClr val="dk1"/>
+          </a:lnRef>
+          <a:fillRef idx="0">
+            <a:schemeClr val="dk1"/>
+          </a:fillRef>
+          <a:effectRef idx="1">
+            <a:schemeClr val="dk1"/>
+          </a:effectRef>
+          <a:fontRef idx="minor">
+            <a:schemeClr val="tx1"/>
+          </a:fontRef>
+        </p:style>
+      </p:cxnSp>
+      <p:sp>
+        <p:nvSpPr>
+          <p:cNvPr id="411" name="Rectangle 410">
+            <a:extLst>
+              <a:ext uri="{FF2B5EF4-FFF2-40B4-BE49-F238E27FC236}">
+                <a16:creationId xmlns:a16="http://schemas.microsoft.com/office/drawing/2014/main" id="{73015C36-0E66-77F0-222A-AF2B22DB0131}"/>
               </a:ext>
             </a:extLst>
           </p:cNvPr>
@@ -9546,7 +9291,7 @@
         </p:nvSpPr>
         <p:spPr>
           <a:xfrm>
-            <a:off x="2190654" y="6869131"/>
+            <a:off x="1416618" y="4260526"/>
             <a:ext cx="1798521" cy="276999"/>
           </a:xfrm>
           <a:prstGeom prst="rect">
@@ -9585,6 +9330,265 @@
       </p:sp>
       <p:sp>
         <p:nvSpPr>
+          <p:cNvPr id="412" name="TextBox 411">
+            <a:extLst>
+              <a:ext uri="{FF2B5EF4-FFF2-40B4-BE49-F238E27FC236}">
+                <a16:creationId xmlns:a16="http://schemas.microsoft.com/office/drawing/2014/main" id="{4B057196-5C1F-6BBE-C721-6AE09DC38A8F}"/>
+              </a:ext>
+            </a:extLst>
+          </p:cNvPr>
+          <p:cNvSpPr txBox="1"/>
+          <p:nvPr/>
+        </p:nvSpPr>
+        <p:spPr>
+          <a:xfrm>
+            <a:off x="1420935" y="4242051"/>
+            <a:ext cx="1721305" cy="276999"/>
+          </a:xfrm>
+          <a:prstGeom prst="rect">
+            <a:avLst/>
+          </a:prstGeom>
+          <a:noFill/>
+        </p:spPr>
+        <p:txBody>
+          <a:bodyPr wrap="none" rtlCol="0">
+            <a:spAutoFit/>
+          </a:bodyPr>
+          <a:lstStyle/>
+          <a:p>
+            <a:r>
+              <a:rPr lang="en-US" sz="1200" noProof="1"/>
+              <a:t>parameter files (config)</a:t>
+            </a:r>
+          </a:p>
+        </p:txBody>
+      </p:sp>
+      <p:cxnSp>
+        <p:nvCxnSpPr>
+          <p:cNvPr id="271" name="Elbow Connector 270">
+            <a:extLst>
+              <a:ext uri="{FF2B5EF4-FFF2-40B4-BE49-F238E27FC236}">
+                <a16:creationId xmlns:a16="http://schemas.microsoft.com/office/drawing/2014/main" id="{F1DCB39C-7841-7600-DE7A-8484CEBCFC65}"/>
+              </a:ext>
+            </a:extLst>
+          </p:cNvPr>
+          <p:cNvCxnSpPr>
+            <a:cxnSpLocks/>
+            <a:stCxn id="10" idx="0"/>
+            <a:endCxn id="235" idx="1"/>
+          </p:cNvCxnSpPr>
+          <p:nvPr/>
+        </p:nvCxnSpPr>
+        <p:spPr>
+          <a:xfrm rot="16200000" flipH="1">
+            <a:off x="-279414" y="4531717"/>
+            <a:ext cx="4636468" cy="315360"/>
+          </a:xfrm>
+          <a:prstGeom prst="bentConnector4">
+            <a:avLst>
+              <a:gd name="adj1" fmla="val -4108"/>
+              <a:gd name="adj2" fmla="val -644713"/>
+            </a:avLst>
+          </a:prstGeom>
+          <a:ln w="38100">
+            <a:tailEnd type="triangle"/>
+          </a:ln>
+        </p:spPr>
+        <p:style>
+          <a:lnRef idx="2">
+            <a:schemeClr val="dk1"/>
+          </a:lnRef>
+          <a:fillRef idx="0">
+            <a:schemeClr val="dk1"/>
+          </a:fillRef>
+          <a:effectRef idx="1">
+            <a:schemeClr val="dk1"/>
+          </a:effectRef>
+          <a:fontRef idx="minor">
+            <a:schemeClr val="tx1"/>
+          </a:fontRef>
+        </p:style>
+      </p:cxnSp>
+      <p:cxnSp>
+        <p:nvCxnSpPr>
+          <p:cNvPr id="413" name="Elbow Connector 412">
+            <a:extLst>
+              <a:ext uri="{FF2B5EF4-FFF2-40B4-BE49-F238E27FC236}">
+                <a16:creationId xmlns:a16="http://schemas.microsoft.com/office/drawing/2014/main" id="{A0C3B407-F4DE-374D-3AD3-97DFF9517D13}"/>
+              </a:ext>
+            </a:extLst>
+          </p:cNvPr>
+          <p:cNvCxnSpPr>
+            <a:cxnSpLocks/>
+            <a:stCxn id="411" idx="3"/>
+            <a:endCxn id="207" idx="1"/>
+          </p:cNvCxnSpPr>
+          <p:nvPr/>
+        </p:nvCxnSpPr>
+        <p:spPr>
+          <a:xfrm flipH="1" flipV="1">
+            <a:off x="1411570" y="3931627"/>
+            <a:ext cx="1803569" cy="467399"/>
+          </a:xfrm>
+          <a:prstGeom prst="bentConnector5">
+            <a:avLst>
+              <a:gd name="adj1" fmla="val -6929"/>
+              <a:gd name="adj2" fmla="val 50000"/>
+              <a:gd name="adj3" fmla="val 107943"/>
+            </a:avLst>
+          </a:prstGeom>
+          <a:ln w="38100">
+            <a:tailEnd type="triangle"/>
+          </a:ln>
+        </p:spPr>
+        <p:style>
+          <a:lnRef idx="2">
+            <a:schemeClr val="dk1"/>
+          </a:lnRef>
+          <a:fillRef idx="0">
+            <a:schemeClr val="dk1"/>
+          </a:fillRef>
+          <a:effectRef idx="1">
+            <a:schemeClr val="dk1"/>
+          </a:effectRef>
+          <a:fontRef idx="minor">
+            <a:schemeClr val="tx1"/>
+          </a:fontRef>
+        </p:style>
+      </p:cxnSp>
+      <p:cxnSp>
+        <p:nvCxnSpPr>
+          <p:cNvPr id="418" name="Elbow Connector 417">
+            <a:extLst>
+              <a:ext uri="{FF2B5EF4-FFF2-40B4-BE49-F238E27FC236}">
+                <a16:creationId xmlns:a16="http://schemas.microsoft.com/office/drawing/2014/main" id="{93D336B5-376D-08F8-7200-9DBE305EAF6C}"/>
+              </a:ext>
+            </a:extLst>
+          </p:cNvPr>
+          <p:cNvCxnSpPr>
+            <a:cxnSpLocks/>
+            <a:stCxn id="411" idx="3"/>
+            <a:endCxn id="10" idx="1"/>
+          </p:cNvCxnSpPr>
+          <p:nvPr/>
+        </p:nvCxnSpPr>
+        <p:spPr>
+          <a:xfrm flipH="1" flipV="1">
+            <a:off x="959221" y="2509663"/>
+            <a:ext cx="2255918" cy="1889363"/>
+          </a:xfrm>
+          <a:prstGeom prst="bentConnector5">
+            <a:avLst>
+              <a:gd name="adj1" fmla="val -10403"/>
+              <a:gd name="adj2" fmla="val 54517"/>
+              <a:gd name="adj3" fmla="val 115537"/>
+            </a:avLst>
+          </a:prstGeom>
+          <a:ln w="38100">
+            <a:tailEnd type="triangle"/>
+          </a:ln>
+        </p:spPr>
+        <p:style>
+          <a:lnRef idx="2">
+            <a:schemeClr val="dk1"/>
+          </a:lnRef>
+          <a:fillRef idx="0">
+            <a:schemeClr val="dk1"/>
+          </a:fillRef>
+          <a:effectRef idx="1">
+            <a:schemeClr val="dk1"/>
+          </a:effectRef>
+          <a:fontRef idx="minor">
+            <a:schemeClr val="tx1"/>
+          </a:fontRef>
+        </p:style>
+      </p:cxnSp>
+      <p:cxnSp>
+        <p:nvCxnSpPr>
+          <p:cNvPr id="445" name="Elbow Connector 444">
+            <a:extLst>
+              <a:ext uri="{FF2B5EF4-FFF2-40B4-BE49-F238E27FC236}">
+                <a16:creationId xmlns:a16="http://schemas.microsoft.com/office/drawing/2014/main" id="{D401A50A-EE39-5ABB-0CC8-D3A02E1998A9}"/>
+              </a:ext>
+            </a:extLst>
+          </p:cNvPr>
+          <p:cNvCxnSpPr>
+            <a:cxnSpLocks/>
+            <a:stCxn id="22" idx="0"/>
+            <a:endCxn id="25" idx="1"/>
+          </p:cNvCxnSpPr>
+          <p:nvPr/>
+        </p:nvCxnSpPr>
+        <p:spPr>
+          <a:xfrm rot="16200000" flipV="1">
+            <a:off x="488485" y="1426845"/>
+            <a:ext cx="2201669" cy="454763"/>
+          </a:xfrm>
+          <a:prstGeom prst="bentConnector4">
+            <a:avLst>
+              <a:gd name="adj1" fmla="val 2277"/>
+              <a:gd name="adj2" fmla="val 360806"/>
+            </a:avLst>
+          </a:prstGeom>
+          <a:ln w="38100">
+            <a:prstDash val="dash"/>
+            <a:headEnd type="none" w="med" len="med"/>
+            <a:tailEnd type="triangle" w="med" len="med"/>
+          </a:ln>
+        </p:spPr>
+        <p:style>
+          <a:lnRef idx="2">
+            <a:schemeClr val="dk1"/>
+          </a:lnRef>
+          <a:fillRef idx="0">
+            <a:schemeClr val="dk1"/>
+          </a:fillRef>
+          <a:effectRef idx="1">
+            <a:schemeClr val="dk1"/>
+          </a:effectRef>
+          <a:fontRef idx="minor">
+            <a:schemeClr val="tx1"/>
+          </a:fontRef>
+        </p:style>
+      </p:cxnSp>
+      <p:pic>
+        <p:nvPicPr>
+          <p:cNvPr id="23" name="Graphic 22" descr="Repeat with solid fill">
+            <a:extLst>
+              <a:ext uri="{FF2B5EF4-FFF2-40B4-BE49-F238E27FC236}">
+                <a16:creationId xmlns:a16="http://schemas.microsoft.com/office/drawing/2014/main" id="{09551D4D-6A79-39C2-445F-B6C40EAEA47E}"/>
+              </a:ext>
+            </a:extLst>
+          </p:cNvPr>
+          <p:cNvPicPr>
+            <a:picLocks noChangeAspect="1"/>
+          </p:cNvPicPr>
+          <p:nvPr/>
+        </p:nvPicPr>
+        <p:blipFill>
+          <a:blip>
+            <a:extLst>
+              <a:ext uri="{96DAC541-7B7A-43D3-8B79-37D633B846F1}">
+                <asvg:svgBlip xmlns:asvg="http://schemas.microsoft.com/office/drawing/2016/SVG/main" r:embed="rId2"/>
+              </a:ext>
+            </a:extLst>
+          </a:blip>
+          <a:stretch>
+            <a:fillRect/>
+          </a:stretch>
+        </p:blipFill>
+        <p:spPr>
+          <a:xfrm>
+            <a:off x="821257" y="2561410"/>
+            <a:ext cx="366563" cy="366563"/>
+          </a:xfrm>
+          <a:prstGeom prst="rect">
+            <a:avLst/>
+          </a:prstGeom>
+        </p:spPr>
+      </p:pic>
+      <p:sp>
+        <p:nvSpPr>
           <p:cNvPr id="3" name="TextBox 2">
             <a:extLst>
               <a:ext uri="{FF2B5EF4-FFF2-40B4-BE49-F238E27FC236}">
@@ -9597,7 +9601,7 @@
         </p:nvSpPr>
         <p:spPr>
           <a:xfrm>
-            <a:off x="2180997" y="6869131"/>
+            <a:off x="2197913" y="6555601"/>
             <a:ext cx="1366015" cy="276999"/>
           </a:xfrm>
           <a:prstGeom prst="rect">
@@ -9636,14 +9640,14 @@
         </p:nvCxnSpPr>
         <p:spPr>
           <a:xfrm flipH="1">
-            <a:off x="2180997" y="553392"/>
-            <a:ext cx="1024778" cy="6454239"/>
+            <a:off x="2197913" y="553392"/>
+            <a:ext cx="695708" cy="6140709"/>
           </a:xfrm>
           <a:prstGeom prst="bentConnector5">
             <a:avLst>
-              <a:gd name="adj1" fmla="val -3611"/>
-              <a:gd name="adj2" fmla="val 42309"/>
-              <a:gd name="adj3" fmla="val 195390"/>
+              <a:gd name="adj1" fmla="val -32859"/>
+              <a:gd name="adj2" fmla="val 42555"/>
+              <a:gd name="adj3" fmla="val 248777"/>
             </a:avLst>
           </a:prstGeom>
           <a:ln w="38100">
@@ -9752,6 +9756,58 @@
           </a:p>
         </p:txBody>
       </p:sp>
+      <p:sp>
+        <p:nvSpPr>
+          <p:cNvPr id="121" name="Rectangle 120">
+            <a:extLst>
+              <a:ext uri="{FF2B5EF4-FFF2-40B4-BE49-F238E27FC236}">
+                <a16:creationId xmlns:a16="http://schemas.microsoft.com/office/drawing/2014/main" id="{97D814AA-F7D5-5908-F53A-E39932D2141C}"/>
+              </a:ext>
+            </a:extLst>
+          </p:cNvPr>
+          <p:cNvSpPr/>
+          <p:nvPr/>
+        </p:nvSpPr>
+        <p:spPr>
+          <a:xfrm>
+            <a:off x="3411989" y="2202856"/>
+            <a:ext cx="1241246" cy="276998"/>
+          </a:xfrm>
+          <a:prstGeom prst="rect">
+            <a:avLst/>
+          </a:prstGeom>
+          <a:solidFill>
+            <a:schemeClr val="accent6">
+              <a:lumMod val="60000"/>
+              <a:lumOff val="40000"/>
+            </a:schemeClr>
+          </a:solidFill>
+        </p:spPr>
+        <p:style>
+          <a:lnRef idx="2">
+            <a:schemeClr val="accent1">
+              <a:shade val="15000"/>
+            </a:schemeClr>
+          </a:lnRef>
+          <a:fillRef idx="1">
+            <a:schemeClr val="accent1"/>
+          </a:fillRef>
+          <a:effectRef idx="0">
+            <a:schemeClr val="accent1"/>
+          </a:effectRef>
+          <a:fontRef idx="minor">
+            <a:schemeClr val="lt1"/>
+          </a:fontRef>
+        </p:style>
+        <p:txBody>
+          <a:bodyPr rtlCol="0" anchor="ctr"/>
+          <a:lstStyle/>
+          <a:p>
+            <a:pPr algn="ctr"/>
+            <a:endParaRPr lang="en-US" noProof="1"/>
+          </a:p>
+        </p:txBody>
+      </p:sp>
       <p:cxnSp>
         <p:nvCxnSpPr>
           <p:cNvPr id="16" name="Elbow Connector 15">
@@ -9775,7 +9831,351 @@
           </a:xfrm>
           <a:prstGeom prst="bentConnector3">
             <a:avLst>
-              <a:gd name="adj1" fmla="val 29924"/>
+              <a:gd name="adj1" fmla="val 32921"/>
+            </a:avLst>
+          </a:prstGeom>
+          <a:ln w="38100">
+            <a:tailEnd type="triangle"/>
+          </a:ln>
+        </p:spPr>
+        <p:style>
+          <a:lnRef idx="2">
+            <a:schemeClr val="dk1"/>
+          </a:lnRef>
+          <a:fillRef idx="0">
+            <a:schemeClr val="dk1"/>
+          </a:fillRef>
+          <a:effectRef idx="1">
+            <a:schemeClr val="dk1"/>
+          </a:effectRef>
+          <a:fontRef idx="minor">
+            <a:schemeClr val="tx1"/>
+          </a:fontRef>
+        </p:style>
+      </p:cxnSp>
+      <p:sp>
+        <p:nvSpPr>
+          <p:cNvPr id="122" name="Rectangle 121">
+            <a:extLst>
+              <a:ext uri="{FF2B5EF4-FFF2-40B4-BE49-F238E27FC236}">
+                <a16:creationId xmlns:a16="http://schemas.microsoft.com/office/drawing/2014/main" id="{51B08FE6-2245-C94B-E117-87B43E069B78}"/>
+              </a:ext>
+            </a:extLst>
+          </p:cNvPr>
+          <p:cNvSpPr/>
+          <p:nvPr/>
+        </p:nvSpPr>
+        <p:spPr>
+          <a:xfrm>
+            <a:off x="3551689" y="2515898"/>
+            <a:ext cx="763801" cy="276998"/>
+          </a:xfrm>
+          <a:prstGeom prst="rect">
+            <a:avLst/>
+          </a:prstGeom>
+          <a:solidFill>
+            <a:schemeClr val="accent6">
+              <a:lumMod val="60000"/>
+              <a:lumOff val="40000"/>
+            </a:schemeClr>
+          </a:solidFill>
+        </p:spPr>
+        <p:style>
+          <a:lnRef idx="2">
+            <a:schemeClr val="accent1">
+              <a:shade val="15000"/>
+            </a:schemeClr>
+          </a:lnRef>
+          <a:fillRef idx="1">
+            <a:schemeClr val="accent1"/>
+          </a:fillRef>
+          <a:effectRef idx="0">
+            <a:schemeClr val="accent1"/>
+          </a:effectRef>
+          <a:fontRef idx="minor">
+            <a:schemeClr val="lt1"/>
+          </a:fontRef>
+        </p:style>
+        <p:txBody>
+          <a:bodyPr rtlCol="0" anchor="ctr"/>
+          <a:lstStyle/>
+          <a:p>
+            <a:pPr algn="ctr"/>
+            <a:endParaRPr lang="en-US" noProof="1"/>
+          </a:p>
+        </p:txBody>
+      </p:sp>
+      <p:sp>
+        <p:nvSpPr>
+          <p:cNvPr id="88" name="TextBox 87">
+            <a:extLst>
+              <a:ext uri="{FF2B5EF4-FFF2-40B4-BE49-F238E27FC236}">
+                <a16:creationId xmlns:a16="http://schemas.microsoft.com/office/drawing/2014/main" id="{37C6E6D5-67F7-12E6-B1D9-95CD09C13167}"/>
+              </a:ext>
+            </a:extLst>
+          </p:cNvPr>
+          <p:cNvSpPr txBox="1"/>
+          <p:nvPr/>
+        </p:nvSpPr>
+        <p:spPr>
+          <a:xfrm>
+            <a:off x="3352524" y="2195514"/>
+            <a:ext cx="1463362" cy="276999"/>
+          </a:xfrm>
+          <a:prstGeom prst="rect">
+            <a:avLst/>
+          </a:prstGeom>
+          <a:noFill/>
+        </p:spPr>
+        <p:txBody>
+          <a:bodyPr wrap="square" rtlCol="0">
+            <a:spAutoFit/>
+          </a:bodyPr>
+          <a:lstStyle/>
+          <a:p>
+            <a:r>
+              <a:rPr lang="en-US" sz="1200" noProof="1"/>
+              <a:t>SNAP_preparation</a:t>
+            </a:r>
+          </a:p>
+        </p:txBody>
+      </p:sp>
+      <p:sp>
+        <p:nvSpPr>
+          <p:cNvPr id="89" name="TextBox 88">
+            <a:extLst>
+              <a:ext uri="{FF2B5EF4-FFF2-40B4-BE49-F238E27FC236}">
+                <a16:creationId xmlns:a16="http://schemas.microsoft.com/office/drawing/2014/main" id="{6E701B43-67D6-4BCC-7F61-319716C258F9}"/>
+              </a:ext>
+            </a:extLst>
+          </p:cNvPr>
+          <p:cNvSpPr txBox="1"/>
+          <p:nvPr/>
+        </p:nvSpPr>
+        <p:spPr>
+          <a:xfrm>
+            <a:off x="3526969" y="2523606"/>
+            <a:ext cx="1463362" cy="276999"/>
+          </a:xfrm>
+          <a:prstGeom prst="rect">
+            <a:avLst/>
+          </a:prstGeom>
+          <a:noFill/>
+        </p:spPr>
+        <p:txBody>
+          <a:bodyPr wrap="square" rtlCol="0">
+            <a:spAutoFit/>
+          </a:bodyPr>
+          <a:lstStyle/>
+          <a:p>
+            <a:r>
+              <a:rPr lang="en-US" sz="1200" noProof="1"/>
+              <a:t>SNAP_run</a:t>
+            </a:r>
+          </a:p>
+        </p:txBody>
+      </p:sp>
+      <p:sp>
+        <p:nvSpPr>
+          <p:cNvPr id="123" name="Rectangle 122">
+            <a:extLst>
+              <a:ext uri="{FF2B5EF4-FFF2-40B4-BE49-F238E27FC236}">
+                <a16:creationId xmlns:a16="http://schemas.microsoft.com/office/drawing/2014/main" id="{0C0EA210-7017-B2EF-0F0A-EF8AF29E5981}"/>
+              </a:ext>
+            </a:extLst>
+          </p:cNvPr>
+          <p:cNvSpPr/>
+          <p:nvPr/>
+        </p:nvSpPr>
+        <p:spPr>
+          <a:xfrm>
+            <a:off x="3550341" y="2826573"/>
+            <a:ext cx="1241246" cy="276998"/>
+          </a:xfrm>
+          <a:prstGeom prst="rect">
+            <a:avLst/>
+          </a:prstGeom>
+          <a:solidFill>
+            <a:schemeClr val="accent6">
+              <a:lumMod val="60000"/>
+              <a:lumOff val="40000"/>
+            </a:schemeClr>
+          </a:solidFill>
+        </p:spPr>
+        <p:style>
+          <a:lnRef idx="2">
+            <a:schemeClr val="accent1">
+              <a:shade val="15000"/>
+            </a:schemeClr>
+          </a:lnRef>
+          <a:fillRef idx="1">
+            <a:schemeClr val="accent1"/>
+          </a:fillRef>
+          <a:effectRef idx="0">
+            <a:schemeClr val="accent1"/>
+          </a:effectRef>
+          <a:fontRef idx="minor">
+            <a:schemeClr val="lt1"/>
+          </a:fontRef>
+        </p:style>
+        <p:txBody>
+          <a:bodyPr rtlCol="0" anchor="ctr"/>
+          <a:lstStyle/>
+          <a:p>
+            <a:pPr algn="ctr"/>
+            <a:endParaRPr lang="en-US" noProof="1"/>
+          </a:p>
+        </p:txBody>
+      </p:sp>
+      <p:sp>
+        <p:nvSpPr>
+          <p:cNvPr id="91" name="TextBox 90">
+            <a:extLst>
+              <a:ext uri="{FF2B5EF4-FFF2-40B4-BE49-F238E27FC236}">
+                <a16:creationId xmlns:a16="http://schemas.microsoft.com/office/drawing/2014/main" id="{0DA2E356-4F2E-D0EA-0E65-EB0DF862D3C7}"/>
+              </a:ext>
+            </a:extLst>
+          </p:cNvPr>
+          <p:cNvSpPr txBox="1"/>
+          <p:nvPr/>
+        </p:nvSpPr>
+        <p:spPr>
+          <a:xfrm>
+            <a:off x="3544603" y="2825056"/>
+            <a:ext cx="1463362" cy="276999"/>
+          </a:xfrm>
+          <a:prstGeom prst="rect">
+            <a:avLst/>
+          </a:prstGeom>
+          <a:noFill/>
+        </p:spPr>
+        <p:txBody>
+          <a:bodyPr wrap="square" rtlCol="0">
+            <a:spAutoFit/>
+          </a:bodyPr>
+          <a:lstStyle/>
+          <a:p>
+            <a:r>
+              <a:rPr lang="en-US" sz="1200" noProof="1"/>
+              <a:t>SNAP_cleanup</a:t>
+            </a:r>
+          </a:p>
+        </p:txBody>
+      </p:sp>
+      <p:cxnSp>
+        <p:nvCxnSpPr>
+          <p:cNvPr id="134" name="Elbow Connector 133">
+            <a:extLst>
+              <a:ext uri="{FF2B5EF4-FFF2-40B4-BE49-F238E27FC236}">
+                <a16:creationId xmlns:a16="http://schemas.microsoft.com/office/drawing/2014/main" id="{F53AB591-4C73-FA2B-608C-A825F264B04B}"/>
+              </a:ext>
+            </a:extLst>
+          </p:cNvPr>
+          <p:cNvCxnSpPr>
+            <a:cxnSpLocks/>
+            <a:stCxn id="121" idx="3"/>
+            <a:endCxn id="122" idx="3"/>
+          </p:cNvCxnSpPr>
+          <p:nvPr/>
+        </p:nvCxnSpPr>
+        <p:spPr>
+          <a:xfrm flipH="1">
+            <a:off x="4315490" y="2341355"/>
+            <a:ext cx="337745" cy="313042"/>
+          </a:xfrm>
+          <a:prstGeom prst="bentConnector3">
+            <a:avLst>
+              <a:gd name="adj1" fmla="val -20681"/>
+            </a:avLst>
+          </a:prstGeom>
+          <a:ln w="38100">
+            <a:tailEnd type="triangle"/>
+          </a:ln>
+        </p:spPr>
+        <p:style>
+          <a:lnRef idx="2">
+            <a:schemeClr val="dk1"/>
+          </a:lnRef>
+          <a:fillRef idx="0">
+            <a:schemeClr val="dk1"/>
+          </a:fillRef>
+          <a:effectRef idx="1">
+            <a:schemeClr val="dk1"/>
+          </a:effectRef>
+          <a:fontRef idx="minor">
+            <a:schemeClr val="tx1"/>
+          </a:fontRef>
+        </p:style>
+      </p:cxnSp>
+      <p:cxnSp>
+        <p:nvCxnSpPr>
+          <p:cNvPr id="142" name="Elbow Connector 141">
+            <a:extLst>
+              <a:ext uri="{FF2B5EF4-FFF2-40B4-BE49-F238E27FC236}">
+                <a16:creationId xmlns:a16="http://schemas.microsoft.com/office/drawing/2014/main" id="{8C0F00B3-FC42-AC4A-94F3-5FDB6FFB51C2}"/>
+              </a:ext>
+            </a:extLst>
+          </p:cNvPr>
+          <p:cNvCxnSpPr>
+            <a:cxnSpLocks/>
+            <a:stCxn id="122" idx="1"/>
+            <a:endCxn id="123" idx="1"/>
+          </p:cNvCxnSpPr>
+          <p:nvPr/>
+        </p:nvCxnSpPr>
+        <p:spPr>
+          <a:xfrm rot="10800000" flipV="1">
+            <a:off x="3550341" y="2654396"/>
+            <a:ext cx="1348" cy="310675"/>
+          </a:xfrm>
+          <a:prstGeom prst="bentConnector3">
+            <a:avLst>
+              <a:gd name="adj1" fmla="val 12818843"/>
+            </a:avLst>
+          </a:prstGeom>
+          <a:ln w="38100">
+            <a:tailEnd type="triangle"/>
+          </a:ln>
+        </p:spPr>
+        <p:style>
+          <a:lnRef idx="2">
+            <a:schemeClr val="dk1"/>
+          </a:lnRef>
+          <a:fillRef idx="0">
+            <a:schemeClr val="dk1"/>
+          </a:fillRef>
+          <a:effectRef idx="1">
+            <a:schemeClr val="dk1"/>
+          </a:effectRef>
+          <a:fontRef idx="minor">
+            <a:schemeClr val="tx1"/>
+          </a:fontRef>
+        </p:style>
+      </p:cxnSp>
+      <p:cxnSp>
+        <p:nvCxnSpPr>
+          <p:cNvPr id="162" name="Elbow Connector 161">
+            <a:extLst>
+              <a:ext uri="{FF2B5EF4-FFF2-40B4-BE49-F238E27FC236}">
+                <a16:creationId xmlns:a16="http://schemas.microsoft.com/office/drawing/2014/main" id="{AA2CABF4-A3D9-979F-2F50-4A3004A996E0}"/>
+              </a:ext>
+            </a:extLst>
+          </p:cNvPr>
+          <p:cNvCxnSpPr>
+            <a:cxnSpLocks/>
+            <a:stCxn id="9" idx="3"/>
+            <a:endCxn id="121" idx="1"/>
+          </p:cNvCxnSpPr>
+          <p:nvPr/>
+        </p:nvCxnSpPr>
+        <p:spPr>
+          <a:xfrm>
+            <a:off x="2030477" y="2013797"/>
+            <a:ext cx="1381512" cy="327558"/>
+          </a:xfrm>
+          <a:prstGeom prst="bentConnector3">
+            <a:avLst>
+              <a:gd name="adj1" fmla="val 57354"/>
             </a:avLst>
           </a:prstGeom>
           <a:ln w="38100">

--- a/docs/assets/Caroline_drawings.pptx
+++ b/docs/assets/Caroline_drawings.pptx
@@ -9989,8 +9989,8 @@
         </p:nvSpPr>
         <p:spPr>
           <a:xfrm>
-            <a:off x="3550341" y="2826573"/>
-            <a:ext cx="1241246" cy="276998"/>
+            <a:off x="3550340" y="2826573"/>
+            <a:ext cx="1414085" cy="276998"/>
           </a:xfrm>
           <a:prstGeom prst="rect">
             <a:avLst/>
@@ -10041,7 +10041,7 @@
         </p:nvSpPr>
         <p:spPr>
           <a:xfrm>
-            <a:off x="3544603" y="2825056"/>
+            <a:off x="3519257" y="2835895"/>
             <a:ext cx="1463362" cy="276999"/>
           </a:xfrm>
           <a:prstGeom prst="rect">
@@ -10057,7 +10057,7 @@
           <a:p>
             <a:r>
               <a:rPr lang="en-US" sz="1200" noProof="1"/>
-              <a:t>SNAP_cleanup</a:t>
+              <a:t>SNAP_permissions</a:t>
             </a:r>
           </a:p>
         </p:txBody>
@@ -10126,11 +10126,11 @@
         <p:spPr>
           <a:xfrm rot="10800000" flipV="1">
             <a:off x="3550341" y="2654396"/>
-            <a:ext cx="1348" cy="310675"/>
+            <a:ext cx="1349" cy="310675"/>
           </a:xfrm>
           <a:prstGeom prst="bentConnector3">
             <a:avLst>
-              <a:gd name="adj1" fmla="val 12818843"/>
+              <a:gd name="adj1" fmla="val 13787102"/>
             </a:avLst>
           </a:prstGeom>
           <a:ln w="38100">

--- a/docs/assets/Caroline_drawings.pptx
+++ b/docs/assets/Caroline_drawings.pptx
@@ -260,7 +260,7 @@
           <a:p>
             <a:fld id="{9BFBA175-CEA6-974F-BECD-C1A384BB3024}" type="datetimeFigureOut">
               <a:rPr lang="en-US" smtClean="0"/>
-              <a:t>3/30/26</a:t>
+              <a:t>8/3/26</a:t>
             </a:fld>
             <a:endParaRPr lang="en-US"/>
           </a:p>
@@ -458,7 +458,7 @@
           <a:p>
             <a:fld id="{9BFBA175-CEA6-974F-BECD-C1A384BB3024}" type="datetimeFigureOut">
               <a:rPr lang="en-US" smtClean="0"/>
-              <a:t>3/30/26</a:t>
+              <a:t>8/3/26</a:t>
             </a:fld>
             <a:endParaRPr lang="en-US"/>
           </a:p>
@@ -666,7 +666,7 @@
           <a:p>
             <a:fld id="{9BFBA175-CEA6-974F-BECD-C1A384BB3024}" type="datetimeFigureOut">
               <a:rPr lang="en-US" smtClean="0"/>
-              <a:t>3/30/26</a:t>
+              <a:t>8/3/26</a:t>
             </a:fld>
             <a:endParaRPr lang="en-US"/>
           </a:p>
@@ -864,7 +864,7 @@
           <a:p>
             <a:fld id="{9BFBA175-CEA6-974F-BECD-C1A384BB3024}" type="datetimeFigureOut">
               <a:rPr lang="en-US" smtClean="0"/>
-              <a:t>3/30/26</a:t>
+              <a:t>8/3/26</a:t>
             </a:fld>
             <a:endParaRPr lang="en-US"/>
           </a:p>
@@ -1139,7 +1139,7 @@
           <a:p>
             <a:fld id="{9BFBA175-CEA6-974F-BECD-C1A384BB3024}" type="datetimeFigureOut">
               <a:rPr lang="en-US" smtClean="0"/>
-              <a:t>3/30/26</a:t>
+              <a:t>8/3/26</a:t>
             </a:fld>
             <a:endParaRPr lang="en-US"/>
           </a:p>
@@ -1404,7 +1404,7 @@
           <a:p>
             <a:fld id="{9BFBA175-CEA6-974F-BECD-C1A384BB3024}" type="datetimeFigureOut">
               <a:rPr lang="en-US" smtClean="0"/>
-              <a:t>3/30/26</a:t>
+              <a:t>8/3/26</a:t>
             </a:fld>
             <a:endParaRPr lang="en-US"/>
           </a:p>
@@ -1816,7 +1816,7 @@
           <a:p>
             <a:fld id="{9BFBA175-CEA6-974F-BECD-C1A384BB3024}" type="datetimeFigureOut">
               <a:rPr lang="en-US" smtClean="0"/>
-              <a:t>3/30/26</a:t>
+              <a:t>8/3/26</a:t>
             </a:fld>
             <a:endParaRPr lang="en-US"/>
           </a:p>
@@ -1957,7 +1957,7 @@
           <a:p>
             <a:fld id="{9BFBA175-CEA6-974F-BECD-C1A384BB3024}" type="datetimeFigureOut">
               <a:rPr lang="en-US" smtClean="0"/>
-              <a:t>3/30/26</a:t>
+              <a:t>8/3/26</a:t>
             </a:fld>
             <a:endParaRPr lang="en-US"/>
           </a:p>
@@ -2070,7 +2070,7 @@
           <a:p>
             <a:fld id="{9BFBA175-CEA6-974F-BECD-C1A384BB3024}" type="datetimeFigureOut">
               <a:rPr lang="en-US" smtClean="0"/>
-              <a:t>3/30/26</a:t>
+              <a:t>8/3/26</a:t>
             </a:fld>
             <a:endParaRPr lang="en-US"/>
           </a:p>
@@ -2381,7 +2381,7 @@
           <a:p>
             <a:fld id="{9BFBA175-CEA6-974F-BECD-C1A384BB3024}" type="datetimeFigureOut">
               <a:rPr lang="en-US" smtClean="0"/>
-              <a:t>3/30/26</a:t>
+              <a:t>8/3/26</a:t>
             </a:fld>
             <a:endParaRPr lang="en-US"/>
           </a:p>
@@ -2669,7 +2669,7 @@
           <a:p>
             <a:fld id="{9BFBA175-CEA6-974F-BECD-C1A384BB3024}" type="datetimeFigureOut">
               <a:rPr lang="en-US" smtClean="0"/>
-              <a:t>3/30/26</a:t>
+              <a:t>8/3/26</a:t>
             </a:fld>
             <a:endParaRPr lang="en-US"/>
           </a:p>
@@ -2910,7 +2910,7 @@
           <a:p>
             <a:fld id="{9BFBA175-CEA6-974F-BECD-C1A384BB3024}" type="datetimeFigureOut">
               <a:rPr lang="en-US" smtClean="0"/>
-              <a:t>3/30/26</a:t>
+              <a:t>8/3/26</a:t>
             </a:fld>
             <a:endParaRPr lang="en-US"/>
           </a:p>
@@ -4661,8 +4661,8 @@
         </p:nvSpPr>
         <p:spPr>
           <a:xfrm>
-            <a:off x="5185847" y="1423746"/>
-            <a:ext cx="1335208" cy="1607580"/>
+            <a:off x="5185847" y="1132898"/>
+            <a:ext cx="1335208" cy="2036292"/>
           </a:xfrm>
           <a:prstGeom prst="rect">
             <a:avLst/>
@@ -4713,7 +4713,7 @@
         </p:nvSpPr>
         <p:spPr>
           <a:xfrm>
-            <a:off x="5276654" y="1871922"/>
+            <a:off x="5276654" y="1585597"/>
             <a:ext cx="1135096" cy="276998"/>
           </a:xfrm>
           <a:prstGeom prst="rect">
@@ -4765,7 +4765,7 @@
         </p:nvSpPr>
         <p:spPr>
           <a:xfrm>
-            <a:off x="5255827" y="1876997"/>
+            <a:off x="5273624" y="1581451"/>
             <a:ext cx="1155923" cy="276999"/>
           </a:xfrm>
           <a:prstGeom prst="rect">
@@ -4800,8 +4800,8 @@
         </p:nvSpPr>
         <p:spPr>
           <a:xfrm>
-            <a:off x="5203011" y="1424514"/>
-            <a:ext cx="944489" cy="461665"/>
+            <a:off x="5182572" y="1141614"/>
+            <a:ext cx="1698868" cy="461665"/>
           </a:xfrm>
           <a:prstGeom prst="rect">
             <a:avLst/>
@@ -4809,14 +4809,14 @@
           <a:noFill/>
         </p:spPr>
         <p:txBody>
-          <a:bodyPr wrap="none" rtlCol="0">
+          <a:bodyPr wrap="square" rtlCol="0">
             <a:spAutoFit/>
           </a:bodyPr>
           <a:lstStyle/>
           <a:p>
             <a:r>
               <a:rPr lang="en-US" sz="1200" noProof="1"/>
-              <a:t>Cropping</a:t>
+              <a:t>Cropping </a:t>
             </a:r>
           </a:p>
           <a:p>
@@ -4841,7 +4841,7 @@
         </p:nvSpPr>
         <p:spPr>
           <a:xfrm>
-            <a:off x="5278701" y="2255705"/>
+            <a:off x="5278700" y="1946319"/>
             <a:ext cx="1145770" cy="276998"/>
           </a:xfrm>
           <a:prstGeom prst="rect">
@@ -4893,7 +4893,7 @@
         </p:nvSpPr>
         <p:spPr>
           <a:xfrm>
-            <a:off x="5275043" y="2273990"/>
+            <a:off x="5266631" y="1933602"/>
             <a:ext cx="1022204" cy="276999"/>
           </a:xfrm>
           <a:prstGeom prst="rect">
@@ -4933,11 +4933,11 @@
         <p:spPr>
           <a:xfrm>
             <a:off x="4088586" y="1656672"/>
-            <a:ext cx="1167241" cy="358825"/>
+            <a:ext cx="1185038" cy="63279"/>
           </a:xfrm>
           <a:prstGeom prst="bentConnector3">
             <a:avLst>
-              <a:gd name="adj1" fmla="val 84817"/>
+              <a:gd name="adj1" fmla="val 50000"/>
             </a:avLst>
           </a:prstGeom>
           <a:ln w="38100">
@@ -4978,11 +4978,11 @@
         <p:spPr>
           <a:xfrm>
             <a:off x="4088586" y="1656672"/>
-            <a:ext cx="1186457" cy="755818"/>
+            <a:ext cx="1178045" cy="415430"/>
           </a:xfrm>
           <a:prstGeom prst="bentConnector3">
             <a:avLst>
-              <a:gd name="adj1" fmla="val 69267"/>
+              <a:gd name="adj1" fmla="val 42944"/>
             </a:avLst>
           </a:prstGeom>
           <a:ln w="38100">
@@ -5021,13 +5021,13 @@
           <p:nvPr/>
         </p:nvCxnSpPr>
         <p:spPr>
-          <a:xfrm>
-            <a:off x="4180789" y="1997295"/>
-            <a:ext cx="1075038" cy="18202"/>
+          <a:xfrm flipV="1">
+            <a:off x="4180789" y="1719951"/>
+            <a:ext cx="1092835" cy="277344"/>
           </a:xfrm>
           <a:prstGeom prst="bentConnector3">
             <a:avLst>
-              <a:gd name="adj1" fmla="val 57679"/>
+              <a:gd name="adj1" fmla="val 67749"/>
             </a:avLst>
           </a:prstGeom>
           <a:ln w="38100">
@@ -5068,11 +5068,11 @@
         <p:spPr>
           <a:xfrm>
             <a:off x="4180789" y="1997295"/>
-            <a:ext cx="1094254" cy="415195"/>
+            <a:ext cx="1085842" cy="74807"/>
           </a:xfrm>
           <a:prstGeom prst="bentConnector3">
             <a:avLst>
-              <a:gd name="adj1" fmla="val 56383"/>
+              <a:gd name="adj1" fmla="val 12573"/>
             </a:avLst>
           </a:prstGeom>
           <a:ln w="38100">
@@ -5742,7 +5742,7 @@
         <p:spPr>
           <a:xfrm rot="10800000" flipV="1">
             <a:off x="5853452" y="423098"/>
-            <a:ext cx="1042863" cy="1000647"/>
+            <a:ext cx="1042863" cy="709799"/>
           </a:xfrm>
           <a:prstGeom prst="bentConnector2">
             <a:avLst/>
@@ -6055,12 +6055,12 @@
         </p:nvCxnSpPr>
         <p:spPr>
           <a:xfrm>
-            <a:off x="6411750" y="2015497"/>
-            <a:ext cx="1341788" cy="408756"/>
+            <a:off x="6429547" y="1719951"/>
+            <a:ext cx="1323991" cy="704302"/>
           </a:xfrm>
           <a:prstGeom prst="bentConnector3">
             <a:avLst>
-              <a:gd name="adj1" fmla="val 39589"/>
+              <a:gd name="adj1" fmla="val 43721"/>
             </a:avLst>
           </a:prstGeom>
           <a:ln w="38100">
@@ -9826,12 +9826,12 @@
         </p:nvCxnSpPr>
         <p:spPr>
           <a:xfrm>
-            <a:off x="6424471" y="2394204"/>
-            <a:ext cx="1301312" cy="383150"/>
+            <a:off x="6424470" y="2084818"/>
+            <a:ext cx="1301313" cy="692536"/>
           </a:xfrm>
           <a:prstGeom prst="bentConnector3">
             <a:avLst>
-              <a:gd name="adj1" fmla="val 32921"/>
+              <a:gd name="adj1" fmla="val 35095"/>
             </a:avLst>
           </a:prstGeom>
           <a:ln w="38100">
@@ -10176,6 +10176,360 @@
           <a:prstGeom prst="bentConnector3">
             <a:avLst>
               <a:gd name="adj1" fmla="val 57354"/>
+            </a:avLst>
+          </a:prstGeom>
+          <a:ln w="38100">
+            <a:tailEnd type="triangle"/>
+          </a:ln>
+        </p:spPr>
+        <p:style>
+          <a:lnRef idx="2">
+            <a:schemeClr val="dk1"/>
+          </a:lnRef>
+          <a:fillRef idx="0">
+            <a:schemeClr val="dk1"/>
+          </a:fillRef>
+          <a:effectRef idx="1">
+            <a:schemeClr val="dk1"/>
+          </a:effectRef>
+          <a:fontRef idx="minor">
+            <a:schemeClr val="tx1"/>
+          </a:fontRef>
+        </p:style>
+      </p:cxnSp>
+      <p:sp>
+        <p:nvSpPr>
+          <p:cNvPr id="27" name="Rectangle 26">
+            <a:extLst>
+              <a:ext uri="{FF2B5EF4-FFF2-40B4-BE49-F238E27FC236}">
+                <a16:creationId xmlns:a16="http://schemas.microsoft.com/office/drawing/2014/main" id="{4BFD2C19-2A0D-A0E4-3F3E-B4FA266FE1E5}"/>
+              </a:ext>
+            </a:extLst>
+          </p:cNvPr>
+          <p:cNvSpPr/>
+          <p:nvPr/>
+        </p:nvSpPr>
+        <p:spPr>
+          <a:xfrm>
+            <a:off x="5283232" y="2329638"/>
+            <a:ext cx="1136707" cy="276998"/>
+          </a:xfrm>
+          <a:prstGeom prst="rect">
+            <a:avLst/>
+          </a:prstGeom>
+          <a:solidFill>
+            <a:schemeClr val="accent6">
+              <a:lumMod val="60000"/>
+              <a:lumOff val="40000"/>
+            </a:schemeClr>
+          </a:solidFill>
+        </p:spPr>
+        <p:style>
+          <a:lnRef idx="2">
+            <a:schemeClr val="accent1">
+              <a:shade val="15000"/>
+            </a:schemeClr>
+          </a:lnRef>
+          <a:fillRef idx="1">
+            <a:schemeClr val="accent1"/>
+          </a:fillRef>
+          <a:effectRef idx="0">
+            <a:schemeClr val="accent1"/>
+          </a:effectRef>
+          <a:fontRef idx="minor">
+            <a:schemeClr val="lt1"/>
+          </a:fontRef>
+        </p:style>
+        <p:txBody>
+          <a:bodyPr rtlCol="0" anchor="ctr"/>
+          <a:lstStyle/>
+          <a:p>
+            <a:pPr algn="ctr"/>
+            <a:endParaRPr lang="en-US" noProof="1"/>
+          </a:p>
+        </p:txBody>
+      </p:sp>
+      <p:sp>
+        <p:nvSpPr>
+          <p:cNvPr id="19" name="TextBox 18">
+            <a:extLst>
+              <a:ext uri="{FF2B5EF4-FFF2-40B4-BE49-F238E27FC236}">
+                <a16:creationId xmlns:a16="http://schemas.microsoft.com/office/drawing/2014/main" id="{D1B200E0-B934-C795-EF76-01BF02764698}"/>
+              </a:ext>
+            </a:extLst>
+          </p:cNvPr>
+          <p:cNvSpPr txBox="1"/>
+          <p:nvPr/>
+        </p:nvSpPr>
+        <p:spPr>
+          <a:xfrm>
+            <a:off x="5276379" y="2319061"/>
+            <a:ext cx="1155923" cy="276999"/>
+          </a:xfrm>
+          <a:prstGeom prst="rect">
+            <a:avLst/>
+          </a:prstGeom>
+          <a:noFill/>
+        </p:spPr>
+        <p:txBody>
+          <a:bodyPr wrap="square" rtlCol="0">
+            <a:spAutoFit/>
+          </a:bodyPr>
+          <a:lstStyle/>
+          <a:p>
+            <a:r>
+              <a:rPr lang="en-US" sz="1200" noProof="1"/>
+              <a:t>znap_to_raw</a:t>
+            </a:r>
+          </a:p>
+        </p:txBody>
+      </p:sp>
+      <p:sp>
+        <p:nvSpPr>
+          <p:cNvPr id="29" name="Rectangle 28">
+            <a:extLst>
+              <a:ext uri="{FF2B5EF4-FFF2-40B4-BE49-F238E27FC236}">
+                <a16:creationId xmlns:a16="http://schemas.microsoft.com/office/drawing/2014/main" id="{3F3B2E86-BC18-C082-99CB-5ACF49CC0923}"/>
+              </a:ext>
+            </a:extLst>
+          </p:cNvPr>
+          <p:cNvSpPr/>
+          <p:nvPr/>
+        </p:nvSpPr>
+        <p:spPr>
+          <a:xfrm>
+            <a:off x="5283231" y="2699646"/>
+            <a:ext cx="1136707" cy="276998"/>
+          </a:xfrm>
+          <a:prstGeom prst="rect">
+            <a:avLst/>
+          </a:prstGeom>
+          <a:solidFill>
+            <a:schemeClr val="accent6">
+              <a:lumMod val="60000"/>
+              <a:lumOff val="40000"/>
+            </a:schemeClr>
+          </a:solidFill>
+        </p:spPr>
+        <p:style>
+          <a:lnRef idx="2">
+            <a:schemeClr val="accent1">
+              <a:shade val="15000"/>
+            </a:schemeClr>
+          </a:lnRef>
+          <a:fillRef idx="1">
+            <a:schemeClr val="accent1"/>
+          </a:fillRef>
+          <a:effectRef idx="0">
+            <a:schemeClr val="accent1"/>
+          </a:effectRef>
+          <a:fontRef idx="minor">
+            <a:schemeClr val="lt1"/>
+          </a:fontRef>
+        </p:style>
+        <p:txBody>
+          <a:bodyPr rtlCol="0" anchor="ctr"/>
+          <a:lstStyle/>
+          <a:p>
+            <a:pPr algn="ctr"/>
+            <a:endParaRPr lang="en-US" noProof="1"/>
+          </a:p>
+        </p:txBody>
+      </p:sp>
+      <p:sp>
+        <p:nvSpPr>
+          <p:cNvPr id="46" name="TextBox 45">
+            <a:extLst>
+              <a:ext uri="{FF2B5EF4-FFF2-40B4-BE49-F238E27FC236}">
+                <a16:creationId xmlns:a16="http://schemas.microsoft.com/office/drawing/2014/main" id="{D17A9E61-E95A-FE29-01A6-E1A166DA0F3D}"/>
+              </a:ext>
+            </a:extLst>
+          </p:cNvPr>
+          <p:cNvSpPr txBox="1"/>
+          <p:nvPr/>
+        </p:nvSpPr>
+        <p:spPr>
+          <a:xfrm>
+            <a:off x="5262805" y="2708881"/>
+            <a:ext cx="1155923" cy="276999"/>
+          </a:xfrm>
+          <a:prstGeom prst="rect">
+            <a:avLst/>
+          </a:prstGeom>
+          <a:noFill/>
+        </p:spPr>
+        <p:txBody>
+          <a:bodyPr wrap="square" rtlCol="0">
+            <a:spAutoFit/>
+          </a:bodyPr>
+          <a:lstStyle/>
+          <a:p>
+            <a:r>
+              <a:rPr lang="en-US" sz="1200" noProof="1"/>
+              <a:t>znap_to_zarr</a:t>
+            </a:r>
+          </a:p>
+        </p:txBody>
+      </p:sp>
+      <p:cxnSp>
+        <p:nvCxnSpPr>
+          <p:cNvPr id="54" name="Elbow Connector 53">
+            <a:extLst>
+              <a:ext uri="{FF2B5EF4-FFF2-40B4-BE49-F238E27FC236}">
+                <a16:creationId xmlns:a16="http://schemas.microsoft.com/office/drawing/2014/main" id="{0ECBA00F-FF95-B4CE-7AD7-306A53CA5AE6}"/>
+              </a:ext>
+            </a:extLst>
+          </p:cNvPr>
+          <p:cNvCxnSpPr>
+            <a:cxnSpLocks/>
+            <a:stCxn id="91" idx="3"/>
+            <a:endCxn id="19" idx="1"/>
+          </p:cNvCxnSpPr>
+          <p:nvPr/>
+        </p:nvCxnSpPr>
+        <p:spPr>
+          <a:xfrm flipV="1">
+            <a:off x="4982619" y="2457561"/>
+            <a:ext cx="293760" cy="516834"/>
+          </a:xfrm>
+          <a:prstGeom prst="bentConnector3">
+            <a:avLst>
+              <a:gd name="adj1" fmla="val 34279"/>
+            </a:avLst>
+          </a:prstGeom>
+          <a:ln w="38100">
+            <a:tailEnd type="triangle"/>
+          </a:ln>
+        </p:spPr>
+        <p:style>
+          <a:lnRef idx="2">
+            <a:schemeClr val="dk1"/>
+          </a:lnRef>
+          <a:fillRef idx="0">
+            <a:schemeClr val="dk1"/>
+          </a:fillRef>
+          <a:effectRef idx="1">
+            <a:schemeClr val="dk1"/>
+          </a:effectRef>
+          <a:fontRef idx="minor">
+            <a:schemeClr val="tx1"/>
+          </a:fontRef>
+        </p:style>
+      </p:cxnSp>
+      <p:cxnSp>
+        <p:nvCxnSpPr>
+          <p:cNvPr id="59" name="Elbow Connector 58">
+            <a:extLst>
+              <a:ext uri="{FF2B5EF4-FFF2-40B4-BE49-F238E27FC236}">
+                <a16:creationId xmlns:a16="http://schemas.microsoft.com/office/drawing/2014/main" id="{4CA5B25A-2D41-6F5A-C1CF-97A4B4EA9F18}"/>
+              </a:ext>
+            </a:extLst>
+          </p:cNvPr>
+          <p:cNvCxnSpPr>
+            <a:cxnSpLocks/>
+            <a:stCxn id="91" idx="3"/>
+            <a:endCxn id="46" idx="1"/>
+          </p:cNvCxnSpPr>
+          <p:nvPr/>
+        </p:nvCxnSpPr>
+        <p:spPr>
+          <a:xfrm flipV="1">
+            <a:off x="4982619" y="2847381"/>
+            <a:ext cx="280186" cy="127014"/>
+          </a:xfrm>
+          <a:prstGeom prst="bentConnector3">
+            <a:avLst>
+              <a:gd name="adj1" fmla="val 36814"/>
+            </a:avLst>
+          </a:prstGeom>
+          <a:ln w="38100">
+            <a:tailEnd type="triangle"/>
+          </a:ln>
+        </p:spPr>
+        <p:style>
+          <a:lnRef idx="2">
+            <a:schemeClr val="dk1"/>
+          </a:lnRef>
+          <a:fillRef idx="0">
+            <a:schemeClr val="dk1"/>
+          </a:fillRef>
+          <a:effectRef idx="1">
+            <a:schemeClr val="dk1"/>
+          </a:effectRef>
+          <a:fontRef idx="minor">
+            <a:schemeClr val="tx1"/>
+          </a:fontRef>
+        </p:style>
+      </p:cxnSp>
+      <p:cxnSp>
+        <p:nvCxnSpPr>
+          <p:cNvPr id="63" name="Elbow Connector 62">
+            <a:extLst>
+              <a:ext uri="{FF2B5EF4-FFF2-40B4-BE49-F238E27FC236}">
+                <a16:creationId xmlns:a16="http://schemas.microsoft.com/office/drawing/2014/main" id="{C88B3916-945F-7C75-1625-B41EE9067B5B}"/>
+              </a:ext>
+            </a:extLst>
+          </p:cNvPr>
+          <p:cNvCxnSpPr>
+            <a:cxnSpLocks/>
+            <a:stCxn id="46" idx="3"/>
+            <a:endCxn id="14" idx="1"/>
+          </p:cNvCxnSpPr>
+          <p:nvPr/>
+        </p:nvCxnSpPr>
+        <p:spPr>
+          <a:xfrm flipV="1">
+            <a:off x="6418728" y="2777354"/>
+            <a:ext cx="1307055" cy="70027"/>
+          </a:xfrm>
+          <a:prstGeom prst="bentConnector3">
+            <a:avLst>
+              <a:gd name="adj1" fmla="val 42933"/>
+            </a:avLst>
+          </a:prstGeom>
+          <a:ln w="38100">
+            <a:tailEnd type="triangle"/>
+          </a:ln>
+        </p:spPr>
+        <p:style>
+          <a:lnRef idx="2">
+            <a:schemeClr val="dk1"/>
+          </a:lnRef>
+          <a:fillRef idx="0">
+            <a:schemeClr val="dk1"/>
+          </a:fillRef>
+          <a:effectRef idx="1">
+            <a:schemeClr val="dk1"/>
+          </a:effectRef>
+          <a:fontRef idx="minor">
+            <a:schemeClr val="tx1"/>
+          </a:fontRef>
+        </p:style>
+      </p:cxnSp>
+      <p:cxnSp>
+        <p:nvCxnSpPr>
+          <p:cNvPr id="73" name="Elbow Connector 72">
+            <a:extLst>
+              <a:ext uri="{FF2B5EF4-FFF2-40B4-BE49-F238E27FC236}">
+                <a16:creationId xmlns:a16="http://schemas.microsoft.com/office/drawing/2014/main" id="{1B1ABF9F-0B05-989B-B33D-04C4A92083CC}"/>
+              </a:ext>
+            </a:extLst>
+          </p:cNvPr>
+          <p:cNvCxnSpPr>
+            <a:cxnSpLocks/>
+            <a:stCxn id="19" idx="3"/>
+            <a:endCxn id="130" idx="1"/>
+          </p:cNvCxnSpPr>
+          <p:nvPr/>
+        </p:nvCxnSpPr>
+        <p:spPr>
+          <a:xfrm flipV="1">
+            <a:off x="6432302" y="2424253"/>
+            <a:ext cx="1321236" cy="33308"/>
+          </a:xfrm>
+          <a:prstGeom prst="bentConnector3">
+            <a:avLst>
+              <a:gd name="adj1" fmla="val 15047"/>
             </a:avLst>
           </a:prstGeom>
           <a:ln w="38100">

--- a/docs/assets/Caroline_drawings.pptx
+++ b/docs/assets/Caroline_drawings.pptx
@@ -260,7 +260,7 @@
           <a:p>
             <a:fld id="{9BFBA175-CEA6-974F-BECD-C1A384BB3024}" type="datetimeFigureOut">
               <a:rPr lang="en-US" smtClean="0"/>
-              <a:t>8/3/26</a:t>
+              <a:t>8/28/26</a:t>
             </a:fld>
             <a:endParaRPr lang="en-US"/>
           </a:p>
@@ -458,7 +458,7 @@
           <a:p>
             <a:fld id="{9BFBA175-CEA6-974F-BECD-C1A384BB3024}" type="datetimeFigureOut">
               <a:rPr lang="en-US" smtClean="0"/>
-              <a:t>8/3/26</a:t>
+              <a:t>8/28/26</a:t>
             </a:fld>
             <a:endParaRPr lang="en-US"/>
           </a:p>
@@ -666,7 +666,7 @@
           <a:p>
             <a:fld id="{9BFBA175-CEA6-974F-BECD-C1A384BB3024}" type="datetimeFigureOut">
               <a:rPr lang="en-US" smtClean="0"/>
-              <a:t>8/3/26</a:t>
+              <a:t>8/28/26</a:t>
             </a:fld>
             <a:endParaRPr lang="en-US"/>
           </a:p>
@@ -864,7 +864,7 @@
           <a:p>
             <a:fld id="{9BFBA175-CEA6-974F-BECD-C1A384BB3024}" type="datetimeFigureOut">
               <a:rPr lang="en-US" smtClean="0"/>
-              <a:t>8/3/26</a:t>
+              <a:t>8/28/26</a:t>
             </a:fld>
             <a:endParaRPr lang="en-US"/>
           </a:p>
@@ -1139,7 +1139,7 @@
           <a:p>
             <a:fld id="{9BFBA175-CEA6-974F-BECD-C1A384BB3024}" type="datetimeFigureOut">
               <a:rPr lang="en-US" smtClean="0"/>
-              <a:t>8/3/26</a:t>
+              <a:t>8/28/26</a:t>
             </a:fld>
             <a:endParaRPr lang="en-US"/>
           </a:p>
@@ -1404,7 +1404,7 @@
           <a:p>
             <a:fld id="{9BFBA175-CEA6-974F-BECD-C1A384BB3024}" type="datetimeFigureOut">
               <a:rPr lang="en-US" smtClean="0"/>
-              <a:t>8/3/26</a:t>
+              <a:t>8/28/26</a:t>
             </a:fld>
             <a:endParaRPr lang="en-US"/>
           </a:p>
@@ -1816,7 +1816,7 @@
           <a:p>
             <a:fld id="{9BFBA175-CEA6-974F-BECD-C1A384BB3024}" type="datetimeFigureOut">
               <a:rPr lang="en-US" smtClean="0"/>
-              <a:t>8/3/26</a:t>
+              <a:t>8/28/26</a:t>
             </a:fld>
             <a:endParaRPr lang="en-US"/>
           </a:p>
@@ -1957,7 +1957,7 @@
           <a:p>
             <a:fld id="{9BFBA175-CEA6-974F-BECD-C1A384BB3024}" type="datetimeFigureOut">
               <a:rPr lang="en-US" smtClean="0"/>
-              <a:t>8/3/26</a:t>
+              <a:t>8/28/26</a:t>
             </a:fld>
             <a:endParaRPr lang="en-US"/>
           </a:p>
@@ -2070,7 +2070,7 @@
           <a:p>
             <a:fld id="{9BFBA175-CEA6-974F-BECD-C1A384BB3024}" type="datetimeFigureOut">
               <a:rPr lang="en-US" smtClean="0"/>
-              <a:t>8/3/26</a:t>
+              <a:t>8/28/26</a:t>
             </a:fld>
             <a:endParaRPr lang="en-US"/>
           </a:p>
@@ -2381,7 +2381,7 @@
           <a:p>
             <a:fld id="{9BFBA175-CEA6-974F-BECD-C1A384BB3024}" type="datetimeFigureOut">
               <a:rPr lang="en-US" smtClean="0"/>
-              <a:t>8/3/26</a:t>
+              <a:t>8/28/26</a:t>
             </a:fld>
             <a:endParaRPr lang="en-US"/>
           </a:p>
@@ -2669,7 +2669,7 @@
           <a:p>
             <a:fld id="{9BFBA175-CEA6-974F-BECD-C1A384BB3024}" type="datetimeFigureOut">
               <a:rPr lang="en-US" smtClean="0"/>
-              <a:t>8/3/26</a:t>
+              <a:t>8/28/26</a:t>
             </a:fld>
             <a:endParaRPr lang="en-US"/>
           </a:p>
@@ -2910,7 +2910,7 @@
           <a:p>
             <a:fld id="{9BFBA175-CEA6-974F-BECD-C1A384BB3024}" type="datetimeFigureOut">
               <a:rPr lang="en-US" smtClean="0"/>
-              <a:t>8/3/26</a:t>
+              <a:t>8/28/26</a:t>
             </a:fld>
             <a:endParaRPr lang="en-US"/>
           </a:p>
@@ -3477,7 +3477,7 @@
         <p:spPr>
           <a:xfrm>
             <a:off x="708211" y="989697"/>
-            <a:ext cx="6010223" cy="2257043"/>
+            <a:ext cx="6010223" cy="2369019"/>
           </a:xfrm>
           <a:prstGeom prst="rect">
             <a:avLst/>
@@ -3863,8 +3863,8 @@
         </p:nvSpPr>
         <p:spPr>
           <a:xfrm>
-            <a:off x="3296838" y="1085850"/>
-            <a:ext cx="1711127" cy="2083340"/>
+            <a:off x="3296838" y="1034850"/>
+            <a:ext cx="3350115" cy="2234824"/>
           </a:xfrm>
           <a:prstGeom prst="rect">
             <a:avLst/>
@@ -4157,53 +4157,6 @@
           </a:fontRef>
         </p:style>
       </p:cxnSp>
-      <p:cxnSp>
-        <p:nvCxnSpPr>
-          <p:cNvPr id="30" name="Elbow Connector 29">
-            <a:extLst>
-              <a:ext uri="{FF2B5EF4-FFF2-40B4-BE49-F238E27FC236}">
-                <a16:creationId xmlns:a16="http://schemas.microsoft.com/office/drawing/2014/main" id="{51B8DDD4-A1D7-AABF-8BD3-71839D82721B}"/>
-              </a:ext>
-            </a:extLst>
-          </p:cNvPr>
-          <p:cNvCxnSpPr>
-            <a:cxnSpLocks/>
-            <a:stCxn id="24" idx="3"/>
-            <a:endCxn id="9" idx="1"/>
-          </p:cNvCxnSpPr>
-          <p:nvPr/>
-        </p:nvCxnSpPr>
-        <p:spPr>
-          <a:xfrm flipH="1">
-            <a:off x="959222" y="553392"/>
-            <a:ext cx="1934399" cy="1460405"/>
-          </a:xfrm>
-          <a:prstGeom prst="bentConnector5">
-            <a:avLst>
-              <a:gd name="adj1" fmla="val -11818"/>
-              <a:gd name="adj2" fmla="val 15650"/>
-              <a:gd name="adj3" fmla="val 121009"/>
-            </a:avLst>
-          </a:prstGeom>
-          <a:ln w="38100">
-            <a:tailEnd type="triangle"/>
-          </a:ln>
-        </p:spPr>
-        <p:style>
-          <a:lnRef idx="2">
-            <a:schemeClr val="dk1"/>
-          </a:lnRef>
-          <a:fillRef idx="0">
-            <a:schemeClr val="dk1"/>
-          </a:fillRef>
-          <a:effectRef idx="1">
-            <a:schemeClr val="dk1"/>
-          </a:effectRef>
-          <a:fontRef idx="minor">
-            <a:schemeClr val="tx1"/>
-          </a:fontRef>
-        </p:style>
-      </p:cxnSp>
       <p:sp>
         <p:nvSpPr>
           <p:cNvPr id="37" name="Rectangle 36">
@@ -4219,7 +4172,7 @@
         <p:spPr>
           <a:xfrm>
             <a:off x="3411989" y="1515410"/>
-            <a:ext cx="678174" cy="276998"/>
+            <a:ext cx="768800" cy="276998"/>
           </a:xfrm>
           <a:prstGeom prst="rect">
             <a:avLst/>
@@ -4270,8 +4223,8 @@
         </p:nvSpPr>
         <p:spPr>
           <a:xfrm>
-            <a:off x="3425942" y="1518172"/>
-            <a:ext cx="662644" cy="276999"/>
+            <a:off x="3397286" y="1510103"/>
+            <a:ext cx="759923" cy="276999"/>
           </a:xfrm>
           <a:prstGeom prst="rect">
             <a:avLst/>
@@ -4286,7 +4239,7 @@
           <a:p>
             <a:r>
               <a:rPr lang="en-US" sz="1200" noProof="1"/>
-              <a:t>Doris</a:t>
+              <a:t>Doris_v5</a:t>
             </a:r>
           </a:p>
         </p:txBody>
@@ -4305,8 +4258,8 @@
         </p:nvSpPr>
         <p:spPr>
           <a:xfrm>
-            <a:off x="3229998" y="1062000"/>
-            <a:ext cx="1158394" cy="461665"/>
+            <a:off x="4457897" y="1009231"/>
+            <a:ext cx="2511548" cy="276999"/>
           </a:xfrm>
           <a:prstGeom prst="rect">
             <a:avLst/>
@@ -4314,20 +4267,14 @@
           <a:noFill/>
         </p:spPr>
         <p:txBody>
-          <a:bodyPr wrap="none" rtlCol="0">
+          <a:bodyPr wrap="square" rtlCol="0">
             <a:spAutoFit/>
           </a:bodyPr>
           <a:lstStyle/>
           <a:p>
             <a:r>
               <a:rPr lang="en-US" sz="1200" noProof="1"/>
-              <a:t>Coregistration </a:t>
-            </a:r>
-          </a:p>
-          <a:p>
-            <a:r>
-              <a:rPr lang="en-US" sz="1200" noProof="1"/>
-              <a:t>submodule</a:t>
+              <a:t>Stack Generation submodule</a:t>
             </a:r>
           </a:p>
         </p:txBody>
@@ -4433,8 +4380,8 @@
         </p:nvSpPr>
         <p:spPr>
           <a:xfrm>
-            <a:off x="4293638" y="1165679"/>
-            <a:ext cx="681168" cy="387525"/>
+            <a:off x="3360499" y="1100531"/>
+            <a:ext cx="855298" cy="387525"/>
           </a:xfrm>
           <a:prstGeom prst="rect">
             <a:avLst/>
@@ -4485,8 +4432,8 @@
         </p:nvSpPr>
         <p:spPr>
           <a:xfrm>
-            <a:off x="4266469" y="1132898"/>
-            <a:ext cx="785106" cy="461665"/>
+            <a:off x="3355285" y="1072724"/>
+            <a:ext cx="882208" cy="461665"/>
           </a:xfrm>
           <a:prstGeom prst="rect">
             <a:avLst/>
@@ -4501,7 +4448,7 @@
           <a:p>
             <a:r>
               <a:rPr lang="en-US" sz="1200" noProof="1"/>
-              <a:t>Doris_</a:t>
+              <a:t>Doris_v5_</a:t>
             </a:r>
           </a:p>
           <a:p>
@@ -4512,51 +4459,6 @@
           </a:p>
         </p:txBody>
       </p:sp>
-      <p:cxnSp>
-        <p:nvCxnSpPr>
-          <p:cNvPr id="45" name="Elbow Connector 44">
-            <a:extLst>
-              <a:ext uri="{FF2B5EF4-FFF2-40B4-BE49-F238E27FC236}">
-                <a16:creationId xmlns:a16="http://schemas.microsoft.com/office/drawing/2014/main" id="{06259752-2039-425E-9397-5486DCC9D33E}"/>
-              </a:ext>
-            </a:extLst>
-          </p:cNvPr>
-          <p:cNvCxnSpPr>
-            <a:cxnSpLocks/>
-            <a:stCxn id="9" idx="3"/>
-            <a:endCxn id="38" idx="1"/>
-          </p:cNvCxnSpPr>
-          <p:nvPr/>
-        </p:nvCxnSpPr>
-        <p:spPr>
-          <a:xfrm flipV="1">
-            <a:off x="2030477" y="1656672"/>
-            <a:ext cx="1395465" cy="357125"/>
-          </a:xfrm>
-          <a:prstGeom prst="bentConnector3">
-            <a:avLst>
-              <a:gd name="adj1" fmla="val 50000"/>
-            </a:avLst>
-          </a:prstGeom>
-          <a:ln w="38100">
-            <a:tailEnd type="triangle"/>
-          </a:ln>
-        </p:spPr>
-        <p:style>
-          <a:lnRef idx="2">
-            <a:schemeClr val="dk1"/>
-          </a:lnRef>
-          <a:fillRef idx="0">
-            <a:schemeClr val="dk1"/>
-          </a:fillRef>
-          <a:effectRef idx="1">
-            <a:schemeClr val="dk1"/>
-          </a:effectRef>
-          <a:fontRef idx="minor">
-            <a:schemeClr val="tx1"/>
-          </a:fontRef>
-        </p:style>
-      </p:cxnSp>
       <p:cxnSp>
         <p:nvCxnSpPr>
           <p:cNvPr id="48" name="Elbow Connector 47">
@@ -4614,21 +4516,24 @@
           <p:cNvCxnSpPr>
             <a:cxnSpLocks/>
             <a:stCxn id="38" idx="3"/>
-            <a:endCxn id="44" idx="1"/>
+            <a:endCxn id="43" idx="3"/>
           </p:cNvCxnSpPr>
           <p:nvPr/>
         </p:nvCxnSpPr>
         <p:spPr>
           <a:xfrm flipV="1">
-            <a:off x="4088586" y="1363731"/>
-            <a:ext cx="177883" cy="292941"/>
+            <a:off x="4157209" y="1294294"/>
+            <a:ext cx="58588" cy="354309"/>
           </a:xfrm>
           <a:prstGeom prst="bentConnector3">
             <a:avLst>
-              <a:gd name="adj1" fmla="val 17873"/>
+              <a:gd name="adj1" fmla="val 375181"/>
             </a:avLst>
           </a:prstGeom>
           <a:ln w="38100">
+            <a:solidFill>
+              <a:srgbClr val="FF0000"/>
+            </a:solidFill>
             <a:tailEnd type="triangle"/>
           </a:ln>
         </p:spPr>
@@ -4649,10 +4554,10 @@
       </p:cxnSp>
       <p:sp>
         <p:nvSpPr>
-          <p:cNvPr id="65" name="Rectangle 64">
-            <a:extLst>
-              <a:ext uri="{FF2B5EF4-FFF2-40B4-BE49-F238E27FC236}">
-                <a16:creationId xmlns:a16="http://schemas.microsoft.com/office/drawing/2014/main" id="{D517E391-2564-88C3-0A8B-8364595036A1}"/>
+          <p:cNvPr id="66" name="Rectangle 65">
+            <a:extLst>
+              <a:ext uri="{FF2B5EF4-FFF2-40B4-BE49-F238E27FC236}">
+                <a16:creationId xmlns:a16="http://schemas.microsoft.com/office/drawing/2014/main" id="{D80C0914-655F-3F8D-4FE3-C9B38CA53878}"/>
               </a:ext>
             </a:extLst>
           </p:cNvPr>
@@ -4661,16 +4566,16 @@
         </p:nvSpPr>
         <p:spPr>
           <a:xfrm>
-            <a:off x="5185847" y="1132898"/>
-            <a:ext cx="1335208" cy="2036292"/>
+            <a:off x="5253158" y="1243793"/>
+            <a:ext cx="1135096" cy="408655"/>
           </a:xfrm>
           <a:prstGeom prst="rect">
             <a:avLst/>
           </a:prstGeom>
           <a:solidFill>
-            <a:schemeClr val="accent1">
-              <a:lumMod val="40000"/>
-              <a:lumOff val="60000"/>
+            <a:schemeClr val="accent6">
+              <a:lumMod val="60000"/>
+              <a:lumOff val="40000"/>
             </a:schemeClr>
           </a:solidFill>
         </p:spPr>
@@ -4701,10 +4606,45 @@
       </p:sp>
       <p:sp>
         <p:nvSpPr>
-          <p:cNvPr id="66" name="Rectangle 65">
-            <a:extLst>
-              <a:ext uri="{FF2B5EF4-FFF2-40B4-BE49-F238E27FC236}">
-                <a16:creationId xmlns:a16="http://schemas.microsoft.com/office/drawing/2014/main" id="{D80C0914-655F-3F8D-4FE3-C9B38CA53878}"/>
+          <p:cNvPr id="67" name="TextBox 66">
+            <a:extLst>
+              <a:ext uri="{FF2B5EF4-FFF2-40B4-BE49-F238E27FC236}">
+                <a16:creationId xmlns:a16="http://schemas.microsoft.com/office/drawing/2014/main" id="{E01245D9-C53D-7D45-F842-CE128AF8C0C6}"/>
+              </a:ext>
+            </a:extLst>
+          </p:cNvPr>
+          <p:cNvSpPr txBox="1"/>
+          <p:nvPr/>
+        </p:nvSpPr>
+        <p:spPr>
+          <a:xfrm>
+            <a:off x="5241330" y="1221072"/>
+            <a:ext cx="1155923" cy="461665"/>
+          </a:xfrm>
+          <a:prstGeom prst="rect">
+            <a:avLst/>
+          </a:prstGeom>
+          <a:noFill/>
+        </p:spPr>
+        <p:txBody>
+          <a:bodyPr wrap="square" rtlCol="0">
+            <a:spAutoFit/>
+          </a:bodyPr>
+          <a:lstStyle/>
+          <a:p>
+            <a:r>
+              <a:rPr lang="en-US" sz="1200" noProof="1"/>
+              <a:t>reduce_SLC_matlab</a:t>
+            </a:r>
+          </a:p>
+        </p:txBody>
+      </p:sp>
+      <p:sp>
+        <p:nvSpPr>
+          <p:cNvPr id="71" name="Rectangle 70">
+            <a:extLst>
+              <a:ext uri="{FF2B5EF4-FFF2-40B4-BE49-F238E27FC236}">
+                <a16:creationId xmlns:a16="http://schemas.microsoft.com/office/drawing/2014/main" id="{AE5317CE-BF80-6F3A-84EA-B67F98B0A589}"/>
               </a:ext>
             </a:extLst>
           </p:cNvPr>
@@ -4713,8 +4653,8 @@
         </p:nvSpPr>
         <p:spPr>
           <a:xfrm>
-            <a:off x="5276654" y="1585597"/>
-            <a:ext cx="1135096" cy="276998"/>
+            <a:off x="5260272" y="1744781"/>
+            <a:ext cx="1145770" cy="419653"/>
           </a:xfrm>
           <a:prstGeom prst="rect">
             <a:avLst/>
@@ -4753,10 +4693,10 @@
       </p:sp>
       <p:sp>
         <p:nvSpPr>
-          <p:cNvPr id="67" name="TextBox 66">
-            <a:extLst>
-              <a:ext uri="{FF2B5EF4-FFF2-40B4-BE49-F238E27FC236}">
-                <a16:creationId xmlns:a16="http://schemas.microsoft.com/office/drawing/2014/main" id="{E01245D9-C53D-7D45-F842-CE128AF8C0C6}"/>
+          <p:cNvPr id="72" name="TextBox 71">
+            <a:extLst>
+              <a:ext uri="{FF2B5EF4-FFF2-40B4-BE49-F238E27FC236}">
+                <a16:creationId xmlns:a16="http://schemas.microsoft.com/office/drawing/2014/main" id="{6E13CC8E-5746-4CA1-7B71-B0EF48BBA905}"/>
               </a:ext>
             </a:extLst>
           </p:cNvPr>
@@ -4765,8 +4705,8 @@
         </p:nvSpPr>
         <p:spPr>
           <a:xfrm>
-            <a:off x="5273624" y="1581451"/>
-            <a:ext cx="1155923" cy="276999"/>
+            <a:off x="5257280" y="1732841"/>
+            <a:ext cx="1130974" cy="461665"/>
           </a:xfrm>
           <a:prstGeom prst="rect">
             <a:avLst/>
@@ -4781,58 +4721,152 @@
           <a:p>
             <a:r>
               <a:rPr lang="en-US" sz="1200" noProof="1"/>
-              <a:t>crop_to_raw</a:t>
-            </a:r>
-          </a:p>
-        </p:txBody>
-      </p:sp>
-      <p:sp>
-        <p:nvSpPr>
-          <p:cNvPr id="68" name="TextBox 67">
-            <a:extLst>
-              <a:ext uri="{FF2B5EF4-FFF2-40B4-BE49-F238E27FC236}">
-                <a16:creationId xmlns:a16="http://schemas.microsoft.com/office/drawing/2014/main" id="{848E6182-9D06-DDB1-F995-981BF95F9865}"/>
-              </a:ext>
-            </a:extLst>
-          </p:cNvPr>
-          <p:cNvSpPr txBox="1"/>
-          <p:nvPr/>
-        </p:nvSpPr>
-        <p:spPr>
-          <a:xfrm>
-            <a:off x="5182572" y="1141614"/>
-            <a:ext cx="1698868" cy="461665"/>
-          </a:xfrm>
-          <a:prstGeom prst="rect">
-            <a:avLst/>
-          </a:prstGeom>
-          <a:noFill/>
-        </p:spPr>
-        <p:txBody>
-          <a:bodyPr wrap="square" rtlCol="0">
-            <a:spAutoFit/>
-          </a:bodyPr>
-          <a:lstStyle/>
-          <a:p>
-            <a:r>
-              <a:rPr lang="en-US" sz="1200" noProof="1"/>
-              <a:t>Cropping </a:t>
-            </a:r>
-          </a:p>
-          <a:p>
-            <a:r>
-              <a:rPr lang="en-US" sz="1200" noProof="1"/>
-              <a:t>submodule</a:t>
-            </a:r>
-          </a:p>
-        </p:txBody>
-      </p:sp>
-      <p:sp>
-        <p:nvSpPr>
-          <p:cNvPr id="71" name="Rectangle 70">
-            <a:extLst>
-              <a:ext uri="{FF2B5EF4-FFF2-40B4-BE49-F238E27FC236}">
-                <a16:creationId xmlns:a16="http://schemas.microsoft.com/office/drawing/2014/main" id="{AE5317CE-BF80-6F3A-84EA-B67F98B0A589}"/>
+              <a:t>reduce_SLC_python</a:t>
+            </a:r>
+          </a:p>
+        </p:txBody>
+      </p:sp>
+      <p:cxnSp>
+        <p:nvCxnSpPr>
+          <p:cNvPr id="80" name="Elbow Connector 79">
+            <a:extLst>
+              <a:ext uri="{FF2B5EF4-FFF2-40B4-BE49-F238E27FC236}">
+                <a16:creationId xmlns:a16="http://schemas.microsoft.com/office/drawing/2014/main" id="{71949CAC-F5B5-2CF9-D972-FF33913EC9C0}"/>
+              </a:ext>
+            </a:extLst>
+          </p:cNvPr>
+          <p:cNvCxnSpPr>
+            <a:cxnSpLocks/>
+            <a:stCxn id="38" idx="3"/>
+            <a:endCxn id="72" idx="1"/>
+          </p:cNvCxnSpPr>
+          <p:nvPr/>
+        </p:nvCxnSpPr>
+        <p:spPr>
+          <a:xfrm>
+            <a:off x="4157209" y="1648603"/>
+            <a:ext cx="1100071" cy="315071"/>
+          </a:xfrm>
+          <a:prstGeom prst="bentConnector3">
+            <a:avLst>
+              <a:gd name="adj1" fmla="val 70124"/>
+            </a:avLst>
+          </a:prstGeom>
+          <a:ln w="38100">
+            <a:tailEnd type="triangle"/>
+          </a:ln>
+        </p:spPr>
+        <p:style>
+          <a:lnRef idx="2">
+            <a:schemeClr val="dk1"/>
+          </a:lnRef>
+          <a:fillRef idx="0">
+            <a:schemeClr val="dk1"/>
+          </a:fillRef>
+          <a:effectRef idx="1">
+            <a:schemeClr val="dk1"/>
+          </a:effectRef>
+          <a:fontRef idx="minor">
+            <a:schemeClr val="tx1"/>
+          </a:fontRef>
+        </p:style>
+      </p:cxnSp>
+      <p:cxnSp>
+        <p:nvCxnSpPr>
+          <p:cNvPr id="84" name="Elbow Connector 83">
+            <a:extLst>
+              <a:ext uri="{FF2B5EF4-FFF2-40B4-BE49-F238E27FC236}">
+                <a16:creationId xmlns:a16="http://schemas.microsoft.com/office/drawing/2014/main" id="{3133F727-549D-22D6-580B-576E854B34A5}"/>
+              </a:ext>
+            </a:extLst>
+          </p:cNvPr>
+          <p:cNvCxnSpPr>
+            <a:cxnSpLocks/>
+            <a:stCxn id="41" idx="3"/>
+            <a:endCxn id="67" idx="1"/>
+          </p:cNvCxnSpPr>
+          <p:nvPr/>
+        </p:nvCxnSpPr>
+        <p:spPr>
+          <a:xfrm flipV="1">
+            <a:off x="4180789" y="1451905"/>
+            <a:ext cx="1060541" cy="545390"/>
+          </a:xfrm>
+          <a:prstGeom prst="bentConnector3">
+            <a:avLst>
+              <a:gd name="adj1" fmla="val 33663"/>
+            </a:avLst>
+          </a:prstGeom>
+          <a:ln w="38100">
+            <a:tailEnd type="triangle"/>
+          </a:ln>
+        </p:spPr>
+        <p:style>
+          <a:lnRef idx="2">
+            <a:schemeClr val="dk1"/>
+          </a:lnRef>
+          <a:fillRef idx="0">
+            <a:schemeClr val="dk1"/>
+          </a:fillRef>
+          <a:effectRef idx="1">
+            <a:schemeClr val="dk1"/>
+          </a:effectRef>
+          <a:fontRef idx="minor">
+            <a:schemeClr val="tx1"/>
+          </a:fontRef>
+        </p:style>
+      </p:cxnSp>
+      <p:cxnSp>
+        <p:nvCxnSpPr>
+          <p:cNvPr id="87" name="Elbow Connector 86">
+            <a:extLst>
+              <a:ext uri="{FF2B5EF4-FFF2-40B4-BE49-F238E27FC236}">
+                <a16:creationId xmlns:a16="http://schemas.microsoft.com/office/drawing/2014/main" id="{8E9671BF-0E47-82FF-755B-00D204B3387A}"/>
+              </a:ext>
+            </a:extLst>
+          </p:cNvPr>
+          <p:cNvCxnSpPr>
+            <a:cxnSpLocks/>
+            <a:stCxn id="41" idx="3"/>
+            <a:endCxn id="72" idx="1"/>
+          </p:cNvCxnSpPr>
+          <p:nvPr/>
+        </p:nvCxnSpPr>
+        <p:spPr>
+          <a:xfrm flipV="1">
+            <a:off x="4180789" y="1963674"/>
+            <a:ext cx="1076491" cy="33621"/>
+          </a:xfrm>
+          <a:prstGeom prst="bentConnector3">
+            <a:avLst>
+              <a:gd name="adj1" fmla="val 70565"/>
+            </a:avLst>
+          </a:prstGeom>
+          <a:ln w="38100">
+            <a:tailEnd type="triangle"/>
+          </a:ln>
+        </p:spPr>
+        <p:style>
+          <a:lnRef idx="2">
+            <a:schemeClr val="dk1"/>
+          </a:lnRef>
+          <a:fillRef idx="0">
+            <a:schemeClr val="dk1"/>
+          </a:fillRef>
+          <a:effectRef idx="1">
+            <a:schemeClr val="dk1"/>
+          </a:effectRef>
+          <a:fontRef idx="minor">
+            <a:schemeClr val="tx1"/>
+          </a:fontRef>
+        </p:style>
+      </p:cxnSp>
+      <p:sp>
+        <p:nvSpPr>
+          <p:cNvPr id="101" name="Rectangle 100">
+            <a:extLst>
+              <a:ext uri="{FF2B5EF4-FFF2-40B4-BE49-F238E27FC236}">
+                <a16:creationId xmlns:a16="http://schemas.microsoft.com/office/drawing/2014/main" id="{B4ED219E-F726-F67B-0BA5-2A98949302D4}"/>
               </a:ext>
             </a:extLst>
           </p:cNvPr>
@@ -4841,17 +4875,14 @@
         </p:nvSpPr>
         <p:spPr>
           <a:xfrm>
-            <a:off x="5278700" y="1946319"/>
-            <a:ext cx="1145770" cy="276998"/>
+            <a:off x="115230" y="3611261"/>
+            <a:ext cx="706027" cy="217670"/>
           </a:xfrm>
           <a:prstGeom prst="rect">
             <a:avLst/>
           </a:prstGeom>
           <a:solidFill>
-            <a:schemeClr val="accent6">
-              <a:lumMod val="60000"/>
-              <a:lumOff val="40000"/>
-            </a:schemeClr>
+            <a:srgbClr val="FFC000"/>
           </a:solidFill>
         </p:spPr>
         <p:style>
@@ -4875,231 +4906,28 @@
           <a:lstStyle/>
           <a:p>
             <a:pPr algn="ctr"/>
-            <a:endParaRPr lang="en-US" noProof="1"/>
-          </a:p>
-        </p:txBody>
-      </p:sp>
-      <p:sp>
-        <p:nvSpPr>
-          <p:cNvPr id="72" name="TextBox 71">
-            <a:extLst>
-              <a:ext uri="{FF2B5EF4-FFF2-40B4-BE49-F238E27FC236}">
-                <a16:creationId xmlns:a16="http://schemas.microsoft.com/office/drawing/2014/main" id="{6E13CC8E-5746-4CA1-7B71-B0EF48BBA905}"/>
-              </a:ext>
-            </a:extLst>
-          </p:cNvPr>
-          <p:cNvSpPr txBox="1"/>
-          <p:nvPr/>
-        </p:nvSpPr>
-        <p:spPr>
-          <a:xfrm>
-            <a:off x="5266631" y="1933602"/>
-            <a:ext cx="1022204" cy="276999"/>
-          </a:xfrm>
-          <a:prstGeom prst="rect">
-            <a:avLst/>
-          </a:prstGeom>
-          <a:noFill/>
-        </p:spPr>
-        <p:txBody>
-          <a:bodyPr wrap="square" rtlCol="0">
-            <a:spAutoFit/>
-          </a:bodyPr>
-          <a:lstStyle/>
-          <a:p>
-            <a:r>
-              <a:rPr lang="en-US" sz="1200" noProof="1"/>
-              <a:t>crop_to_zarr</a:t>
-            </a:r>
-          </a:p>
-        </p:txBody>
-      </p:sp>
-      <p:cxnSp>
-        <p:nvCxnSpPr>
-          <p:cNvPr id="77" name="Elbow Connector 76">
-            <a:extLst>
-              <a:ext uri="{FF2B5EF4-FFF2-40B4-BE49-F238E27FC236}">
-                <a16:creationId xmlns:a16="http://schemas.microsoft.com/office/drawing/2014/main" id="{EFB9DCAC-D9DF-356F-214E-A86B9BC7E720}"/>
-              </a:ext>
-            </a:extLst>
-          </p:cNvPr>
-          <p:cNvCxnSpPr>
-            <a:cxnSpLocks/>
-            <a:stCxn id="38" idx="3"/>
-            <a:endCxn id="67" idx="1"/>
-          </p:cNvCxnSpPr>
-          <p:nvPr/>
-        </p:nvCxnSpPr>
-        <p:spPr>
-          <a:xfrm>
-            <a:off x="4088586" y="1656672"/>
-            <a:ext cx="1185038" cy="63279"/>
-          </a:xfrm>
-          <a:prstGeom prst="bentConnector3">
-            <a:avLst>
-              <a:gd name="adj1" fmla="val 50000"/>
-            </a:avLst>
-          </a:prstGeom>
-          <a:ln w="38100">
-            <a:tailEnd type="triangle"/>
-          </a:ln>
-        </p:spPr>
-        <p:style>
-          <a:lnRef idx="2">
-            <a:schemeClr val="dk1"/>
-          </a:lnRef>
-          <a:fillRef idx="0">
-            <a:schemeClr val="dk1"/>
-          </a:fillRef>
-          <a:effectRef idx="1">
-            <a:schemeClr val="dk1"/>
-          </a:effectRef>
-          <a:fontRef idx="minor">
-            <a:schemeClr val="tx1"/>
-          </a:fontRef>
-        </p:style>
-      </p:cxnSp>
-      <p:cxnSp>
-        <p:nvCxnSpPr>
-          <p:cNvPr id="80" name="Elbow Connector 79">
-            <a:extLst>
-              <a:ext uri="{FF2B5EF4-FFF2-40B4-BE49-F238E27FC236}">
-                <a16:creationId xmlns:a16="http://schemas.microsoft.com/office/drawing/2014/main" id="{71949CAC-F5B5-2CF9-D972-FF33913EC9C0}"/>
-              </a:ext>
-            </a:extLst>
-          </p:cNvPr>
-          <p:cNvCxnSpPr>
-            <a:cxnSpLocks/>
-            <a:stCxn id="38" idx="3"/>
-            <a:endCxn id="72" idx="1"/>
-          </p:cNvCxnSpPr>
-          <p:nvPr/>
-        </p:nvCxnSpPr>
-        <p:spPr>
-          <a:xfrm>
-            <a:off x="4088586" y="1656672"/>
-            <a:ext cx="1178045" cy="415430"/>
-          </a:xfrm>
-          <a:prstGeom prst="bentConnector3">
-            <a:avLst>
-              <a:gd name="adj1" fmla="val 42944"/>
-            </a:avLst>
-          </a:prstGeom>
-          <a:ln w="38100">
-            <a:tailEnd type="triangle"/>
-          </a:ln>
-        </p:spPr>
-        <p:style>
-          <a:lnRef idx="2">
-            <a:schemeClr val="dk1"/>
-          </a:lnRef>
-          <a:fillRef idx="0">
-            <a:schemeClr val="dk1"/>
-          </a:fillRef>
-          <a:effectRef idx="1">
-            <a:schemeClr val="dk1"/>
-          </a:effectRef>
-          <a:fontRef idx="minor">
-            <a:schemeClr val="tx1"/>
-          </a:fontRef>
-        </p:style>
-      </p:cxnSp>
-      <p:cxnSp>
-        <p:nvCxnSpPr>
-          <p:cNvPr id="84" name="Elbow Connector 83">
-            <a:extLst>
-              <a:ext uri="{FF2B5EF4-FFF2-40B4-BE49-F238E27FC236}">
-                <a16:creationId xmlns:a16="http://schemas.microsoft.com/office/drawing/2014/main" id="{3133F727-549D-22D6-580B-576E854B34A5}"/>
-              </a:ext>
-            </a:extLst>
-          </p:cNvPr>
-          <p:cNvCxnSpPr>
-            <a:cxnSpLocks/>
-            <a:stCxn id="41" idx="3"/>
-            <a:endCxn id="67" idx="1"/>
-          </p:cNvCxnSpPr>
-          <p:nvPr/>
-        </p:nvCxnSpPr>
-        <p:spPr>
-          <a:xfrm flipV="1">
-            <a:off x="4180789" y="1719951"/>
-            <a:ext cx="1092835" cy="277344"/>
-          </a:xfrm>
-          <a:prstGeom prst="bentConnector3">
-            <a:avLst>
-              <a:gd name="adj1" fmla="val 67749"/>
-            </a:avLst>
-          </a:prstGeom>
-          <a:ln w="38100">
-            <a:tailEnd type="triangle"/>
-          </a:ln>
-        </p:spPr>
-        <p:style>
-          <a:lnRef idx="2">
-            <a:schemeClr val="dk1"/>
-          </a:lnRef>
-          <a:fillRef idx="0">
-            <a:schemeClr val="dk1"/>
-          </a:fillRef>
-          <a:effectRef idx="1">
-            <a:schemeClr val="dk1"/>
-          </a:effectRef>
-          <a:fontRef idx="minor">
-            <a:schemeClr val="tx1"/>
-          </a:fontRef>
-        </p:style>
-      </p:cxnSp>
-      <p:cxnSp>
-        <p:nvCxnSpPr>
-          <p:cNvPr id="87" name="Elbow Connector 86">
-            <a:extLst>
-              <a:ext uri="{FF2B5EF4-FFF2-40B4-BE49-F238E27FC236}">
-                <a16:creationId xmlns:a16="http://schemas.microsoft.com/office/drawing/2014/main" id="{8E9671BF-0E47-82FF-755B-00D204B3387A}"/>
-              </a:ext>
-            </a:extLst>
-          </p:cNvPr>
-          <p:cNvCxnSpPr>
-            <a:cxnSpLocks/>
-            <a:stCxn id="41" idx="3"/>
-            <a:endCxn id="72" idx="1"/>
-          </p:cNvCxnSpPr>
-          <p:nvPr/>
-        </p:nvCxnSpPr>
-        <p:spPr>
-          <a:xfrm>
-            <a:off x="4180789" y="1997295"/>
-            <a:ext cx="1085842" cy="74807"/>
-          </a:xfrm>
-          <a:prstGeom prst="bentConnector3">
-            <a:avLst>
-              <a:gd name="adj1" fmla="val 12573"/>
-            </a:avLst>
-          </a:prstGeom>
-          <a:ln w="38100">
-            <a:tailEnd type="triangle"/>
-          </a:ln>
-        </p:spPr>
-        <p:style>
-          <a:lnRef idx="2">
-            <a:schemeClr val="dk1"/>
-          </a:lnRef>
-          <a:fillRef idx="0">
-            <a:schemeClr val="dk1"/>
-          </a:fillRef>
-          <a:effectRef idx="1">
-            <a:schemeClr val="dk1"/>
-          </a:effectRef>
-          <a:fontRef idx="minor">
-            <a:schemeClr val="tx1"/>
-          </a:fontRef>
-        </p:style>
-      </p:cxnSp>
-      <p:sp>
-        <p:nvSpPr>
-          <p:cNvPr id="101" name="Rectangle 100">
-            <a:extLst>
-              <a:ext uri="{FF2B5EF4-FFF2-40B4-BE49-F238E27FC236}">
-                <a16:creationId xmlns:a16="http://schemas.microsoft.com/office/drawing/2014/main" id="{B4ED219E-F726-F67B-0BA5-2A98949302D4}"/>
+            <a:r>
+              <a:rPr lang="en-US" sz="1200" noProof="1">
+                <a:solidFill>
+                  <a:schemeClr val="tx1"/>
+                </a:solidFill>
+              </a:rPr>
+              <a:t>Module</a:t>
+            </a:r>
+            <a:endParaRPr lang="en-US" noProof="1">
+              <a:solidFill>
+                <a:schemeClr val="tx1"/>
+              </a:solidFill>
+            </a:endParaRPr>
+          </a:p>
+        </p:txBody>
+      </p:sp>
+      <p:sp>
+        <p:nvSpPr>
+          <p:cNvPr id="102" name="Rectangle 101">
+            <a:extLst>
+              <a:ext uri="{FF2B5EF4-FFF2-40B4-BE49-F238E27FC236}">
+                <a16:creationId xmlns:a16="http://schemas.microsoft.com/office/drawing/2014/main" id="{DBD75ABE-6998-1D43-DAA9-D50179BC1CFC}"/>
               </a:ext>
             </a:extLst>
           </p:cNvPr>
@@ -5108,14 +4936,17 @@
         </p:nvSpPr>
         <p:spPr>
           <a:xfrm>
-            <a:off x="115230" y="3611261"/>
-            <a:ext cx="706027" cy="217670"/>
+            <a:off x="115229" y="3975782"/>
+            <a:ext cx="972426" cy="217670"/>
           </a:xfrm>
           <a:prstGeom prst="rect">
             <a:avLst/>
           </a:prstGeom>
           <a:solidFill>
-            <a:srgbClr val="FFC000"/>
+            <a:schemeClr val="accent1">
+              <a:lumMod val="40000"/>
+              <a:lumOff val="60000"/>
+            </a:schemeClr>
           </a:solidFill>
         </p:spPr>
         <p:style>
@@ -5145,7 +4976,7 @@
                   <a:schemeClr val="tx1"/>
                 </a:solidFill>
               </a:rPr>
-              <a:t>Module</a:t>
+              <a:t>Submodule</a:t>
             </a:r>
             <a:endParaRPr lang="en-US" noProof="1">
               <a:solidFill>
@@ -5157,10 +4988,10 @@
       </p:sp>
       <p:sp>
         <p:nvSpPr>
-          <p:cNvPr id="102" name="Rectangle 101">
-            <a:extLst>
-              <a:ext uri="{FF2B5EF4-FFF2-40B4-BE49-F238E27FC236}">
-                <a16:creationId xmlns:a16="http://schemas.microsoft.com/office/drawing/2014/main" id="{DBD75ABE-6998-1D43-DAA9-D50179BC1CFC}"/>
+          <p:cNvPr id="103" name="Rectangle 102">
+            <a:extLst>
+              <a:ext uri="{FF2B5EF4-FFF2-40B4-BE49-F238E27FC236}">
+                <a16:creationId xmlns:a16="http://schemas.microsoft.com/office/drawing/2014/main" id="{4F644BBD-061B-B9D3-C6EA-A7E895BD9345}"/>
               </a:ext>
             </a:extLst>
           </p:cNvPr>
@@ -5169,16 +5000,16 @@
         </p:nvSpPr>
         <p:spPr>
           <a:xfrm>
-            <a:off x="115229" y="3975782"/>
+            <a:off x="115229" y="4348872"/>
             <a:ext cx="972426" cy="217670"/>
           </a:xfrm>
           <a:prstGeom prst="rect">
             <a:avLst/>
           </a:prstGeom>
           <a:solidFill>
-            <a:schemeClr val="accent1">
-              <a:lumMod val="40000"/>
-              <a:lumOff val="60000"/>
+            <a:schemeClr val="accent6">
+              <a:lumMod val="60000"/>
+              <a:lumOff val="40000"/>
             </a:schemeClr>
           </a:solidFill>
         </p:spPr>
@@ -5209,7 +5040,7 @@
                   <a:schemeClr val="tx1"/>
                 </a:solidFill>
               </a:rPr>
-              <a:t>Submodule</a:t>
+              <a:t>Job</a:t>
             </a:r>
             <a:endParaRPr lang="en-US" noProof="1">
               <a:solidFill>
@@ -5221,10 +5052,10 @@
       </p:sp>
       <p:sp>
         <p:nvSpPr>
-          <p:cNvPr id="103" name="Rectangle 102">
-            <a:extLst>
-              <a:ext uri="{FF2B5EF4-FFF2-40B4-BE49-F238E27FC236}">
-                <a16:creationId xmlns:a16="http://schemas.microsoft.com/office/drawing/2014/main" id="{4F644BBD-061B-B9D3-C6EA-A7E895BD9345}"/>
+          <p:cNvPr id="104" name="Rectangle 103">
+            <a:extLst>
+              <a:ext uri="{FF2B5EF4-FFF2-40B4-BE49-F238E27FC236}">
+                <a16:creationId xmlns:a16="http://schemas.microsoft.com/office/drawing/2014/main" id="{43704229-1A4E-1F39-C9D3-67B41FDF6FAC}"/>
               </a:ext>
             </a:extLst>
           </p:cNvPr>
@@ -5233,14 +5064,14 @@
         </p:nvSpPr>
         <p:spPr>
           <a:xfrm>
-            <a:off x="115229" y="4348872"/>
+            <a:off x="115229" y="4721962"/>
             <a:ext cx="972426" cy="217670"/>
           </a:xfrm>
           <a:prstGeom prst="rect">
             <a:avLst/>
           </a:prstGeom>
           <a:solidFill>
-            <a:schemeClr val="accent6">
+            <a:schemeClr val="accent2">
               <a:lumMod val="60000"/>
               <a:lumOff val="40000"/>
             </a:schemeClr>
@@ -5273,7 +5104,7 @@
                   <a:schemeClr val="tx1"/>
                 </a:solidFill>
               </a:rPr>
-              <a:t>Job</a:t>
+              <a:t>Cronjob</a:t>
             </a:r>
             <a:endParaRPr lang="en-US" noProof="1">
               <a:solidFill>
@@ -5285,10 +5116,10 @@
       </p:sp>
       <p:sp>
         <p:nvSpPr>
-          <p:cNvPr id="104" name="Rectangle 103">
-            <a:extLst>
-              <a:ext uri="{FF2B5EF4-FFF2-40B4-BE49-F238E27FC236}">
-                <a16:creationId xmlns:a16="http://schemas.microsoft.com/office/drawing/2014/main" id="{43704229-1A4E-1F39-C9D3-67B41FDF6FAC}"/>
+          <p:cNvPr id="105" name="Rectangle 104">
+            <a:extLst>
+              <a:ext uri="{FF2B5EF4-FFF2-40B4-BE49-F238E27FC236}">
+                <a16:creationId xmlns:a16="http://schemas.microsoft.com/office/drawing/2014/main" id="{BE8E47FC-6FF3-D73F-73E8-1406230AD271}"/>
               </a:ext>
             </a:extLst>
           </p:cNvPr>
@@ -5297,17 +5128,14 @@
         </p:nvSpPr>
         <p:spPr>
           <a:xfrm>
-            <a:off x="115229" y="4721962"/>
-            <a:ext cx="972426" cy="217670"/>
+            <a:off x="6896314" y="3050"/>
+            <a:ext cx="2402065" cy="840098"/>
           </a:xfrm>
           <a:prstGeom prst="rect">
             <a:avLst/>
           </a:prstGeom>
           <a:solidFill>
-            <a:schemeClr val="accent2">
-              <a:lumMod val="60000"/>
-              <a:lumOff val="40000"/>
-            </a:schemeClr>
+            <a:srgbClr val="FFC000"/>
           </a:solidFill>
         </p:spPr>
         <p:style>
@@ -5331,28 +5159,51 @@
           <a:lstStyle/>
           <a:p>
             <a:pPr algn="ctr"/>
-            <a:r>
-              <a:rPr lang="en-US" sz="1200" noProof="1">
-                <a:solidFill>
-                  <a:schemeClr val="tx1"/>
-                </a:solidFill>
-              </a:rPr>
-              <a:t>Cronjob</a:t>
-            </a:r>
-            <a:endParaRPr lang="en-US" noProof="1">
-              <a:solidFill>
-                <a:schemeClr val="tx1"/>
-              </a:solidFill>
-            </a:endParaRPr>
-          </a:p>
-        </p:txBody>
-      </p:sp>
-      <p:sp>
-        <p:nvSpPr>
-          <p:cNvPr id="105" name="Rectangle 104">
-            <a:extLst>
-              <a:ext uri="{FF2B5EF4-FFF2-40B4-BE49-F238E27FC236}">
-                <a16:creationId xmlns:a16="http://schemas.microsoft.com/office/drawing/2014/main" id="{BE8E47FC-6FF3-D73F-73E8-1406230AD271}"/>
+            <a:endParaRPr lang="en-US" noProof="1"/>
+          </a:p>
+        </p:txBody>
+      </p:sp>
+      <p:sp>
+        <p:nvSpPr>
+          <p:cNvPr id="107" name="TextBox 106">
+            <a:extLst>
+              <a:ext uri="{FF2B5EF4-FFF2-40B4-BE49-F238E27FC236}">
+                <a16:creationId xmlns:a16="http://schemas.microsoft.com/office/drawing/2014/main" id="{95DAF584-9CBD-8EF5-CDFE-65D541FAEED9}"/>
+              </a:ext>
+            </a:extLst>
+          </p:cNvPr>
+          <p:cNvSpPr txBox="1"/>
+          <p:nvPr/>
+        </p:nvSpPr>
+        <p:spPr>
+          <a:xfrm>
+            <a:off x="6893834" y="0"/>
+            <a:ext cx="2257477" cy="276999"/>
+          </a:xfrm>
+          <a:prstGeom prst="rect">
+            <a:avLst/>
+          </a:prstGeom>
+          <a:noFill/>
+        </p:spPr>
+        <p:txBody>
+          <a:bodyPr wrap="none" rtlCol="0">
+            <a:spAutoFit/>
+          </a:bodyPr>
+          <a:lstStyle/>
+          <a:p>
+            <a:r>
+              <a:rPr lang="en-US" sz="1200" noProof="1"/>
+              <a:t>Contextual enrichment module</a:t>
+            </a:r>
+          </a:p>
+        </p:txBody>
+      </p:sp>
+      <p:sp>
+        <p:nvSpPr>
+          <p:cNvPr id="108" name="Rectangle 107">
+            <a:extLst>
+              <a:ext uri="{FF2B5EF4-FFF2-40B4-BE49-F238E27FC236}">
+                <a16:creationId xmlns:a16="http://schemas.microsoft.com/office/drawing/2014/main" id="{A2B9C804-5483-19F3-5E8C-2746AC779672}"/>
               </a:ext>
             </a:extLst>
           </p:cNvPr>
@@ -5361,14 +5212,17 @@
         </p:nvSpPr>
         <p:spPr>
           <a:xfrm>
-            <a:off x="6896314" y="3050"/>
-            <a:ext cx="2402065" cy="840098"/>
+            <a:off x="7145251" y="414891"/>
+            <a:ext cx="2029466" cy="257115"/>
           </a:xfrm>
           <a:prstGeom prst="rect">
             <a:avLst/>
           </a:prstGeom>
           <a:solidFill>
-            <a:srgbClr val="FFC000"/>
+            <a:schemeClr val="accent2">
+              <a:lumMod val="60000"/>
+              <a:lumOff val="40000"/>
+            </a:schemeClr>
           </a:solidFill>
         </p:spPr>
         <p:style>
@@ -5396,12 +5250,48 @@
           </a:p>
         </p:txBody>
       </p:sp>
-      <p:sp>
-        <p:nvSpPr>
-          <p:cNvPr id="107" name="TextBox 106">
-            <a:extLst>
-              <a:ext uri="{FF2B5EF4-FFF2-40B4-BE49-F238E27FC236}">
-                <a16:creationId xmlns:a16="http://schemas.microsoft.com/office/drawing/2014/main" id="{95DAF584-9CBD-8EF5-CDFE-65D541FAEED9}"/>
+      <p:pic>
+        <p:nvPicPr>
+          <p:cNvPr id="109" name="Graphic 108" descr="Repeat with solid fill">
+            <a:extLst>
+              <a:ext uri="{FF2B5EF4-FFF2-40B4-BE49-F238E27FC236}">
+                <a16:creationId xmlns:a16="http://schemas.microsoft.com/office/drawing/2014/main" id="{8DDE8412-8AA8-2CE7-081B-2292E7B2A6A3}"/>
+              </a:ext>
+            </a:extLst>
+          </p:cNvPr>
+          <p:cNvPicPr>
+            <a:picLocks noChangeAspect="1"/>
+          </p:cNvPicPr>
+          <p:nvPr/>
+        </p:nvPicPr>
+        <p:blipFill>
+          <a:blip>
+            <a:extLst>
+              <a:ext uri="{96DAC541-7B7A-43D3-8B79-37D633B846F1}">
+                <asvg:svgBlip xmlns:asvg="http://schemas.microsoft.com/office/drawing/2016/SVG/main" r:embed="rId2"/>
+              </a:ext>
+            </a:extLst>
+          </a:blip>
+          <a:stretch>
+            <a:fillRect/>
+          </a:stretch>
+        </p:blipFill>
+        <p:spPr>
+          <a:xfrm>
+            <a:off x="7007286" y="201357"/>
+            <a:ext cx="366563" cy="366563"/>
+          </a:xfrm>
+          <a:prstGeom prst="rect">
+            <a:avLst/>
+          </a:prstGeom>
+        </p:spPr>
+      </p:pic>
+      <p:sp>
+        <p:nvSpPr>
+          <p:cNvPr id="110" name="TextBox 109">
+            <a:extLst>
+              <a:ext uri="{FF2B5EF4-FFF2-40B4-BE49-F238E27FC236}">
+                <a16:creationId xmlns:a16="http://schemas.microsoft.com/office/drawing/2014/main" id="{C1645450-9C5E-3E6B-6B42-35C499AAA3C2}"/>
               </a:ext>
             </a:extLst>
           </p:cNvPr>
@@ -5410,8 +5300,8 @@
         </p:nvSpPr>
         <p:spPr>
           <a:xfrm>
-            <a:off x="6893834" y="0"/>
-            <a:ext cx="2257477" cy="276999"/>
+            <a:off x="7082613" y="404948"/>
+            <a:ext cx="2029466" cy="276999"/>
           </a:xfrm>
           <a:prstGeom prst="rect">
             <a:avLst/>
@@ -5426,17 +5316,230 @@
           <a:p>
             <a:r>
               <a:rPr lang="en-US" sz="1200" noProof="1"/>
-              <a:t>Contextual enrichment module</a:t>
-            </a:r>
-          </a:p>
-        </p:txBody>
-      </p:sp>
-      <p:sp>
-        <p:nvSpPr>
-          <p:cNvPr id="108" name="Rectangle 107">
-            <a:extLst>
-              <a:ext uri="{FF2B5EF4-FFF2-40B4-BE49-F238E27FC236}">
-                <a16:creationId xmlns:a16="http://schemas.microsoft.com/office/drawing/2014/main" id="{A2B9C804-5483-19F3-5E8C-2746AC779672}"/>
+              <a:t>manage-contextual-data.sh</a:t>
+            </a:r>
+          </a:p>
+        </p:txBody>
+      </p:sp>
+      <p:cxnSp>
+        <p:nvCxnSpPr>
+          <p:cNvPr id="111" name="Elbow Connector 110">
+            <a:extLst>
+              <a:ext uri="{FF2B5EF4-FFF2-40B4-BE49-F238E27FC236}">
+                <a16:creationId xmlns:a16="http://schemas.microsoft.com/office/drawing/2014/main" id="{952B35AC-82CB-455F-E5E4-53C831E282F0}"/>
+              </a:ext>
+            </a:extLst>
+          </p:cNvPr>
+          <p:cNvCxnSpPr>
+            <a:cxnSpLocks/>
+          </p:cNvCxnSpPr>
+          <p:nvPr/>
+        </p:nvCxnSpPr>
+        <p:spPr>
+          <a:xfrm>
+            <a:off x="113818" y="5766021"/>
+            <a:ext cx="973837" cy="12700"/>
+          </a:xfrm>
+          <a:prstGeom prst="bentConnector3">
+            <a:avLst>
+              <a:gd name="adj1" fmla="val 50000"/>
+            </a:avLst>
+          </a:prstGeom>
+          <a:ln w="38100">
+            <a:tailEnd type="triangle"/>
+          </a:ln>
+        </p:spPr>
+        <p:style>
+          <a:lnRef idx="2">
+            <a:schemeClr val="dk1"/>
+          </a:lnRef>
+          <a:fillRef idx="0">
+            <a:schemeClr val="dk1"/>
+          </a:fillRef>
+          <a:effectRef idx="1">
+            <a:schemeClr val="dk1"/>
+          </a:effectRef>
+          <a:fontRef idx="minor">
+            <a:schemeClr val="tx1"/>
+          </a:fontRef>
+        </p:style>
+      </p:cxnSp>
+      <p:cxnSp>
+        <p:nvCxnSpPr>
+          <p:cNvPr id="115" name="Elbow Connector 114">
+            <a:extLst>
+              <a:ext uri="{FF2B5EF4-FFF2-40B4-BE49-F238E27FC236}">
+                <a16:creationId xmlns:a16="http://schemas.microsoft.com/office/drawing/2014/main" id="{20507E83-C5D4-4F4B-90DB-6F40B07BE1A8}"/>
+              </a:ext>
+            </a:extLst>
+          </p:cNvPr>
+          <p:cNvCxnSpPr>
+            <a:cxnSpLocks/>
+          </p:cNvCxnSpPr>
+          <p:nvPr/>
+        </p:nvCxnSpPr>
+        <p:spPr>
+          <a:xfrm>
+            <a:off x="113817" y="6153305"/>
+            <a:ext cx="973837" cy="12700"/>
+          </a:xfrm>
+          <a:prstGeom prst="bentConnector3">
+            <a:avLst>
+              <a:gd name="adj1" fmla="val 50000"/>
+            </a:avLst>
+          </a:prstGeom>
+          <a:ln w="38100">
+            <a:prstDash val="dash"/>
+            <a:tailEnd type="triangle"/>
+          </a:ln>
+        </p:spPr>
+        <p:style>
+          <a:lnRef idx="2">
+            <a:schemeClr val="dk1"/>
+          </a:lnRef>
+          <a:fillRef idx="0">
+            <a:schemeClr val="dk1"/>
+          </a:fillRef>
+          <a:effectRef idx="1">
+            <a:schemeClr val="dk1"/>
+          </a:effectRef>
+          <a:fontRef idx="minor">
+            <a:schemeClr val="tx1"/>
+          </a:fontRef>
+        </p:style>
+      </p:cxnSp>
+      <p:sp>
+        <p:nvSpPr>
+          <p:cNvPr id="116" name="TextBox 115">
+            <a:extLst>
+              <a:ext uri="{FF2B5EF4-FFF2-40B4-BE49-F238E27FC236}">
+                <a16:creationId xmlns:a16="http://schemas.microsoft.com/office/drawing/2014/main" id="{CDF7C4B4-481B-CFB9-520F-47FB13DB5CF9}"/>
+              </a:ext>
+            </a:extLst>
+          </p:cNvPr>
+          <p:cNvSpPr txBox="1"/>
+          <p:nvPr/>
+        </p:nvSpPr>
+        <p:spPr>
+          <a:xfrm>
+            <a:off x="0" y="5325451"/>
+            <a:ext cx="775790" cy="461665"/>
+          </a:xfrm>
+          <a:prstGeom prst="rect">
+            <a:avLst/>
+          </a:prstGeom>
+          <a:noFill/>
+        </p:spPr>
+        <p:txBody>
+          <a:bodyPr wrap="none" rtlCol="0">
+            <a:spAutoFit/>
+          </a:bodyPr>
+          <a:lstStyle/>
+          <a:p>
+            <a:r>
+              <a:rPr lang="en-US" sz="1200" noProof="1"/>
+              <a:t>Existing </a:t>
+            </a:r>
+          </a:p>
+          <a:p>
+            <a:r>
+              <a:rPr lang="en-US" sz="1200" noProof="1"/>
+              <a:t>interface</a:t>
+            </a:r>
+          </a:p>
+        </p:txBody>
+      </p:sp>
+      <p:sp>
+        <p:nvSpPr>
+          <p:cNvPr id="117" name="TextBox 116">
+            <a:extLst>
+              <a:ext uri="{FF2B5EF4-FFF2-40B4-BE49-F238E27FC236}">
+                <a16:creationId xmlns:a16="http://schemas.microsoft.com/office/drawing/2014/main" id="{F59F51D3-A45C-C4D7-AF2F-385CED4E30A9}"/>
+              </a:ext>
+            </a:extLst>
+          </p:cNvPr>
+          <p:cNvSpPr txBox="1"/>
+          <p:nvPr/>
+        </p:nvSpPr>
+        <p:spPr>
+          <a:xfrm>
+            <a:off x="-2816" y="5733829"/>
+            <a:ext cx="942117" cy="461665"/>
+          </a:xfrm>
+          <a:prstGeom prst="rect">
+            <a:avLst/>
+          </a:prstGeom>
+          <a:noFill/>
+        </p:spPr>
+        <p:txBody>
+          <a:bodyPr wrap="none" rtlCol="0">
+            <a:spAutoFit/>
+          </a:bodyPr>
+          <a:lstStyle/>
+          <a:p>
+            <a:r>
+              <a:rPr lang="en-US" sz="1200" noProof="1"/>
+              <a:t>Envisioned </a:t>
+            </a:r>
+          </a:p>
+          <a:p>
+            <a:r>
+              <a:rPr lang="en-US" sz="1200" noProof="1"/>
+              <a:t>interface</a:t>
+            </a:r>
+          </a:p>
+        </p:txBody>
+      </p:sp>
+      <p:cxnSp>
+        <p:nvCxnSpPr>
+          <p:cNvPr id="118" name="Elbow Connector 117">
+            <a:extLst>
+              <a:ext uri="{FF2B5EF4-FFF2-40B4-BE49-F238E27FC236}">
+                <a16:creationId xmlns:a16="http://schemas.microsoft.com/office/drawing/2014/main" id="{E6CEC6D7-D3DC-095E-3164-A2E1BD6864DB}"/>
+              </a:ext>
+            </a:extLst>
+          </p:cNvPr>
+          <p:cNvCxnSpPr>
+            <a:cxnSpLocks/>
+            <a:stCxn id="105" idx="1"/>
+            <a:endCxn id="18" idx="0"/>
+          </p:cNvCxnSpPr>
+          <p:nvPr/>
+        </p:nvCxnSpPr>
+        <p:spPr>
+          <a:xfrm rot="10800000" flipV="1">
+            <a:off x="4971896" y="423098"/>
+            <a:ext cx="1924418" cy="611751"/>
+          </a:xfrm>
+          <a:prstGeom prst="bentConnector2">
+            <a:avLst/>
+          </a:prstGeom>
+          <a:ln w="38100">
+            <a:prstDash val="dash"/>
+            <a:tailEnd type="triangle"/>
+          </a:ln>
+        </p:spPr>
+        <p:style>
+          <a:lnRef idx="2">
+            <a:schemeClr val="dk1"/>
+          </a:lnRef>
+          <a:fillRef idx="0">
+            <a:schemeClr val="dk1"/>
+          </a:fillRef>
+          <a:effectRef idx="1">
+            <a:schemeClr val="dk1"/>
+          </a:effectRef>
+          <a:fontRef idx="minor">
+            <a:schemeClr val="tx1"/>
+          </a:fontRef>
+        </p:style>
+      </p:cxnSp>
+      <p:sp>
+        <p:nvSpPr>
+          <p:cNvPr id="124" name="Rectangle 123">
+            <a:extLst>
+              <a:ext uri="{FF2B5EF4-FFF2-40B4-BE49-F238E27FC236}">
+                <a16:creationId xmlns:a16="http://schemas.microsoft.com/office/drawing/2014/main" id="{1144A2D0-F07C-EA52-335F-60FE264A2668}"/>
               </a:ext>
             </a:extLst>
           </p:cNvPr>
@@ -5445,17 +5548,14 @@
         </p:nvSpPr>
         <p:spPr>
           <a:xfrm>
-            <a:off x="7145251" y="414891"/>
-            <a:ext cx="2029466" cy="257115"/>
+            <a:off x="7234824" y="1265682"/>
+            <a:ext cx="2210704" cy="1903508"/>
           </a:xfrm>
           <a:prstGeom prst="rect">
             <a:avLst/>
           </a:prstGeom>
           <a:solidFill>
-            <a:schemeClr val="accent2">
-              <a:lumMod val="60000"/>
-              <a:lumOff val="40000"/>
-            </a:schemeClr>
+            <a:srgbClr val="FFC000"/>
           </a:solidFill>
         </p:spPr>
         <p:style>
@@ -5483,48 +5583,12 @@
           </a:p>
         </p:txBody>
       </p:sp>
-      <p:pic>
-        <p:nvPicPr>
-          <p:cNvPr id="109" name="Graphic 108" descr="Repeat with solid fill">
-            <a:extLst>
-              <a:ext uri="{FF2B5EF4-FFF2-40B4-BE49-F238E27FC236}">
-                <a16:creationId xmlns:a16="http://schemas.microsoft.com/office/drawing/2014/main" id="{8DDE8412-8AA8-2CE7-081B-2292E7B2A6A3}"/>
-              </a:ext>
-            </a:extLst>
-          </p:cNvPr>
-          <p:cNvPicPr>
-            <a:picLocks noChangeAspect="1"/>
-          </p:cNvPicPr>
-          <p:nvPr/>
-        </p:nvPicPr>
-        <p:blipFill>
-          <a:blip>
-            <a:extLst>
-              <a:ext uri="{96DAC541-7B7A-43D3-8B79-37D633B846F1}">
-                <asvg:svgBlip xmlns:asvg="http://schemas.microsoft.com/office/drawing/2016/SVG/main" r:embed="rId2"/>
-              </a:ext>
-            </a:extLst>
-          </a:blip>
-          <a:stretch>
-            <a:fillRect/>
-          </a:stretch>
-        </p:blipFill>
-        <p:spPr>
-          <a:xfrm>
-            <a:off x="7007286" y="201357"/>
-            <a:ext cx="366563" cy="366563"/>
-          </a:xfrm>
-          <a:prstGeom prst="rect">
-            <a:avLst/>
-          </a:prstGeom>
-        </p:spPr>
-      </p:pic>
-      <p:sp>
-        <p:nvSpPr>
-          <p:cNvPr id="110" name="TextBox 109">
-            <a:extLst>
-              <a:ext uri="{FF2B5EF4-FFF2-40B4-BE49-F238E27FC236}">
-                <a16:creationId xmlns:a16="http://schemas.microsoft.com/office/drawing/2014/main" id="{C1645450-9C5E-3E6B-6B42-35C499AAA3C2}"/>
+      <p:sp>
+        <p:nvSpPr>
+          <p:cNvPr id="125" name="TextBox 124">
+            <a:extLst>
+              <a:ext uri="{FF2B5EF4-FFF2-40B4-BE49-F238E27FC236}">
+                <a16:creationId xmlns:a16="http://schemas.microsoft.com/office/drawing/2014/main" id="{FAFF869A-5F75-CC43-390D-4D58E6A26F21}"/>
               </a:ext>
             </a:extLst>
           </p:cNvPr>
@@ -5533,8 +5597,8 @@
         </p:nvSpPr>
         <p:spPr>
           <a:xfrm>
-            <a:off x="7082613" y="404948"/>
-            <a:ext cx="2029466" cy="276999"/>
+            <a:off x="7213997" y="1253899"/>
+            <a:ext cx="1593450" cy="461665"/>
           </a:xfrm>
           <a:prstGeom prst="rect">
             <a:avLst/>
@@ -5549,230 +5613,23 @@
           <a:p>
             <a:r>
               <a:rPr lang="en-US" sz="1200" noProof="1"/>
-              <a:t>manage-contextual-data.sh</a:t>
-            </a:r>
-          </a:p>
-        </p:txBody>
-      </p:sp>
-      <p:cxnSp>
-        <p:nvCxnSpPr>
-          <p:cNvPr id="111" name="Elbow Connector 110">
-            <a:extLst>
-              <a:ext uri="{FF2B5EF4-FFF2-40B4-BE49-F238E27FC236}">
-                <a16:creationId xmlns:a16="http://schemas.microsoft.com/office/drawing/2014/main" id="{952B35AC-82CB-455F-E5E4-53C831E282F0}"/>
-              </a:ext>
-            </a:extLst>
-          </p:cNvPr>
-          <p:cNvCxnSpPr>
-            <a:cxnSpLocks/>
-          </p:cNvCxnSpPr>
-          <p:nvPr/>
-        </p:nvCxnSpPr>
-        <p:spPr>
-          <a:xfrm>
-            <a:off x="113818" y="5766021"/>
-            <a:ext cx="973837" cy="12700"/>
-          </a:xfrm>
-          <a:prstGeom prst="bentConnector3">
-            <a:avLst>
-              <a:gd name="adj1" fmla="val 50000"/>
-            </a:avLst>
-          </a:prstGeom>
-          <a:ln w="38100">
-            <a:tailEnd type="triangle"/>
-          </a:ln>
-        </p:spPr>
-        <p:style>
-          <a:lnRef idx="2">
-            <a:schemeClr val="dk1"/>
-          </a:lnRef>
-          <a:fillRef idx="0">
-            <a:schemeClr val="dk1"/>
-          </a:fillRef>
-          <a:effectRef idx="1">
-            <a:schemeClr val="dk1"/>
-          </a:effectRef>
-          <a:fontRef idx="minor">
-            <a:schemeClr val="tx1"/>
-          </a:fontRef>
-        </p:style>
-      </p:cxnSp>
-      <p:cxnSp>
-        <p:nvCxnSpPr>
-          <p:cNvPr id="115" name="Elbow Connector 114">
-            <a:extLst>
-              <a:ext uri="{FF2B5EF4-FFF2-40B4-BE49-F238E27FC236}">
-                <a16:creationId xmlns:a16="http://schemas.microsoft.com/office/drawing/2014/main" id="{20507E83-C5D4-4F4B-90DB-6F40B07BE1A8}"/>
-              </a:ext>
-            </a:extLst>
-          </p:cNvPr>
-          <p:cNvCxnSpPr>
-            <a:cxnSpLocks/>
-          </p:cNvCxnSpPr>
-          <p:nvPr/>
-        </p:nvCxnSpPr>
-        <p:spPr>
-          <a:xfrm>
-            <a:off x="113817" y="6153305"/>
-            <a:ext cx="973837" cy="12700"/>
-          </a:xfrm>
-          <a:prstGeom prst="bentConnector3">
-            <a:avLst>
-              <a:gd name="adj1" fmla="val 50000"/>
-            </a:avLst>
-          </a:prstGeom>
-          <a:ln w="38100">
-            <a:prstDash val="dash"/>
-            <a:tailEnd type="triangle"/>
-          </a:ln>
-        </p:spPr>
-        <p:style>
-          <a:lnRef idx="2">
-            <a:schemeClr val="dk1"/>
-          </a:lnRef>
-          <a:fillRef idx="0">
-            <a:schemeClr val="dk1"/>
-          </a:fillRef>
-          <a:effectRef idx="1">
-            <a:schemeClr val="dk1"/>
-          </a:effectRef>
-          <a:fontRef idx="minor">
-            <a:schemeClr val="tx1"/>
-          </a:fontRef>
-        </p:style>
-      </p:cxnSp>
-      <p:sp>
-        <p:nvSpPr>
-          <p:cNvPr id="116" name="TextBox 115">
-            <a:extLst>
-              <a:ext uri="{FF2B5EF4-FFF2-40B4-BE49-F238E27FC236}">
-                <a16:creationId xmlns:a16="http://schemas.microsoft.com/office/drawing/2014/main" id="{CDF7C4B4-481B-CFB9-520F-47FB13DB5CF9}"/>
-              </a:ext>
-            </a:extLst>
-          </p:cNvPr>
-          <p:cNvSpPr txBox="1"/>
-          <p:nvPr/>
-        </p:nvSpPr>
-        <p:spPr>
-          <a:xfrm>
-            <a:off x="0" y="5325451"/>
-            <a:ext cx="775790" cy="461665"/>
-          </a:xfrm>
-          <a:prstGeom prst="rect">
-            <a:avLst/>
-          </a:prstGeom>
-          <a:noFill/>
-        </p:spPr>
-        <p:txBody>
-          <a:bodyPr wrap="none" rtlCol="0">
-            <a:spAutoFit/>
-          </a:bodyPr>
-          <a:lstStyle/>
+              <a:t>Recursive parameter </a:t>
+            </a:r>
+          </a:p>
           <a:p>
             <a:r>
               <a:rPr lang="en-US" sz="1200" noProof="1"/>
-              <a:t>Existing </a:t>
-            </a:r>
-          </a:p>
-          <a:p>
-            <a:r>
-              <a:rPr lang="en-US" sz="1200" noProof="1"/>
-              <a:t>interface</a:t>
-            </a:r>
-          </a:p>
-        </p:txBody>
-      </p:sp>
-      <p:sp>
-        <p:nvSpPr>
-          <p:cNvPr id="117" name="TextBox 116">
-            <a:extLst>
-              <a:ext uri="{FF2B5EF4-FFF2-40B4-BE49-F238E27FC236}">
-                <a16:creationId xmlns:a16="http://schemas.microsoft.com/office/drawing/2014/main" id="{F59F51D3-A45C-C4D7-AF2F-385CED4E30A9}"/>
-              </a:ext>
-            </a:extLst>
-          </p:cNvPr>
-          <p:cNvSpPr txBox="1"/>
-          <p:nvPr/>
-        </p:nvSpPr>
-        <p:spPr>
-          <a:xfrm>
-            <a:off x="-2816" y="5733829"/>
-            <a:ext cx="942117" cy="461665"/>
-          </a:xfrm>
-          <a:prstGeom prst="rect">
-            <a:avLst/>
-          </a:prstGeom>
-          <a:noFill/>
-        </p:spPr>
-        <p:txBody>
-          <a:bodyPr wrap="none" rtlCol="0">
-            <a:spAutoFit/>
-          </a:bodyPr>
-          <a:lstStyle/>
-          <a:p>
-            <a:r>
-              <a:rPr lang="en-US" sz="1200" noProof="1"/>
-              <a:t>Envisioned </a:t>
-            </a:r>
-          </a:p>
-          <a:p>
-            <a:r>
-              <a:rPr lang="en-US" sz="1200" noProof="1"/>
-              <a:t>interface</a:t>
-            </a:r>
-          </a:p>
-        </p:txBody>
-      </p:sp>
-      <p:cxnSp>
-        <p:nvCxnSpPr>
-          <p:cNvPr id="118" name="Elbow Connector 117">
-            <a:extLst>
-              <a:ext uri="{FF2B5EF4-FFF2-40B4-BE49-F238E27FC236}">
-                <a16:creationId xmlns:a16="http://schemas.microsoft.com/office/drawing/2014/main" id="{E6CEC6D7-D3DC-095E-3164-A2E1BD6864DB}"/>
-              </a:ext>
-            </a:extLst>
-          </p:cNvPr>
-          <p:cNvCxnSpPr>
-            <a:cxnSpLocks/>
-            <a:stCxn id="105" idx="1"/>
-            <a:endCxn id="65" idx="0"/>
-          </p:cNvCxnSpPr>
-          <p:nvPr/>
-        </p:nvCxnSpPr>
-        <p:spPr>
-          <a:xfrm rot="10800000" flipV="1">
-            <a:off x="5853452" y="423098"/>
-            <a:ext cx="1042863" cy="709799"/>
-          </a:xfrm>
-          <a:prstGeom prst="bentConnector2">
-            <a:avLst/>
-          </a:prstGeom>
-          <a:ln w="38100">
-            <a:prstDash val="dash"/>
-            <a:tailEnd type="triangle"/>
-          </a:ln>
-        </p:spPr>
-        <p:style>
-          <a:lnRef idx="2">
-            <a:schemeClr val="dk1"/>
-          </a:lnRef>
-          <a:fillRef idx="0">
-            <a:schemeClr val="dk1"/>
-          </a:fillRef>
-          <a:effectRef idx="1">
-            <a:schemeClr val="dk1"/>
-          </a:effectRef>
-          <a:fontRef idx="minor">
-            <a:schemeClr val="tx1"/>
-          </a:fontRef>
-        </p:style>
-      </p:cxnSp>
-      <p:sp>
-        <p:nvSpPr>
-          <p:cNvPr id="124" name="Rectangle 123">
-            <a:extLst>
-              <a:ext uri="{FF2B5EF4-FFF2-40B4-BE49-F238E27FC236}">
-                <a16:creationId xmlns:a16="http://schemas.microsoft.com/office/drawing/2014/main" id="{1144A2D0-F07C-EA52-335F-60FE264A2668}"/>
+              <a:t>estimation module</a:t>
+            </a:r>
+          </a:p>
+        </p:txBody>
+      </p:sp>
+      <p:sp>
+        <p:nvSpPr>
+          <p:cNvPr id="126" name="Rectangle 125">
+            <a:extLst>
+              <a:ext uri="{FF2B5EF4-FFF2-40B4-BE49-F238E27FC236}">
+                <a16:creationId xmlns:a16="http://schemas.microsoft.com/office/drawing/2014/main" id="{03988097-E540-FBB1-A6A2-926BB96D6A54}"/>
               </a:ext>
             </a:extLst>
           </p:cNvPr>
@@ -5781,14 +5638,17 @@
         </p:nvSpPr>
         <p:spPr>
           <a:xfrm>
-            <a:off x="7234824" y="1265682"/>
-            <a:ext cx="2210704" cy="1662292"/>
+            <a:off x="7617222" y="1757619"/>
+            <a:ext cx="1442598" cy="1354509"/>
           </a:xfrm>
           <a:prstGeom prst="rect">
             <a:avLst/>
           </a:prstGeom>
           <a:solidFill>
-            <a:srgbClr val="FFC000"/>
+            <a:schemeClr val="accent1">
+              <a:lumMod val="40000"/>
+              <a:lumOff val="60000"/>
+            </a:schemeClr>
           </a:solidFill>
         </p:spPr>
         <p:style>
@@ -5818,10 +5678,10 @@
       </p:sp>
       <p:sp>
         <p:nvSpPr>
-          <p:cNvPr id="125" name="TextBox 124">
-            <a:extLst>
-              <a:ext uri="{FF2B5EF4-FFF2-40B4-BE49-F238E27FC236}">
-                <a16:creationId xmlns:a16="http://schemas.microsoft.com/office/drawing/2014/main" id="{FAFF869A-5F75-CC43-390D-4D58E6A26F21}"/>
+          <p:cNvPr id="127" name="TextBox 126">
+            <a:extLst>
+              <a:ext uri="{FF2B5EF4-FFF2-40B4-BE49-F238E27FC236}">
+                <a16:creationId xmlns:a16="http://schemas.microsoft.com/office/drawing/2014/main" id="{07D01FEE-04EE-0BCC-AFAB-9D6DDB5D809D}"/>
               </a:ext>
             </a:extLst>
           </p:cNvPr>
@@ -5830,8 +5690,8 @@
         </p:nvSpPr>
         <p:spPr>
           <a:xfrm>
-            <a:off x="7213997" y="1253899"/>
-            <a:ext cx="1593450" cy="461665"/>
+            <a:off x="7615648" y="1765871"/>
+            <a:ext cx="944489" cy="461665"/>
           </a:xfrm>
           <a:prstGeom prst="rect">
             <a:avLst/>
@@ -5846,23 +5706,23 @@
           <a:p>
             <a:r>
               <a:rPr lang="en-US" sz="1200" noProof="1"/>
-              <a:t>Recursive parameter </a:t>
+              <a:t>PSI-batch </a:t>
             </a:r>
           </a:p>
           <a:p>
             <a:r>
               <a:rPr lang="en-US" sz="1200" noProof="1"/>
-              <a:t>estimation module</a:t>
-            </a:r>
-          </a:p>
-        </p:txBody>
-      </p:sp>
-      <p:sp>
-        <p:nvSpPr>
-          <p:cNvPr id="126" name="Rectangle 125">
-            <a:extLst>
-              <a:ext uri="{FF2B5EF4-FFF2-40B4-BE49-F238E27FC236}">
-                <a16:creationId xmlns:a16="http://schemas.microsoft.com/office/drawing/2014/main" id="{03988097-E540-FBB1-A6A2-926BB96D6A54}"/>
+              <a:t>submodule</a:t>
+            </a:r>
+          </a:p>
+        </p:txBody>
+      </p:sp>
+      <p:sp>
+        <p:nvSpPr>
+          <p:cNvPr id="129" name="Rectangle 128">
+            <a:extLst>
+              <a:ext uri="{FF2B5EF4-FFF2-40B4-BE49-F238E27FC236}">
+                <a16:creationId xmlns:a16="http://schemas.microsoft.com/office/drawing/2014/main" id="{1160CC15-03BD-B69B-2A10-1A7B2EF2B6E0}"/>
               </a:ext>
             </a:extLst>
           </p:cNvPr>
@@ -5871,16 +5731,16 @@
         </p:nvSpPr>
         <p:spPr>
           <a:xfrm>
-            <a:off x="7617222" y="1757620"/>
-            <a:ext cx="1442598" cy="1170354"/>
+            <a:off x="7752127" y="2285753"/>
+            <a:ext cx="1055320" cy="276998"/>
           </a:xfrm>
           <a:prstGeom prst="rect">
             <a:avLst/>
           </a:prstGeom>
           <a:solidFill>
-            <a:schemeClr val="accent1">
-              <a:lumMod val="40000"/>
-              <a:lumOff val="60000"/>
+            <a:schemeClr val="accent6">
+              <a:lumMod val="60000"/>
+              <a:lumOff val="40000"/>
             </a:schemeClr>
           </a:solidFill>
         </p:spPr>
@@ -5911,10 +5771,10 @@
       </p:sp>
       <p:sp>
         <p:nvSpPr>
-          <p:cNvPr id="127" name="TextBox 126">
-            <a:extLst>
-              <a:ext uri="{FF2B5EF4-FFF2-40B4-BE49-F238E27FC236}">
-                <a16:creationId xmlns:a16="http://schemas.microsoft.com/office/drawing/2014/main" id="{07D01FEE-04EE-0BCC-AFAB-9D6DDB5D809D}"/>
+          <p:cNvPr id="130" name="TextBox 129">
+            <a:extLst>
+              <a:ext uri="{FF2B5EF4-FFF2-40B4-BE49-F238E27FC236}">
+                <a16:creationId xmlns:a16="http://schemas.microsoft.com/office/drawing/2014/main" id="{C060D362-EF78-B053-503E-9CE209BA54FB}"/>
               </a:ext>
             </a:extLst>
           </p:cNvPr>
@@ -5923,8 +5783,8 @@
         </p:nvSpPr>
         <p:spPr>
           <a:xfrm>
-            <a:off x="7615648" y="1765871"/>
-            <a:ext cx="944489" cy="461665"/>
+            <a:off x="7753538" y="2285753"/>
+            <a:ext cx="1127488" cy="276999"/>
           </a:xfrm>
           <a:prstGeom prst="rect">
             <a:avLst/>
@@ -5939,23 +5799,17 @@
           <a:p>
             <a:r>
               <a:rPr lang="en-US" sz="1200" noProof="1"/>
-              <a:t>PSI-batch </a:t>
-            </a:r>
-          </a:p>
-          <a:p>
-            <a:r>
-              <a:rPr lang="en-US" sz="1200" noProof="1"/>
-              <a:t>submodule</a:t>
-            </a:r>
-          </a:p>
-        </p:txBody>
-      </p:sp>
-      <p:sp>
-        <p:nvSpPr>
-          <p:cNvPr id="129" name="Rectangle 128">
-            <a:extLst>
-              <a:ext uri="{FF2B5EF4-FFF2-40B4-BE49-F238E27FC236}">
-                <a16:creationId xmlns:a16="http://schemas.microsoft.com/office/drawing/2014/main" id="{1160CC15-03BD-B69B-2A10-1A7B2EF2B6E0}"/>
+              <a:t>DePSI_matlab</a:t>
+            </a:r>
+          </a:p>
+        </p:txBody>
+      </p:sp>
+      <p:sp>
+        <p:nvSpPr>
+          <p:cNvPr id="143" name="Rectangle 142">
+            <a:extLst>
+              <a:ext uri="{FF2B5EF4-FFF2-40B4-BE49-F238E27FC236}">
+                <a16:creationId xmlns:a16="http://schemas.microsoft.com/office/drawing/2014/main" id="{523D6039-BA4E-FB36-B686-8C0302EE9B06}"/>
               </a:ext>
             </a:extLst>
           </p:cNvPr>
@@ -5964,17 +5818,14 @@
         </p:nvSpPr>
         <p:spPr>
           <a:xfrm>
-            <a:off x="7752127" y="2285753"/>
-            <a:ext cx="1055320" cy="276998"/>
+            <a:off x="9826352" y="1291053"/>
+            <a:ext cx="2210704" cy="2902399"/>
           </a:xfrm>
           <a:prstGeom prst="rect">
             <a:avLst/>
           </a:prstGeom>
           <a:solidFill>
-            <a:schemeClr val="accent6">
-              <a:lumMod val="60000"/>
-              <a:lumOff val="40000"/>
-            </a:schemeClr>
+            <a:srgbClr val="FFC000"/>
           </a:solidFill>
         </p:spPr>
         <p:style>
@@ -6004,10 +5855,10 @@
       </p:sp>
       <p:sp>
         <p:nvSpPr>
-          <p:cNvPr id="130" name="TextBox 129">
-            <a:extLst>
-              <a:ext uri="{FF2B5EF4-FFF2-40B4-BE49-F238E27FC236}">
-                <a16:creationId xmlns:a16="http://schemas.microsoft.com/office/drawing/2014/main" id="{C060D362-EF78-B053-503E-9CE209BA54FB}"/>
+          <p:cNvPr id="144" name="TextBox 143">
+            <a:extLst>
+              <a:ext uri="{FF2B5EF4-FFF2-40B4-BE49-F238E27FC236}">
+                <a16:creationId xmlns:a16="http://schemas.microsoft.com/office/drawing/2014/main" id="{DBFA2ABA-391B-C98D-A4EA-542DFFE65B50}"/>
               </a:ext>
             </a:extLst>
           </p:cNvPr>
@@ -6016,8 +5867,8 @@
         </p:nvSpPr>
         <p:spPr>
           <a:xfrm>
-            <a:off x="7753538" y="2285753"/>
-            <a:ext cx="587020" cy="276999"/>
+            <a:off x="9805525" y="1279271"/>
+            <a:ext cx="2158668" cy="461665"/>
           </a:xfrm>
           <a:prstGeom prst="rect">
             <a:avLst/>
@@ -6032,62 +5883,23 @@
           <a:p>
             <a:r>
               <a:rPr lang="en-US" sz="1200" noProof="1"/>
-              <a:t>DePSI</a:t>
-            </a:r>
-          </a:p>
-        </p:txBody>
-      </p:sp>
-      <p:cxnSp>
-        <p:nvCxnSpPr>
-          <p:cNvPr id="140" name="Elbow Connector 139">
-            <a:extLst>
-              <a:ext uri="{FF2B5EF4-FFF2-40B4-BE49-F238E27FC236}">
-                <a16:creationId xmlns:a16="http://schemas.microsoft.com/office/drawing/2014/main" id="{F2BD8F2E-331B-FC73-1ED0-016EE89404B5}"/>
-              </a:ext>
-            </a:extLst>
-          </p:cNvPr>
-          <p:cNvCxnSpPr>
-            <a:cxnSpLocks/>
-            <a:stCxn id="67" idx="3"/>
-            <a:endCxn id="130" idx="1"/>
-          </p:cNvCxnSpPr>
-          <p:nvPr/>
-        </p:nvCxnSpPr>
-        <p:spPr>
-          <a:xfrm>
-            <a:off x="6429547" y="1719951"/>
-            <a:ext cx="1323991" cy="704302"/>
-          </a:xfrm>
-          <a:prstGeom prst="bentConnector3">
-            <a:avLst>
-              <a:gd name="adj1" fmla="val 43721"/>
-            </a:avLst>
-          </a:prstGeom>
-          <a:ln w="38100">
-            <a:tailEnd type="triangle"/>
-          </a:ln>
-        </p:spPr>
-        <p:style>
-          <a:lnRef idx="2">
-            <a:schemeClr val="dk1"/>
-          </a:lnRef>
-          <a:fillRef idx="0">
-            <a:schemeClr val="dk1"/>
-          </a:fillRef>
-          <a:effectRef idx="1">
-            <a:schemeClr val="dk1"/>
-          </a:effectRef>
-          <a:fontRef idx="minor">
-            <a:schemeClr val="tx1"/>
-          </a:fontRef>
-        </p:style>
-      </p:cxnSp>
-      <p:sp>
-        <p:nvSpPr>
-          <p:cNvPr id="143" name="Rectangle 142">
-            <a:extLst>
-              <a:ext uri="{FF2B5EF4-FFF2-40B4-BE49-F238E27FC236}">
-                <a16:creationId xmlns:a16="http://schemas.microsoft.com/office/drawing/2014/main" id="{523D6039-BA4E-FB36-B686-8C0302EE9B06}"/>
+              <a:t>Interactive interpretation</a:t>
+            </a:r>
+          </a:p>
+          <a:p>
+            <a:r>
+              <a:rPr lang="en-US" sz="1200" noProof="1"/>
+              <a:t>interface (dashboard) module</a:t>
+            </a:r>
+          </a:p>
+        </p:txBody>
+      </p:sp>
+      <p:sp>
+        <p:nvSpPr>
+          <p:cNvPr id="145" name="Rectangle 144">
+            <a:extLst>
+              <a:ext uri="{FF2B5EF4-FFF2-40B4-BE49-F238E27FC236}">
+                <a16:creationId xmlns:a16="http://schemas.microsoft.com/office/drawing/2014/main" id="{C5A91BDF-D3CF-8552-E2FD-F92130C3ABC3}"/>
               </a:ext>
             </a:extLst>
           </p:cNvPr>
@@ -6096,14 +5908,17 @@
         </p:nvSpPr>
         <p:spPr>
           <a:xfrm>
-            <a:off x="9826352" y="1291053"/>
-            <a:ext cx="2210704" cy="2902399"/>
+            <a:off x="10208750" y="1782992"/>
+            <a:ext cx="1425546" cy="2189414"/>
           </a:xfrm>
           <a:prstGeom prst="rect">
             <a:avLst/>
           </a:prstGeom>
           <a:solidFill>
-            <a:srgbClr val="FFC000"/>
+            <a:schemeClr val="accent1">
+              <a:lumMod val="40000"/>
+              <a:lumOff val="60000"/>
+            </a:schemeClr>
           </a:solidFill>
         </p:spPr>
         <p:style>
@@ -6133,10 +5948,10 @@
       </p:sp>
       <p:sp>
         <p:nvSpPr>
-          <p:cNvPr id="144" name="TextBox 143">
-            <a:extLst>
-              <a:ext uri="{FF2B5EF4-FFF2-40B4-BE49-F238E27FC236}">
-                <a16:creationId xmlns:a16="http://schemas.microsoft.com/office/drawing/2014/main" id="{DBFA2ABA-391B-C98D-A4EA-542DFFE65B50}"/>
+          <p:cNvPr id="146" name="TextBox 145">
+            <a:extLst>
+              <a:ext uri="{FF2B5EF4-FFF2-40B4-BE49-F238E27FC236}">
+                <a16:creationId xmlns:a16="http://schemas.microsoft.com/office/drawing/2014/main" id="{07935329-29A4-0EF4-7F8D-7BFC7808E4CE}"/>
               </a:ext>
             </a:extLst>
           </p:cNvPr>
@@ -6145,8 +5960,8 @@
         </p:nvSpPr>
         <p:spPr>
           <a:xfrm>
-            <a:off x="9805525" y="1279271"/>
-            <a:ext cx="2158668" cy="461665"/>
+            <a:off x="10207176" y="1791243"/>
+            <a:ext cx="944489" cy="461665"/>
           </a:xfrm>
           <a:prstGeom prst="rect">
             <a:avLst/>
@@ -6161,23 +5976,23 @@
           <a:p>
             <a:r>
               <a:rPr lang="en-US" sz="1200" noProof="1"/>
-              <a:t>Interactive interpretation</a:t>
+              <a:t>PSI-batch </a:t>
             </a:r>
           </a:p>
           <a:p>
             <a:r>
               <a:rPr lang="en-US" sz="1200" noProof="1"/>
-              <a:t>interface (dashboard) module</a:t>
-            </a:r>
-          </a:p>
-        </p:txBody>
-      </p:sp>
-      <p:sp>
-        <p:nvSpPr>
-          <p:cNvPr id="145" name="Rectangle 144">
-            <a:extLst>
-              <a:ext uri="{FF2B5EF4-FFF2-40B4-BE49-F238E27FC236}">
-                <a16:creationId xmlns:a16="http://schemas.microsoft.com/office/drawing/2014/main" id="{C5A91BDF-D3CF-8552-E2FD-F92130C3ABC3}"/>
+              <a:t>submodule</a:t>
+            </a:r>
+          </a:p>
+        </p:txBody>
+      </p:sp>
+      <p:sp>
+        <p:nvSpPr>
+          <p:cNvPr id="147" name="Rectangle 146">
+            <a:extLst>
+              <a:ext uri="{FF2B5EF4-FFF2-40B4-BE49-F238E27FC236}">
+                <a16:creationId xmlns:a16="http://schemas.microsoft.com/office/drawing/2014/main" id="{5F4A150C-D58F-E04E-83DB-1C0BF2CBC931}"/>
               </a:ext>
             </a:extLst>
           </p:cNvPr>
@@ -6186,16 +6001,16 @@
         </p:nvSpPr>
         <p:spPr>
           <a:xfrm>
-            <a:off x="10208750" y="1782992"/>
-            <a:ext cx="1425546" cy="2189414"/>
+            <a:off x="10343655" y="2311125"/>
+            <a:ext cx="1055320" cy="276998"/>
           </a:xfrm>
           <a:prstGeom prst="rect">
             <a:avLst/>
           </a:prstGeom>
           <a:solidFill>
-            <a:schemeClr val="accent1">
-              <a:lumMod val="40000"/>
-              <a:lumOff val="60000"/>
+            <a:schemeClr val="accent6">
+              <a:lumMod val="60000"/>
+              <a:lumOff val="40000"/>
             </a:schemeClr>
           </a:solidFill>
         </p:spPr>
@@ -6226,10 +6041,10 @@
       </p:sp>
       <p:sp>
         <p:nvSpPr>
-          <p:cNvPr id="146" name="TextBox 145">
-            <a:extLst>
-              <a:ext uri="{FF2B5EF4-FFF2-40B4-BE49-F238E27FC236}">
-                <a16:creationId xmlns:a16="http://schemas.microsoft.com/office/drawing/2014/main" id="{07935329-29A4-0EF4-7F8D-7BFC7808E4CE}"/>
+          <p:cNvPr id="148" name="TextBox 147">
+            <a:extLst>
+              <a:ext uri="{FF2B5EF4-FFF2-40B4-BE49-F238E27FC236}">
+                <a16:creationId xmlns:a16="http://schemas.microsoft.com/office/drawing/2014/main" id="{6EC0BA02-C3A1-A936-10D2-C85838E6A902}"/>
               </a:ext>
             </a:extLst>
           </p:cNvPr>
@@ -6238,8 +6053,8 @@
         </p:nvSpPr>
         <p:spPr>
           <a:xfrm>
-            <a:off x="10207176" y="1791243"/>
-            <a:ext cx="944489" cy="461665"/>
+            <a:off x="10345066" y="2311125"/>
+            <a:ext cx="1016112" cy="276999"/>
           </a:xfrm>
           <a:prstGeom prst="rect">
             <a:avLst/>
@@ -6254,23 +6069,17 @@
           <a:p>
             <a:r>
               <a:rPr lang="en-US" sz="1200" noProof="1"/>
-              <a:t>PSI-batch </a:t>
-            </a:r>
-          </a:p>
-          <a:p>
-            <a:r>
-              <a:rPr lang="en-US" sz="1200" noProof="1"/>
-              <a:t>submodule</a:t>
-            </a:r>
-          </a:p>
-        </p:txBody>
-      </p:sp>
-      <p:sp>
-        <p:nvSpPr>
-          <p:cNvPr id="147" name="Rectangle 146">
-            <a:extLst>
-              <a:ext uri="{FF2B5EF4-FFF2-40B4-BE49-F238E27FC236}">
-                <a16:creationId xmlns:a16="http://schemas.microsoft.com/office/drawing/2014/main" id="{5F4A150C-D58F-E04E-83DB-1C0BF2CBC931}"/>
+              <a:t>create_MRM</a:t>
+            </a:r>
+          </a:p>
+        </p:txBody>
+      </p:sp>
+      <p:sp>
+        <p:nvSpPr>
+          <p:cNvPr id="149" name="Rectangle 148">
+            <a:extLst>
+              <a:ext uri="{FF2B5EF4-FFF2-40B4-BE49-F238E27FC236}">
+                <a16:creationId xmlns:a16="http://schemas.microsoft.com/office/drawing/2014/main" id="{852B3886-8E2B-1DA7-1B39-8F29B0B68A89}"/>
               </a:ext>
             </a:extLst>
           </p:cNvPr>
@@ -6279,7 +6088,7 @@
         </p:nvSpPr>
         <p:spPr>
           <a:xfrm>
-            <a:off x="10343655" y="2311125"/>
+            <a:off x="10357555" y="2711628"/>
             <a:ext cx="1055320" cy="276998"/>
           </a:xfrm>
           <a:prstGeom prst="rect">
@@ -6319,10 +6128,10 @@
       </p:sp>
       <p:sp>
         <p:nvSpPr>
-          <p:cNvPr id="148" name="TextBox 147">
-            <a:extLst>
-              <a:ext uri="{FF2B5EF4-FFF2-40B4-BE49-F238E27FC236}">
-                <a16:creationId xmlns:a16="http://schemas.microsoft.com/office/drawing/2014/main" id="{6EC0BA02-C3A1-A936-10D2-C85838E6A902}"/>
+          <p:cNvPr id="150" name="TextBox 149">
+            <a:extLst>
+              <a:ext uri="{FF2B5EF4-FFF2-40B4-BE49-F238E27FC236}">
+                <a16:creationId xmlns:a16="http://schemas.microsoft.com/office/drawing/2014/main" id="{7D8EF9C6-FACC-FE45-CBEF-A9BDC5CB411B}"/>
               </a:ext>
             </a:extLst>
           </p:cNvPr>
@@ -6331,8 +6140,8 @@
         </p:nvSpPr>
         <p:spPr>
           <a:xfrm>
-            <a:off x="10345066" y="2311125"/>
-            <a:ext cx="521297" cy="276999"/>
+            <a:off x="10358966" y="2711628"/>
+            <a:ext cx="953210" cy="276999"/>
           </a:xfrm>
           <a:prstGeom prst="rect">
             <a:avLst/>
@@ -6347,17 +6156,17 @@
           <a:p>
             <a:r>
               <a:rPr lang="en-US" sz="1200" noProof="1"/>
-              <a:t>MRM</a:t>
-            </a:r>
-          </a:p>
-        </p:txBody>
-      </p:sp>
-      <p:sp>
-        <p:nvSpPr>
-          <p:cNvPr id="149" name="Rectangle 148">
-            <a:extLst>
-              <a:ext uri="{FF2B5EF4-FFF2-40B4-BE49-F238E27FC236}">
-                <a16:creationId xmlns:a16="http://schemas.microsoft.com/office/drawing/2014/main" id="{852B3886-8E2B-1DA7-1B39-8F29B0B68A89}"/>
+              <a:t>DePSI_post</a:t>
+            </a:r>
+          </a:p>
+        </p:txBody>
+      </p:sp>
+      <p:sp>
+        <p:nvSpPr>
+          <p:cNvPr id="151" name="Rectangle 150">
+            <a:extLst>
+              <a:ext uri="{FF2B5EF4-FFF2-40B4-BE49-F238E27FC236}">
+                <a16:creationId xmlns:a16="http://schemas.microsoft.com/office/drawing/2014/main" id="{9F540C36-C0AC-522F-F1B4-D5B4BB6157DB}"/>
               </a:ext>
             </a:extLst>
           </p:cNvPr>
@@ -6366,8 +6175,8 @@
         </p:nvSpPr>
         <p:spPr>
           <a:xfrm>
-            <a:off x="10357555" y="2711628"/>
-            <a:ext cx="1055320" cy="276998"/>
+            <a:off x="10357555" y="3112129"/>
+            <a:ext cx="1055320" cy="404629"/>
           </a:xfrm>
           <a:prstGeom prst="rect">
             <a:avLst/>
@@ -6406,10 +6215,10 @@
       </p:sp>
       <p:sp>
         <p:nvSpPr>
-          <p:cNvPr id="150" name="TextBox 149">
-            <a:extLst>
-              <a:ext uri="{FF2B5EF4-FFF2-40B4-BE49-F238E27FC236}">
-                <a16:creationId xmlns:a16="http://schemas.microsoft.com/office/drawing/2014/main" id="{7D8EF9C6-FACC-FE45-CBEF-A9BDC5CB411B}"/>
+          <p:cNvPr id="152" name="TextBox 151">
+            <a:extLst>
+              <a:ext uri="{FF2B5EF4-FFF2-40B4-BE49-F238E27FC236}">
+                <a16:creationId xmlns:a16="http://schemas.microsoft.com/office/drawing/2014/main" id="{69F79757-248B-5C5A-89D4-DED1199F8B46}"/>
               </a:ext>
             </a:extLst>
           </p:cNvPr>
@@ -6418,8 +6227,8 @@
         </p:nvSpPr>
         <p:spPr>
           <a:xfrm>
-            <a:off x="10358966" y="2711628"/>
-            <a:ext cx="953210" cy="276999"/>
+            <a:off x="10352906" y="3089427"/>
+            <a:ext cx="1107996" cy="461665"/>
           </a:xfrm>
           <a:prstGeom prst="rect">
             <a:avLst/>
@@ -6427,24 +6236,24 @@
           <a:noFill/>
         </p:spPr>
         <p:txBody>
-          <a:bodyPr wrap="none" rtlCol="0">
+          <a:bodyPr wrap="square" rtlCol="0">
             <a:spAutoFit/>
           </a:bodyPr>
           <a:lstStyle/>
           <a:p>
             <a:r>
               <a:rPr lang="en-US" sz="1200" noProof="1"/>
-              <a:t>DePSI_post</a:t>
-            </a:r>
-          </a:p>
-        </p:txBody>
-      </p:sp>
-      <p:sp>
-        <p:nvSpPr>
-          <p:cNvPr id="151" name="Rectangle 150">
-            <a:extLst>
-              <a:ext uri="{FF2B5EF4-FFF2-40B4-BE49-F238E27FC236}">
-                <a16:creationId xmlns:a16="http://schemas.microsoft.com/office/drawing/2014/main" id="{9F540C36-C0AC-522F-F1B4-D5B4BB6157DB}"/>
+              <a:t>set_portal_upload_flag</a:t>
+            </a:r>
+          </a:p>
+        </p:txBody>
+      </p:sp>
+      <p:sp>
+        <p:nvSpPr>
+          <p:cNvPr id="153" name="Rectangle 152">
+            <a:extLst>
+              <a:ext uri="{FF2B5EF4-FFF2-40B4-BE49-F238E27FC236}">
+                <a16:creationId xmlns:a16="http://schemas.microsoft.com/office/drawing/2014/main" id="{976BE14B-5B8F-558F-9FA1-A78B73B24BD5}"/>
               </a:ext>
             </a:extLst>
           </p:cNvPr>
@@ -6453,8 +6262,8 @@
         </p:nvSpPr>
         <p:spPr>
           <a:xfrm>
-            <a:off x="10357555" y="3112129"/>
-            <a:ext cx="1055320" cy="404629"/>
+            <a:off x="10357555" y="3648529"/>
+            <a:ext cx="1055320" cy="276998"/>
           </a:xfrm>
           <a:prstGeom prst="rect">
             <a:avLst/>
@@ -6493,10 +6302,10 @@
       </p:sp>
       <p:sp>
         <p:nvSpPr>
-          <p:cNvPr id="152" name="TextBox 151">
-            <a:extLst>
-              <a:ext uri="{FF2B5EF4-FFF2-40B4-BE49-F238E27FC236}">
-                <a16:creationId xmlns:a16="http://schemas.microsoft.com/office/drawing/2014/main" id="{69F79757-248B-5C5A-89D4-DED1199F8B46}"/>
+          <p:cNvPr id="154" name="TextBox 153">
+            <a:extLst>
+              <a:ext uri="{FF2B5EF4-FFF2-40B4-BE49-F238E27FC236}">
+                <a16:creationId xmlns:a16="http://schemas.microsoft.com/office/drawing/2014/main" id="{35442FBC-82EE-E4DA-9A2E-34BED05DAAB4}"/>
               </a:ext>
             </a:extLst>
           </p:cNvPr>
@@ -6505,8 +6314,8 @@
         </p:nvSpPr>
         <p:spPr>
           <a:xfrm>
-            <a:off x="10352906" y="3089427"/>
-            <a:ext cx="1115434" cy="276999"/>
+            <a:off x="10356144" y="3651893"/>
+            <a:ext cx="1107996" cy="276999"/>
           </a:xfrm>
           <a:prstGeom prst="rect">
             <a:avLst/>
@@ -6521,17 +6330,158 @@
           <a:p>
             <a:r>
               <a:rPr lang="en-US" sz="1200" noProof="1"/>
-              <a:t>portal_upload</a:t>
-            </a:r>
-          </a:p>
-        </p:txBody>
-      </p:sp>
-      <p:sp>
-        <p:nvSpPr>
-          <p:cNvPr id="153" name="Rectangle 152">
-            <a:extLst>
-              <a:ext uri="{FF2B5EF4-FFF2-40B4-BE49-F238E27FC236}">
-                <a16:creationId xmlns:a16="http://schemas.microsoft.com/office/drawing/2014/main" id="{976BE14B-5B8F-558F-9FA1-A78B73B24BD5}"/>
+              <a:t>create_tarball</a:t>
+            </a:r>
+          </a:p>
+        </p:txBody>
+      </p:sp>
+      <p:cxnSp>
+        <p:nvCxnSpPr>
+          <p:cNvPr id="137" name="Elbow Connector 136">
+            <a:extLst>
+              <a:ext uri="{FF2B5EF4-FFF2-40B4-BE49-F238E27FC236}">
+                <a16:creationId xmlns:a16="http://schemas.microsoft.com/office/drawing/2014/main" id="{D44995DD-7903-6111-428E-D5E9E5F14DAA}"/>
+              </a:ext>
+            </a:extLst>
+          </p:cNvPr>
+          <p:cNvCxnSpPr>
+            <a:cxnSpLocks/>
+            <a:stCxn id="129" idx="3"/>
+            <a:endCxn id="148" idx="1"/>
+          </p:cNvCxnSpPr>
+          <p:nvPr/>
+        </p:nvCxnSpPr>
+        <p:spPr>
+          <a:xfrm>
+            <a:off x="8807447" y="2424252"/>
+            <a:ext cx="1537619" cy="25373"/>
+          </a:xfrm>
+          <a:prstGeom prst="bentConnector3">
+            <a:avLst>
+              <a:gd name="adj1" fmla="val 50000"/>
+            </a:avLst>
+          </a:prstGeom>
+          <a:ln w="38100">
+            <a:solidFill>
+              <a:srgbClr val="FF0000"/>
+            </a:solidFill>
+            <a:tailEnd type="triangle"/>
+          </a:ln>
+        </p:spPr>
+        <p:style>
+          <a:lnRef idx="2">
+            <a:schemeClr val="dk1"/>
+          </a:lnRef>
+          <a:fillRef idx="0">
+            <a:schemeClr val="dk1"/>
+          </a:fillRef>
+          <a:effectRef idx="1">
+            <a:schemeClr val="dk1"/>
+          </a:effectRef>
+          <a:fontRef idx="minor">
+            <a:schemeClr val="tx1"/>
+          </a:fontRef>
+        </p:style>
+      </p:cxnSp>
+      <p:cxnSp>
+        <p:nvCxnSpPr>
+          <p:cNvPr id="157" name="Elbow Connector 156">
+            <a:extLst>
+              <a:ext uri="{FF2B5EF4-FFF2-40B4-BE49-F238E27FC236}">
+                <a16:creationId xmlns:a16="http://schemas.microsoft.com/office/drawing/2014/main" id="{01617EC3-26F0-DB49-8A44-420E4EE98068}"/>
+              </a:ext>
+            </a:extLst>
+          </p:cNvPr>
+          <p:cNvCxnSpPr>
+            <a:cxnSpLocks/>
+            <a:stCxn id="147" idx="3"/>
+            <a:endCxn id="149" idx="3"/>
+          </p:cNvCxnSpPr>
+          <p:nvPr/>
+        </p:nvCxnSpPr>
+        <p:spPr>
+          <a:xfrm>
+            <a:off x="11398975" y="2449624"/>
+            <a:ext cx="13900" cy="400503"/>
+          </a:xfrm>
+          <a:prstGeom prst="bentConnector3">
+            <a:avLst>
+              <a:gd name="adj1" fmla="val 1317439"/>
+            </a:avLst>
+          </a:prstGeom>
+          <a:ln w="38100">
+            <a:solidFill>
+              <a:srgbClr val="FF0000"/>
+            </a:solidFill>
+            <a:tailEnd type="triangle"/>
+          </a:ln>
+        </p:spPr>
+        <p:style>
+          <a:lnRef idx="2">
+            <a:schemeClr val="dk1"/>
+          </a:lnRef>
+          <a:fillRef idx="0">
+            <a:schemeClr val="dk1"/>
+          </a:fillRef>
+          <a:effectRef idx="1">
+            <a:schemeClr val="dk1"/>
+          </a:effectRef>
+          <a:fontRef idx="minor">
+            <a:schemeClr val="tx1"/>
+          </a:fontRef>
+        </p:style>
+      </p:cxnSp>
+      <p:cxnSp>
+        <p:nvCxnSpPr>
+          <p:cNvPr id="164" name="Elbow Connector 163">
+            <a:extLst>
+              <a:ext uri="{FF2B5EF4-FFF2-40B4-BE49-F238E27FC236}">
+                <a16:creationId xmlns:a16="http://schemas.microsoft.com/office/drawing/2014/main" id="{0C3F13BC-9D82-FDF8-84A0-CBE3659343E9}"/>
+              </a:ext>
+            </a:extLst>
+          </p:cNvPr>
+          <p:cNvCxnSpPr>
+            <a:cxnSpLocks/>
+            <a:stCxn id="150" idx="1"/>
+            <a:endCxn id="154" idx="1"/>
+          </p:cNvCxnSpPr>
+          <p:nvPr/>
+        </p:nvCxnSpPr>
+        <p:spPr>
+          <a:xfrm rot="10800000" flipV="1">
+            <a:off x="10356144" y="2850127"/>
+            <a:ext cx="2822" cy="940265"/>
+          </a:xfrm>
+          <a:prstGeom prst="bentConnector3">
+            <a:avLst>
+              <a:gd name="adj1" fmla="val 8200638"/>
+            </a:avLst>
+          </a:prstGeom>
+          <a:ln w="38100">
+            <a:tailEnd type="triangle"/>
+          </a:ln>
+        </p:spPr>
+        <p:style>
+          <a:lnRef idx="2">
+            <a:schemeClr val="dk1"/>
+          </a:lnRef>
+          <a:fillRef idx="0">
+            <a:schemeClr val="dk1"/>
+          </a:fillRef>
+          <a:effectRef idx="1">
+            <a:schemeClr val="dk1"/>
+          </a:effectRef>
+          <a:fontRef idx="minor">
+            <a:schemeClr val="tx1"/>
+          </a:fontRef>
+        </p:style>
+      </p:cxnSp>
+      <p:sp>
+        <p:nvSpPr>
+          <p:cNvPr id="167" name="Rectangle 166">
+            <a:extLst>
+              <a:ext uri="{FF2B5EF4-FFF2-40B4-BE49-F238E27FC236}">
+                <a16:creationId xmlns:a16="http://schemas.microsoft.com/office/drawing/2014/main" id="{8EAADE57-A7F1-465E-A7F8-368C409F03D1}"/>
               </a:ext>
             </a:extLst>
           </p:cNvPr>
@@ -6540,17 +6490,14 @@
         </p:nvSpPr>
         <p:spPr>
           <a:xfrm>
-            <a:off x="10357555" y="3648529"/>
-            <a:ext cx="1055320" cy="276998"/>
+            <a:off x="9836748" y="4340598"/>
+            <a:ext cx="2210704" cy="2403103"/>
           </a:xfrm>
           <a:prstGeom prst="rect">
             <a:avLst/>
           </a:prstGeom>
           <a:solidFill>
-            <a:schemeClr val="accent6">
-              <a:lumMod val="60000"/>
-              <a:lumOff val="40000"/>
-            </a:schemeClr>
+            <a:srgbClr val="FFC000"/>
           </a:solidFill>
         </p:spPr>
         <p:style>
@@ -6580,10 +6527,10 @@
       </p:sp>
       <p:sp>
         <p:nvSpPr>
-          <p:cNvPr id="154" name="TextBox 153">
-            <a:extLst>
-              <a:ext uri="{FF2B5EF4-FFF2-40B4-BE49-F238E27FC236}">
-                <a16:creationId xmlns:a16="http://schemas.microsoft.com/office/drawing/2014/main" id="{35442FBC-82EE-E4DA-9A2E-34BED05DAAB4}"/>
+          <p:cNvPr id="168" name="TextBox 167">
+            <a:extLst>
+              <a:ext uri="{FF2B5EF4-FFF2-40B4-BE49-F238E27FC236}">
+                <a16:creationId xmlns:a16="http://schemas.microsoft.com/office/drawing/2014/main" id="{A2046404-B34A-31AD-A244-E7BB40544DAE}"/>
               </a:ext>
             </a:extLst>
           </p:cNvPr>
@@ -6592,8 +6539,8 @@
         </p:nvSpPr>
         <p:spPr>
           <a:xfrm>
-            <a:off x="10356144" y="3651893"/>
-            <a:ext cx="615297" cy="276999"/>
+            <a:off x="9815921" y="4328816"/>
+            <a:ext cx="1058431" cy="276999"/>
           </a:xfrm>
           <a:prstGeom prst="rect">
             <a:avLst/>
@@ -6608,197 +6555,17 @@
           <a:p>
             <a:r>
               <a:rPr lang="en-US" sz="1200" noProof="1"/>
-              <a:t>tarball</a:t>
-            </a:r>
-          </a:p>
-        </p:txBody>
-      </p:sp>
-      <p:cxnSp>
-        <p:nvCxnSpPr>
-          <p:cNvPr id="137" name="Elbow Connector 136">
-            <a:extLst>
-              <a:ext uri="{FF2B5EF4-FFF2-40B4-BE49-F238E27FC236}">
-                <a16:creationId xmlns:a16="http://schemas.microsoft.com/office/drawing/2014/main" id="{D44995DD-7903-6111-428E-D5E9E5F14DAA}"/>
-              </a:ext>
-            </a:extLst>
-          </p:cNvPr>
-          <p:cNvCxnSpPr>
-            <a:cxnSpLocks/>
-            <a:stCxn id="129" idx="3"/>
-            <a:endCxn id="148" idx="1"/>
-          </p:cNvCxnSpPr>
-          <p:nvPr/>
-        </p:nvCxnSpPr>
-        <p:spPr>
-          <a:xfrm>
-            <a:off x="8807447" y="2424252"/>
-            <a:ext cx="1537619" cy="25373"/>
-          </a:xfrm>
-          <a:prstGeom prst="bentConnector3">
-            <a:avLst>
-              <a:gd name="adj1" fmla="val 50000"/>
-            </a:avLst>
-          </a:prstGeom>
-          <a:ln w="38100">
-            <a:tailEnd type="triangle"/>
-          </a:ln>
-        </p:spPr>
-        <p:style>
-          <a:lnRef idx="2">
-            <a:schemeClr val="dk1"/>
-          </a:lnRef>
-          <a:fillRef idx="0">
-            <a:schemeClr val="dk1"/>
-          </a:fillRef>
-          <a:effectRef idx="1">
-            <a:schemeClr val="dk1"/>
-          </a:effectRef>
-          <a:fontRef idx="minor">
-            <a:schemeClr val="tx1"/>
-          </a:fontRef>
-        </p:style>
-      </p:cxnSp>
-      <p:cxnSp>
-        <p:nvCxnSpPr>
-          <p:cNvPr id="157" name="Elbow Connector 156">
-            <a:extLst>
-              <a:ext uri="{FF2B5EF4-FFF2-40B4-BE49-F238E27FC236}">
-                <a16:creationId xmlns:a16="http://schemas.microsoft.com/office/drawing/2014/main" id="{01617EC3-26F0-DB49-8A44-420E4EE98068}"/>
-              </a:ext>
-            </a:extLst>
-          </p:cNvPr>
-          <p:cNvCxnSpPr>
-            <a:cxnSpLocks/>
-            <a:stCxn id="147" idx="3"/>
-            <a:endCxn id="149" idx="3"/>
-          </p:cNvCxnSpPr>
-          <p:nvPr/>
-        </p:nvCxnSpPr>
-        <p:spPr>
-          <a:xfrm>
-            <a:off x="11398975" y="2449624"/>
-            <a:ext cx="13900" cy="400503"/>
-          </a:xfrm>
-          <a:prstGeom prst="bentConnector3">
-            <a:avLst>
-              <a:gd name="adj1" fmla="val 1317439"/>
-            </a:avLst>
-          </a:prstGeom>
-          <a:ln w="38100">
-            <a:tailEnd type="triangle"/>
-          </a:ln>
-        </p:spPr>
-        <p:style>
-          <a:lnRef idx="2">
-            <a:schemeClr val="dk1"/>
-          </a:lnRef>
-          <a:fillRef idx="0">
-            <a:schemeClr val="dk1"/>
-          </a:fillRef>
-          <a:effectRef idx="1">
-            <a:schemeClr val="dk1"/>
-          </a:effectRef>
-          <a:fontRef idx="minor">
-            <a:schemeClr val="tx1"/>
-          </a:fontRef>
-        </p:style>
-      </p:cxnSp>
-      <p:cxnSp>
-        <p:nvCxnSpPr>
-          <p:cNvPr id="161" name="Elbow Connector 160">
-            <a:extLst>
-              <a:ext uri="{FF2B5EF4-FFF2-40B4-BE49-F238E27FC236}">
-                <a16:creationId xmlns:a16="http://schemas.microsoft.com/office/drawing/2014/main" id="{871D9BCC-E78C-93BC-3871-5B4F055D0068}"/>
-              </a:ext>
-            </a:extLst>
-          </p:cNvPr>
-          <p:cNvCxnSpPr>
-            <a:cxnSpLocks/>
-            <a:stCxn id="150" idx="1"/>
-            <a:endCxn id="151" idx="1"/>
-          </p:cNvCxnSpPr>
-          <p:nvPr/>
-        </p:nvCxnSpPr>
-        <p:spPr>
-          <a:xfrm rot="10800000" flipV="1">
-            <a:off x="10357556" y="2850128"/>
-            <a:ext cx="1411" cy="464316"/>
-          </a:xfrm>
-          <a:prstGeom prst="bentConnector3">
-            <a:avLst>
-              <a:gd name="adj1" fmla="val 16301276"/>
-            </a:avLst>
-          </a:prstGeom>
-          <a:ln w="38100">
-            <a:tailEnd type="triangle"/>
-          </a:ln>
-        </p:spPr>
-        <p:style>
-          <a:lnRef idx="2">
-            <a:schemeClr val="dk1"/>
-          </a:lnRef>
-          <a:fillRef idx="0">
-            <a:schemeClr val="dk1"/>
-          </a:fillRef>
-          <a:effectRef idx="1">
-            <a:schemeClr val="dk1"/>
-          </a:effectRef>
-          <a:fontRef idx="minor">
-            <a:schemeClr val="tx1"/>
-          </a:fontRef>
-        </p:style>
-      </p:cxnSp>
-      <p:cxnSp>
-        <p:nvCxnSpPr>
-          <p:cNvPr id="164" name="Elbow Connector 163">
-            <a:extLst>
-              <a:ext uri="{FF2B5EF4-FFF2-40B4-BE49-F238E27FC236}">
-                <a16:creationId xmlns:a16="http://schemas.microsoft.com/office/drawing/2014/main" id="{0C3F13BC-9D82-FDF8-84A0-CBE3659343E9}"/>
-              </a:ext>
-            </a:extLst>
-          </p:cNvPr>
-          <p:cNvCxnSpPr>
-            <a:cxnSpLocks/>
-            <a:stCxn id="150" idx="1"/>
-            <a:endCxn id="154" idx="1"/>
-          </p:cNvCxnSpPr>
-          <p:nvPr/>
-        </p:nvCxnSpPr>
-        <p:spPr>
-          <a:xfrm rot="10800000" flipV="1">
-            <a:off x="10356144" y="2850127"/>
-            <a:ext cx="2822" cy="940265"/>
-          </a:xfrm>
-          <a:prstGeom prst="bentConnector3">
-            <a:avLst>
-              <a:gd name="adj1" fmla="val 8200638"/>
-            </a:avLst>
-          </a:prstGeom>
-          <a:ln w="38100">
-            <a:tailEnd type="triangle"/>
-          </a:ln>
-        </p:spPr>
-        <p:style>
-          <a:lnRef idx="2">
-            <a:schemeClr val="dk1"/>
-          </a:lnRef>
-          <a:fillRef idx="0">
-            <a:schemeClr val="dk1"/>
-          </a:fillRef>
-          <a:effectRef idx="1">
-            <a:schemeClr val="dk1"/>
-          </a:effectRef>
-          <a:fontRef idx="minor">
-            <a:schemeClr val="tx1"/>
-          </a:fontRef>
-        </p:style>
-      </p:cxnSp>
-      <p:sp>
-        <p:nvSpPr>
-          <p:cNvPr id="167" name="Rectangle 166">
-            <a:extLst>
-              <a:ext uri="{FF2B5EF4-FFF2-40B4-BE49-F238E27FC236}">
-                <a16:creationId xmlns:a16="http://schemas.microsoft.com/office/drawing/2014/main" id="{8EAADE57-A7F1-465E-A7F8-368C409F03D1}"/>
+              <a:t>Push module</a:t>
+            </a:r>
+          </a:p>
+        </p:txBody>
+      </p:sp>
+      <p:sp>
+        <p:nvSpPr>
+          <p:cNvPr id="169" name="Rectangle 168">
+            <a:extLst>
+              <a:ext uri="{FF2B5EF4-FFF2-40B4-BE49-F238E27FC236}">
+                <a16:creationId xmlns:a16="http://schemas.microsoft.com/office/drawing/2014/main" id="{A505DE79-729C-C209-5A5E-879F8C3FC1A1}"/>
               </a:ext>
             </a:extLst>
           </p:cNvPr>
@@ -6807,14 +6574,17 @@
         </p:nvSpPr>
         <p:spPr>
           <a:xfrm>
-            <a:off x="9836748" y="4340598"/>
-            <a:ext cx="2210704" cy="2403103"/>
+            <a:off x="10208750" y="4664108"/>
+            <a:ext cx="1425546" cy="716680"/>
           </a:xfrm>
           <a:prstGeom prst="rect">
             <a:avLst/>
           </a:prstGeom>
           <a:solidFill>
-            <a:srgbClr val="FFC000"/>
+            <a:schemeClr val="accent1">
+              <a:lumMod val="40000"/>
+              <a:lumOff val="60000"/>
+            </a:schemeClr>
           </a:solidFill>
         </p:spPr>
         <p:style>
@@ -6844,10 +6614,10 @@
       </p:sp>
       <p:sp>
         <p:nvSpPr>
-          <p:cNvPr id="168" name="TextBox 167">
-            <a:extLst>
-              <a:ext uri="{FF2B5EF4-FFF2-40B4-BE49-F238E27FC236}">
-                <a16:creationId xmlns:a16="http://schemas.microsoft.com/office/drawing/2014/main" id="{A2046404-B34A-31AD-A244-E7BB40544DAE}"/>
+          <p:cNvPr id="170" name="TextBox 169">
+            <a:extLst>
+              <a:ext uri="{FF2B5EF4-FFF2-40B4-BE49-F238E27FC236}">
+                <a16:creationId xmlns:a16="http://schemas.microsoft.com/office/drawing/2014/main" id="{3E96B55C-FAE6-32E1-D6EE-719868282BE4}"/>
               </a:ext>
             </a:extLst>
           </p:cNvPr>
@@ -6856,8 +6626,8 @@
         </p:nvSpPr>
         <p:spPr>
           <a:xfrm>
-            <a:off x="9815921" y="4328816"/>
-            <a:ext cx="1058431" cy="276999"/>
+            <a:off x="10207176" y="4672358"/>
+            <a:ext cx="1383712" cy="276999"/>
           </a:xfrm>
           <a:prstGeom prst="rect">
             <a:avLst/>
@@ -6872,17 +6642,17 @@
           <a:p>
             <a:r>
               <a:rPr lang="en-US" sz="1200" noProof="1"/>
-              <a:t>Push module</a:t>
-            </a:r>
-          </a:p>
-        </p:txBody>
-      </p:sp>
-      <p:sp>
-        <p:nvSpPr>
-          <p:cNvPr id="169" name="Rectangle 168">
-            <a:extLst>
-              <a:ext uri="{FF2B5EF4-FFF2-40B4-BE49-F238E27FC236}">
-                <a16:creationId xmlns:a16="http://schemas.microsoft.com/office/drawing/2014/main" id="{A505DE79-729C-C209-5A5E-879F8C3FC1A1}"/>
+              <a:t>Email  submodule</a:t>
+            </a:r>
+          </a:p>
+        </p:txBody>
+      </p:sp>
+      <p:sp>
+        <p:nvSpPr>
+          <p:cNvPr id="171" name="Rectangle 170">
+            <a:extLst>
+              <a:ext uri="{FF2B5EF4-FFF2-40B4-BE49-F238E27FC236}">
+                <a16:creationId xmlns:a16="http://schemas.microsoft.com/office/drawing/2014/main" id="{7292B625-71D3-CDE8-252C-F778E3094B89}"/>
               </a:ext>
             </a:extLst>
           </p:cNvPr>
@@ -6891,16 +6661,16 @@
         </p:nvSpPr>
         <p:spPr>
           <a:xfrm>
-            <a:off x="10208750" y="4664108"/>
-            <a:ext cx="1425546" cy="716680"/>
+            <a:off x="10345748" y="5017564"/>
+            <a:ext cx="1055320" cy="276998"/>
           </a:xfrm>
           <a:prstGeom prst="rect">
             <a:avLst/>
           </a:prstGeom>
           <a:solidFill>
-            <a:schemeClr val="accent1">
-              <a:lumMod val="40000"/>
-              <a:lumOff val="60000"/>
+            <a:schemeClr val="accent6">
+              <a:lumMod val="60000"/>
+              <a:lumOff val="40000"/>
             </a:schemeClr>
           </a:solidFill>
         </p:spPr>
@@ -6931,10 +6701,10 @@
       </p:sp>
       <p:sp>
         <p:nvSpPr>
-          <p:cNvPr id="170" name="TextBox 169">
-            <a:extLst>
-              <a:ext uri="{FF2B5EF4-FFF2-40B4-BE49-F238E27FC236}">
-                <a16:creationId xmlns:a16="http://schemas.microsoft.com/office/drawing/2014/main" id="{3E96B55C-FAE6-32E1-D6EE-719868282BE4}"/>
+          <p:cNvPr id="172" name="TextBox 171">
+            <a:extLst>
+              <a:ext uri="{FF2B5EF4-FFF2-40B4-BE49-F238E27FC236}">
+                <a16:creationId xmlns:a16="http://schemas.microsoft.com/office/drawing/2014/main" id="{696E6790-11D2-7B3F-FDF5-F1AB853FD09F}"/>
               </a:ext>
             </a:extLst>
           </p:cNvPr>
@@ -6943,8 +6713,8 @@
         </p:nvSpPr>
         <p:spPr>
           <a:xfrm>
-            <a:off x="10207176" y="4672358"/>
-            <a:ext cx="1383712" cy="276999"/>
+            <a:off x="10347159" y="5017564"/>
+            <a:ext cx="556563" cy="276999"/>
           </a:xfrm>
           <a:prstGeom prst="rect">
             <a:avLst/>
@@ -6959,17 +6729,17 @@
           <a:p>
             <a:r>
               <a:rPr lang="en-US" sz="1200" noProof="1"/>
-              <a:t>Email  submodule</a:t>
-            </a:r>
-          </a:p>
-        </p:txBody>
-      </p:sp>
-      <p:sp>
-        <p:nvSpPr>
-          <p:cNvPr id="171" name="Rectangle 170">
-            <a:extLst>
-              <a:ext uri="{FF2B5EF4-FFF2-40B4-BE49-F238E27FC236}">
-                <a16:creationId xmlns:a16="http://schemas.microsoft.com/office/drawing/2014/main" id="{7292B625-71D3-CDE8-252C-F778E3094B89}"/>
+              <a:t>email</a:t>
+            </a:r>
+          </a:p>
+        </p:txBody>
+      </p:sp>
+      <p:sp>
+        <p:nvSpPr>
+          <p:cNvPr id="182" name="Rectangle 181">
+            <a:extLst>
+              <a:ext uri="{FF2B5EF4-FFF2-40B4-BE49-F238E27FC236}">
+                <a16:creationId xmlns:a16="http://schemas.microsoft.com/office/drawing/2014/main" id="{3F92EDA8-08F4-D2D7-B5FD-A87BBD6539B1}"/>
               </a:ext>
             </a:extLst>
           </p:cNvPr>
@@ -6978,16 +6748,16 @@
         </p:nvSpPr>
         <p:spPr>
           <a:xfrm>
-            <a:off x="10345748" y="5017564"/>
-            <a:ext cx="1055320" cy="276998"/>
+            <a:off x="10208750" y="5558696"/>
+            <a:ext cx="1425546" cy="1115235"/>
           </a:xfrm>
           <a:prstGeom prst="rect">
             <a:avLst/>
           </a:prstGeom>
           <a:solidFill>
-            <a:schemeClr val="accent6">
-              <a:lumMod val="60000"/>
-              <a:lumOff val="40000"/>
+            <a:schemeClr val="accent1">
+              <a:lumMod val="40000"/>
+              <a:lumOff val="60000"/>
             </a:schemeClr>
           </a:solidFill>
         </p:spPr>
@@ -7018,10 +6788,10 @@
       </p:sp>
       <p:sp>
         <p:nvSpPr>
-          <p:cNvPr id="172" name="TextBox 171">
-            <a:extLst>
-              <a:ext uri="{FF2B5EF4-FFF2-40B4-BE49-F238E27FC236}">
-                <a16:creationId xmlns:a16="http://schemas.microsoft.com/office/drawing/2014/main" id="{696E6790-11D2-7B3F-FDF5-F1AB853FD09F}"/>
+          <p:cNvPr id="183" name="TextBox 182">
+            <a:extLst>
+              <a:ext uri="{FF2B5EF4-FFF2-40B4-BE49-F238E27FC236}">
+                <a16:creationId xmlns:a16="http://schemas.microsoft.com/office/drawing/2014/main" id="{38DA1E40-626B-9DCB-C92E-3FC2F2D19000}"/>
               </a:ext>
             </a:extLst>
           </p:cNvPr>
@@ -7030,8 +6800,8 @@
         </p:nvSpPr>
         <p:spPr>
           <a:xfrm>
-            <a:off x="10347159" y="5017564"/>
-            <a:ext cx="556563" cy="276999"/>
+            <a:off x="10207176" y="5566947"/>
+            <a:ext cx="1104854" cy="461665"/>
           </a:xfrm>
           <a:prstGeom prst="rect">
             <a:avLst/>
@@ -7046,17 +6816,23 @@
           <a:p>
             <a:r>
               <a:rPr lang="en-US" sz="1200" noProof="1"/>
-              <a:t>email</a:t>
-            </a:r>
-          </a:p>
-        </p:txBody>
-      </p:sp>
-      <p:sp>
-        <p:nvSpPr>
-          <p:cNvPr id="182" name="Rectangle 181">
-            <a:extLst>
-              <a:ext uri="{FF2B5EF4-FFF2-40B4-BE49-F238E27FC236}">
-                <a16:creationId xmlns:a16="http://schemas.microsoft.com/office/drawing/2014/main" id="{3F92EDA8-08F4-D2D7-B5FD-A87BBD6539B1}"/>
+              <a:t>Portal upload </a:t>
+            </a:r>
+          </a:p>
+          <a:p>
+            <a:r>
+              <a:rPr lang="en-US" sz="1200" noProof="1"/>
+              <a:t>submodule</a:t>
+            </a:r>
+          </a:p>
+        </p:txBody>
+      </p:sp>
+      <p:sp>
+        <p:nvSpPr>
+          <p:cNvPr id="190" name="Rectangle 189">
+            <a:extLst>
+              <a:ext uri="{FF2B5EF4-FFF2-40B4-BE49-F238E27FC236}">
+                <a16:creationId xmlns:a16="http://schemas.microsoft.com/office/drawing/2014/main" id="{0A48B503-CC52-02E4-5A82-C267AF970A4A}"/>
               </a:ext>
             </a:extLst>
           </p:cNvPr>
@@ -7065,16 +6841,16 @@
         </p:nvSpPr>
         <p:spPr>
           <a:xfrm>
-            <a:off x="10208750" y="5558696"/>
-            <a:ext cx="1425546" cy="1115235"/>
+            <a:off x="10269814" y="6089789"/>
+            <a:ext cx="1200418" cy="477266"/>
           </a:xfrm>
           <a:prstGeom prst="rect">
             <a:avLst/>
           </a:prstGeom>
           <a:solidFill>
-            <a:schemeClr val="accent1">
-              <a:lumMod val="40000"/>
-              <a:lumOff val="60000"/>
+            <a:schemeClr val="accent2">
+              <a:lumMod val="60000"/>
+              <a:lumOff val="40000"/>
             </a:schemeClr>
           </a:solidFill>
         </p:spPr>
@@ -7103,12 +6879,48 @@
           </a:p>
         </p:txBody>
       </p:sp>
-      <p:sp>
-        <p:nvSpPr>
-          <p:cNvPr id="183" name="TextBox 182">
-            <a:extLst>
-              <a:ext uri="{FF2B5EF4-FFF2-40B4-BE49-F238E27FC236}">
-                <a16:creationId xmlns:a16="http://schemas.microsoft.com/office/drawing/2014/main" id="{38DA1E40-626B-9DCB-C92E-3FC2F2D19000}"/>
+      <p:pic>
+        <p:nvPicPr>
+          <p:cNvPr id="191" name="Graphic 190" descr="Repeat with solid fill">
+            <a:extLst>
+              <a:ext uri="{FF2B5EF4-FFF2-40B4-BE49-F238E27FC236}">
+                <a16:creationId xmlns:a16="http://schemas.microsoft.com/office/drawing/2014/main" id="{CABE0660-E635-ADCA-3A9D-231B14C1C86D}"/>
+              </a:ext>
+            </a:extLst>
+          </p:cNvPr>
+          <p:cNvPicPr>
+            <a:picLocks noChangeAspect="1"/>
+          </p:cNvPicPr>
+          <p:nvPr/>
+        </p:nvPicPr>
+        <p:blipFill>
+          <a:blip>
+            <a:extLst>
+              <a:ext uri="{96DAC541-7B7A-43D3-8B79-37D633B846F1}">
+                <asvg:svgBlip xmlns:asvg="http://schemas.microsoft.com/office/drawing/2016/SVG/main" r:embed="rId2"/>
+              </a:ext>
+            </a:extLst>
+          </a:blip>
+          <a:stretch>
+            <a:fillRect/>
+          </a:stretch>
+        </p:blipFill>
+        <p:spPr>
+          <a:xfrm>
+            <a:off x="10131849" y="5876255"/>
+            <a:ext cx="366563" cy="366563"/>
+          </a:xfrm>
+          <a:prstGeom prst="rect">
+            <a:avLst/>
+          </a:prstGeom>
+        </p:spPr>
+      </p:pic>
+      <p:sp>
+        <p:nvSpPr>
+          <p:cNvPr id="192" name="TextBox 191">
+            <a:extLst>
+              <a:ext uri="{FF2B5EF4-FFF2-40B4-BE49-F238E27FC236}">
+                <a16:creationId xmlns:a16="http://schemas.microsoft.com/office/drawing/2014/main" id="{5B009463-94DF-6736-3FA6-645C1725284A}"/>
               </a:ext>
             </a:extLst>
           </p:cNvPr>
@@ -7117,8 +6929,8 @@
         </p:nvSpPr>
         <p:spPr>
           <a:xfrm>
-            <a:off x="10207176" y="5566947"/>
-            <a:ext cx="1104854" cy="461665"/>
+            <a:off x="10207176" y="6079846"/>
+            <a:ext cx="1220078" cy="461665"/>
           </a:xfrm>
           <a:prstGeom prst="rect">
             <a:avLst/>
@@ -7133,23 +6945,155 @@
           <a:p>
             <a:r>
               <a:rPr lang="en-US" sz="1200" noProof="1"/>
-              <a:t>Portal upload </a:t>
+              <a:t>manage-portal-</a:t>
             </a:r>
           </a:p>
           <a:p>
             <a:r>
               <a:rPr lang="en-US" sz="1200" noProof="1"/>
-              <a:t>submodule</a:t>
-            </a:r>
-          </a:p>
-        </p:txBody>
-      </p:sp>
-      <p:sp>
-        <p:nvSpPr>
-          <p:cNvPr id="190" name="Rectangle 189">
-            <a:extLst>
-              <a:ext uri="{FF2B5EF4-FFF2-40B4-BE49-F238E27FC236}">
-                <a16:creationId xmlns:a16="http://schemas.microsoft.com/office/drawing/2014/main" id="{0A48B503-CC52-02E4-5A82-C267AF970A4A}"/>
+              <a:t>upload.sh</a:t>
+            </a:r>
+          </a:p>
+        </p:txBody>
+      </p:sp>
+      <p:cxnSp>
+        <p:nvCxnSpPr>
+          <p:cNvPr id="193" name="Elbow Connector 192">
+            <a:extLst>
+              <a:ext uri="{FF2B5EF4-FFF2-40B4-BE49-F238E27FC236}">
+                <a16:creationId xmlns:a16="http://schemas.microsoft.com/office/drawing/2014/main" id="{FC8CC733-6D77-7485-2911-756009B750FC}"/>
+              </a:ext>
+            </a:extLst>
+          </p:cNvPr>
+          <p:cNvCxnSpPr>
+            <a:cxnSpLocks/>
+            <a:stCxn id="143" idx="2"/>
+            <a:endCxn id="172" idx="1"/>
+          </p:cNvCxnSpPr>
+          <p:nvPr/>
+        </p:nvCxnSpPr>
+        <p:spPr>
+          <a:xfrm rot="5400000">
+            <a:off x="10158126" y="4382486"/>
+            <a:ext cx="962612" cy="584545"/>
+          </a:xfrm>
+          <a:prstGeom prst="bentConnector4">
+            <a:avLst>
+              <a:gd name="adj1" fmla="val 42806"/>
+              <a:gd name="adj2" fmla="val 139107"/>
+            </a:avLst>
+          </a:prstGeom>
+          <a:ln w="38100">
+            <a:tailEnd type="triangle"/>
+          </a:ln>
+        </p:spPr>
+        <p:style>
+          <a:lnRef idx="2">
+            <a:schemeClr val="dk1"/>
+          </a:lnRef>
+          <a:fillRef idx="0">
+            <a:schemeClr val="dk1"/>
+          </a:fillRef>
+          <a:effectRef idx="1">
+            <a:schemeClr val="dk1"/>
+          </a:effectRef>
+          <a:fontRef idx="minor">
+            <a:schemeClr val="tx1"/>
+          </a:fontRef>
+        </p:style>
+      </p:cxnSp>
+      <p:cxnSp>
+        <p:nvCxnSpPr>
+          <p:cNvPr id="196" name="Elbow Connector 195">
+            <a:extLst>
+              <a:ext uri="{FF2B5EF4-FFF2-40B4-BE49-F238E27FC236}">
+                <a16:creationId xmlns:a16="http://schemas.microsoft.com/office/drawing/2014/main" id="{EC15F707-E48C-4506-4848-B454D78CC45D}"/>
+              </a:ext>
+            </a:extLst>
+          </p:cNvPr>
+          <p:cNvCxnSpPr>
+            <a:cxnSpLocks/>
+            <a:stCxn id="124" idx="2"/>
+            <a:endCxn id="172" idx="1"/>
+          </p:cNvCxnSpPr>
+          <p:nvPr/>
+        </p:nvCxnSpPr>
+        <p:spPr>
+          <a:xfrm rot="16200000" flipH="1">
+            <a:off x="8350230" y="3159135"/>
+            <a:ext cx="1986874" cy="2006983"/>
+          </a:xfrm>
+          <a:prstGeom prst="bentConnector2">
+            <a:avLst/>
+          </a:prstGeom>
+          <a:ln w="38100">
+            <a:tailEnd type="triangle"/>
+          </a:ln>
+        </p:spPr>
+        <p:style>
+          <a:lnRef idx="2">
+            <a:schemeClr val="dk1"/>
+          </a:lnRef>
+          <a:fillRef idx="0">
+            <a:schemeClr val="dk1"/>
+          </a:fillRef>
+          <a:effectRef idx="1">
+            <a:schemeClr val="dk1"/>
+          </a:effectRef>
+          <a:fontRef idx="minor">
+            <a:schemeClr val="tx1"/>
+          </a:fontRef>
+        </p:style>
+      </p:cxnSp>
+      <p:cxnSp>
+        <p:nvCxnSpPr>
+          <p:cNvPr id="199" name="Elbow Connector 198">
+            <a:extLst>
+              <a:ext uri="{FF2B5EF4-FFF2-40B4-BE49-F238E27FC236}">
+                <a16:creationId xmlns:a16="http://schemas.microsoft.com/office/drawing/2014/main" id="{78D85E10-BFF8-F859-94D9-5B6D5905F67D}"/>
+              </a:ext>
+            </a:extLst>
+          </p:cNvPr>
+          <p:cNvCxnSpPr>
+            <a:cxnSpLocks/>
+            <a:stCxn id="4" idx="2"/>
+            <a:endCxn id="172" idx="1"/>
+          </p:cNvCxnSpPr>
+          <p:nvPr/>
+        </p:nvCxnSpPr>
+        <p:spPr>
+          <a:xfrm rot="16200000" flipH="1">
+            <a:off x="6131567" y="940472"/>
+            <a:ext cx="1797348" cy="6633836"/>
+          </a:xfrm>
+          <a:prstGeom prst="bentConnector2">
+            <a:avLst/>
+          </a:prstGeom>
+          <a:ln w="38100">
+            <a:tailEnd type="triangle"/>
+          </a:ln>
+        </p:spPr>
+        <p:style>
+          <a:lnRef idx="2">
+            <a:schemeClr val="dk1"/>
+          </a:lnRef>
+          <a:fillRef idx="0">
+            <a:schemeClr val="dk1"/>
+          </a:fillRef>
+          <a:effectRef idx="1">
+            <a:schemeClr val="dk1"/>
+          </a:effectRef>
+          <a:fontRef idx="minor">
+            <a:schemeClr val="tx1"/>
+          </a:fontRef>
+        </p:style>
+      </p:cxnSp>
+      <p:sp>
+        <p:nvSpPr>
+          <p:cNvPr id="202" name="Rectangle 201">
+            <a:extLst>
+              <a:ext uri="{FF2B5EF4-FFF2-40B4-BE49-F238E27FC236}">
+                <a16:creationId xmlns:a16="http://schemas.microsoft.com/office/drawing/2014/main" id="{4DF0C0AB-CA09-37E8-4E61-6BF091F30A58}"/>
               </a:ext>
             </a:extLst>
           </p:cNvPr>
@@ -7158,17 +7102,14 @@
         </p:nvSpPr>
         <p:spPr>
           <a:xfrm>
-            <a:off x="10269814" y="6089789"/>
-            <a:ext cx="1200418" cy="477266"/>
+            <a:off x="6039899" y="3376150"/>
+            <a:ext cx="2210704" cy="674380"/>
           </a:xfrm>
           <a:prstGeom prst="rect">
             <a:avLst/>
           </a:prstGeom>
           <a:solidFill>
-            <a:schemeClr val="accent2">
-              <a:lumMod val="60000"/>
-              <a:lumOff val="40000"/>
-            </a:schemeClr>
+            <a:srgbClr val="FFC000"/>
           </a:solidFill>
         </p:spPr>
         <p:style>
@@ -7196,48 +7137,12 @@
           </a:p>
         </p:txBody>
       </p:sp>
-      <p:pic>
-        <p:nvPicPr>
-          <p:cNvPr id="191" name="Graphic 190" descr="Repeat with solid fill">
-            <a:extLst>
-              <a:ext uri="{FF2B5EF4-FFF2-40B4-BE49-F238E27FC236}">
-                <a16:creationId xmlns:a16="http://schemas.microsoft.com/office/drawing/2014/main" id="{CABE0660-E635-ADCA-3A9D-231B14C1C86D}"/>
-              </a:ext>
-            </a:extLst>
-          </p:cNvPr>
-          <p:cNvPicPr>
-            <a:picLocks noChangeAspect="1"/>
-          </p:cNvPicPr>
-          <p:nvPr/>
-        </p:nvPicPr>
-        <p:blipFill>
-          <a:blip>
-            <a:extLst>
-              <a:ext uri="{96DAC541-7B7A-43D3-8B79-37D633B846F1}">
-                <asvg:svgBlip xmlns:asvg="http://schemas.microsoft.com/office/drawing/2016/SVG/main" r:embed="rId2"/>
-              </a:ext>
-            </a:extLst>
-          </a:blip>
-          <a:stretch>
-            <a:fillRect/>
-          </a:stretch>
-        </p:blipFill>
-        <p:spPr>
-          <a:xfrm>
-            <a:off x="10131849" y="5876255"/>
-            <a:ext cx="366563" cy="366563"/>
-          </a:xfrm>
-          <a:prstGeom prst="rect">
-            <a:avLst/>
-          </a:prstGeom>
-        </p:spPr>
-      </p:pic>
-      <p:sp>
-        <p:nvSpPr>
-          <p:cNvPr id="192" name="TextBox 191">
-            <a:extLst>
-              <a:ext uri="{FF2B5EF4-FFF2-40B4-BE49-F238E27FC236}">
-                <a16:creationId xmlns:a16="http://schemas.microsoft.com/office/drawing/2014/main" id="{5B009463-94DF-6736-3FA6-645C1725284A}"/>
+      <p:sp>
+        <p:nvSpPr>
+          <p:cNvPr id="203" name="TextBox 202">
+            <a:extLst>
+              <a:ext uri="{FF2B5EF4-FFF2-40B4-BE49-F238E27FC236}">
+                <a16:creationId xmlns:a16="http://schemas.microsoft.com/office/drawing/2014/main" id="{859FF1C2-F890-2F0C-3C58-AD5533636B67}"/>
               </a:ext>
             </a:extLst>
           </p:cNvPr>
@@ -7246,8 +7151,8 @@
         </p:nvSpPr>
         <p:spPr>
           <a:xfrm>
-            <a:off x="10207176" y="6079846"/>
-            <a:ext cx="1220078" cy="461665"/>
+            <a:off x="6019072" y="3364367"/>
+            <a:ext cx="2164310" cy="276999"/>
           </a:xfrm>
           <a:prstGeom prst="rect">
             <a:avLst/>
@@ -7262,155 +7167,17 @@
           <a:p>
             <a:r>
               <a:rPr lang="en-US" sz="1200" noProof="1"/>
-              <a:t>manage-portal-</a:t>
-            </a:r>
-          </a:p>
-          <a:p>
-            <a:r>
-              <a:rPr lang="en-US" sz="1200" noProof="1"/>
-              <a:t>upload.sh</a:t>
-            </a:r>
-          </a:p>
-        </p:txBody>
-      </p:sp>
-      <p:cxnSp>
-        <p:nvCxnSpPr>
-          <p:cNvPr id="193" name="Elbow Connector 192">
-            <a:extLst>
-              <a:ext uri="{FF2B5EF4-FFF2-40B4-BE49-F238E27FC236}">
-                <a16:creationId xmlns:a16="http://schemas.microsoft.com/office/drawing/2014/main" id="{FC8CC733-6D77-7485-2911-756009B750FC}"/>
-              </a:ext>
-            </a:extLst>
-          </p:cNvPr>
-          <p:cNvCxnSpPr>
-            <a:cxnSpLocks/>
-            <a:stCxn id="143" idx="2"/>
-            <a:endCxn id="172" idx="1"/>
-          </p:cNvCxnSpPr>
-          <p:nvPr/>
-        </p:nvCxnSpPr>
-        <p:spPr>
-          <a:xfrm rot="5400000">
-            <a:off x="10158126" y="4382486"/>
-            <a:ext cx="962612" cy="584545"/>
-          </a:xfrm>
-          <a:prstGeom prst="bentConnector4">
-            <a:avLst>
-              <a:gd name="adj1" fmla="val 42806"/>
-              <a:gd name="adj2" fmla="val 139107"/>
-            </a:avLst>
-          </a:prstGeom>
-          <a:ln w="38100">
-            <a:tailEnd type="triangle"/>
-          </a:ln>
-        </p:spPr>
-        <p:style>
-          <a:lnRef idx="2">
-            <a:schemeClr val="dk1"/>
-          </a:lnRef>
-          <a:fillRef idx="0">
-            <a:schemeClr val="dk1"/>
-          </a:fillRef>
-          <a:effectRef idx="1">
-            <a:schemeClr val="dk1"/>
-          </a:effectRef>
-          <a:fontRef idx="minor">
-            <a:schemeClr val="tx1"/>
-          </a:fontRef>
-        </p:style>
-      </p:cxnSp>
-      <p:cxnSp>
-        <p:nvCxnSpPr>
-          <p:cNvPr id="196" name="Elbow Connector 195">
-            <a:extLst>
-              <a:ext uri="{FF2B5EF4-FFF2-40B4-BE49-F238E27FC236}">
-                <a16:creationId xmlns:a16="http://schemas.microsoft.com/office/drawing/2014/main" id="{EC15F707-E48C-4506-4848-B454D78CC45D}"/>
-              </a:ext>
-            </a:extLst>
-          </p:cNvPr>
-          <p:cNvCxnSpPr>
-            <a:cxnSpLocks/>
-            <a:stCxn id="124" idx="2"/>
-            <a:endCxn id="172" idx="1"/>
-          </p:cNvCxnSpPr>
-          <p:nvPr/>
-        </p:nvCxnSpPr>
-        <p:spPr>
-          <a:xfrm rot="16200000" flipH="1">
-            <a:off x="8229622" y="3038527"/>
-            <a:ext cx="2228090" cy="2006983"/>
-          </a:xfrm>
-          <a:prstGeom prst="bentConnector2">
-            <a:avLst/>
-          </a:prstGeom>
-          <a:ln w="38100">
-            <a:tailEnd type="triangle"/>
-          </a:ln>
-        </p:spPr>
-        <p:style>
-          <a:lnRef idx="2">
-            <a:schemeClr val="dk1"/>
-          </a:lnRef>
-          <a:fillRef idx="0">
-            <a:schemeClr val="dk1"/>
-          </a:fillRef>
-          <a:effectRef idx="1">
-            <a:schemeClr val="dk1"/>
-          </a:effectRef>
-          <a:fontRef idx="minor">
-            <a:schemeClr val="tx1"/>
-          </a:fontRef>
-        </p:style>
-      </p:cxnSp>
-      <p:cxnSp>
-        <p:nvCxnSpPr>
-          <p:cNvPr id="199" name="Elbow Connector 198">
-            <a:extLst>
-              <a:ext uri="{FF2B5EF4-FFF2-40B4-BE49-F238E27FC236}">
-                <a16:creationId xmlns:a16="http://schemas.microsoft.com/office/drawing/2014/main" id="{78D85E10-BFF8-F859-94D9-5B6D5905F67D}"/>
-              </a:ext>
-            </a:extLst>
-          </p:cNvPr>
-          <p:cNvCxnSpPr>
-            <a:cxnSpLocks/>
-            <a:stCxn id="4" idx="2"/>
-            <a:endCxn id="172" idx="1"/>
-          </p:cNvCxnSpPr>
-          <p:nvPr/>
-        </p:nvCxnSpPr>
-        <p:spPr>
-          <a:xfrm rot="16200000" flipH="1">
-            <a:off x="6075579" y="884484"/>
-            <a:ext cx="1909324" cy="6633836"/>
-          </a:xfrm>
-          <a:prstGeom prst="bentConnector2">
-            <a:avLst/>
-          </a:prstGeom>
-          <a:ln w="38100">
-            <a:tailEnd type="triangle"/>
-          </a:ln>
-        </p:spPr>
-        <p:style>
-          <a:lnRef idx="2">
-            <a:schemeClr val="dk1"/>
-          </a:lnRef>
-          <a:fillRef idx="0">
-            <a:schemeClr val="dk1"/>
-          </a:fillRef>
-          <a:effectRef idx="1">
-            <a:schemeClr val="dk1"/>
-          </a:effectRef>
-          <a:fontRef idx="minor">
-            <a:schemeClr val="tx1"/>
-          </a:fontRef>
-        </p:style>
-      </p:cxnSp>
-      <p:sp>
-        <p:nvSpPr>
-          <p:cNvPr id="202" name="Rectangle 201">
-            <a:extLst>
-              <a:ext uri="{FF2B5EF4-FFF2-40B4-BE49-F238E27FC236}">
-                <a16:creationId xmlns:a16="http://schemas.microsoft.com/office/drawing/2014/main" id="{4DF0C0AB-CA09-37E8-4E61-6BF091F30A58}"/>
+              <a:t>Autonomous analysis module</a:t>
+            </a:r>
+          </a:p>
+        </p:txBody>
+      </p:sp>
+      <p:sp>
+        <p:nvSpPr>
+          <p:cNvPr id="204" name="Rectangle 203">
+            <a:extLst>
+              <a:ext uri="{FF2B5EF4-FFF2-40B4-BE49-F238E27FC236}">
+                <a16:creationId xmlns:a16="http://schemas.microsoft.com/office/drawing/2014/main" id="{BAFF2FE4-31A4-6630-979A-627EE16BB38F}"/>
               </a:ext>
             </a:extLst>
           </p:cNvPr>
@@ -7419,8 +7186,8 @@
         </p:nvSpPr>
         <p:spPr>
           <a:xfrm>
-            <a:off x="6039899" y="3376150"/>
-            <a:ext cx="2210704" cy="674380"/>
+            <a:off x="1311229" y="3529352"/>
+            <a:ext cx="1981952" cy="1097512"/>
           </a:xfrm>
           <a:prstGeom prst="rect">
             <a:avLst/>
@@ -7456,10 +7223,10 @@
       </p:sp>
       <p:sp>
         <p:nvSpPr>
-          <p:cNvPr id="203" name="TextBox 202">
-            <a:extLst>
-              <a:ext uri="{FF2B5EF4-FFF2-40B4-BE49-F238E27FC236}">
-                <a16:creationId xmlns:a16="http://schemas.microsoft.com/office/drawing/2014/main" id="{859FF1C2-F890-2F0C-3C58-AD5533636B67}"/>
+          <p:cNvPr id="205" name="TextBox 204">
+            <a:extLst>
+              <a:ext uri="{FF2B5EF4-FFF2-40B4-BE49-F238E27FC236}">
+                <a16:creationId xmlns:a16="http://schemas.microsoft.com/office/drawing/2014/main" id="{522B8CEA-8063-4FF1-A945-A8E2D0558607}"/>
               </a:ext>
             </a:extLst>
           </p:cNvPr>
@@ -7468,8 +7235,8 @@
         </p:nvSpPr>
         <p:spPr>
           <a:xfrm>
-            <a:off x="6019072" y="3364367"/>
-            <a:ext cx="2164310" cy="276999"/>
+            <a:off x="1290402" y="3517570"/>
+            <a:ext cx="1904689" cy="276999"/>
           </a:xfrm>
           <a:prstGeom prst="rect">
             <a:avLst/>
@@ -7484,17 +7251,17 @@
           <a:p>
             <a:r>
               <a:rPr lang="en-US" sz="1200" noProof="1"/>
-              <a:t>Autonomous analysis module</a:t>
-            </a:r>
-          </a:p>
-        </p:txBody>
-      </p:sp>
-      <p:sp>
-        <p:nvSpPr>
-          <p:cNvPr id="204" name="Rectangle 203">
-            <a:extLst>
-              <a:ext uri="{FF2B5EF4-FFF2-40B4-BE49-F238E27FC236}">
-                <a16:creationId xmlns:a16="http://schemas.microsoft.com/office/drawing/2014/main" id="{BAFF2FE4-31A4-6630-979A-627EE16BB38F}"/>
+              <a:t>AAA job definition module</a:t>
+            </a:r>
+          </a:p>
+        </p:txBody>
+      </p:sp>
+      <p:sp>
+        <p:nvSpPr>
+          <p:cNvPr id="206" name="Rectangle 205">
+            <a:extLst>
+              <a:ext uri="{FF2B5EF4-FFF2-40B4-BE49-F238E27FC236}">
+                <a16:creationId xmlns:a16="http://schemas.microsoft.com/office/drawing/2014/main" id="{B710222F-7C63-6F6F-FB86-09813BF12071}"/>
               </a:ext>
             </a:extLst>
           </p:cNvPr>
@@ -7503,14 +7270,16 @@
         </p:nvSpPr>
         <p:spPr>
           <a:xfrm>
-            <a:off x="1311229" y="3529352"/>
-            <a:ext cx="1981952" cy="1097512"/>
+            <a:off x="1407253" y="3811602"/>
+            <a:ext cx="1798521" cy="276999"/>
           </a:xfrm>
           <a:prstGeom prst="rect">
             <a:avLst/>
           </a:prstGeom>
           <a:solidFill>
-            <a:srgbClr val="FFC000"/>
+            <a:schemeClr val="bg2">
+              <a:lumMod val="90000"/>
+            </a:schemeClr>
           </a:solidFill>
         </p:spPr>
         <p:style>
@@ -7540,10 +7309,10 @@
       </p:sp>
       <p:sp>
         <p:nvSpPr>
-          <p:cNvPr id="205" name="TextBox 204">
-            <a:extLst>
-              <a:ext uri="{FF2B5EF4-FFF2-40B4-BE49-F238E27FC236}">
-                <a16:creationId xmlns:a16="http://schemas.microsoft.com/office/drawing/2014/main" id="{522B8CEA-8063-4FF1-A945-A8E2D0558607}"/>
+          <p:cNvPr id="207" name="TextBox 206">
+            <a:extLst>
+              <a:ext uri="{FF2B5EF4-FFF2-40B4-BE49-F238E27FC236}">
+                <a16:creationId xmlns:a16="http://schemas.microsoft.com/office/drawing/2014/main" id="{21F28E10-CF99-5DA4-3BB8-896AAF6F4B78}"/>
               </a:ext>
             </a:extLst>
           </p:cNvPr>
@@ -7552,8 +7321,8 @@
         </p:nvSpPr>
         <p:spPr>
           <a:xfrm>
-            <a:off x="1290402" y="3517570"/>
-            <a:ext cx="1904689" cy="276999"/>
+            <a:off x="1411570" y="3793127"/>
+            <a:ext cx="1811073" cy="276999"/>
           </a:xfrm>
           <a:prstGeom prst="rect">
             <a:avLst/>
@@ -7568,17 +7337,17 @@
           <a:p>
             <a:r>
               <a:rPr lang="en-US" sz="1200" noProof="1"/>
-              <a:t>AAA job definition module</a:t>
-            </a:r>
-          </a:p>
-        </p:txBody>
-      </p:sp>
-      <p:sp>
-        <p:nvSpPr>
-          <p:cNvPr id="206" name="Rectangle 205">
-            <a:extLst>
-              <a:ext uri="{FF2B5EF4-FFF2-40B4-BE49-F238E27FC236}">
-                <a16:creationId xmlns:a16="http://schemas.microsoft.com/office/drawing/2014/main" id="{B710222F-7C63-6F6F-FB86-09813BF12071}"/>
+              <a:t>spider_install.sh (tracks)</a:t>
+            </a:r>
+          </a:p>
+        </p:txBody>
+      </p:sp>
+      <p:sp>
+        <p:nvSpPr>
+          <p:cNvPr id="209" name="Rectangle 208">
+            <a:extLst>
+              <a:ext uri="{FF2B5EF4-FFF2-40B4-BE49-F238E27FC236}">
+                <a16:creationId xmlns:a16="http://schemas.microsoft.com/office/drawing/2014/main" id="{F519284B-BED4-D749-68CE-6B52FC0C4C6D}"/>
               </a:ext>
             </a:extLst>
           </p:cNvPr>
@@ -7587,8 +7356,8 @@
         </p:nvSpPr>
         <p:spPr>
           <a:xfrm>
-            <a:off x="1407253" y="3811602"/>
-            <a:ext cx="1798521" cy="276999"/>
+            <a:off x="113817" y="5123993"/>
+            <a:ext cx="972426" cy="217670"/>
           </a:xfrm>
           <a:prstGeom prst="rect">
             <a:avLst/>
@@ -7620,51 +7389,122 @@
           <a:lstStyle/>
           <a:p>
             <a:pPr algn="ctr"/>
-            <a:endParaRPr lang="en-US" noProof="1"/>
-          </a:p>
-        </p:txBody>
-      </p:sp>
-      <p:sp>
-        <p:nvSpPr>
-          <p:cNvPr id="207" name="TextBox 206">
-            <a:extLst>
-              <a:ext uri="{FF2B5EF4-FFF2-40B4-BE49-F238E27FC236}">
-                <a16:creationId xmlns:a16="http://schemas.microsoft.com/office/drawing/2014/main" id="{21F28E10-CF99-5DA4-3BB8-896AAF6F4B78}"/>
-              </a:ext>
-            </a:extLst>
-          </p:cNvPr>
-          <p:cNvSpPr txBox="1"/>
-          <p:nvPr/>
-        </p:nvSpPr>
-        <p:spPr>
-          <a:xfrm>
-            <a:off x="1411570" y="3793127"/>
-            <a:ext cx="1811073" cy="276999"/>
-          </a:xfrm>
-          <a:prstGeom prst="rect">
-            <a:avLst/>
-          </a:prstGeom>
-          <a:noFill/>
-        </p:spPr>
-        <p:txBody>
-          <a:bodyPr wrap="none" rtlCol="0">
-            <a:spAutoFit/>
-          </a:bodyPr>
-          <a:lstStyle/>
-          <a:p>
-            <a:r>
-              <a:rPr lang="en-US" sz="1200" noProof="1"/>
-              <a:t>spider_install.sh (tracks)</a:t>
-            </a:r>
-          </a:p>
-        </p:txBody>
-      </p:sp>
-      <p:sp>
-        <p:nvSpPr>
-          <p:cNvPr id="209" name="Rectangle 208">
-            <a:extLst>
-              <a:ext uri="{FF2B5EF4-FFF2-40B4-BE49-F238E27FC236}">
-                <a16:creationId xmlns:a16="http://schemas.microsoft.com/office/drawing/2014/main" id="{F519284B-BED4-D749-68CE-6B52FC0C4C6D}"/>
+            <a:r>
+              <a:rPr lang="en-US" sz="1200" noProof="1">
+                <a:solidFill>
+                  <a:schemeClr val="tx1"/>
+                </a:solidFill>
+              </a:rPr>
+              <a:t>Other</a:t>
+            </a:r>
+            <a:endParaRPr lang="en-US" noProof="1">
+              <a:solidFill>
+                <a:schemeClr val="tx1"/>
+              </a:solidFill>
+            </a:endParaRPr>
+          </a:p>
+        </p:txBody>
+      </p:sp>
+      <p:cxnSp>
+        <p:nvCxnSpPr>
+          <p:cNvPr id="211" name="Elbow Connector 210">
+            <a:extLst>
+              <a:ext uri="{FF2B5EF4-FFF2-40B4-BE49-F238E27FC236}">
+                <a16:creationId xmlns:a16="http://schemas.microsoft.com/office/drawing/2014/main" id="{685C1FA2-29DD-FEA9-5497-8C8EB6042CBD}"/>
+              </a:ext>
+            </a:extLst>
+          </p:cNvPr>
+          <p:cNvCxnSpPr>
+            <a:cxnSpLocks/>
+            <a:stCxn id="207" idx="3"/>
+            <a:endCxn id="9" idx="1"/>
+          </p:cNvCxnSpPr>
+          <p:nvPr/>
+        </p:nvCxnSpPr>
+        <p:spPr>
+          <a:xfrm flipH="1" flipV="1">
+            <a:off x="959222" y="2013797"/>
+            <a:ext cx="2263421" cy="1917830"/>
+          </a:xfrm>
+          <a:prstGeom prst="bentConnector5">
+            <a:avLst>
+              <a:gd name="adj1" fmla="val -10100"/>
+              <a:gd name="adj2" fmla="val 28947"/>
+              <a:gd name="adj3" fmla="val 140174"/>
+            </a:avLst>
+          </a:prstGeom>
+          <a:ln w="38100">
+            <a:tailEnd type="triangle"/>
+          </a:ln>
+        </p:spPr>
+        <p:style>
+          <a:lnRef idx="2">
+            <a:schemeClr val="dk1"/>
+          </a:lnRef>
+          <a:fillRef idx="0">
+            <a:schemeClr val="dk1"/>
+          </a:fillRef>
+          <a:effectRef idx="1">
+            <a:schemeClr val="dk1"/>
+          </a:effectRef>
+          <a:fontRef idx="minor">
+            <a:schemeClr val="tx1"/>
+          </a:fontRef>
+        </p:style>
+      </p:cxnSp>
+      <p:cxnSp>
+        <p:nvCxnSpPr>
+          <p:cNvPr id="216" name="Elbow Connector 215">
+            <a:extLst>
+              <a:ext uri="{FF2B5EF4-FFF2-40B4-BE49-F238E27FC236}">
+                <a16:creationId xmlns:a16="http://schemas.microsoft.com/office/drawing/2014/main" id="{BB98FBBA-A6F8-4985-2BF0-6A1945D44A6C}"/>
+              </a:ext>
+            </a:extLst>
+          </p:cNvPr>
+          <p:cNvCxnSpPr>
+            <a:cxnSpLocks/>
+            <a:stCxn id="207" idx="3"/>
+            <a:endCxn id="10" idx="1"/>
+          </p:cNvCxnSpPr>
+          <p:nvPr/>
+        </p:nvCxnSpPr>
+        <p:spPr>
+          <a:xfrm flipH="1" flipV="1">
+            <a:off x="959221" y="2509663"/>
+            <a:ext cx="2263422" cy="1421964"/>
+          </a:xfrm>
+          <a:prstGeom prst="bentConnector5">
+            <a:avLst>
+              <a:gd name="adj1" fmla="val -10100"/>
+              <a:gd name="adj2" fmla="val 39143"/>
+              <a:gd name="adj3" fmla="val 115347"/>
+            </a:avLst>
+          </a:prstGeom>
+          <a:ln w="38100">
+            <a:tailEnd type="triangle"/>
+          </a:ln>
+        </p:spPr>
+        <p:style>
+          <a:lnRef idx="2">
+            <a:schemeClr val="dk1"/>
+          </a:lnRef>
+          <a:fillRef idx="0">
+            <a:schemeClr val="dk1"/>
+          </a:fillRef>
+          <a:effectRef idx="1">
+            <a:schemeClr val="dk1"/>
+          </a:effectRef>
+          <a:fontRef idx="minor">
+            <a:schemeClr val="tx1"/>
+          </a:fontRef>
+        </p:style>
+      </p:cxnSp>
+      <p:sp>
+        <p:nvSpPr>
+          <p:cNvPr id="228" name="Rectangle 227">
+            <a:extLst>
+              <a:ext uri="{FF2B5EF4-FFF2-40B4-BE49-F238E27FC236}">
+                <a16:creationId xmlns:a16="http://schemas.microsoft.com/office/drawing/2014/main" id="{EF94C6EB-88A0-FFBC-4189-901C2325CF28}"/>
               </a:ext>
             </a:extLst>
           </p:cNvPr>
@@ -7673,16 +7513,14 @@
         </p:nvSpPr>
         <p:spPr>
           <a:xfrm>
-            <a:off x="113817" y="5123993"/>
-            <a:ext cx="972426" cy="217670"/>
+            <a:off x="2089860" y="5531113"/>
+            <a:ext cx="3929428" cy="1659960"/>
           </a:xfrm>
           <a:prstGeom prst="rect">
             <a:avLst/>
           </a:prstGeom>
           <a:solidFill>
-            <a:schemeClr val="bg2">
-              <a:lumMod val="90000"/>
-            </a:schemeClr>
+            <a:srgbClr val="FFC000"/>
           </a:solidFill>
         </p:spPr>
         <p:style>
@@ -7706,122 +7544,51 @@
           <a:lstStyle/>
           <a:p>
             <a:pPr algn="ctr"/>
-            <a:r>
-              <a:rPr lang="en-US" sz="1200" noProof="1">
-                <a:solidFill>
-                  <a:schemeClr val="tx1"/>
-                </a:solidFill>
-              </a:rPr>
-              <a:t>Other</a:t>
-            </a:r>
-            <a:endParaRPr lang="en-US" noProof="1">
-              <a:solidFill>
-                <a:schemeClr val="tx1"/>
-              </a:solidFill>
-            </a:endParaRPr>
-          </a:p>
-        </p:txBody>
-      </p:sp>
-      <p:cxnSp>
-        <p:nvCxnSpPr>
-          <p:cNvPr id="211" name="Elbow Connector 210">
-            <a:extLst>
-              <a:ext uri="{FF2B5EF4-FFF2-40B4-BE49-F238E27FC236}">
-                <a16:creationId xmlns:a16="http://schemas.microsoft.com/office/drawing/2014/main" id="{685C1FA2-29DD-FEA9-5497-8C8EB6042CBD}"/>
-              </a:ext>
-            </a:extLst>
-          </p:cNvPr>
-          <p:cNvCxnSpPr>
-            <a:cxnSpLocks/>
-            <a:stCxn id="207" idx="3"/>
-            <a:endCxn id="9" idx="1"/>
-          </p:cNvCxnSpPr>
-          <p:nvPr/>
-        </p:nvCxnSpPr>
-        <p:spPr>
-          <a:xfrm flipH="1" flipV="1">
-            <a:off x="959222" y="2013797"/>
-            <a:ext cx="2263421" cy="1917830"/>
-          </a:xfrm>
-          <a:prstGeom prst="bentConnector5">
-            <a:avLst>
-              <a:gd name="adj1" fmla="val -10100"/>
-              <a:gd name="adj2" fmla="val 28947"/>
-              <a:gd name="adj3" fmla="val 140174"/>
-            </a:avLst>
-          </a:prstGeom>
-          <a:ln w="38100">
-            <a:tailEnd type="triangle"/>
-          </a:ln>
-        </p:spPr>
-        <p:style>
-          <a:lnRef idx="2">
-            <a:schemeClr val="dk1"/>
-          </a:lnRef>
-          <a:fillRef idx="0">
-            <a:schemeClr val="dk1"/>
-          </a:fillRef>
-          <a:effectRef idx="1">
-            <a:schemeClr val="dk1"/>
-          </a:effectRef>
-          <a:fontRef idx="minor">
-            <a:schemeClr val="tx1"/>
-          </a:fontRef>
-        </p:style>
-      </p:cxnSp>
-      <p:cxnSp>
-        <p:nvCxnSpPr>
-          <p:cNvPr id="216" name="Elbow Connector 215">
-            <a:extLst>
-              <a:ext uri="{FF2B5EF4-FFF2-40B4-BE49-F238E27FC236}">
-                <a16:creationId xmlns:a16="http://schemas.microsoft.com/office/drawing/2014/main" id="{BB98FBBA-A6F8-4985-2BF0-6A1945D44A6C}"/>
-              </a:ext>
-            </a:extLst>
-          </p:cNvPr>
-          <p:cNvCxnSpPr>
-            <a:cxnSpLocks/>
-            <a:stCxn id="207" idx="3"/>
-            <a:endCxn id="10" idx="1"/>
-          </p:cNvCxnSpPr>
-          <p:nvPr/>
-        </p:nvCxnSpPr>
-        <p:spPr>
-          <a:xfrm flipH="1" flipV="1">
-            <a:off x="959221" y="2509663"/>
-            <a:ext cx="2263422" cy="1421964"/>
-          </a:xfrm>
-          <a:prstGeom prst="bentConnector5">
-            <a:avLst>
-              <a:gd name="adj1" fmla="val -10100"/>
-              <a:gd name="adj2" fmla="val 39143"/>
-              <a:gd name="adj3" fmla="val 115347"/>
-            </a:avLst>
-          </a:prstGeom>
-          <a:ln w="38100">
-            <a:tailEnd type="triangle"/>
-          </a:ln>
-        </p:spPr>
-        <p:style>
-          <a:lnRef idx="2">
-            <a:schemeClr val="dk1"/>
-          </a:lnRef>
-          <a:fillRef idx="0">
-            <a:schemeClr val="dk1"/>
-          </a:fillRef>
-          <a:effectRef idx="1">
-            <a:schemeClr val="dk1"/>
-          </a:effectRef>
-          <a:fontRef idx="minor">
-            <a:schemeClr val="tx1"/>
-          </a:fontRef>
-        </p:style>
-      </p:cxnSp>
-      <p:sp>
-        <p:nvSpPr>
-          <p:cNvPr id="228" name="Rectangle 227">
-            <a:extLst>
-              <a:ext uri="{FF2B5EF4-FFF2-40B4-BE49-F238E27FC236}">
-                <a16:creationId xmlns:a16="http://schemas.microsoft.com/office/drawing/2014/main" id="{EF94C6EB-88A0-FFBC-4189-901C2325CF28}"/>
+            <a:endParaRPr lang="en-US" noProof="1"/>
+          </a:p>
+        </p:txBody>
+      </p:sp>
+      <p:sp>
+        <p:nvSpPr>
+          <p:cNvPr id="229" name="TextBox 228">
+            <a:extLst>
+              <a:ext uri="{FF2B5EF4-FFF2-40B4-BE49-F238E27FC236}">
+                <a16:creationId xmlns:a16="http://schemas.microsoft.com/office/drawing/2014/main" id="{E98C9070-3425-21D2-6195-95971F803F08}"/>
+              </a:ext>
+            </a:extLst>
+          </p:cNvPr>
+          <p:cNvSpPr txBox="1"/>
+          <p:nvPr/>
+        </p:nvSpPr>
+        <p:spPr>
+          <a:xfrm>
+            <a:off x="2082498" y="5509596"/>
+            <a:ext cx="1853136" cy="276999"/>
+          </a:xfrm>
+          <a:prstGeom prst="rect">
+            <a:avLst/>
+          </a:prstGeom>
+          <a:noFill/>
+        </p:spPr>
+        <p:txBody>
+          <a:bodyPr wrap="none" rtlCol="0">
+            <a:spAutoFit/>
+          </a:bodyPr>
+          <a:lstStyle/>
+          <a:p>
+            <a:r>
+              <a:rPr lang="en-US" sz="1200" noProof="1"/>
+              <a:t>Logging &amp; Library module</a:t>
+            </a:r>
+          </a:p>
+        </p:txBody>
+      </p:sp>
+      <p:sp>
+        <p:nvSpPr>
+          <p:cNvPr id="230" name="Rectangle 229">
+            <a:extLst>
+              <a:ext uri="{FF2B5EF4-FFF2-40B4-BE49-F238E27FC236}">
+                <a16:creationId xmlns:a16="http://schemas.microsoft.com/office/drawing/2014/main" id="{396F879B-0A03-2B09-94FD-F0C568892B03}"/>
               </a:ext>
             </a:extLst>
           </p:cNvPr>
@@ -7830,14 +7597,16 @@
         </p:nvSpPr>
         <p:spPr>
           <a:xfrm>
-            <a:off x="2089860" y="5531113"/>
-            <a:ext cx="3929428" cy="1659960"/>
+            <a:off x="2211057" y="5805882"/>
+            <a:ext cx="1624673" cy="334722"/>
           </a:xfrm>
           <a:prstGeom prst="rect">
             <a:avLst/>
           </a:prstGeom>
           <a:solidFill>
-            <a:srgbClr val="FFC000"/>
+            <a:schemeClr val="bg2">
+              <a:lumMod val="90000"/>
+            </a:schemeClr>
           </a:solidFill>
         </p:spPr>
         <p:style>
@@ -7867,10 +7636,10 @@
       </p:sp>
       <p:sp>
         <p:nvSpPr>
-          <p:cNvPr id="229" name="TextBox 228">
-            <a:extLst>
-              <a:ext uri="{FF2B5EF4-FFF2-40B4-BE49-F238E27FC236}">
-                <a16:creationId xmlns:a16="http://schemas.microsoft.com/office/drawing/2014/main" id="{E98C9070-3425-21D2-6195-95971F803F08}"/>
+          <p:cNvPr id="231" name="TextBox 230">
+            <a:extLst>
+              <a:ext uri="{FF2B5EF4-FFF2-40B4-BE49-F238E27FC236}">
+                <a16:creationId xmlns:a16="http://schemas.microsoft.com/office/drawing/2014/main" id="{9ED97C6F-74CB-4237-EB7C-4F7860392331}"/>
               </a:ext>
             </a:extLst>
           </p:cNvPr>
@@ -7879,8 +7648,8 @@
         </p:nvSpPr>
         <p:spPr>
           <a:xfrm>
-            <a:off x="2082498" y="5509596"/>
-            <a:ext cx="1853136" cy="276999"/>
+            <a:off x="2215374" y="5818580"/>
+            <a:ext cx="1489727" cy="276999"/>
           </a:xfrm>
           <a:prstGeom prst="rect">
             <a:avLst/>
@@ -7888,24 +7657,24 @@
           <a:noFill/>
         </p:spPr>
         <p:txBody>
-          <a:bodyPr wrap="none" rtlCol="0">
+          <a:bodyPr wrap="square" rtlCol="0">
             <a:spAutoFit/>
           </a:bodyPr>
           <a:lstStyle/>
           <a:p>
             <a:r>
               <a:rPr lang="en-US" sz="1200" noProof="1"/>
-              <a:t>Logging &amp; Library module</a:t>
-            </a:r>
-          </a:p>
-        </p:txBody>
-      </p:sp>
-      <p:sp>
-        <p:nvSpPr>
-          <p:cNvPr id="230" name="Rectangle 229">
-            <a:extLst>
-              <a:ext uri="{FF2B5EF4-FFF2-40B4-BE49-F238E27FC236}">
-                <a16:creationId xmlns:a16="http://schemas.microsoft.com/office/drawing/2014/main" id="{396F879B-0A03-2B09-94FD-F0C568892B03}"/>
+              <a:t>submitted_jobs.log</a:t>
+            </a:r>
+          </a:p>
+        </p:txBody>
+      </p:sp>
+      <p:sp>
+        <p:nvSpPr>
+          <p:cNvPr id="232" name="Rectangle 231">
+            <a:extLst>
+              <a:ext uri="{FF2B5EF4-FFF2-40B4-BE49-F238E27FC236}">
+                <a16:creationId xmlns:a16="http://schemas.microsoft.com/office/drawing/2014/main" id="{52A76F3A-B96C-D5D1-611C-B10755535B93}"/>
               </a:ext>
             </a:extLst>
           </p:cNvPr>
@@ -7914,8 +7683,8 @@
         </p:nvSpPr>
         <p:spPr>
           <a:xfrm>
-            <a:off x="2211057" y="5805882"/>
-            <a:ext cx="1624673" cy="334722"/>
+            <a:off x="2208408" y="6184584"/>
+            <a:ext cx="1627321" cy="258523"/>
           </a:xfrm>
           <a:prstGeom prst="rect">
             <a:avLst/>
@@ -7953,10 +7722,10 @@
       </p:sp>
       <p:sp>
         <p:nvSpPr>
-          <p:cNvPr id="231" name="TextBox 230">
-            <a:extLst>
-              <a:ext uri="{FF2B5EF4-FFF2-40B4-BE49-F238E27FC236}">
-                <a16:creationId xmlns:a16="http://schemas.microsoft.com/office/drawing/2014/main" id="{9ED97C6F-74CB-4237-EB7C-4F7860392331}"/>
+          <p:cNvPr id="233" name="TextBox 232">
+            <a:extLst>
+              <a:ext uri="{FF2B5EF4-FFF2-40B4-BE49-F238E27FC236}">
+                <a16:creationId xmlns:a16="http://schemas.microsoft.com/office/drawing/2014/main" id="{DFCDFC5E-F1D0-06C8-87C8-024D7F5C5E32}"/>
               </a:ext>
             </a:extLst>
           </p:cNvPr>
@@ -7965,8 +7734,8 @@
         </p:nvSpPr>
         <p:spPr>
           <a:xfrm>
-            <a:off x="2215374" y="5818580"/>
-            <a:ext cx="1489727" cy="276999"/>
+            <a:off x="2212724" y="6166108"/>
+            <a:ext cx="1504253" cy="276999"/>
           </a:xfrm>
           <a:prstGeom prst="rect">
             <a:avLst/>
@@ -7981,17 +7750,17 @@
           <a:p>
             <a:r>
               <a:rPr lang="en-US" sz="1200" noProof="1"/>
-              <a:t>submitted_jobs.log</a:t>
-            </a:r>
-          </a:p>
-        </p:txBody>
-      </p:sp>
-      <p:sp>
-        <p:nvSpPr>
-          <p:cNvPr id="232" name="Rectangle 231">
-            <a:extLst>
-              <a:ext uri="{FF2B5EF4-FFF2-40B4-BE49-F238E27FC236}">
-                <a16:creationId xmlns:a16="http://schemas.microsoft.com/office/drawing/2014/main" id="{52A76F3A-B96C-D5D1-611C-B10755535B93}"/>
+              <a:t>submission-log.csv</a:t>
+            </a:r>
+          </a:p>
+        </p:txBody>
+      </p:sp>
+      <p:sp>
+        <p:nvSpPr>
+          <p:cNvPr id="234" name="Rectangle 233">
+            <a:extLst>
+              <a:ext uri="{FF2B5EF4-FFF2-40B4-BE49-F238E27FC236}">
+                <a16:creationId xmlns:a16="http://schemas.microsoft.com/office/drawing/2014/main" id="{35EE2F83-558E-852E-FE23-E422BCE2D5EA}"/>
               </a:ext>
             </a:extLst>
           </p:cNvPr>
@@ -8000,8 +7769,8 @@
         </p:nvSpPr>
         <p:spPr>
           <a:xfrm>
-            <a:off x="2208408" y="6184584"/>
-            <a:ext cx="1627321" cy="258523"/>
+            <a:off x="2191822" y="6544186"/>
+            <a:ext cx="1798521" cy="276999"/>
           </a:xfrm>
           <a:prstGeom prst="rect">
             <a:avLst/>
@@ -8039,45 +7808,10 @@
       </p:sp>
       <p:sp>
         <p:nvSpPr>
-          <p:cNvPr id="233" name="TextBox 232">
-            <a:extLst>
-              <a:ext uri="{FF2B5EF4-FFF2-40B4-BE49-F238E27FC236}">
-                <a16:creationId xmlns:a16="http://schemas.microsoft.com/office/drawing/2014/main" id="{DFCDFC5E-F1D0-06C8-87C8-024D7F5C5E32}"/>
-              </a:ext>
-            </a:extLst>
-          </p:cNvPr>
-          <p:cNvSpPr txBox="1"/>
-          <p:nvPr/>
-        </p:nvSpPr>
-        <p:spPr>
-          <a:xfrm>
-            <a:off x="2212724" y="6166108"/>
-            <a:ext cx="1504253" cy="276999"/>
-          </a:xfrm>
-          <a:prstGeom prst="rect">
-            <a:avLst/>
-          </a:prstGeom>
-          <a:noFill/>
-        </p:spPr>
-        <p:txBody>
-          <a:bodyPr wrap="square" rtlCol="0">
-            <a:spAutoFit/>
-          </a:bodyPr>
-          <a:lstStyle/>
-          <a:p>
-            <a:r>
-              <a:rPr lang="en-US" sz="1200" noProof="1"/>
-              <a:t>submission-log.csv</a:t>
-            </a:r>
-          </a:p>
-        </p:txBody>
-      </p:sp>
-      <p:sp>
-        <p:nvSpPr>
-          <p:cNvPr id="234" name="Rectangle 233">
-            <a:extLst>
-              <a:ext uri="{FF2B5EF4-FFF2-40B4-BE49-F238E27FC236}">
-                <a16:creationId xmlns:a16="http://schemas.microsoft.com/office/drawing/2014/main" id="{35EE2F83-558E-852E-FE23-E422BCE2D5EA}"/>
+          <p:cNvPr id="12" name="Rectangle 11">
+            <a:extLst>
+              <a:ext uri="{FF2B5EF4-FFF2-40B4-BE49-F238E27FC236}">
+                <a16:creationId xmlns:a16="http://schemas.microsoft.com/office/drawing/2014/main" id="{C8E75110-E5A2-86E9-F389-F50AFA3FB93B}"/>
               </a:ext>
             </a:extLst>
           </p:cNvPr>
@@ -8086,7 +7820,7 @@
         </p:nvSpPr>
         <p:spPr>
           <a:xfrm>
-            <a:off x="2191822" y="6544186"/>
+            <a:off x="2190654" y="6869131"/>
             <a:ext cx="1798521" cy="276999"/>
           </a:xfrm>
           <a:prstGeom prst="rect">
@@ -8125,10 +7859,139 @@
       </p:sp>
       <p:sp>
         <p:nvSpPr>
-          <p:cNvPr id="12" name="Rectangle 11">
-            <a:extLst>
-              <a:ext uri="{FF2B5EF4-FFF2-40B4-BE49-F238E27FC236}">
-                <a16:creationId xmlns:a16="http://schemas.microsoft.com/office/drawing/2014/main" id="{C8E75110-E5A2-86E9-F389-F50AFA3FB93B}"/>
+          <p:cNvPr id="235" name="TextBox 234">
+            <a:extLst>
+              <a:ext uri="{FF2B5EF4-FFF2-40B4-BE49-F238E27FC236}">
+                <a16:creationId xmlns:a16="http://schemas.microsoft.com/office/drawing/2014/main" id="{6C41EAC6-8BA9-F9C0-D2B2-B94F85BEEC94}"/>
+              </a:ext>
+            </a:extLst>
+          </p:cNvPr>
+          <p:cNvSpPr txBox="1"/>
+          <p:nvPr/>
+        </p:nvSpPr>
+        <p:spPr>
+          <a:xfrm>
+            <a:off x="2196500" y="6869131"/>
+            <a:ext cx="1678986" cy="276999"/>
+          </a:xfrm>
+          <a:prstGeom prst="rect">
+            <a:avLst/>
+          </a:prstGeom>
+          <a:noFill/>
+        </p:spPr>
+        <p:txBody>
+          <a:bodyPr wrap="none" rtlCol="0">
+            <a:spAutoFit/>
+          </a:bodyPr>
+          <a:lstStyle/>
+          <a:p>
+            <a:r>
+              <a:rPr lang="en-US" sz="1200" noProof="1"/>
+              <a:t>caroline-download.log</a:t>
+            </a:r>
+          </a:p>
+        </p:txBody>
+      </p:sp>
+      <p:cxnSp>
+        <p:nvCxnSpPr>
+          <p:cNvPr id="236" name="Elbow Connector 235">
+            <a:extLst>
+              <a:ext uri="{FF2B5EF4-FFF2-40B4-BE49-F238E27FC236}">
+                <a16:creationId xmlns:a16="http://schemas.microsoft.com/office/drawing/2014/main" id="{E25ECFBC-DD90-6998-C466-10A38D14D511}"/>
+              </a:ext>
+            </a:extLst>
+          </p:cNvPr>
+          <p:cNvCxnSpPr>
+            <a:cxnSpLocks/>
+            <a:stCxn id="24" idx="3"/>
+            <a:endCxn id="233" idx="1"/>
+          </p:cNvCxnSpPr>
+          <p:nvPr/>
+        </p:nvCxnSpPr>
+        <p:spPr>
+          <a:xfrm flipH="1">
+            <a:off x="2212724" y="553392"/>
+            <a:ext cx="680897" cy="5751216"/>
+          </a:xfrm>
+          <a:prstGeom prst="bentConnector5">
+            <a:avLst>
+              <a:gd name="adj1" fmla="val -33573"/>
+              <a:gd name="adj2" fmla="val 45473"/>
+              <a:gd name="adj3" fmla="val 253878"/>
+            </a:avLst>
+          </a:prstGeom>
+          <a:ln w="38100">
+            <a:tailEnd type="triangle"/>
+          </a:ln>
+        </p:spPr>
+        <p:style>
+          <a:lnRef idx="2">
+            <a:schemeClr val="dk1"/>
+          </a:lnRef>
+          <a:fillRef idx="0">
+            <a:schemeClr val="dk1"/>
+          </a:fillRef>
+          <a:effectRef idx="1">
+            <a:schemeClr val="dk1"/>
+          </a:effectRef>
+          <a:fontRef idx="minor">
+            <a:schemeClr val="tx1"/>
+          </a:fontRef>
+        </p:style>
+      </p:cxnSp>
+      <p:cxnSp>
+        <p:nvCxnSpPr>
+          <p:cNvPr id="245" name="Elbow Connector 244">
+            <a:extLst>
+              <a:ext uri="{FF2B5EF4-FFF2-40B4-BE49-F238E27FC236}">
+                <a16:creationId xmlns:a16="http://schemas.microsoft.com/office/drawing/2014/main" id="{2BAB6FC4-08EF-3B2E-4E28-66AC35CA0206}"/>
+              </a:ext>
+            </a:extLst>
+          </p:cNvPr>
+          <p:cNvCxnSpPr>
+            <a:cxnSpLocks/>
+            <a:stCxn id="24" idx="3"/>
+            <a:endCxn id="230" idx="1"/>
+          </p:cNvCxnSpPr>
+          <p:nvPr/>
+        </p:nvCxnSpPr>
+        <p:spPr>
+          <a:xfrm flipH="1">
+            <a:off x="2211057" y="553392"/>
+            <a:ext cx="682564" cy="5419851"/>
+          </a:xfrm>
+          <a:prstGeom prst="bentConnector5">
+            <a:avLst>
+              <a:gd name="adj1" fmla="val -33491"/>
+              <a:gd name="adj2" fmla="val 48211"/>
+              <a:gd name="adj3" fmla="val 252571"/>
+            </a:avLst>
+          </a:prstGeom>
+          <a:ln w="38100">
+            <a:tailEnd type="triangle"/>
+          </a:ln>
+        </p:spPr>
+        <p:style>
+          <a:lnRef idx="2">
+            <a:schemeClr val="dk1"/>
+          </a:lnRef>
+          <a:fillRef idx="0">
+            <a:schemeClr val="dk1"/>
+          </a:fillRef>
+          <a:effectRef idx="1">
+            <a:schemeClr val="dk1"/>
+          </a:effectRef>
+          <a:fontRef idx="minor">
+            <a:schemeClr val="tx1"/>
+          </a:fontRef>
+        </p:style>
+      </p:cxnSp>
+      <p:sp>
+        <p:nvSpPr>
+          <p:cNvPr id="251" name="Rectangle 250">
+            <a:extLst>
+              <a:ext uri="{FF2B5EF4-FFF2-40B4-BE49-F238E27FC236}">
+                <a16:creationId xmlns:a16="http://schemas.microsoft.com/office/drawing/2014/main" id="{0DE18C41-7D69-C3A8-2E4C-550B0C257405}"/>
               </a:ext>
             </a:extLst>
           </p:cNvPr>
@@ -8137,15 +8000,16 @@
         </p:nvSpPr>
         <p:spPr>
           <a:xfrm>
-            <a:off x="2190654" y="6869131"/>
-            <a:ext cx="1798521" cy="276999"/>
+            <a:off x="4241656" y="5820809"/>
+            <a:ext cx="1002645" cy="235607"/>
           </a:xfrm>
           <a:prstGeom prst="rect">
             <a:avLst/>
           </a:prstGeom>
           <a:solidFill>
-            <a:schemeClr val="bg2">
-              <a:lumMod val="90000"/>
+            <a:schemeClr val="accent2">
+              <a:lumMod val="60000"/>
+              <a:lumOff val="40000"/>
             </a:schemeClr>
           </a:solidFill>
         </p:spPr>
@@ -8174,12 +8038,48 @@
           </a:p>
         </p:txBody>
       </p:sp>
-      <p:sp>
-        <p:nvSpPr>
-          <p:cNvPr id="235" name="TextBox 234">
-            <a:extLst>
-              <a:ext uri="{FF2B5EF4-FFF2-40B4-BE49-F238E27FC236}">
-                <a16:creationId xmlns:a16="http://schemas.microsoft.com/office/drawing/2014/main" id="{6C41EAC6-8BA9-F9C0-D2B2-B94F85BEEC94}"/>
+      <p:pic>
+        <p:nvPicPr>
+          <p:cNvPr id="252" name="Graphic 251" descr="Repeat with solid fill">
+            <a:extLst>
+              <a:ext uri="{FF2B5EF4-FFF2-40B4-BE49-F238E27FC236}">
+                <a16:creationId xmlns:a16="http://schemas.microsoft.com/office/drawing/2014/main" id="{67A996B4-F823-EC67-0AE1-4EE31A3646EC}"/>
+              </a:ext>
+            </a:extLst>
+          </p:cNvPr>
+          <p:cNvPicPr>
+            <a:picLocks noChangeAspect="1"/>
+          </p:cNvPicPr>
+          <p:nvPr/>
+        </p:nvPicPr>
+        <p:blipFill>
+          <a:blip>
+            <a:extLst>
+              <a:ext uri="{96DAC541-7B7A-43D3-8B79-37D633B846F1}">
+                <asvg:svgBlip xmlns:asvg="http://schemas.microsoft.com/office/drawing/2016/SVG/main" r:embed="rId2"/>
+              </a:ext>
+            </a:extLst>
+          </a:blip>
+          <a:stretch>
+            <a:fillRect/>
+          </a:stretch>
+        </p:blipFill>
+        <p:spPr>
+          <a:xfrm>
+            <a:off x="4103691" y="5607275"/>
+            <a:ext cx="366563" cy="366563"/>
+          </a:xfrm>
+          <a:prstGeom prst="rect">
+            <a:avLst/>
+          </a:prstGeom>
+        </p:spPr>
+      </p:pic>
+      <p:sp>
+        <p:nvSpPr>
+          <p:cNvPr id="253" name="TextBox 252">
+            <a:extLst>
+              <a:ext uri="{FF2B5EF4-FFF2-40B4-BE49-F238E27FC236}">
+                <a16:creationId xmlns:a16="http://schemas.microsoft.com/office/drawing/2014/main" id="{7CDEFB63-7160-738C-F4FD-61210C50AEF9}"/>
               </a:ext>
             </a:extLst>
           </p:cNvPr>
@@ -8188,8 +8088,8 @@
         </p:nvSpPr>
         <p:spPr>
           <a:xfrm>
-            <a:off x="2196500" y="6869131"/>
-            <a:ext cx="1678986" cy="276999"/>
+            <a:off x="4179018" y="5810866"/>
+            <a:ext cx="1011302" cy="276999"/>
           </a:xfrm>
           <a:prstGeom prst="rect">
             <a:avLst/>
@@ -8204,111 +8104,17 @@
           <a:p>
             <a:r>
               <a:rPr lang="en-US" sz="1200" noProof="1"/>
-              <a:t>caroline-download.log</a:t>
-            </a:r>
-          </a:p>
-        </p:txBody>
-      </p:sp>
-      <p:cxnSp>
-        <p:nvCxnSpPr>
-          <p:cNvPr id="236" name="Elbow Connector 235">
-            <a:extLst>
-              <a:ext uri="{FF2B5EF4-FFF2-40B4-BE49-F238E27FC236}">
-                <a16:creationId xmlns:a16="http://schemas.microsoft.com/office/drawing/2014/main" id="{E25ECFBC-DD90-6998-C466-10A38D14D511}"/>
-              </a:ext>
-            </a:extLst>
-          </p:cNvPr>
-          <p:cNvCxnSpPr>
-            <a:cxnSpLocks/>
-            <a:stCxn id="24" idx="3"/>
-            <a:endCxn id="233" idx="1"/>
-          </p:cNvCxnSpPr>
-          <p:nvPr/>
-        </p:nvCxnSpPr>
-        <p:spPr>
-          <a:xfrm flipH="1">
-            <a:off x="2212724" y="553392"/>
-            <a:ext cx="680897" cy="5751216"/>
-          </a:xfrm>
-          <a:prstGeom prst="bentConnector5">
-            <a:avLst>
-              <a:gd name="adj1" fmla="val -33573"/>
-              <a:gd name="adj2" fmla="val 45473"/>
-              <a:gd name="adj3" fmla="val 253878"/>
-            </a:avLst>
-          </a:prstGeom>
-          <a:ln w="38100">
-            <a:tailEnd type="triangle"/>
-          </a:ln>
-        </p:spPr>
-        <p:style>
-          <a:lnRef idx="2">
-            <a:schemeClr val="dk1"/>
-          </a:lnRef>
-          <a:fillRef idx="0">
-            <a:schemeClr val="dk1"/>
-          </a:fillRef>
-          <a:effectRef idx="1">
-            <a:schemeClr val="dk1"/>
-          </a:effectRef>
-          <a:fontRef idx="minor">
-            <a:schemeClr val="tx1"/>
-          </a:fontRef>
-        </p:style>
-      </p:cxnSp>
-      <p:cxnSp>
-        <p:nvCxnSpPr>
-          <p:cNvPr id="245" name="Elbow Connector 244">
-            <a:extLst>
-              <a:ext uri="{FF2B5EF4-FFF2-40B4-BE49-F238E27FC236}">
-                <a16:creationId xmlns:a16="http://schemas.microsoft.com/office/drawing/2014/main" id="{2BAB6FC4-08EF-3B2E-4E28-66AC35CA0206}"/>
-              </a:ext>
-            </a:extLst>
-          </p:cNvPr>
-          <p:cNvCxnSpPr>
-            <a:cxnSpLocks/>
-            <a:stCxn id="24" idx="3"/>
-            <a:endCxn id="230" idx="1"/>
-          </p:cNvCxnSpPr>
-          <p:nvPr/>
-        </p:nvCxnSpPr>
-        <p:spPr>
-          <a:xfrm flipH="1">
-            <a:off x="2211057" y="553392"/>
-            <a:ext cx="682564" cy="5419851"/>
-          </a:xfrm>
-          <a:prstGeom prst="bentConnector5">
-            <a:avLst>
-              <a:gd name="adj1" fmla="val -33491"/>
-              <a:gd name="adj2" fmla="val 48211"/>
-              <a:gd name="adj3" fmla="val 252571"/>
-            </a:avLst>
-          </a:prstGeom>
-          <a:ln w="38100">
-            <a:tailEnd type="triangle"/>
-          </a:ln>
-        </p:spPr>
-        <p:style>
-          <a:lnRef idx="2">
-            <a:schemeClr val="dk1"/>
-          </a:lnRef>
-          <a:fillRef idx="0">
-            <a:schemeClr val="dk1"/>
-          </a:fillRef>
-          <a:effectRef idx="1">
-            <a:schemeClr val="dk1"/>
-          </a:effectRef>
-          <a:fontRef idx="minor">
-            <a:schemeClr val="tx1"/>
-          </a:fontRef>
-        </p:style>
-      </p:cxnSp>
-      <p:sp>
-        <p:nvSpPr>
-          <p:cNvPr id="251" name="Rectangle 250">
-            <a:extLst>
-              <a:ext uri="{FF2B5EF4-FFF2-40B4-BE49-F238E27FC236}">
-                <a16:creationId xmlns:a16="http://schemas.microsoft.com/office/drawing/2014/main" id="{0DE18C41-7D69-C3A8-2E4C-550B0C257405}"/>
+              <a:t>email-log.sh</a:t>
+            </a:r>
+          </a:p>
+        </p:txBody>
+      </p:sp>
+      <p:sp>
+        <p:nvSpPr>
+          <p:cNvPr id="254" name="Rectangle 253">
+            <a:extLst>
+              <a:ext uri="{FF2B5EF4-FFF2-40B4-BE49-F238E27FC236}">
+                <a16:creationId xmlns:a16="http://schemas.microsoft.com/office/drawing/2014/main" id="{1F4EA00B-6D53-7E05-F41D-830F9BDC1505}"/>
               </a:ext>
             </a:extLst>
           </p:cNvPr>
@@ -8317,8 +8123,8 @@
         </p:nvSpPr>
         <p:spPr>
           <a:xfrm>
-            <a:off x="4241656" y="5820809"/>
-            <a:ext cx="1002645" cy="235607"/>
+            <a:off x="4261475" y="6205437"/>
+            <a:ext cx="1652437" cy="242864"/>
           </a:xfrm>
           <a:prstGeom prst="rect">
             <a:avLst/>
@@ -8357,10 +8163,10 @@
       </p:sp>
       <p:pic>
         <p:nvPicPr>
-          <p:cNvPr id="252" name="Graphic 251" descr="Repeat with solid fill">
-            <a:extLst>
-              <a:ext uri="{FF2B5EF4-FFF2-40B4-BE49-F238E27FC236}">
-                <a16:creationId xmlns:a16="http://schemas.microsoft.com/office/drawing/2014/main" id="{67A996B4-F823-EC67-0AE1-4EE31A3646EC}"/>
+          <p:cNvPr id="255" name="Graphic 254" descr="Repeat with solid fill">
+            <a:extLst>
+              <a:ext uri="{FF2B5EF4-FFF2-40B4-BE49-F238E27FC236}">
+                <a16:creationId xmlns:a16="http://schemas.microsoft.com/office/drawing/2014/main" id="{38DDCA80-E0E1-7C0E-EB15-733B8914F936}"/>
               </a:ext>
             </a:extLst>
           </p:cNvPr>
@@ -8383,7 +8189,7 @@
         </p:blipFill>
         <p:spPr>
           <a:xfrm>
-            <a:off x="4103691" y="5607275"/>
+            <a:off x="4123510" y="5991903"/>
             <a:ext cx="366563" cy="366563"/>
           </a:xfrm>
           <a:prstGeom prst="rect">
@@ -8393,10 +8199,10 @@
       </p:pic>
       <p:sp>
         <p:nvSpPr>
-          <p:cNvPr id="253" name="TextBox 252">
-            <a:extLst>
-              <a:ext uri="{FF2B5EF4-FFF2-40B4-BE49-F238E27FC236}">
-                <a16:creationId xmlns:a16="http://schemas.microsoft.com/office/drawing/2014/main" id="{7CDEFB63-7160-738C-F4FD-61210C50AEF9}"/>
+          <p:cNvPr id="256" name="TextBox 255">
+            <a:extLst>
+              <a:ext uri="{FF2B5EF4-FFF2-40B4-BE49-F238E27FC236}">
+                <a16:creationId xmlns:a16="http://schemas.microsoft.com/office/drawing/2014/main" id="{CB709F97-5D18-8E1F-EB03-274F995138A7}"/>
               </a:ext>
             </a:extLst>
           </p:cNvPr>
@@ -8405,8 +8211,8 @@
         </p:nvSpPr>
         <p:spPr>
           <a:xfrm>
-            <a:off x="4179018" y="5810866"/>
-            <a:ext cx="1011302" cy="276999"/>
+            <a:off x="4202156" y="6195494"/>
+            <a:ext cx="1745286" cy="276999"/>
           </a:xfrm>
           <a:prstGeom prst="rect">
             <a:avLst/>
@@ -8421,17 +8227,196 @@
           <a:p>
             <a:r>
               <a:rPr lang="en-US" sz="1200" noProof="1"/>
-              <a:t>email-log.sh</a:t>
-            </a:r>
-          </a:p>
-        </p:txBody>
-      </p:sp>
-      <p:sp>
-        <p:nvSpPr>
-          <p:cNvPr id="254" name="Rectangle 253">
-            <a:extLst>
-              <a:ext uri="{FF2B5EF4-FFF2-40B4-BE49-F238E27FC236}">
-                <a16:creationId xmlns:a16="http://schemas.microsoft.com/office/drawing/2014/main" id="{1F4EA00B-6D53-7E05-F41D-830F9BDC1505}"/>
+              <a:t>create-overview-kml.sh</a:t>
+            </a:r>
+          </a:p>
+        </p:txBody>
+      </p:sp>
+      <p:cxnSp>
+        <p:nvCxnSpPr>
+          <p:cNvPr id="257" name="Elbow Connector 256">
+            <a:extLst>
+              <a:ext uri="{FF2B5EF4-FFF2-40B4-BE49-F238E27FC236}">
+                <a16:creationId xmlns:a16="http://schemas.microsoft.com/office/drawing/2014/main" id="{1AE0C03A-E3D0-6F9B-8F09-C0B4EE6E3133}"/>
+              </a:ext>
+            </a:extLst>
+          </p:cNvPr>
+          <p:cNvCxnSpPr>
+            <a:cxnSpLocks/>
+            <a:stCxn id="230" idx="3"/>
+          </p:cNvCxnSpPr>
+          <p:nvPr/>
+        </p:nvCxnSpPr>
+        <p:spPr>
+          <a:xfrm flipV="1">
+            <a:off x="3835730" y="5964661"/>
+            <a:ext cx="387013" cy="8582"/>
+          </a:xfrm>
+          <a:prstGeom prst="bentConnector3">
+            <a:avLst>
+              <a:gd name="adj1" fmla="val 50000"/>
+            </a:avLst>
+          </a:prstGeom>
+          <a:ln w="38100">
+            <a:tailEnd type="triangle"/>
+          </a:ln>
+        </p:spPr>
+        <p:style>
+          <a:lnRef idx="2">
+            <a:schemeClr val="dk1"/>
+          </a:lnRef>
+          <a:fillRef idx="0">
+            <a:schemeClr val="dk1"/>
+          </a:fillRef>
+          <a:effectRef idx="1">
+            <a:schemeClr val="dk1"/>
+          </a:effectRef>
+          <a:fontRef idx="minor">
+            <a:schemeClr val="tx1"/>
+          </a:fontRef>
+        </p:style>
+      </p:cxnSp>
+      <p:cxnSp>
+        <p:nvCxnSpPr>
+          <p:cNvPr id="262" name="Elbow Connector 261">
+            <a:extLst>
+              <a:ext uri="{FF2B5EF4-FFF2-40B4-BE49-F238E27FC236}">
+                <a16:creationId xmlns:a16="http://schemas.microsoft.com/office/drawing/2014/main" id="{E7DDF635-308E-C78A-FAEC-8636C3FF0A9B}"/>
+              </a:ext>
+            </a:extLst>
+          </p:cNvPr>
+          <p:cNvCxnSpPr>
+            <a:cxnSpLocks/>
+            <a:stCxn id="4" idx="2"/>
+            <a:endCxn id="256" idx="1"/>
+          </p:cNvCxnSpPr>
+          <p:nvPr/>
+        </p:nvCxnSpPr>
+        <p:spPr>
+          <a:xfrm rot="16200000" flipH="1">
+            <a:off x="2470100" y="4601938"/>
+            <a:ext cx="2975278" cy="488833"/>
+          </a:xfrm>
+          <a:prstGeom prst="bentConnector2">
+            <a:avLst/>
+          </a:prstGeom>
+          <a:ln w="38100">
+            <a:tailEnd type="triangle"/>
+          </a:ln>
+        </p:spPr>
+        <p:style>
+          <a:lnRef idx="2">
+            <a:schemeClr val="dk1"/>
+          </a:lnRef>
+          <a:fillRef idx="0">
+            <a:schemeClr val="dk1"/>
+          </a:fillRef>
+          <a:effectRef idx="1">
+            <a:schemeClr val="dk1"/>
+          </a:effectRef>
+          <a:fontRef idx="minor">
+            <a:schemeClr val="tx1"/>
+          </a:fontRef>
+        </p:style>
+      </p:cxnSp>
+      <p:cxnSp>
+        <p:nvCxnSpPr>
+          <p:cNvPr id="265" name="Elbow Connector 264">
+            <a:extLst>
+              <a:ext uri="{FF2B5EF4-FFF2-40B4-BE49-F238E27FC236}">
+                <a16:creationId xmlns:a16="http://schemas.microsoft.com/office/drawing/2014/main" id="{03AF12DC-32B0-6A0E-BAD3-2B75F19ADEEB}"/>
+              </a:ext>
+            </a:extLst>
+          </p:cNvPr>
+          <p:cNvCxnSpPr>
+            <a:cxnSpLocks/>
+            <a:stCxn id="4" idx="2"/>
+            <a:endCxn id="230" idx="1"/>
+          </p:cNvCxnSpPr>
+          <p:nvPr/>
+        </p:nvCxnSpPr>
+        <p:spPr>
+          <a:xfrm rot="5400000">
+            <a:off x="1654927" y="3914846"/>
+            <a:ext cx="2614527" cy="1502266"/>
+          </a:xfrm>
+          <a:prstGeom prst="bentConnector4">
+            <a:avLst>
+              <a:gd name="adj1" fmla="val 46799"/>
+              <a:gd name="adj2" fmla="val 115217"/>
+            </a:avLst>
+          </a:prstGeom>
+          <a:ln w="38100">
+            <a:tailEnd type="triangle"/>
+          </a:ln>
+        </p:spPr>
+        <p:style>
+          <a:lnRef idx="2">
+            <a:schemeClr val="dk1"/>
+          </a:lnRef>
+          <a:fillRef idx="0">
+            <a:schemeClr val="dk1"/>
+          </a:fillRef>
+          <a:effectRef idx="1">
+            <a:schemeClr val="dk1"/>
+          </a:effectRef>
+          <a:fontRef idx="minor">
+            <a:schemeClr val="tx1"/>
+          </a:fontRef>
+        </p:style>
+      </p:cxnSp>
+      <p:cxnSp>
+        <p:nvCxnSpPr>
+          <p:cNvPr id="278" name="Elbow Connector 277">
+            <a:extLst>
+              <a:ext uri="{FF2B5EF4-FFF2-40B4-BE49-F238E27FC236}">
+                <a16:creationId xmlns:a16="http://schemas.microsoft.com/office/drawing/2014/main" id="{60EE083B-F0F2-219E-FD1C-938D14EBE610}"/>
+              </a:ext>
+            </a:extLst>
+          </p:cNvPr>
+          <p:cNvCxnSpPr>
+            <a:cxnSpLocks/>
+            <a:stCxn id="8" idx="0"/>
+            <a:endCxn id="235" idx="1"/>
+          </p:cNvCxnSpPr>
+          <p:nvPr/>
+        </p:nvCxnSpPr>
+        <p:spPr>
+          <a:xfrm rot="16200000" flipH="1">
+            <a:off x="-725810" y="4085321"/>
+            <a:ext cx="5142971" cy="701648"/>
+          </a:xfrm>
+          <a:prstGeom prst="bentConnector4">
+            <a:avLst>
+              <a:gd name="adj1" fmla="val -2716"/>
+              <a:gd name="adj2" fmla="val -234920"/>
+            </a:avLst>
+          </a:prstGeom>
+          <a:ln w="38100">
+            <a:tailEnd type="triangle"/>
+          </a:ln>
+        </p:spPr>
+        <p:style>
+          <a:lnRef idx="2">
+            <a:schemeClr val="dk1"/>
+          </a:lnRef>
+          <a:fillRef idx="0">
+            <a:schemeClr val="dk1"/>
+          </a:fillRef>
+          <a:effectRef idx="1">
+            <a:schemeClr val="dk1"/>
+          </a:effectRef>
+          <a:fontRef idx="minor">
+            <a:schemeClr val="tx1"/>
+          </a:fontRef>
+        </p:style>
+      </p:cxnSp>
+      <p:sp>
+        <p:nvSpPr>
+          <p:cNvPr id="289" name="Rectangle 288">
+            <a:extLst>
+              <a:ext uri="{FF2B5EF4-FFF2-40B4-BE49-F238E27FC236}">
+                <a16:creationId xmlns:a16="http://schemas.microsoft.com/office/drawing/2014/main" id="{0CAA2824-AD66-7A27-E452-E3299C00B2E5}"/>
               </a:ext>
             </a:extLst>
           </p:cNvPr>
@@ -8440,17 +8425,14 @@
         </p:nvSpPr>
         <p:spPr>
           <a:xfrm>
-            <a:off x="4261475" y="6205437"/>
-            <a:ext cx="1652437" cy="242864"/>
+            <a:off x="6518976" y="5521900"/>
+            <a:ext cx="1342489" cy="674380"/>
           </a:xfrm>
           <a:prstGeom prst="rect">
             <a:avLst/>
           </a:prstGeom>
           <a:solidFill>
-            <a:schemeClr val="accent2">
-              <a:lumMod val="60000"/>
-              <a:lumOff val="40000"/>
-            </a:schemeClr>
+            <a:srgbClr val="FFC000"/>
           </a:solidFill>
         </p:spPr>
         <p:style>
@@ -8478,48 +8460,12 @@
           </a:p>
         </p:txBody>
       </p:sp>
-      <p:pic>
-        <p:nvPicPr>
-          <p:cNvPr id="255" name="Graphic 254" descr="Repeat with solid fill">
-            <a:extLst>
-              <a:ext uri="{FF2B5EF4-FFF2-40B4-BE49-F238E27FC236}">
-                <a16:creationId xmlns:a16="http://schemas.microsoft.com/office/drawing/2014/main" id="{38DDCA80-E0E1-7C0E-EB15-733B8914F936}"/>
-              </a:ext>
-            </a:extLst>
-          </p:cNvPr>
-          <p:cNvPicPr>
-            <a:picLocks noChangeAspect="1"/>
-          </p:cNvPicPr>
-          <p:nvPr/>
-        </p:nvPicPr>
-        <p:blipFill>
-          <a:blip>
-            <a:extLst>
-              <a:ext uri="{96DAC541-7B7A-43D3-8B79-37D633B846F1}">
-                <asvg:svgBlip xmlns:asvg="http://schemas.microsoft.com/office/drawing/2016/SVG/main" r:embed="rId2"/>
-              </a:ext>
-            </a:extLst>
-          </a:blip>
-          <a:stretch>
-            <a:fillRect/>
-          </a:stretch>
-        </p:blipFill>
-        <p:spPr>
-          <a:xfrm>
-            <a:off x="4123510" y="5991903"/>
-            <a:ext cx="366563" cy="366563"/>
-          </a:xfrm>
-          <a:prstGeom prst="rect">
-            <a:avLst/>
-          </a:prstGeom>
-        </p:spPr>
-      </p:pic>
-      <p:sp>
-        <p:nvSpPr>
-          <p:cNvPr id="256" name="TextBox 255">
-            <a:extLst>
-              <a:ext uri="{FF2B5EF4-FFF2-40B4-BE49-F238E27FC236}">
-                <a16:creationId xmlns:a16="http://schemas.microsoft.com/office/drawing/2014/main" id="{CB709F97-5D18-8E1F-EB03-274F995138A7}"/>
+      <p:sp>
+        <p:nvSpPr>
+          <p:cNvPr id="290" name="TextBox 289">
+            <a:extLst>
+              <a:ext uri="{FF2B5EF4-FFF2-40B4-BE49-F238E27FC236}">
+                <a16:creationId xmlns:a16="http://schemas.microsoft.com/office/drawing/2014/main" id="{29625248-F791-B6AA-F224-3FC10DF36286}"/>
               </a:ext>
             </a:extLst>
           </p:cNvPr>
@@ -8528,8 +8474,8 @@
         </p:nvSpPr>
         <p:spPr>
           <a:xfrm>
-            <a:off x="4202156" y="6195494"/>
-            <a:ext cx="1745286" cy="276999"/>
+            <a:off x="6502981" y="5580220"/>
+            <a:ext cx="1008609" cy="276999"/>
           </a:xfrm>
           <a:prstGeom prst="rect">
             <a:avLst/>
@@ -8544,38 +8490,41 @@
           <a:p>
             <a:r>
               <a:rPr lang="en-US" sz="1200" noProof="1"/>
-              <a:t>create-overview-kml.sh</a:t>
+              <a:t>Risk module</a:t>
             </a:r>
           </a:p>
         </p:txBody>
       </p:sp>
       <p:cxnSp>
         <p:nvCxnSpPr>
-          <p:cNvPr id="257" name="Elbow Connector 256">
-            <a:extLst>
-              <a:ext uri="{FF2B5EF4-FFF2-40B4-BE49-F238E27FC236}">
-                <a16:creationId xmlns:a16="http://schemas.microsoft.com/office/drawing/2014/main" id="{1AE0C03A-E3D0-6F9B-8F09-C0B4EE6E3133}"/>
+          <p:cNvPr id="298" name="Elbow Connector 297">
+            <a:extLst>
+              <a:ext uri="{FF2B5EF4-FFF2-40B4-BE49-F238E27FC236}">
+                <a16:creationId xmlns:a16="http://schemas.microsoft.com/office/drawing/2014/main" id="{3CD32CFC-B131-B4C0-37F1-F50938DF9027}"/>
               </a:ext>
             </a:extLst>
           </p:cNvPr>
           <p:cNvCxnSpPr>
             <a:cxnSpLocks/>
-            <a:stCxn id="230" idx="3"/>
+            <a:stCxn id="105" idx="2"/>
+            <a:endCxn id="203" idx="0"/>
           </p:cNvCxnSpPr>
           <p:nvPr/>
         </p:nvCxnSpPr>
         <p:spPr>
-          <a:xfrm flipV="1">
-            <a:off x="3835730" y="5964661"/>
-            <a:ext cx="387013" cy="8582"/>
+          <a:xfrm rot="5400000">
+            <a:off x="6338678" y="1605697"/>
+            <a:ext cx="2521219" cy="996120"/>
           </a:xfrm>
           <a:prstGeom prst="bentConnector3">
             <a:avLst>
-              <a:gd name="adj1" fmla="val 50000"/>
+              <a:gd name="adj1" fmla="val 11848"/>
             </a:avLst>
           </a:prstGeom>
           <a:ln w="38100">
-            <a:tailEnd type="triangle"/>
+            <a:prstDash val="dash"/>
+            <a:headEnd type="triangle" w="med" len="med"/>
+            <a:tailEnd type="triangle" w="med" len="med"/>
           </a:ln>
         </p:spPr>
         <p:style>
@@ -8595,30 +8544,32 @@
       </p:cxnSp>
       <p:cxnSp>
         <p:nvCxnSpPr>
-          <p:cNvPr id="262" name="Elbow Connector 261">
-            <a:extLst>
-              <a:ext uri="{FF2B5EF4-FFF2-40B4-BE49-F238E27FC236}">
-                <a16:creationId xmlns:a16="http://schemas.microsoft.com/office/drawing/2014/main" id="{E7DDF635-308E-C78A-FAEC-8636C3FF0A9B}"/>
+          <p:cNvPr id="306" name="Elbow Connector 305">
+            <a:extLst>
+              <a:ext uri="{FF2B5EF4-FFF2-40B4-BE49-F238E27FC236}">
+                <a16:creationId xmlns:a16="http://schemas.microsoft.com/office/drawing/2014/main" id="{A2BD6CC8-010E-C75F-9045-58E249025B12}"/>
               </a:ext>
             </a:extLst>
           </p:cNvPr>
           <p:cNvCxnSpPr>
             <a:cxnSpLocks/>
-            <a:stCxn id="4" idx="2"/>
-            <a:endCxn id="256" idx="1"/>
+            <a:stCxn id="124" idx="1"/>
+            <a:endCxn id="203" idx="0"/>
           </p:cNvCxnSpPr>
           <p:nvPr/>
         </p:nvCxnSpPr>
         <p:spPr>
-          <a:xfrm rot="16200000" flipH="1">
-            <a:off x="2414112" y="4545950"/>
-            <a:ext cx="3087254" cy="488833"/>
+          <a:xfrm rot="10800000" flipV="1">
+            <a:off x="7101228" y="2217435"/>
+            <a:ext cx="133597" cy="1146931"/>
           </a:xfrm>
           <a:prstGeom prst="bentConnector2">
             <a:avLst/>
           </a:prstGeom>
           <a:ln w="38100">
-            <a:tailEnd type="triangle"/>
+            <a:prstDash val="dash"/>
+            <a:headEnd type="triangle" w="med" len="med"/>
+            <a:tailEnd type="triangle" w="med" len="med"/>
           </a:ln>
         </p:spPr>
         <p:style>
@@ -8638,33 +8589,33 @@
       </p:cxnSp>
       <p:cxnSp>
         <p:nvCxnSpPr>
-          <p:cNvPr id="265" name="Elbow Connector 264">
-            <a:extLst>
-              <a:ext uri="{FF2B5EF4-FFF2-40B4-BE49-F238E27FC236}">
-                <a16:creationId xmlns:a16="http://schemas.microsoft.com/office/drawing/2014/main" id="{03AF12DC-32B0-6A0E-BAD3-2B75F19ADEEB}"/>
+          <p:cNvPr id="318" name="Elbow Connector 317">
+            <a:extLst>
+              <a:ext uri="{FF2B5EF4-FFF2-40B4-BE49-F238E27FC236}">
+                <a16:creationId xmlns:a16="http://schemas.microsoft.com/office/drawing/2014/main" id="{F16A25D0-3C85-6841-BBF3-CF40983677B6}"/>
               </a:ext>
             </a:extLst>
           </p:cNvPr>
           <p:cNvCxnSpPr>
             <a:cxnSpLocks/>
-            <a:stCxn id="4" idx="2"/>
-            <a:endCxn id="230" idx="1"/>
+            <a:stCxn id="204" idx="3"/>
           </p:cNvCxnSpPr>
           <p:nvPr/>
         </p:nvCxnSpPr>
         <p:spPr>
-          <a:xfrm rot="5400000">
-            <a:off x="1598939" y="3858858"/>
-            <a:ext cx="2726503" cy="1502266"/>
-          </a:xfrm>
-          <a:prstGeom prst="bentConnector4">
+          <a:xfrm flipV="1">
+            <a:off x="3293181" y="3713482"/>
+            <a:ext cx="2726105" cy="364626"/>
+          </a:xfrm>
+          <a:prstGeom prst="bentConnector3">
             <a:avLst>
-              <a:gd name="adj1" fmla="val 56098"/>
-              <a:gd name="adj2" fmla="val 115217"/>
+              <a:gd name="adj1" fmla="val 50000"/>
             </a:avLst>
           </a:prstGeom>
           <a:ln w="38100">
-            <a:tailEnd type="triangle"/>
+            <a:prstDash val="dash"/>
+            <a:headEnd type="none" w="med" len="med"/>
+            <a:tailEnd type="triangle" w="med" len="med"/>
           </a:ln>
         </p:spPr>
         <p:style>
@@ -8684,33 +8635,35 @@
       </p:cxnSp>
       <p:cxnSp>
         <p:nvCxnSpPr>
-          <p:cNvPr id="278" name="Elbow Connector 277">
-            <a:extLst>
-              <a:ext uri="{FF2B5EF4-FFF2-40B4-BE49-F238E27FC236}">
-                <a16:creationId xmlns:a16="http://schemas.microsoft.com/office/drawing/2014/main" id="{60EE083B-F0F2-219E-FD1C-938D14EBE610}"/>
+          <p:cNvPr id="323" name="Elbow Connector 322">
+            <a:extLst>
+              <a:ext uri="{FF2B5EF4-FFF2-40B4-BE49-F238E27FC236}">
+                <a16:creationId xmlns:a16="http://schemas.microsoft.com/office/drawing/2014/main" id="{290FC449-2309-C9B3-D4D9-AD89940C3FDF}"/>
               </a:ext>
             </a:extLst>
           </p:cNvPr>
           <p:cNvCxnSpPr>
             <a:cxnSpLocks/>
-            <a:stCxn id="8" idx="0"/>
-            <a:endCxn id="235" idx="1"/>
+            <a:stCxn id="124" idx="3"/>
+            <a:endCxn id="289" idx="0"/>
           </p:cNvCxnSpPr>
           <p:nvPr/>
         </p:nvCxnSpPr>
         <p:spPr>
-          <a:xfrm rot="16200000" flipH="1">
-            <a:off x="-725810" y="4085321"/>
-            <a:ext cx="5142971" cy="701648"/>
+          <a:xfrm flipH="1">
+            <a:off x="7190221" y="2217436"/>
+            <a:ext cx="2255307" cy="3304464"/>
           </a:xfrm>
           <a:prstGeom prst="bentConnector4">
             <a:avLst>
-              <a:gd name="adj1" fmla="val -2716"/>
-              <a:gd name="adj2" fmla="val -234920"/>
+              <a:gd name="adj1" fmla="val -10136"/>
+              <a:gd name="adj2" fmla="val 64401"/>
             </a:avLst>
           </a:prstGeom>
           <a:ln w="38100">
-            <a:tailEnd type="triangle"/>
+            <a:prstDash val="dash"/>
+            <a:headEnd type="triangle" w="med" len="med"/>
+            <a:tailEnd type="triangle" w="med" len="med"/>
           </a:ln>
         </p:spPr>
         <p:style>
@@ -8728,12 +8681,294 @@
           </a:fontRef>
         </p:style>
       </p:cxnSp>
-      <p:sp>
-        <p:nvSpPr>
-          <p:cNvPr id="289" name="Rectangle 288">
-            <a:extLst>
-              <a:ext uri="{FF2B5EF4-FFF2-40B4-BE49-F238E27FC236}">
-                <a16:creationId xmlns:a16="http://schemas.microsoft.com/office/drawing/2014/main" id="{0CAA2824-AD66-7A27-E452-E3299C00B2E5}"/>
+      <p:cxnSp>
+        <p:nvCxnSpPr>
+          <p:cNvPr id="330" name="Elbow Connector 329">
+            <a:extLst>
+              <a:ext uri="{FF2B5EF4-FFF2-40B4-BE49-F238E27FC236}">
+                <a16:creationId xmlns:a16="http://schemas.microsoft.com/office/drawing/2014/main" id="{D145EBC3-6A0E-CB95-C9FF-C8370282382E}"/>
+              </a:ext>
+            </a:extLst>
+          </p:cNvPr>
+          <p:cNvCxnSpPr>
+            <a:cxnSpLocks/>
+            <a:stCxn id="202" idx="2"/>
+            <a:endCxn id="289" idx="0"/>
+          </p:cNvCxnSpPr>
+          <p:nvPr/>
+        </p:nvCxnSpPr>
+        <p:spPr>
+          <a:xfrm rot="16200000" flipH="1">
+            <a:off x="6432051" y="4763730"/>
+            <a:ext cx="1471370" cy="44970"/>
+          </a:xfrm>
+          <a:prstGeom prst="bentConnector3">
+            <a:avLst>
+              <a:gd name="adj1" fmla="val 50000"/>
+            </a:avLst>
+          </a:prstGeom>
+          <a:ln w="38100">
+            <a:prstDash val="dash"/>
+            <a:headEnd type="triangle" w="med" len="med"/>
+            <a:tailEnd type="triangle" w="med" len="med"/>
+          </a:ln>
+        </p:spPr>
+        <p:style>
+          <a:lnRef idx="2">
+            <a:schemeClr val="dk1"/>
+          </a:lnRef>
+          <a:fillRef idx="0">
+            <a:schemeClr val="dk1"/>
+          </a:fillRef>
+          <a:effectRef idx="1">
+            <a:schemeClr val="dk1"/>
+          </a:effectRef>
+          <a:fontRef idx="minor">
+            <a:schemeClr val="tx1"/>
+          </a:fontRef>
+        </p:style>
+      </p:cxnSp>
+      <p:cxnSp>
+        <p:nvCxnSpPr>
+          <p:cNvPr id="334" name="Elbow Connector 333">
+            <a:extLst>
+              <a:ext uri="{FF2B5EF4-FFF2-40B4-BE49-F238E27FC236}">
+                <a16:creationId xmlns:a16="http://schemas.microsoft.com/office/drawing/2014/main" id="{760BFCB2-3D62-F50C-E73E-78B7EE7581DB}"/>
+              </a:ext>
+            </a:extLst>
+          </p:cNvPr>
+          <p:cNvCxnSpPr>
+            <a:cxnSpLocks/>
+            <a:stCxn id="204" idx="3"/>
+            <a:endCxn id="289" idx="1"/>
+          </p:cNvCxnSpPr>
+          <p:nvPr/>
+        </p:nvCxnSpPr>
+        <p:spPr>
+          <a:xfrm>
+            <a:off x="3293181" y="4078108"/>
+            <a:ext cx="3225795" cy="1780982"/>
+          </a:xfrm>
+          <a:prstGeom prst="bentConnector3">
+            <a:avLst>
+              <a:gd name="adj1" fmla="val 73140"/>
+            </a:avLst>
+          </a:prstGeom>
+          <a:ln w="38100">
+            <a:prstDash val="dash"/>
+            <a:headEnd type="none" w="med" len="med"/>
+            <a:tailEnd type="triangle" w="med" len="med"/>
+          </a:ln>
+        </p:spPr>
+        <p:style>
+          <a:lnRef idx="2">
+            <a:schemeClr val="dk1"/>
+          </a:lnRef>
+          <a:fillRef idx="0">
+            <a:schemeClr val="dk1"/>
+          </a:fillRef>
+          <a:effectRef idx="1">
+            <a:schemeClr val="dk1"/>
+          </a:effectRef>
+          <a:fontRef idx="minor">
+            <a:schemeClr val="tx1"/>
+          </a:fontRef>
+        </p:style>
+      </p:cxnSp>
+      <p:cxnSp>
+        <p:nvCxnSpPr>
+          <p:cNvPr id="341" name="Elbow Connector 340">
+            <a:extLst>
+              <a:ext uri="{FF2B5EF4-FFF2-40B4-BE49-F238E27FC236}">
+                <a16:creationId xmlns:a16="http://schemas.microsoft.com/office/drawing/2014/main" id="{24005D6A-4DC3-B548-8E21-828250BBEDDB}"/>
+              </a:ext>
+            </a:extLst>
+          </p:cNvPr>
+          <p:cNvCxnSpPr>
+            <a:cxnSpLocks/>
+            <a:stCxn id="289" idx="3"/>
+            <a:endCxn id="167" idx="1"/>
+          </p:cNvCxnSpPr>
+          <p:nvPr/>
+        </p:nvCxnSpPr>
+        <p:spPr>
+          <a:xfrm flipV="1">
+            <a:off x="7861465" y="5542150"/>
+            <a:ext cx="1975283" cy="316940"/>
+          </a:xfrm>
+          <a:prstGeom prst="bentConnector3">
+            <a:avLst>
+              <a:gd name="adj1" fmla="val 50000"/>
+            </a:avLst>
+          </a:prstGeom>
+          <a:ln w="38100">
+            <a:prstDash val="dash"/>
+            <a:headEnd type="none" w="med" len="med"/>
+            <a:tailEnd type="triangle" w="med" len="med"/>
+          </a:ln>
+        </p:spPr>
+        <p:style>
+          <a:lnRef idx="2">
+            <a:schemeClr val="dk1"/>
+          </a:lnRef>
+          <a:fillRef idx="0">
+            <a:schemeClr val="dk1"/>
+          </a:fillRef>
+          <a:effectRef idx="1">
+            <a:schemeClr val="dk1"/>
+          </a:effectRef>
+          <a:fontRef idx="minor">
+            <a:schemeClr val="tx1"/>
+          </a:fontRef>
+        </p:style>
+      </p:cxnSp>
+      <p:cxnSp>
+        <p:nvCxnSpPr>
+          <p:cNvPr id="344" name="Elbow Connector 343">
+            <a:extLst>
+              <a:ext uri="{FF2B5EF4-FFF2-40B4-BE49-F238E27FC236}">
+                <a16:creationId xmlns:a16="http://schemas.microsoft.com/office/drawing/2014/main" id="{2784287A-736E-68DE-209D-219212CEB8E3}"/>
+              </a:ext>
+            </a:extLst>
+          </p:cNvPr>
+          <p:cNvCxnSpPr>
+            <a:cxnSpLocks/>
+            <a:stCxn id="289" idx="3"/>
+            <a:endCxn id="228" idx="3"/>
+          </p:cNvCxnSpPr>
+          <p:nvPr/>
+        </p:nvCxnSpPr>
+        <p:spPr>
+          <a:xfrm flipH="1">
+            <a:off x="6019288" y="5859090"/>
+            <a:ext cx="1842177" cy="502003"/>
+          </a:xfrm>
+          <a:prstGeom prst="bentConnector3">
+            <a:avLst>
+              <a:gd name="adj1" fmla="val -12409"/>
+            </a:avLst>
+          </a:prstGeom>
+          <a:ln w="38100">
+            <a:prstDash val="dash"/>
+            <a:headEnd type="none" w="med" len="med"/>
+            <a:tailEnd type="triangle" w="med" len="med"/>
+          </a:ln>
+        </p:spPr>
+        <p:style>
+          <a:lnRef idx="2">
+            <a:schemeClr val="dk1"/>
+          </a:lnRef>
+          <a:fillRef idx="0">
+            <a:schemeClr val="dk1"/>
+          </a:fillRef>
+          <a:effectRef idx="1">
+            <a:schemeClr val="dk1"/>
+          </a:effectRef>
+          <a:fontRef idx="minor">
+            <a:schemeClr val="tx1"/>
+          </a:fontRef>
+        </p:style>
+      </p:cxnSp>
+      <p:cxnSp>
+        <p:nvCxnSpPr>
+          <p:cNvPr id="356" name="Elbow Connector 355">
+            <a:extLst>
+              <a:ext uri="{FF2B5EF4-FFF2-40B4-BE49-F238E27FC236}">
+                <a16:creationId xmlns:a16="http://schemas.microsoft.com/office/drawing/2014/main" id="{A0F63EF9-019B-28D7-1FF7-EABE30B73796}"/>
+              </a:ext>
+            </a:extLst>
+          </p:cNvPr>
+          <p:cNvCxnSpPr>
+            <a:cxnSpLocks/>
+            <a:stCxn id="151" idx="3"/>
+            <a:endCxn id="190" idx="3"/>
+          </p:cNvCxnSpPr>
+          <p:nvPr/>
+        </p:nvCxnSpPr>
+        <p:spPr>
+          <a:xfrm>
+            <a:off x="11412875" y="3314444"/>
+            <a:ext cx="57357" cy="3013978"/>
+          </a:xfrm>
+          <a:prstGeom prst="bentConnector3">
+            <a:avLst>
+              <a:gd name="adj1" fmla="val 498556"/>
+            </a:avLst>
+          </a:prstGeom>
+          <a:ln w="38100">
+            <a:solidFill>
+              <a:srgbClr val="FF0000"/>
+            </a:solidFill>
+            <a:tailEnd type="triangle"/>
+          </a:ln>
+        </p:spPr>
+        <p:style>
+          <a:lnRef idx="2">
+            <a:schemeClr val="dk1"/>
+          </a:lnRef>
+          <a:fillRef idx="0">
+            <a:schemeClr val="dk1"/>
+          </a:fillRef>
+          <a:effectRef idx="1">
+            <a:schemeClr val="dk1"/>
+          </a:effectRef>
+          <a:fontRef idx="minor">
+            <a:schemeClr val="tx1"/>
+          </a:fontRef>
+        </p:style>
+      </p:cxnSp>
+      <p:cxnSp>
+        <p:nvCxnSpPr>
+          <p:cNvPr id="361" name="Elbow Connector 360">
+            <a:extLst>
+              <a:ext uri="{FF2B5EF4-FFF2-40B4-BE49-F238E27FC236}">
+                <a16:creationId xmlns:a16="http://schemas.microsoft.com/office/drawing/2014/main" id="{F9AC13C7-350C-1DC2-5BDE-3F9AD781F1FD}"/>
+              </a:ext>
+            </a:extLst>
+          </p:cNvPr>
+          <p:cNvCxnSpPr>
+            <a:cxnSpLocks/>
+            <a:stCxn id="232" idx="2"/>
+            <a:endCxn id="172" idx="1"/>
+          </p:cNvCxnSpPr>
+          <p:nvPr/>
+        </p:nvCxnSpPr>
+        <p:spPr>
+          <a:xfrm rot="5400000" flipH="1" flipV="1">
+            <a:off x="6041092" y="2137041"/>
+            <a:ext cx="1287043" cy="7325090"/>
+          </a:xfrm>
+          <a:prstGeom prst="bentConnector4">
+            <a:avLst>
+              <a:gd name="adj1" fmla="val -4578"/>
+              <a:gd name="adj2" fmla="val 76531"/>
+            </a:avLst>
+          </a:prstGeom>
+          <a:ln w="38100">
+            <a:tailEnd type="triangle"/>
+          </a:ln>
+        </p:spPr>
+        <p:style>
+          <a:lnRef idx="2">
+            <a:schemeClr val="dk1"/>
+          </a:lnRef>
+          <a:fillRef idx="0">
+            <a:schemeClr val="dk1"/>
+          </a:fillRef>
+          <a:effectRef idx="1">
+            <a:schemeClr val="dk1"/>
+          </a:effectRef>
+          <a:fontRef idx="minor">
+            <a:schemeClr val="tx1"/>
+          </a:fontRef>
+        </p:style>
+      </p:cxnSp>
+      <p:sp>
+        <p:nvSpPr>
+          <p:cNvPr id="411" name="Rectangle 410">
+            <a:extLst>
+              <a:ext uri="{FF2B5EF4-FFF2-40B4-BE49-F238E27FC236}">
+                <a16:creationId xmlns:a16="http://schemas.microsoft.com/office/drawing/2014/main" id="{73015C36-0E66-77F0-222A-AF2B22DB0131}"/>
               </a:ext>
             </a:extLst>
           </p:cNvPr>
@@ -8742,14 +8977,16 @@
         </p:nvSpPr>
         <p:spPr>
           <a:xfrm>
-            <a:off x="6518976" y="5521900"/>
-            <a:ext cx="1342489" cy="674380"/>
+            <a:off x="1416618" y="4260526"/>
+            <a:ext cx="1798521" cy="276999"/>
           </a:xfrm>
           <a:prstGeom prst="rect">
             <a:avLst/>
           </a:prstGeom>
           <a:solidFill>
-            <a:srgbClr val="FFC000"/>
+            <a:schemeClr val="bg2">
+              <a:lumMod val="90000"/>
+            </a:schemeClr>
           </a:solidFill>
         </p:spPr>
         <p:style>
@@ -8779,10 +9016,10 @@
       </p:sp>
       <p:sp>
         <p:nvSpPr>
-          <p:cNvPr id="290" name="TextBox 289">
-            <a:extLst>
-              <a:ext uri="{FF2B5EF4-FFF2-40B4-BE49-F238E27FC236}">
-                <a16:creationId xmlns:a16="http://schemas.microsoft.com/office/drawing/2014/main" id="{29625248-F791-B6AA-F224-3FC10DF36286}"/>
+          <p:cNvPr id="412" name="TextBox 411">
+            <a:extLst>
+              <a:ext uri="{FF2B5EF4-FFF2-40B4-BE49-F238E27FC236}">
+                <a16:creationId xmlns:a16="http://schemas.microsoft.com/office/drawing/2014/main" id="{4B057196-5C1F-6BBE-C721-6AE09DC38A8F}"/>
               </a:ext>
             </a:extLst>
           </p:cNvPr>
@@ -8791,8 +9028,8 @@
         </p:nvSpPr>
         <p:spPr>
           <a:xfrm>
-            <a:off x="6502981" y="5580220"/>
-            <a:ext cx="1008609" cy="276999"/>
+            <a:off x="1420935" y="4242051"/>
+            <a:ext cx="1721305" cy="276999"/>
           </a:xfrm>
           <a:prstGeom prst="rect">
             <a:avLst/>
@@ -8807,41 +9044,40 @@
           <a:p>
             <a:r>
               <a:rPr lang="en-US" sz="1200" noProof="1"/>
-              <a:t>Risk module</a:t>
+              <a:t>parameter files (config)</a:t>
             </a:r>
           </a:p>
         </p:txBody>
       </p:sp>
       <p:cxnSp>
         <p:nvCxnSpPr>
-          <p:cNvPr id="298" name="Elbow Connector 297">
-            <a:extLst>
-              <a:ext uri="{FF2B5EF4-FFF2-40B4-BE49-F238E27FC236}">
-                <a16:creationId xmlns:a16="http://schemas.microsoft.com/office/drawing/2014/main" id="{3CD32CFC-B131-B4C0-37F1-F50938DF9027}"/>
+          <p:cNvPr id="271" name="Elbow Connector 270">
+            <a:extLst>
+              <a:ext uri="{FF2B5EF4-FFF2-40B4-BE49-F238E27FC236}">
+                <a16:creationId xmlns:a16="http://schemas.microsoft.com/office/drawing/2014/main" id="{F1DCB39C-7841-7600-DE7A-8484CEBCFC65}"/>
               </a:ext>
             </a:extLst>
           </p:cNvPr>
           <p:cNvCxnSpPr>
             <a:cxnSpLocks/>
-            <a:stCxn id="105" idx="2"/>
-            <a:endCxn id="203" idx="0"/>
+            <a:stCxn id="10" idx="0"/>
+            <a:endCxn id="235" idx="1"/>
           </p:cNvCxnSpPr>
           <p:nvPr/>
         </p:nvCxnSpPr>
         <p:spPr>
-          <a:xfrm rot="5400000">
-            <a:off x="6338678" y="1605697"/>
-            <a:ext cx="2521219" cy="996120"/>
-          </a:xfrm>
-          <a:prstGeom prst="bentConnector3">
+          <a:xfrm rot="16200000" flipH="1">
+            <a:off x="-279414" y="4531717"/>
+            <a:ext cx="4636468" cy="315360"/>
+          </a:xfrm>
+          <a:prstGeom prst="bentConnector4">
             <a:avLst>
-              <a:gd name="adj1" fmla="val 11848"/>
+              <a:gd name="adj1" fmla="val -4108"/>
+              <a:gd name="adj2" fmla="val -644713"/>
             </a:avLst>
           </a:prstGeom>
           <a:ln w="38100">
-            <a:prstDash val="dash"/>
-            <a:headEnd type="triangle" w="med" len="med"/>
-            <a:tailEnd type="triangle" w="med" len="med"/>
+            <a:tailEnd type="triangle"/>
           </a:ln>
         </p:spPr>
         <p:style>
@@ -8861,32 +9097,34 @@
       </p:cxnSp>
       <p:cxnSp>
         <p:nvCxnSpPr>
-          <p:cNvPr id="306" name="Elbow Connector 305">
-            <a:extLst>
-              <a:ext uri="{FF2B5EF4-FFF2-40B4-BE49-F238E27FC236}">
-                <a16:creationId xmlns:a16="http://schemas.microsoft.com/office/drawing/2014/main" id="{A2BD6CC8-010E-C75F-9045-58E249025B12}"/>
+          <p:cNvPr id="413" name="Elbow Connector 412">
+            <a:extLst>
+              <a:ext uri="{FF2B5EF4-FFF2-40B4-BE49-F238E27FC236}">
+                <a16:creationId xmlns:a16="http://schemas.microsoft.com/office/drawing/2014/main" id="{A0C3B407-F4DE-374D-3AD3-97DFF9517D13}"/>
               </a:ext>
             </a:extLst>
           </p:cNvPr>
           <p:cNvCxnSpPr>
             <a:cxnSpLocks/>
-            <a:stCxn id="124" idx="1"/>
-            <a:endCxn id="203" idx="0"/>
+            <a:stCxn id="411" idx="3"/>
+            <a:endCxn id="207" idx="1"/>
           </p:cNvCxnSpPr>
           <p:nvPr/>
         </p:nvCxnSpPr>
         <p:spPr>
-          <a:xfrm rot="10800000" flipV="1">
-            <a:off x="7101228" y="2096827"/>
-            <a:ext cx="133597" cy="1267539"/>
-          </a:xfrm>
-          <a:prstGeom prst="bentConnector2">
-            <a:avLst/>
+          <a:xfrm flipH="1" flipV="1">
+            <a:off x="1411570" y="3931627"/>
+            <a:ext cx="1803569" cy="467399"/>
+          </a:xfrm>
+          <a:prstGeom prst="bentConnector5">
+            <a:avLst>
+              <a:gd name="adj1" fmla="val -6929"/>
+              <a:gd name="adj2" fmla="val 50000"/>
+              <a:gd name="adj3" fmla="val 107943"/>
+            </a:avLst>
           </a:prstGeom>
           <a:ln w="38100">
-            <a:prstDash val="dash"/>
-            <a:headEnd type="triangle" w="med" len="med"/>
-            <a:tailEnd type="triangle" w="med" len="med"/>
+            <a:tailEnd type="triangle"/>
           </a:ln>
         </p:spPr>
         <p:style>
@@ -8906,33 +9144,34 @@
       </p:cxnSp>
       <p:cxnSp>
         <p:nvCxnSpPr>
-          <p:cNvPr id="318" name="Elbow Connector 317">
-            <a:extLst>
-              <a:ext uri="{FF2B5EF4-FFF2-40B4-BE49-F238E27FC236}">
-                <a16:creationId xmlns:a16="http://schemas.microsoft.com/office/drawing/2014/main" id="{F16A25D0-3C85-6841-BBF3-CF40983677B6}"/>
+          <p:cNvPr id="418" name="Elbow Connector 417">
+            <a:extLst>
+              <a:ext uri="{FF2B5EF4-FFF2-40B4-BE49-F238E27FC236}">
+                <a16:creationId xmlns:a16="http://schemas.microsoft.com/office/drawing/2014/main" id="{93D336B5-376D-08F8-7200-9DBE305EAF6C}"/>
               </a:ext>
             </a:extLst>
           </p:cNvPr>
           <p:cNvCxnSpPr>
             <a:cxnSpLocks/>
-            <a:stCxn id="204" idx="3"/>
+            <a:stCxn id="411" idx="3"/>
+            <a:endCxn id="10" idx="1"/>
           </p:cNvCxnSpPr>
           <p:nvPr/>
         </p:nvCxnSpPr>
         <p:spPr>
-          <a:xfrm flipV="1">
-            <a:off x="3293181" y="3713482"/>
-            <a:ext cx="2726105" cy="364626"/>
-          </a:xfrm>
-          <a:prstGeom prst="bentConnector3">
+          <a:xfrm flipH="1" flipV="1">
+            <a:off x="959221" y="2509663"/>
+            <a:ext cx="2255918" cy="1889363"/>
+          </a:xfrm>
+          <a:prstGeom prst="bentConnector5">
             <a:avLst>
-              <a:gd name="adj1" fmla="val 50000"/>
+              <a:gd name="adj1" fmla="val -10403"/>
+              <a:gd name="adj2" fmla="val 54517"/>
+              <a:gd name="adj3" fmla="val 115537"/>
             </a:avLst>
           </a:prstGeom>
           <a:ln w="38100">
-            <a:prstDash val="dash"/>
-            <a:headEnd type="none" w="med" len="med"/>
-            <a:tailEnd type="triangle" w="med" len="med"/>
+            <a:tailEnd type="triangle"/>
           </a:ln>
         </p:spPr>
         <p:style>
@@ -8952,34 +9191,34 @@
       </p:cxnSp>
       <p:cxnSp>
         <p:nvCxnSpPr>
-          <p:cNvPr id="323" name="Elbow Connector 322">
-            <a:extLst>
-              <a:ext uri="{FF2B5EF4-FFF2-40B4-BE49-F238E27FC236}">
-                <a16:creationId xmlns:a16="http://schemas.microsoft.com/office/drawing/2014/main" id="{290FC449-2309-C9B3-D4D9-AD89940C3FDF}"/>
+          <p:cNvPr id="445" name="Elbow Connector 444">
+            <a:extLst>
+              <a:ext uri="{FF2B5EF4-FFF2-40B4-BE49-F238E27FC236}">
+                <a16:creationId xmlns:a16="http://schemas.microsoft.com/office/drawing/2014/main" id="{D401A50A-EE39-5ABB-0CC8-D3A02E1998A9}"/>
               </a:ext>
             </a:extLst>
           </p:cNvPr>
           <p:cNvCxnSpPr>
             <a:cxnSpLocks/>
-            <a:stCxn id="124" idx="3"/>
-            <a:endCxn id="289" idx="0"/>
+            <a:stCxn id="22" idx="0"/>
+            <a:endCxn id="25" idx="1"/>
           </p:cNvCxnSpPr>
           <p:nvPr/>
         </p:nvCxnSpPr>
         <p:spPr>
-          <a:xfrm flipH="1">
-            <a:off x="7190221" y="2096828"/>
-            <a:ext cx="2255307" cy="3425072"/>
+          <a:xfrm rot="16200000" flipV="1">
+            <a:off x="488485" y="1426845"/>
+            <a:ext cx="2201669" cy="454763"/>
           </a:xfrm>
           <a:prstGeom prst="bentConnector4">
             <a:avLst>
-              <a:gd name="adj1" fmla="val -7503"/>
-              <a:gd name="adj2" fmla="val 66294"/>
+              <a:gd name="adj1" fmla="val 2277"/>
+              <a:gd name="adj2" fmla="val 360806"/>
             </a:avLst>
           </a:prstGeom>
           <a:ln w="38100">
             <a:prstDash val="dash"/>
-            <a:headEnd type="triangle" w="med" len="med"/>
+            <a:headEnd type="none" w="med" len="med"/>
             <a:tailEnd type="triangle" w="med" len="med"/>
           </a:ln>
         </p:spPr>
@@ -8998,36 +9237,107 @@
           </a:fontRef>
         </p:style>
       </p:cxnSp>
+      <p:pic>
+        <p:nvPicPr>
+          <p:cNvPr id="23" name="Graphic 22" descr="Repeat with solid fill">
+            <a:extLst>
+              <a:ext uri="{FF2B5EF4-FFF2-40B4-BE49-F238E27FC236}">
+                <a16:creationId xmlns:a16="http://schemas.microsoft.com/office/drawing/2014/main" id="{09551D4D-6A79-39C2-445F-B6C40EAEA47E}"/>
+              </a:ext>
+            </a:extLst>
+          </p:cNvPr>
+          <p:cNvPicPr>
+            <a:picLocks noChangeAspect="1"/>
+          </p:cNvPicPr>
+          <p:nvPr/>
+        </p:nvPicPr>
+        <p:blipFill>
+          <a:blip>
+            <a:extLst>
+              <a:ext uri="{96DAC541-7B7A-43D3-8B79-37D633B846F1}">
+                <asvg:svgBlip xmlns:asvg="http://schemas.microsoft.com/office/drawing/2016/SVG/main" r:embed="rId2"/>
+              </a:ext>
+            </a:extLst>
+          </a:blip>
+          <a:stretch>
+            <a:fillRect/>
+          </a:stretch>
+        </p:blipFill>
+        <p:spPr>
+          <a:xfrm>
+            <a:off x="821257" y="2561410"/>
+            <a:ext cx="366563" cy="366563"/>
+          </a:xfrm>
+          <a:prstGeom prst="rect">
+            <a:avLst/>
+          </a:prstGeom>
+        </p:spPr>
+      </p:pic>
+      <p:sp>
+        <p:nvSpPr>
+          <p:cNvPr id="3" name="TextBox 2">
+            <a:extLst>
+              <a:ext uri="{FF2B5EF4-FFF2-40B4-BE49-F238E27FC236}">
+                <a16:creationId xmlns:a16="http://schemas.microsoft.com/office/drawing/2014/main" id="{3F4813CD-6922-FBC0-2980-317D96F51909}"/>
+              </a:ext>
+            </a:extLst>
+          </p:cNvPr>
+          <p:cNvSpPr txBox="1"/>
+          <p:nvPr/>
+        </p:nvSpPr>
+        <p:spPr>
+          <a:xfrm>
+            <a:off x="2197913" y="6555601"/>
+            <a:ext cx="1366015" cy="276999"/>
+          </a:xfrm>
+          <a:prstGeom prst="rect">
+            <a:avLst/>
+          </a:prstGeom>
+          <a:noFill/>
+        </p:spPr>
+        <p:txBody>
+          <a:bodyPr wrap="none" rtlCol="0">
+            <a:spAutoFit/>
+          </a:bodyPr>
+          <a:lstStyle/>
+          <a:p>
+            <a:r>
+              <a:rPr lang="en-US" sz="1200" noProof="1"/>
+              <a:t>slcs-detected.csv</a:t>
+            </a:r>
+          </a:p>
+        </p:txBody>
+      </p:sp>
       <p:cxnSp>
         <p:nvCxnSpPr>
-          <p:cNvPr id="330" name="Elbow Connector 329">
-            <a:extLst>
-              <a:ext uri="{FF2B5EF4-FFF2-40B4-BE49-F238E27FC236}">
-                <a16:creationId xmlns:a16="http://schemas.microsoft.com/office/drawing/2014/main" id="{D145EBC3-6A0E-CB95-C9FF-C8370282382E}"/>
+          <p:cNvPr id="15" name="Elbow Connector 14">
+            <a:extLst>
+              <a:ext uri="{FF2B5EF4-FFF2-40B4-BE49-F238E27FC236}">
+                <a16:creationId xmlns:a16="http://schemas.microsoft.com/office/drawing/2014/main" id="{0ECFF50B-4D54-ABDD-DFE6-3163E65F88E1}"/>
               </a:ext>
             </a:extLst>
           </p:cNvPr>
           <p:cNvCxnSpPr>
             <a:cxnSpLocks/>
-            <a:stCxn id="202" idx="2"/>
-            <a:endCxn id="289" idx="0"/>
+            <a:stCxn id="24" idx="3"/>
+            <a:endCxn id="3" idx="1"/>
           </p:cNvCxnSpPr>
           <p:nvPr/>
         </p:nvCxnSpPr>
         <p:spPr>
-          <a:xfrm rot="16200000" flipH="1">
-            <a:off x="6432051" y="4763730"/>
-            <a:ext cx="1471370" cy="44970"/>
-          </a:xfrm>
-          <a:prstGeom prst="bentConnector3">
+          <a:xfrm flipH="1">
+            <a:off x="2197913" y="553392"/>
+            <a:ext cx="695708" cy="6140709"/>
+          </a:xfrm>
+          <a:prstGeom prst="bentConnector5">
             <a:avLst>
-              <a:gd name="adj1" fmla="val 50000"/>
+              <a:gd name="adj1" fmla="val -32859"/>
+              <a:gd name="adj2" fmla="val 42555"/>
+              <a:gd name="adj3" fmla="val 248777"/>
             </a:avLst>
           </a:prstGeom>
           <a:ln w="38100">
-            <a:prstDash val="dash"/>
-            <a:headEnd type="triangle" w="med" len="med"/>
-            <a:tailEnd type="triangle" w="med" len="med"/>
+            <a:tailEnd type="triangle"/>
           </a:ln>
         </p:spPr>
         <p:style>
@@ -9045,244 +9355,12 @@
           </a:fontRef>
         </p:style>
       </p:cxnSp>
-      <p:cxnSp>
-        <p:nvCxnSpPr>
-          <p:cNvPr id="334" name="Elbow Connector 333">
-            <a:extLst>
-              <a:ext uri="{FF2B5EF4-FFF2-40B4-BE49-F238E27FC236}">
-                <a16:creationId xmlns:a16="http://schemas.microsoft.com/office/drawing/2014/main" id="{760BFCB2-3D62-F50C-E73E-78B7EE7581DB}"/>
-              </a:ext>
-            </a:extLst>
-          </p:cNvPr>
-          <p:cNvCxnSpPr>
-            <a:cxnSpLocks/>
-            <a:stCxn id="204" idx="3"/>
-            <a:endCxn id="289" idx="1"/>
-          </p:cNvCxnSpPr>
-          <p:nvPr/>
-        </p:nvCxnSpPr>
-        <p:spPr>
-          <a:xfrm>
-            <a:off x="3293181" y="4078108"/>
-            <a:ext cx="3225795" cy="1780982"/>
-          </a:xfrm>
-          <a:prstGeom prst="bentConnector3">
-            <a:avLst>
-              <a:gd name="adj1" fmla="val 73140"/>
-            </a:avLst>
-          </a:prstGeom>
-          <a:ln w="38100">
-            <a:prstDash val="dash"/>
-            <a:headEnd type="none" w="med" len="med"/>
-            <a:tailEnd type="triangle" w="med" len="med"/>
-          </a:ln>
-        </p:spPr>
-        <p:style>
-          <a:lnRef idx="2">
-            <a:schemeClr val="dk1"/>
-          </a:lnRef>
-          <a:fillRef idx="0">
-            <a:schemeClr val="dk1"/>
-          </a:fillRef>
-          <a:effectRef idx="1">
-            <a:schemeClr val="dk1"/>
-          </a:effectRef>
-          <a:fontRef idx="minor">
-            <a:schemeClr val="tx1"/>
-          </a:fontRef>
-        </p:style>
-      </p:cxnSp>
-      <p:cxnSp>
-        <p:nvCxnSpPr>
-          <p:cNvPr id="341" name="Elbow Connector 340">
-            <a:extLst>
-              <a:ext uri="{FF2B5EF4-FFF2-40B4-BE49-F238E27FC236}">
-                <a16:creationId xmlns:a16="http://schemas.microsoft.com/office/drawing/2014/main" id="{24005D6A-4DC3-B548-8E21-828250BBEDDB}"/>
-              </a:ext>
-            </a:extLst>
-          </p:cNvPr>
-          <p:cNvCxnSpPr>
-            <a:cxnSpLocks/>
-            <a:stCxn id="289" idx="3"/>
-            <a:endCxn id="167" idx="1"/>
-          </p:cNvCxnSpPr>
-          <p:nvPr/>
-        </p:nvCxnSpPr>
-        <p:spPr>
-          <a:xfrm flipV="1">
-            <a:off x="7861465" y="5542150"/>
-            <a:ext cx="1975283" cy="316940"/>
-          </a:xfrm>
-          <a:prstGeom prst="bentConnector3">
-            <a:avLst>
-              <a:gd name="adj1" fmla="val 50000"/>
-            </a:avLst>
-          </a:prstGeom>
-          <a:ln w="38100">
-            <a:prstDash val="dash"/>
-            <a:headEnd type="none" w="med" len="med"/>
-            <a:tailEnd type="triangle" w="med" len="med"/>
-          </a:ln>
-        </p:spPr>
-        <p:style>
-          <a:lnRef idx="2">
-            <a:schemeClr val="dk1"/>
-          </a:lnRef>
-          <a:fillRef idx="0">
-            <a:schemeClr val="dk1"/>
-          </a:fillRef>
-          <a:effectRef idx="1">
-            <a:schemeClr val="dk1"/>
-          </a:effectRef>
-          <a:fontRef idx="minor">
-            <a:schemeClr val="tx1"/>
-          </a:fontRef>
-        </p:style>
-      </p:cxnSp>
-      <p:cxnSp>
-        <p:nvCxnSpPr>
-          <p:cNvPr id="344" name="Elbow Connector 343">
-            <a:extLst>
-              <a:ext uri="{FF2B5EF4-FFF2-40B4-BE49-F238E27FC236}">
-                <a16:creationId xmlns:a16="http://schemas.microsoft.com/office/drawing/2014/main" id="{2784287A-736E-68DE-209D-219212CEB8E3}"/>
-              </a:ext>
-            </a:extLst>
-          </p:cNvPr>
-          <p:cNvCxnSpPr>
-            <a:cxnSpLocks/>
-            <a:stCxn id="289" idx="3"/>
-            <a:endCxn id="228" idx="3"/>
-          </p:cNvCxnSpPr>
-          <p:nvPr/>
-        </p:nvCxnSpPr>
-        <p:spPr>
-          <a:xfrm flipH="1">
-            <a:off x="6019288" y="5859090"/>
-            <a:ext cx="1842177" cy="502003"/>
-          </a:xfrm>
-          <a:prstGeom prst="bentConnector3">
-            <a:avLst>
-              <a:gd name="adj1" fmla="val -12409"/>
-            </a:avLst>
-          </a:prstGeom>
-          <a:ln w="38100">
-            <a:prstDash val="dash"/>
-            <a:headEnd type="none" w="med" len="med"/>
-            <a:tailEnd type="triangle" w="med" len="med"/>
-          </a:ln>
-        </p:spPr>
-        <p:style>
-          <a:lnRef idx="2">
-            <a:schemeClr val="dk1"/>
-          </a:lnRef>
-          <a:fillRef idx="0">
-            <a:schemeClr val="dk1"/>
-          </a:fillRef>
-          <a:effectRef idx="1">
-            <a:schemeClr val="dk1"/>
-          </a:effectRef>
-          <a:fontRef idx="minor">
-            <a:schemeClr val="tx1"/>
-          </a:fontRef>
-        </p:style>
-      </p:cxnSp>
-      <p:cxnSp>
-        <p:nvCxnSpPr>
-          <p:cNvPr id="356" name="Elbow Connector 355">
-            <a:extLst>
-              <a:ext uri="{FF2B5EF4-FFF2-40B4-BE49-F238E27FC236}">
-                <a16:creationId xmlns:a16="http://schemas.microsoft.com/office/drawing/2014/main" id="{A0F63EF9-019B-28D7-1FF7-EABE30B73796}"/>
-              </a:ext>
-            </a:extLst>
-          </p:cNvPr>
-          <p:cNvCxnSpPr>
-            <a:cxnSpLocks/>
-            <a:stCxn id="151" idx="3"/>
-            <a:endCxn id="190" idx="3"/>
-          </p:cNvCxnSpPr>
-          <p:nvPr/>
-        </p:nvCxnSpPr>
-        <p:spPr>
-          <a:xfrm>
-            <a:off x="11412875" y="3314444"/>
-            <a:ext cx="57357" cy="3013978"/>
-          </a:xfrm>
-          <a:prstGeom prst="bentConnector3">
-            <a:avLst>
-              <a:gd name="adj1" fmla="val 498556"/>
-            </a:avLst>
-          </a:prstGeom>
-          <a:ln w="38100">
-            <a:tailEnd type="triangle"/>
-          </a:ln>
-        </p:spPr>
-        <p:style>
-          <a:lnRef idx="2">
-            <a:schemeClr val="dk1"/>
-          </a:lnRef>
-          <a:fillRef idx="0">
-            <a:schemeClr val="dk1"/>
-          </a:fillRef>
-          <a:effectRef idx="1">
-            <a:schemeClr val="dk1"/>
-          </a:effectRef>
-          <a:fontRef idx="minor">
-            <a:schemeClr val="tx1"/>
-          </a:fontRef>
-        </p:style>
-      </p:cxnSp>
-      <p:cxnSp>
-        <p:nvCxnSpPr>
-          <p:cNvPr id="361" name="Elbow Connector 360">
-            <a:extLst>
-              <a:ext uri="{FF2B5EF4-FFF2-40B4-BE49-F238E27FC236}">
-                <a16:creationId xmlns:a16="http://schemas.microsoft.com/office/drawing/2014/main" id="{F9AC13C7-350C-1DC2-5BDE-3F9AD781F1FD}"/>
-              </a:ext>
-            </a:extLst>
-          </p:cNvPr>
-          <p:cNvCxnSpPr>
-            <a:cxnSpLocks/>
-            <a:stCxn id="232" idx="2"/>
-            <a:endCxn id="172" idx="1"/>
-          </p:cNvCxnSpPr>
-          <p:nvPr/>
-        </p:nvCxnSpPr>
-        <p:spPr>
-          <a:xfrm rot="5400000" flipH="1" flipV="1">
-            <a:off x="6041092" y="2137041"/>
-            <a:ext cx="1287043" cy="7325090"/>
-          </a:xfrm>
-          <a:prstGeom prst="bentConnector4">
-            <a:avLst>
-              <a:gd name="adj1" fmla="val -4578"/>
-              <a:gd name="adj2" fmla="val 76531"/>
-            </a:avLst>
-          </a:prstGeom>
-          <a:ln w="38100">
-            <a:tailEnd type="triangle"/>
-          </a:ln>
-        </p:spPr>
-        <p:style>
-          <a:lnRef idx="2">
-            <a:schemeClr val="dk1"/>
-          </a:lnRef>
-          <a:fillRef idx="0">
-            <a:schemeClr val="dk1"/>
-          </a:fillRef>
-          <a:effectRef idx="1">
-            <a:schemeClr val="dk1"/>
-          </a:effectRef>
-          <a:fontRef idx="minor">
-            <a:schemeClr val="tx1"/>
-          </a:fontRef>
-        </p:style>
-      </p:cxnSp>
-      <p:sp>
-        <p:nvSpPr>
-          <p:cNvPr id="411" name="Rectangle 410">
-            <a:extLst>
-              <a:ext uri="{FF2B5EF4-FFF2-40B4-BE49-F238E27FC236}">
-                <a16:creationId xmlns:a16="http://schemas.microsoft.com/office/drawing/2014/main" id="{73015C36-0E66-77F0-222A-AF2B22DB0131}"/>
+      <p:sp>
+        <p:nvSpPr>
+          <p:cNvPr id="13" name="Rectangle 12">
+            <a:extLst>
+              <a:ext uri="{FF2B5EF4-FFF2-40B4-BE49-F238E27FC236}">
+                <a16:creationId xmlns:a16="http://schemas.microsoft.com/office/drawing/2014/main" id="{4DBD7949-D110-2098-EE63-CEEDEC5B89DD}"/>
               </a:ext>
             </a:extLst>
           </p:cNvPr>
@@ -9291,15 +9369,16 @@
         </p:nvSpPr>
         <p:spPr>
           <a:xfrm>
-            <a:off x="1416618" y="4260526"/>
-            <a:ext cx="1798521" cy="276999"/>
+            <a:off x="7744733" y="2610834"/>
+            <a:ext cx="1188687" cy="443853"/>
           </a:xfrm>
           <a:prstGeom prst="rect">
             <a:avLst/>
           </a:prstGeom>
           <a:solidFill>
-            <a:schemeClr val="bg2">
-              <a:lumMod val="90000"/>
+            <a:schemeClr val="accent6">
+              <a:lumMod val="60000"/>
+              <a:lumOff val="40000"/>
             </a:schemeClr>
           </a:solidFill>
         </p:spPr>
@@ -9330,10 +9409,10 @@
       </p:sp>
       <p:sp>
         <p:nvSpPr>
-          <p:cNvPr id="412" name="TextBox 411">
-            <a:extLst>
-              <a:ext uri="{FF2B5EF4-FFF2-40B4-BE49-F238E27FC236}">
-                <a16:creationId xmlns:a16="http://schemas.microsoft.com/office/drawing/2014/main" id="{4B057196-5C1F-6BBE-C721-6AE09DC38A8F}"/>
+          <p:cNvPr id="14" name="TextBox 13">
+            <a:extLst>
+              <a:ext uri="{FF2B5EF4-FFF2-40B4-BE49-F238E27FC236}">
+                <a16:creationId xmlns:a16="http://schemas.microsoft.com/office/drawing/2014/main" id="{EF27102E-0F3B-E146-A830-34538C6360CB}"/>
               </a:ext>
             </a:extLst>
           </p:cNvPr>
@@ -9342,8 +9421,8 @@
         </p:nvSpPr>
         <p:spPr>
           <a:xfrm>
-            <a:off x="1420935" y="4242051"/>
-            <a:ext cx="1721305" cy="276999"/>
+            <a:off x="7725783" y="2638854"/>
+            <a:ext cx="1207637" cy="461665"/>
           </a:xfrm>
           <a:prstGeom prst="rect">
             <a:avLst/>
@@ -9351,330 +9430,24 @@
           <a:noFill/>
         </p:spPr>
         <p:txBody>
-          <a:bodyPr wrap="none" rtlCol="0">
+          <a:bodyPr wrap="square" rtlCol="0">
             <a:spAutoFit/>
           </a:bodyPr>
           <a:lstStyle/>
           <a:p>
             <a:r>
               <a:rPr lang="en-US" sz="1200" noProof="1"/>
-              <a:t>parameter files (config)</a:t>
-            </a:r>
-          </a:p>
-        </p:txBody>
-      </p:sp>
-      <p:cxnSp>
-        <p:nvCxnSpPr>
-          <p:cNvPr id="271" name="Elbow Connector 270">
-            <a:extLst>
-              <a:ext uri="{FF2B5EF4-FFF2-40B4-BE49-F238E27FC236}">
-                <a16:creationId xmlns:a16="http://schemas.microsoft.com/office/drawing/2014/main" id="{F1DCB39C-7841-7600-DE7A-8484CEBCFC65}"/>
-              </a:ext>
-            </a:extLst>
-          </p:cNvPr>
-          <p:cNvCxnSpPr>
-            <a:cxnSpLocks/>
-            <a:stCxn id="10" idx="0"/>
-            <a:endCxn id="235" idx="1"/>
-          </p:cNvCxnSpPr>
-          <p:nvPr/>
-        </p:nvCxnSpPr>
-        <p:spPr>
-          <a:xfrm rot="16200000" flipH="1">
-            <a:off x="-279414" y="4531717"/>
-            <a:ext cx="4636468" cy="315360"/>
-          </a:xfrm>
-          <a:prstGeom prst="bentConnector4">
-            <a:avLst>
-              <a:gd name="adj1" fmla="val -4108"/>
-              <a:gd name="adj2" fmla="val -644713"/>
-            </a:avLst>
-          </a:prstGeom>
-          <a:ln w="38100">
-            <a:tailEnd type="triangle"/>
-          </a:ln>
-        </p:spPr>
-        <p:style>
-          <a:lnRef idx="2">
-            <a:schemeClr val="dk1"/>
-          </a:lnRef>
-          <a:fillRef idx="0">
-            <a:schemeClr val="dk1"/>
-          </a:fillRef>
-          <a:effectRef idx="1">
-            <a:schemeClr val="dk1"/>
-          </a:effectRef>
-          <a:fontRef idx="minor">
-            <a:schemeClr val="tx1"/>
-          </a:fontRef>
-        </p:style>
-      </p:cxnSp>
-      <p:cxnSp>
-        <p:nvCxnSpPr>
-          <p:cNvPr id="413" name="Elbow Connector 412">
-            <a:extLst>
-              <a:ext uri="{FF2B5EF4-FFF2-40B4-BE49-F238E27FC236}">
-                <a16:creationId xmlns:a16="http://schemas.microsoft.com/office/drawing/2014/main" id="{A0C3B407-F4DE-374D-3AD3-97DFF9517D13}"/>
-              </a:ext>
-            </a:extLst>
-          </p:cNvPr>
-          <p:cNvCxnSpPr>
-            <a:cxnSpLocks/>
-            <a:stCxn id="411" idx="3"/>
-            <a:endCxn id="207" idx="1"/>
-          </p:cNvCxnSpPr>
-          <p:nvPr/>
-        </p:nvCxnSpPr>
-        <p:spPr>
-          <a:xfrm flipH="1" flipV="1">
-            <a:off x="1411570" y="3931627"/>
-            <a:ext cx="1803569" cy="467399"/>
-          </a:xfrm>
-          <a:prstGeom prst="bentConnector5">
-            <a:avLst>
-              <a:gd name="adj1" fmla="val -6929"/>
-              <a:gd name="adj2" fmla="val 50000"/>
-              <a:gd name="adj3" fmla="val 107943"/>
-            </a:avLst>
-          </a:prstGeom>
-          <a:ln w="38100">
-            <a:tailEnd type="triangle"/>
-          </a:ln>
-        </p:spPr>
-        <p:style>
-          <a:lnRef idx="2">
-            <a:schemeClr val="dk1"/>
-          </a:lnRef>
-          <a:fillRef idx="0">
-            <a:schemeClr val="dk1"/>
-          </a:fillRef>
-          <a:effectRef idx="1">
-            <a:schemeClr val="dk1"/>
-          </a:effectRef>
-          <a:fontRef idx="minor">
-            <a:schemeClr val="tx1"/>
-          </a:fontRef>
-        </p:style>
-      </p:cxnSp>
-      <p:cxnSp>
-        <p:nvCxnSpPr>
-          <p:cNvPr id="418" name="Elbow Connector 417">
-            <a:extLst>
-              <a:ext uri="{FF2B5EF4-FFF2-40B4-BE49-F238E27FC236}">
-                <a16:creationId xmlns:a16="http://schemas.microsoft.com/office/drawing/2014/main" id="{93D336B5-376D-08F8-7200-9DBE305EAF6C}"/>
-              </a:ext>
-            </a:extLst>
-          </p:cNvPr>
-          <p:cNvCxnSpPr>
-            <a:cxnSpLocks/>
-            <a:stCxn id="411" idx="3"/>
-            <a:endCxn id="10" idx="1"/>
-          </p:cNvCxnSpPr>
-          <p:nvPr/>
-        </p:nvCxnSpPr>
-        <p:spPr>
-          <a:xfrm flipH="1" flipV="1">
-            <a:off x="959221" y="2509663"/>
-            <a:ext cx="2255918" cy="1889363"/>
-          </a:xfrm>
-          <a:prstGeom prst="bentConnector5">
-            <a:avLst>
-              <a:gd name="adj1" fmla="val -10403"/>
-              <a:gd name="adj2" fmla="val 54517"/>
-              <a:gd name="adj3" fmla="val 115537"/>
-            </a:avLst>
-          </a:prstGeom>
-          <a:ln w="38100">
-            <a:tailEnd type="triangle"/>
-          </a:ln>
-        </p:spPr>
-        <p:style>
-          <a:lnRef idx="2">
-            <a:schemeClr val="dk1"/>
-          </a:lnRef>
-          <a:fillRef idx="0">
-            <a:schemeClr val="dk1"/>
-          </a:fillRef>
-          <a:effectRef idx="1">
-            <a:schemeClr val="dk1"/>
-          </a:effectRef>
-          <a:fontRef idx="minor">
-            <a:schemeClr val="tx1"/>
-          </a:fontRef>
-        </p:style>
-      </p:cxnSp>
-      <p:cxnSp>
-        <p:nvCxnSpPr>
-          <p:cNvPr id="445" name="Elbow Connector 444">
-            <a:extLst>
-              <a:ext uri="{FF2B5EF4-FFF2-40B4-BE49-F238E27FC236}">
-                <a16:creationId xmlns:a16="http://schemas.microsoft.com/office/drawing/2014/main" id="{D401A50A-EE39-5ABB-0CC8-D3A02E1998A9}"/>
-              </a:ext>
-            </a:extLst>
-          </p:cNvPr>
-          <p:cNvCxnSpPr>
-            <a:cxnSpLocks/>
-            <a:stCxn id="22" idx="0"/>
-            <a:endCxn id="25" idx="1"/>
-          </p:cNvCxnSpPr>
-          <p:nvPr/>
-        </p:nvCxnSpPr>
-        <p:spPr>
-          <a:xfrm rot="16200000" flipV="1">
-            <a:off x="488485" y="1426845"/>
-            <a:ext cx="2201669" cy="454763"/>
-          </a:xfrm>
-          <a:prstGeom prst="bentConnector4">
-            <a:avLst>
-              <a:gd name="adj1" fmla="val 2277"/>
-              <a:gd name="adj2" fmla="val 360806"/>
-            </a:avLst>
-          </a:prstGeom>
-          <a:ln w="38100">
-            <a:prstDash val="dash"/>
-            <a:headEnd type="none" w="med" len="med"/>
-            <a:tailEnd type="triangle" w="med" len="med"/>
-          </a:ln>
-        </p:spPr>
-        <p:style>
-          <a:lnRef idx="2">
-            <a:schemeClr val="dk1"/>
-          </a:lnRef>
-          <a:fillRef idx="0">
-            <a:schemeClr val="dk1"/>
-          </a:fillRef>
-          <a:effectRef idx="1">
-            <a:schemeClr val="dk1"/>
-          </a:effectRef>
-          <a:fontRef idx="minor">
-            <a:schemeClr val="tx1"/>
-          </a:fontRef>
-        </p:style>
-      </p:cxnSp>
-      <p:pic>
-        <p:nvPicPr>
-          <p:cNvPr id="23" name="Graphic 22" descr="Repeat with solid fill">
-            <a:extLst>
-              <a:ext uri="{FF2B5EF4-FFF2-40B4-BE49-F238E27FC236}">
-                <a16:creationId xmlns:a16="http://schemas.microsoft.com/office/drawing/2014/main" id="{09551D4D-6A79-39C2-445F-B6C40EAEA47E}"/>
-              </a:ext>
-            </a:extLst>
-          </p:cNvPr>
-          <p:cNvPicPr>
-            <a:picLocks noChangeAspect="1"/>
-          </p:cNvPicPr>
-          <p:nvPr/>
-        </p:nvPicPr>
-        <p:blipFill>
-          <a:blip>
-            <a:extLst>
-              <a:ext uri="{96DAC541-7B7A-43D3-8B79-37D633B846F1}">
-                <asvg:svgBlip xmlns:asvg="http://schemas.microsoft.com/office/drawing/2016/SVG/main" r:embed="rId2"/>
-              </a:ext>
-            </a:extLst>
-          </a:blip>
-          <a:stretch>
-            <a:fillRect/>
-          </a:stretch>
-        </p:blipFill>
-        <p:spPr>
-          <a:xfrm>
-            <a:off x="821257" y="2561410"/>
-            <a:ext cx="366563" cy="366563"/>
-          </a:xfrm>
-          <a:prstGeom prst="rect">
-            <a:avLst/>
-          </a:prstGeom>
-        </p:spPr>
-      </p:pic>
-      <p:sp>
-        <p:nvSpPr>
-          <p:cNvPr id="3" name="TextBox 2">
-            <a:extLst>
-              <a:ext uri="{FF2B5EF4-FFF2-40B4-BE49-F238E27FC236}">
-                <a16:creationId xmlns:a16="http://schemas.microsoft.com/office/drawing/2014/main" id="{3F4813CD-6922-FBC0-2980-317D96F51909}"/>
-              </a:ext>
-            </a:extLst>
-          </p:cNvPr>
-          <p:cNvSpPr txBox="1"/>
-          <p:nvPr/>
-        </p:nvSpPr>
-        <p:spPr>
-          <a:xfrm>
-            <a:off x="2197913" y="6555601"/>
-            <a:ext cx="1366015" cy="276999"/>
-          </a:xfrm>
-          <a:prstGeom prst="rect">
-            <a:avLst/>
-          </a:prstGeom>
-          <a:noFill/>
-        </p:spPr>
-        <p:txBody>
-          <a:bodyPr wrap="none" rtlCol="0">
-            <a:spAutoFit/>
-          </a:bodyPr>
-          <a:lstStyle/>
-          <a:p>
-            <a:r>
-              <a:rPr lang="en-US" sz="1200" noProof="1"/>
-              <a:t>slcs-detected.csv</a:t>
-            </a:r>
-          </a:p>
-        </p:txBody>
-      </p:sp>
-      <p:cxnSp>
-        <p:nvCxnSpPr>
-          <p:cNvPr id="15" name="Elbow Connector 14">
-            <a:extLst>
-              <a:ext uri="{FF2B5EF4-FFF2-40B4-BE49-F238E27FC236}">
-                <a16:creationId xmlns:a16="http://schemas.microsoft.com/office/drawing/2014/main" id="{0ECFF50B-4D54-ABDD-DFE6-3163E65F88E1}"/>
-              </a:ext>
-            </a:extLst>
-          </p:cNvPr>
-          <p:cNvCxnSpPr>
-            <a:cxnSpLocks/>
-            <a:stCxn id="24" idx="3"/>
-            <a:endCxn id="3" idx="1"/>
-          </p:cNvCxnSpPr>
-          <p:nvPr/>
-        </p:nvCxnSpPr>
-        <p:spPr>
-          <a:xfrm flipH="1">
-            <a:off x="2197913" y="553392"/>
-            <a:ext cx="695708" cy="6140709"/>
-          </a:xfrm>
-          <a:prstGeom prst="bentConnector5">
-            <a:avLst>
-              <a:gd name="adj1" fmla="val -32859"/>
-              <a:gd name="adj2" fmla="val 42555"/>
-              <a:gd name="adj3" fmla="val 248777"/>
-            </a:avLst>
-          </a:prstGeom>
-          <a:ln w="38100">
-            <a:tailEnd type="triangle"/>
-          </a:ln>
-        </p:spPr>
-        <p:style>
-          <a:lnRef idx="2">
-            <a:schemeClr val="dk1"/>
-          </a:lnRef>
-          <a:fillRef idx="0">
-            <a:schemeClr val="dk1"/>
-          </a:fillRef>
-          <a:effectRef idx="1">
-            <a:schemeClr val="dk1"/>
-          </a:effectRef>
-          <a:fontRef idx="minor">
-            <a:schemeClr val="tx1"/>
-          </a:fontRef>
-        </p:style>
-      </p:cxnSp>
-      <p:sp>
-        <p:nvSpPr>
-          <p:cNvPr id="13" name="Rectangle 12">
-            <a:extLst>
-              <a:ext uri="{FF2B5EF4-FFF2-40B4-BE49-F238E27FC236}">
-                <a16:creationId xmlns:a16="http://schemas.microsoft.com/office/drawing/2014/main" id="{4DBD7949-D110-2098-EE63-CEEDEC5B89DD}"/>
+              <a:t>generate_partitioned_STM</a:t>
+            </a:r>
+          </a:p>
+        </p:txBody>
+      </p:sp>
+      <p:sp>
+        <p:nvSpPr>
+          <p:cNvPr id="121" name="Rectangle 120">
+            <a:extLst>
+              <a:ext uri="{FF2B5EF4-FFF2-40B4-BE49-F238E27FC236}">
+                <a16:creationId xmlns:a16="http://schemas.microsoft.com/office/drawing/2014/main" id="{97D814AA-F7D5-5908-F53A-E39932D2141C}"/>
               </a:ext>
             </a:extLst>
           </p:cNvPr>
@@ -9683,8 +9456,8 @@
         </p:nvSpPr>
         <p:spPr>
           <a:xfrm>
-            <a:off x="7744733" y="2610835"/>
-            <a:ext cx="1188687" cy="276998"/>
+            <a:off x="3411989" y="2202856"/>
+            <a:ext cx="1241246" cy="276998"/>
           </a:xfrm>
           <a:prstGeom prst="rect">
             <a:avLst/>
@@ -9721,47 +9494,57 @@
           </a:p>
         </p:txBody>
       </p:sp>
-      <p:sp>
-        <p:nvSpPr>
-          <p:cNvPr id="14" name="TextBox 13">
-            <a:extLst>
-              <a:ext uri="{FF2B5EF4-FFF2-40B4-BE49-F238E27FC236}">
-                <a16:creationId xmlns:a16="http://schemas.microsoft.com/office/drawing/2014/main" id="{EF27102E-0F3B-E146-A830-34538C6360CB}"/>
-              </a:ext>
-            </a:extLst>
-          </p:cNvPr>
-          <p:cNvSpPr txBox="1"/>
-          <p:nvPr/>
-        </p:nvSpPr>
-        <p:spPr>
-          <a:xfrm>
-            <a:off x="7725783" y="2638854"/>
-            <a:ext cx="1240661" cy="276999"/>
-          </a:xfrm>
-          <a:prstGeom prst="rect">
-            <a:avLst/>
-          </a:prstGeom>
-          <a:noFill/>
-        </p:spPr>
-        <p:txBody>
-          <a:bodyPr wrap="none" rtlCol="0">
-            <a:spAutoFit/>
-          </a:bodyPr>
-          <a:lstStyle/>
-          <a:p>
-            <a:r>
-              <a:rPr lang="en-US" sz="1200" noProof="1"/>
-              <a:t>STM_generation</a:t>
-            </a:r>
-          </a:p>
-        </p:txBody>
-      </p:sp>
-      <p:sp>
-        <p:nvSpPr>
-          <p:cNvPr id="121" name="Rectangle 120">
-            <a:extLst>
-              <a:ext uri="{FF2B5EF4-FFF2-40B4-BE49-F238E27FC236}">
-                <a16:creationId xmlns:a16="http://schemas.microsoft.com/office/drawing/2014/main" id="{97D814AA-F7D5-5908-F53A-E39932D2141C}"/>
+      <p:cxnSp>
+        <p:nvCxnSpPr>
+          <p:cNvPr id="16" name="Elbow Connector 15">
+            <a:extLst>
+              <a:ext uri="{FF2B5EF4-FFF2-40B4-BE49-F238E27FC236}">
+                <a16:creationId xmlns:a16="http://schemas.microsoft.com/office/drawing/2014/main" id="{16F45C05-4F32-70D3-F3B2-DA8B83D5F4CC}"/>
+              </a:ext>
+            </a:extLst>
+          </p:cNvPr>
+          <p:cNvCxnSpPr>
+            <a:cxnSpLocks/>
+            <a:stCxn id="71" idx="3"/>
+            <a:endCxn id="14" idx="1"/>
+          </p:cNvCxnSpPr>
+          <p:nvPr/>
+        </p:nvCxnSpPr>
+        <p:spPr>
+          <a:xfrm>
+            <a:off x="6406042" y="1954608"/>
+            <a:ext cx="1319741" cy="915079"/>
+          </a:xfrm>
+          <a:prstGeom prst="bentConnector3">
+            <a:avLst>
+              <a:gd name="adj1" fmla="val 31804"/>
+            </a:avLst>
+          </a:prstGeom>
+          <a:ln w="38100">
+            <a:tailEnd type="triangle"/>
+          </a:ln>
+        </p:spPr>
+        <p:style>
+          <a:lnRef idx="2">
+            <a:schemeClr val="dk1"/>
+          </a:lnRef>
+          <a:fillRef idx="0">
+            <a:schemeClr val="dk1"/>
+          </a:fillRef>
+          <a:effectRef idx="1">
+            <a:schemeClr val="dk1"/>
+          </a:effectRef>
+          <a:fontRef idx="minor">
+            <a:schemeClr val="tx1"/>
+          </a:fontRef>
+        </p:style>
+      </p:cxnSp>
+      <p:sp>
+        <p:nvSpPr>
+          <p:cNvPr id="122" name="Rectangle 121">
+            <a:extLst>
+              <a:ext uri="{FF2B5EF4-FFF2-40B4-BE49-F238E27FC236}">
+                <a16:creationId xmlns:a16="http://schemas.microsoft.com/office/drawing/2014/main" id="{51B08FE6-2245-C94B-E117-87B43E069B78}"/>
               </a:ext>
             </a:extLst>
           </p:cNvPr>
@@ -9770,8 +9553,8 @@
         </p:nvSpPr>
         <p:spPr>
           <a:xfrm>
-            <a:off x="3411989" y="2202856"/>
-            <a:ext cx="1241246" cy="276998"/>
+            <a:off x="3551689" y="2515898"/>
+            <a:ext cx="534135" cy="276998"/>
           </a:xfrm>
           <a:prstGeom prst="rect">
             <a:avLst/>
@@ -9808,57 +9591,82 @@
           </a:p>
         </p:txBody>
       </p:sp>
-      <p:cxnSp>
-        <p:nvCxnSpPr>
-          <p:cNvPr id="16" name="Elbow Connector 15">
-            <a:extLst>
-              <a:ext uri="{FF2B5EF4-FFF2-40B4-BE49-F238E27FC236}">
-                <a16:creationId xmlns:a16="http://schemas.microsoft.com/office/drawing/2014/main" id="{16F45C05-4F32-70D3-F3B2-DA8B83D5F4CC}"/>
-              </a:ext>
-            </a:extLst>
-          </p:cNvPr>
-          <p:cNvCxnSpPr>
-            <a:cxnSpLocks/>
-            <a:stCxn id="71" idx="3"/>
-            <a:endCxn id="14" idx="1"/>
-          </p:cNvCxnSpPr>
-          <p:nvPr/>
-        </p:nvCxnSpPr>
-        <p:spPr>
-          <a:xfrm>
-            <a:off x="6424470" y="2084818"/>
-            <a:ext cx="1301313" cy="692536"/>
-          </a:xfrm>
-          <a:prstGeom prst="bentConnector3">
-            <a:avLst>
-              <a:gd name="adj1" fmla="val 35095"/>
-            </a:avLst>
-          </a:prstGeom>
-          <a:ln w="38100">
-            <a:tailEnd type="triangle"/>
-          </a:ln>
-        </p:spPr>
-        <p:style>
-          <a:lnRef idx="2">
-            <a:schemeClr val="dk1"/>
-          </a:lnRef>
-          <a:fillRef idx="0">
-            <a:schemeClr val="dk1"/>
-          </a:fillRef>
-          <a:effectRef idx="1">
-            <a:schemeClr val="dk1"/>
-          </a:effectRef>
-          <a:fontRef idx="minor">
-            <a:schemeClr val="tx1"/>
-          </a:fontRef>
-        </p:style>
-      </p:cxnSp>
-      <p:sp>
-        <p:nvSpPr>
-          <p:cNvPr id="122" name="Rectangle 121">
-            <a:extLst>
-              <a:ext uri="{FF2B5EF4-FFF2-40B4-BE49-F238E27FC236}">
-                <a16:creationId xmlns:a16="http://schemas.microsoft.com/office/drawing/2014/main" id="{51B08FE6-2245-C94B-E117-87B43E069B78}"/>
+      <p:sp>
+        <p:nvSpPr>
+          <p:cNvPr id="88" name="TextBox 87">
+            <a:extLst>
+              <a:ext uri="{FF2B5EF4-FFF2-40B4-BE49-F238E27FC236}">
+                <a16:creationId xmlns:a16="http://schemas.microsoft.com/office/drawing/2014/main" id="{37C6E6D5-67F7-12E6-B1D9-95CD09C13167}"/>
+              </a:ext>
+            </a:extLst>
+          </p:cNvPr>
+          <p:cNvSpPr txBox="1"/>
+          <p:nvPr/>
+        </p:nvSpPr>
+        <p:spPr>
+          <a:xfrm>
+            <a:off x="3352524" y="2195514"/>
+            <a:ext cx="1463362" cy="276999"/>
+          </a:xfrm>
+          <a:prstGeom prst="rect">
+            <a:avLst/>
+          </a:prstGeom>
+          <a:noFill/>
+        </p:spPr>
+        <p:txBody>
+          <a:bodyPr wrap="square" rtlCol="0">
+            <a:spAutoFit/>
+          </a:bodyPr>
+          <a:lstStyle/>
+          <a:p>
+            <a:r>
+              <a:rPr lang="en-US" sz="1200" noProof="1"/>
+              <a:t>SNAP_preparation</a:t>
+            </a:r>
+          </a:p>
+        </p:txBody>
+      </p:sp>
+      <p:sp>
+        <p:nvSpPr>
+          <p:cNvPr id="89" name="TextBox 88">
+            <a:extLst>
+              <a:ext uri="{FF2B5EF4-FFF2-40B4-BE49-F238E27FC236}">
+                <a16:creationId xmlns:a16="http://schemas.microsoft.com/office/drawing/2014/main" id="{6E701B43-67D6-4BCC-7F61-319716C258F9}"/>
+              </a:ext>
+            </a:extLst>
+          </p:cNvPr>
+          <p:cNvSpPr txBox="1"/>
+          <p:nvPr/>
+        </p:nvSpPr>
+        <p:spPr>
+          <a:xfrm>
+            <a:off x="3526969" y="2523606"/>
+            <a:ext cx="682339" cy="276999"/>
+          </a:xfrm>
+          <a:prstGeom prst="rect">
+            <a:avLst/>
+          </a:prstGeom>
+          <a:noFill/>
+        </p:spPr>
+        <p:txBody>
+          <a:bodyPr wrap="square" rtlCol="0">
+            <a:spAutoFit/>
+          </a:bodyPr>
+          <a:lstStyle/>
+          <a:p>
+            <a:r>
+              <a:rPr lang="en-US" sz="1200" noProof="1"/>
+              <a:t>SNAP</a:t>
+            </a:r>
+          </a:p>
+        </p:txBody>
+      </p:sp>
+      <p:sp>
+        <p:nvSpPr>
+          <p:cNvPr id="123" name="Rectangle 122">
+            <a:extLst>
+              <a:ext uri="{FF2B5EF4-FFF2-40B4-BE49-F238E27FC236}">
+                <a16:creationId xmlns:a16="http://schemas.microsoft.com/office/drawing/2014/main" id="{0C0EA210-7017-B2EF-0F0A-EF8AF29E5981}"/>
               </a:ext>
             </a:extLst>
           </p:cNvPr>
@@ -9867,8 +9675,8 @@
         </p:nvSpPr>
         <p:spPr>
           <a:xfrm>
-            <a:off x="3551689" y="2515898"/>
-            <a:ext cx="763801" cy="276998"/>
+            <a:off x="3536956" y="2826571"/>
+            <a:ext cx="1138447" cy="409479"/>
           </a:xfrm>
           <a:prstGeom prst="rect">
             <a:avLst/>
@@ -9907,10 +9715,10 @@
       </p:sp>
       <p:sp>
         <p:nvSpPr>
-          <p:cNvPr id="88" name="TextBox 87">
-            <a:extLst>
-              <a:ext uri="{FF2B5EF4-FFF2-40B4-BE49-F238E27FC236}">
-                <a16:creationId xmlns:a16="http://schemas.microsoft.com/office/drawing/2014/main" id="{37C6E6D5-67F7-12E6-B1D9-95CD09C13167}"/>
+          <p:cNvPr id="91" name="TextBox 90">
+            <a:extLst>
+              <a:ext uri="{FF2B5EF4-FFF2-40B4-BE49-F238E27FC236}">
+                <a16:creationId xmlns:a16="http://schemas.microsoft.com/office/drawing/2014/main" id="{0DA2E356-4F2E-D0EA-0E65-EB0DF862D3C7}"/>
               </a:ext>
             </a:extLst>
           </p:cNvPr>
@@ -9919,8 +9727,8 @@
         </p:nvSpPr>
         <p:spPr>
           <a:xfrm>
-            <a:off x="3352524" y="2195514"/>
-            <a:ext cx="1463362" cy="276999"/>
+            <a:off x="3542903" y="2809406"/>
+            <a:ext cx="1085842" cy="461665"/>
           </a:xfrm>
           <a:prstGeom prst="rect">
             <a:avLst/>
@@ -9935,52 +9743,152 @@
           <a:p>
             <a:r>
               <a:rPr lang="en-US" sz="1200" noProof="1"/>
-              <a:t>SNAP_preparation</a:t>
-            </a:r>
-          </a:p>
-        </p:txBody>
-      </p:sp>
-      <p:sp>
-        <p:nvSpPr>
-          <p:cNvPr id="89" name="TextBox 88">
-            <a:extLst>
-              <a:ext uri="{FF2B5EF4-FFF2-40B4-BE49-F238E27FC236}">
-                <a16:creationId xmlns:a16="http://schemas.microsoft.com/office/drawing/2014/main" id="{6E701B43-67D6-4BCC-7F61-319716C258F9}"/>
-              </a:ext>
-            </a:extLst>
-          </p:cNvPr>
-          <p:cNvSpPr txBox="1"/>
-          <p:nvPr/>
-        </p:nvSpPr>
-        <p:spPr>
-          <a:xfrm>
-            <a:off x="3526969" y="2523606"/>
-            <a:ext cx="1463362" cy="276999"/>
-          </a:xfrm>
-          <a:prstGeom prst="rect">
-            <a:avLst/>
-          </a:prstGeom>
-          <a:noFill/>
-        </p:spPr>
-        <p:txBody>
-          <a:bodyPr wrap="square" rtlCol="0">
-            <a:spAutoFit/>
-          </a:bodyPr>
-          <a:lstStyle/>
-          <a:p>
-            <a:r>
-              <a:rPr lang="en-US" sz="1200" noProof="1"/>
-              <a:t>SNAP_run</a:t>
-            </a:r>
-          </a:p>
-        </p:txBody>
-      </p:sp>
-      <p:sp>
-        <p:nvSpPr>
-          <p:cNvPr id="123" name="Rectangle 122">
-            <a:extLst>
-              <a:ext uri="{FF2B5EF4-FFF2-40B4-BE49-F238E27FC236}">
-                <a16:creationId xmlns:a16="http://schemas.microsoft.com/office/drawing/2014/main" id="{0C0EA210-7017-B2EF-0F0A-EF8AF29E5981}"/>
+              <a:t>SNAP_fix_permissions</a:t>
+            </a:r>
+          </a:p>
+        </p:txBody>
+      </p:sp>
+      <p:cxnSp>
+        <p:nvCxnSpPr>
+          <p:cNvPr id="134" name="Elbow Connector 133">
+            <a:extLst>
+              <a:ext uri="{FF2B5EF4-FFF2-40B4-BE49-F238E27FC236}">
+                <a16:creationId xmlns:a16="http://schemas.microsoft.com/office/drawing/2014/main" id="{F53AB591-4C73-FA2B-608C-A825F264B04B}"/>
+              </a:ext>
+            </a:extLst>
+          </p:cNvPr>
+          <p:cNvCxnSpPr>
+            <a:cxnSpLocks/>
+            <a:stCxn id="121" idx="3"/>
+            <a:endCxn id="122" idx="3"/>
+          </p:cNvCxnSpPr>
+          <p:nvPr/>
+        </p:nvCxnSpPr>
+        <p:spPr>
+          <a:xfrm flipH="1">
+            <a:off x="4085824" y="2341355"/>
+            <a:ext cx="567411" cy="313042"/>
+          </a:xfrm>
+          <a:prstGeom prst="bentConnector3">
+            <a:avLst>
+              <a:gd name="adj1" fmla="val -24010"/>
+            </a:avLst>
+          </a:prstGeom>
+          <a:ln w="38100">
+            <a:tailEnd type="triangle"/>
+          </a:ln>
+        </p:spPr>
+        <p:style>
+          <a:lnRef idx="2">
+            <a:schemeClr val="dk1"/>
+          </a:lnRef>
+          <a:fillRef idx="0">
+            <a:schemeClr val="dk1"/>
+          </a:fillRef>
+          <a:effectRef idx="1">
+            <a:schemeClr val="dk1"/>
+          </a:effectRef>
+          <a:fontRef idx="minor">
+            <a:schemeClr val="tx1"/>
+          </a:fontRef>
+        </p:style>
+      </p:cxnSp>
+      <p:cxnSp>
+        <p:nvCxnSpPr>
+          <p:cNvPr id="142" name="Elbow Connector 141">
+            <a:extLst>
+              <a:ext uri="{FF2B5EF4-FFF2-40B4-BE49-F238E27FC236}">
+                <a16:creationId xmlns:a16="http://schemas.microsoft.com/office/drawing/2014/main" id="{8C0F00B3-FC42-AC4A-94F3-5FDB6FFB51C2}"/>
+              </a:ext>
+            </a:extLst>
+          </p:cNvPr>
+          <p:cNvCxnSpPr>
+            <a:cxnSpLocks/>
+            <a:stCxn id="122" idx="1"/>
+            <a:endCxn id="123" idx="1"/>
+          </p:cNvCxnSpPr>
+          <p:nvPr/>
+        </p:nvCxnSpPr>
+        <p:spPr>
+          <a:xfrm rot="10800000" flipV="1">
+            <a:off x="3536957" y="2654397"/>
+            <a:ext cx="14733" cy="376914"/>
+          </a:xfrm>
+          <a:prstGeom prst="bentConnector3">
+            <a:avLst>
+              <a:gd name="adj1" fmla="val 1150085"/>
+            </a:avLst>
+          </a:prstGeom>
+          <a:ln w="38100">
+            <a:tailEnd type="triangle"/>
+          </a:ln>
+        </p:spPr>
+        <p:style>
+          <a:lnRef idx="2">
+            <a:schemeClr val="dk1"/>
+          </a:lnRef>
+          <a:fillRef idx="0">
+            <a:schemeClr val="dk1"/>
+          </a:fillRef>
+          <a:effectRef idx="1">
+            <a:schemeClr val="dk1"/>
+          </a:effectRef>
+          <a:fontRef idx="minor">
+            <a:schemeClr val="tx1"/>
+          </a:fontRef>
+        </p:style>
+      </p:cxnSp>
+      <p:cxnSp>
+        <p:nvCxnSpPr>
+          <p:cNvPr id="162" name="Elbow Connector 161">
+            <a:extLst>
+              <a:ext uri="{FF2B5EF4-FFF2-40B4-BE49-F238E27FC236}">
+                <a16:creationId xmlns:a16="http://schemas.microsoft.com/office/drawing/2014/main" id="{AA2CABF4-A3D9-979F-2F50-4A3004A996E0}"/>
+              </a:ext>
+            </a:extLst>
+          </p:cNvPr>
+          <p:cNvCxnSpPr>
+            <a:cxnSpLocks/>
+            <a:stCxn id="9" idx="3"/>
+            <a:endCxn id="121" idx="1"/>
+          </p:cNvCxnSpPr>
+          <p:nvPr/>
+        </p:nvCxnSpPr>
+        <p:spPr>
+          <a:xfrm>
+            <a:off x="2030477" y="2013797"/>
+            <a:ext cx="1381512" cy="327558"/>
+          </a:xfrm>
+          <a:prstGeom prst="bentConnector3">
+            <a:avLst>
+              <a:gd name="adj1" fmla="val 57354"/>
+            </a:avLst>
+          </a:prstGeom>
+          <a:ln w="38100">
+            <a:tailEnd type="triangle"/>
+          </a:ln>
+        </p:spPr>
+        <p:style>
+          <a:lnRef idx="2">
+            <a:schemeClr val="dk1"/>
+          </a:lnRef>
+          <a:fillRef idx="0">
+            <a:schemeClr val="dk1"/>
+          </a:fillRef>
+          <a:effectRef idx="1">
+            <a:schemeClr val="dk1"/>
+          </a:effectRef>
+          <a:fontRef idx="minor">
+            <a:schemeClr val="tx1"/>
+          </a:fontRef>
+        </p:style>
+      </p:cxnSp>
+      <p:sp>
+        <p:nvSpPr>
+          <p:cNvPr id="27" name="Rectangle 26">
+            <a:extLst>
+              <a:ext uri="{FF2B5EF4-FFF2-40B4-BE49-F238E27FC236}">
+                <a16:creationId xmlns:a16="http://schemas.microsoft.com/office/drawing/2014/main" id="{4BFD2C19-2A0D-A0E4-3F3E-B4FA266FE1E5}"/>
               </a:ext>
             </a:extLst>
           </p:cNvPr>
@@ -9989,8 +9897,8 @@
         </p:nvSpPr>
         <p:spPr>
           <a:xfrm>
-            <a:off x="3550340" y="2826573"/>
-            <a:ext cx="1414085" cy="276998"/>
+            <a:off x="5148677" y="2262830"/>
+            <a:ext cx="1414636" cy="392256"/>
           </a:xfrm>
           <a:prstGeom prst="rect">
             <a:avLst/>
@@ -10029,10 +9937,10 @@
       </p:sp>
       <p:sp>
         <p:nvSpPr>
-          <p:cNvPr id="91" name="TextBox 90">
-            <a:extLst>
-              <a:ext uri="{FF2B5EF4-FFF2-40B4-BE49-F238E27FC236}">
-                <a16:creationId xmlns:a16="http://schemas.microsoft.com/office/drawing/2014/main" id="{0DA2E356-4F2E-D0EA-0E65-EB0DF862D3C7}"/>
+          <p:cNvPr id="19" name="TextBox 18">
+            <a:extLst>
+              <a:ext uri="{FF2B5EF4-FFF2-40B4-BE49-F238E27FC236}">
+                <a16:creationId xmlns:a16="http://schemas.microsoft.com/office/drawing/2014/main" id="{D1B200E0-B934-C795-EF76-01BF02764698}"/>
               </a:ext>
             </a:extLst>
           </p:cNvPr>
@@ -10041,8 +9949,8 @@
         </p:nvSpPr>
         <p:spPr>
           <a:xfrm>
-            <a:off x="3519257" y="2835895"/>
-            <a:ext cx="1463362" cy="276999"/>
+            <a:off x="5142483" y="2263802"/>
+            <a:ext cx="1368333" cy="461665"/>
           </a:xfrm>
           <a:prstGeom prst="rect">
             <a:avLst/>
@@ -10057,152 +9965,17 @@
           <a:p>
             <a:r>
               <a:rPr lang="en-US" sz="1200" noProof="1"/>
-              <a:t>SNAP_permissions</a:t>
-            </a:r>
-          </a:p>
-        </p:txBody>
-      </p:sp>
-      <p:cxnSp>
-        <p:nvCxnSpPr>
-          <p:cNvPr id="134" name="Elbow Connector 133">
-            <a:extLst>
-              <a:ext uri="{FF2B5EF4-FFF2-40B4-BE49-F238E27FC236}">
-                <a16:creationId xmlns:a16="http://schemas.microsoft.com/office/drawing/2014/main" id="{F53AB591-4C73-FA2B-608C-A825F264B04B}"/>
-              </a:ext>
-            </a:extLst>
-          </p:cNvPr>
-          <p:cNvCxnSpPr>
-            <a:cxnSpLocks/>
-            <a:stCxn id="121" idx="3"/>
-            <a:endCxn id="122" idx="3"/>
-          </p:cNvCxnSpPr>
-          <p:nvPr/>
-        </p:nvCxnSpPr>
-        <p:spPr>
-          <a:xfrm flipH="1">
-            <a:off x="4315490" y="2341355"/>
-            <a:ext cx="337745" cy="313042"/>
-          </a:xfrm>
-          <a:prstGeom prst="bentConnector3">
-            <a:avLst>
-              <a:gd name="adj1" fmla="val -20681"/>
-            </a:avLst>
-          </a:prstGeom>
-          <a:ln w="38100">
-            <a:tailEnd type="triangle"/>
-          </a:ln>
-        </p:spPr>
-        <p:style>
-          <a:lnRef idx="2">
-            <a:schemeClr val="dk1"/>
-          </a:lnRef>
-          <a:fillRef idx="0">
-            <a:schemeClr val="dk1"/>
-          </a:fillRef>
-          <a:effectRef idx="1">
-            <a:schemeClr val="dk1"/>
-          </a:effectRef>
-          <a:fontRef idx="minor">
-            <a:schemeClr val="tx1"/>
-          </a:fontRef>
-        </p:style>
-      </p:cxnSp>
-      <p:cxnSp>
-        <p:nvCxnSpPr>
-          <p:cNvPr id="142" name="Elbow Connector 141">
-            <a:extLst>
-              <a:ext uri="{FF2B5EF4-FFF2-40B4-BE49-F238E27FC236}">
-                <a16:creationId xmlns:a16="http://schemas.microsoft.com/office/drawing/2014/main" id="{8C0F00B3-FC42-AC4A-94F3-5FDB6FFB51C2}"/>
-              </a:ext>
-            </a:extLst>
-          </p:cNvPr>
-          <p:cNvCxnSpPr>
-            <a:cxnSpLocks/>
-            <a:stCxn id="122" idx="1"/>
-            <a:endCxn id="123" idx="1"/>
-          </p:cNvCxnSpPr>
-          <p:nvPr/>
-        </p:nvCxnSpPr>
-        <p:spPr>
-          <a:xfrm rot="10800000" flipV="1">
-            <a:off x="3550341" y="2654396"/>
-            <a:ext cx="1349" cy="310675"/>
-          </a:xfrm>
-          <a:prstGeom prst="bentConnector3">
-            <a:avLst>
-              <a:gd name="adj1" fmla="val 13787102"/>
-            </a:avLst>
-          </a:prstGeom>
-          <a:ln w="38100">
-            <a:tailEnd type="triangle"/>
-          </a:ln>
-        </p:spPr>
-        <p:style>
-          <a:lnRef idx="2">
-            <a:schemeClr val="dk1"/>
-          </a:lnRef>
-          <a:fillRef idx="0">
-            <a:schemeClr val="dk1"/>
-          </a:fillRef>
-          <a:effectRef idx="1">
-            <a:schemeClr val="dk1"/>
-          </a:effectRef>
-          <a:fontRef idx="minor">
-            <a:schemeClr val="tx1"/>
-          </a:fontRef>
-        </p:style>
-      </p:cxnSp>
-      <p:cxnSp>
-        <p:nvCxnSpPr>
-          <p:cNvPr id="162" name="Elbow Connector 161">
-            <a:extLst>
-              <a:ext uri="{FF2B5EF4-FFF2-40B4-BE49-F238E27FC236}">
-                <a16:creationId xmlns:a16="http://schemas.microsoft.com/office/drawing/2014/main" id="{AA2CABF4-A3D9-979F-2F50-4A3004A996E0}"/>
-              </a:ext>
-            </a:extLst>
-          </p:cNvPr>
-          <p:cNvCxnSpPr>
-            <a:cxnSpLocks/>
-            <a:stCxn id="9" idx="3"/>
-            <a:endCxn id="121" idx="1"/>
-          </p:cNvCxnSpPr>
-          <p:nvPr/>
-        </p:nvCxnSpPr>
-        <p:spPr>
-          <a:xfrm>
-            <a:off x="2030477" y="2013797"/>
-            <a:ext cx="1381512" cy="327558"/>
-          </a:xfrm>
-          <a:prstGeom prst="bentConnector3">
-            <a:avLst>
-              <a:gd name="adj1" fmla="val 57354"/>
-            </a:avLst>
-          </a:prstGeom>
-          <a:ln w="38100">
-            <a:tailEnd type="triangle"/>
-          </a:ln>
-        </p:spPr>
-        <p:style>
-          <a:lnRef idx="2">
-            <a:schemeClr val="dk1"/>
-          </a:lnRef>
-          <a:fillRef idx="0">
-            <a:schemeClr val="dk1"/>
-          </a:fillRef>
-          <a:effectRef idx="1">
-            <a:schemeClr val="dk1"/>
-          </a:effectRef>
-          <a:fontRef idx="minor">
-            <a:schemeClr val="tx1"/>
-          </a:fontRef>
-        </p:style>
-      </p:cxnSp>
-      <p:sp>
-        <p:nvSpPr>
-          <p:cNvPr id="27" name="Rectangle 26">
-            <a:extLst>
-              <a:ext uri="{FF2B5EF4-FFF2-40B4-BE49-F238E27FC236}">
-                <a16:creationId xmlns:a16="http://schemas.microsoft.com/office/drawing/2014/main" id="{4BFD2C19-2A0D-A0E4-3F3E-B4FA266FE1E5}"/>
+              <a:t>merge_to_stack_matlab</a:t>
+            </a:r>
+          </a:p>
+        </p:txBody>
+      </p:sp>
+      <p:sp>
+        <p:nvSpPr>
+          <p:cNvPr id="29" name="Rectangle 28">
+            <a:extLst>
+              <a:ext uri="{FF2B5EF4-FFF2-40B4-BE49-F238E27FC236}">
+                <a16:creationId xmlns:a16="http://schemas.microsoft.com/office/drawing/2014/main" id="{3F3B2E86-BC18-C082-99CB-5ACF49CC0923}"/>
               </a:ext>
             </a:extLst>
           </p:cNvPr>
@@ -10211,8 +9984,8 @@
         </p:nvSpPr>
         <p:spPr>
           <a:xfrm>
-            <a:off x="5283232" y="2329638"/>
-            <a:ext cx="1136707" cy="276998"/>
+            <a:off x="5152128" y="2711627"/>
+            <a:ext cx="1411185" cy="377800"/>
           </a:xfrm>
           <a:prstGeom prst="rect">
             <a:avLst/>
@@ -10251,10 +10024,10 @@
       </p:sp>
       <p:sp>
         <p:nvSpPr>
-          <p:cNvPr id="19" name="TextBox 18">
-            <a:extLst>
-              <a:ext uri="{FF2B5EF4-FFF2-40B4-BE49-F238E27FC236}">
-                <a16:creationId xmlns:a16="http://schemas.microsoft.com/office/drawing/2014/main" id="{D1B200E0-B934-C795-EF76-01BF02764698}"/>
+          <p:cNvPr id="46" name="TextBox 45">
+            <a:extLst>
+              <a:ext uri="{FF2B5EF4-FFF2-40B4-BE49-F238E27FC236}">
+                <a16:creationId xmlns:a16="http://schemas.microsoft.com/office/drawing/2014/main" id="{D17A9E61-E95A-FE29-01A6-E1A166DA0F3D}"/>
               </a:ext>
             </a:extLst>
           </p:cNvPr>
@@ -10263,8 +10036,8 @@
         </p:nvSpPr>
         <p:spPr>
           <a:xfrm>
-            <a:off x="5276379" y="2319061"/>
-            <a:ext cx="1155923" cy="276999"/>
+            <a:off x="5125691" y="2681232"/>
+            <a:ext cx="1368333" cy="461665"/>
           </a:xfrm>
           <a:prstGeom prst="rect">
             <a:avLst/>
@@ -10279,94 +10052,7 @@
           <a:p>
             <a:r>
               <a:rPr lang="en-US" sz="1200" noProof="1"/>
-              <a:t>znap_to_raw</a:t>
-            </a:r>
-          </a:p>
-        </p:txBody>
-      </p:sp>
-      <p:sp>
-        <p:nvSpPr>
-          <p:cNvPr id="29" name="Rectangle 28">
-            <a:extLst>
-              <a:ext uri="{FF2B5EF4-FFF2-40B4-BE49-F238E27FC236}">
-                <a16:creationId xmlns:a16="http://schemas.microsoft.com/office/drawing/2014/main" id="{3F3B2E86-BC18-C082-99CB-5ACF49CC0923}"/>
-              </a:ext>
-            </a:extLst>
-          </p:cNvPr>
-          <p:cNvSpPr/>
-          <p:nvPr/>
-        </p:nvSpPr>
-        <p:spPr>
-          <a:xfrm>
-            <a:off x="5283231" y="2699646"/>
-            <a:ext cx="1136707" cy="276998"/>
-          </a:xfrm>
-          <a:prstGeom prst="rect">
-            <a:avLst/>
-          </a:prstGeom>
-          <a:solidFill>
-            <a:schemeClr val="accent6">
-              <a:lumMod val="60000"/>
-              <a:lumOff val="40000"/>
-            </a:schemeClr>
-          </a:solidFill>
-        </p:spPr>
-        <p:style>
-          <a:lnRef idx="2">
-            <a:schemeClr val="accent1">
-              <a:shade val="15000"/>
-            </a:schemeClr>
-          </a:lnRef>
-          <a:fillRef idx="1">
-            <a:schemeClr val="accent1"/>
-          </a:fillRef>
-          <a:effectRef idx="0">
-            <a:schemeClr val="accent1"/>
-          </a:effectRef>
-          <a:fontRef idx="minor">
-            <a:schemeClr val="lt1"/>
-          </a:fontRef>
-        </p:style>
-        <p:txBody>
-          <a:bodyPr rtlCol="0" anchor="ctr"/>
-          <a:lstStyle/>
-          <a:p>
-            <a:pPr algn="ctr"/>
-            <a:endParaRPr lang="en-US" noProof="1"/>
-          </a:p>
-        </p:txBody>
-      </p:sp>
-      <p:sp>
-        <p:nvSpPr>
-          <p:cNvPr id="46" name="TextBox 45">
-            <a:extLst>
-              <a:ext uri="{FF2B5EF4-FFF2-40B4-BE49-F238E27FC236}">
-                <a16:creationId xmlns:a16="http://schemas.microsoft.com/office/drawing/2014/main" id="{D17A9E61-E95A-FE29-01A6-E1A166DA0F3D}"/>
-              </a:ext>
-            </a:extLst>
-          </p:cNvPr>
-          <p:cNvSpPr txBox="1"/>
-          <p:nvPr/>
-        </p:nvSpPr>
-        <p:spPr>
-          <a:xfrm>
-            <a:off x="5262805" y="2708881"/>
-            <a:ext cx="1155923" cy="276999"/>
-          </a:xfrm>
-          <a:prstGeom prst="rect">
-            <a:avLst/>
-          </a:prstGeom>
-          <a:noFill/>
-        </p:spPr>
-        <p:txBody>
-          <a:bodyPr wrap="square" rtlCol="0">
-            <a:spAutoFit/>
-          </a:bodyPr>
-          <a:lstStyle/>
-          <a:p>
-            <a:r>
-              <a:rPr lang="en-US" sz="1200" noProof="1"/>
-              <a:t>znap_to_zarr</a:t>
+              <a:t>merge_to_stack_python</a:t>
             </a:r>
           </a:p>
         </p:txBody>
@@ -10382,19 +10068,19 @@
           </p:cNvPr>
           <p:cNvCxnSpPr>
             <a:cxnSpLocks/>
-            <a:stCxn id="91" idx="3"/>
+            <a:stCxn id="123" idx="3"/>
             <a:endCxn id="19" idx="1"/>
           </p:cNvCxnSpPr>
           <p:nvPr/>
         </p:nvCxnSpPr>
         <p:spPr>
           <a:xfrm flipV="1">
-            <a:off x="4982619" y="2457561"/>
-            <a:ext cx="293760" cy="516834"/>
+            <a:off x="4675403" y="2494635"/>
+            <a:ext cx="467080" cy="536676"/>
           </a:xfrm>
           <a:prstGeom prst="bentConnector3">
             <a:avLst>
-              <a:gd name="adj1" fmla="val 34279"/>
+              <a:gd name="adj1" fmla="val 50000"/>
             </a:avLst>
           </a:prstGeom>
           <a:ln w="38100">
@@ -10427,19 +10113,18 @@
           </p:cNvPr>
           <p:cNvCxnSpPr>
             <a:cxnSpLocks/>
-            <a:stCxn id="91" idx="3"/>
             <a:endCxn id="46" idx="1"/>
           </p:cNvCxnSpPr>
           <p:nvPr/>
         </p:nvCxnSpPr>
         <p:spPr>
           <a:xfrm flipV="1">
-            <a:off x="4982619" y="2847381"/>
-            <a:ext cx="280186" cy="127014"/>
+            <a:off x="4705035" y="2912065"/>
+            <a:ext cx="420656" cy="119995"/>
           </a:xfrm>
           <a:prstGeom prst="bentConnector3">
             <a:avLst>
-              <a:gd name="adj1" fmla="val 36814"/>
+              <a:gd name="adj1" fmla="val 50000"/>
             </a:avLst>
           </a:prstGeom>
           <a:ln w="38100">
@@ -10479,12 +10164,12 @@
         </p:nvCxnSpPr>
         <p:spPr>
           <a:xfrm flipV="1">
-            <a:off x="6418728" y="2777354"/>
-            <a:ext cx="1307055" cy="70027"/>
+            <a:off x="6494024" y="2869687"/>
+            <a:ext cx="1231759" cy="42378"/>
           </a:xfrm>
           <a:prstGeom prst="bentConnector3">
             <a:avLst>
-              <a:gd name="adj1" fmla="val 42933"/>
+              <a:gd name="adj1" fmla="val 27504"/>
             </a:avLst>
           </a:prstGeom>
           <a:ln w="38100">
@@ -10524,12 +10209,12 @@
         </p:nvCxnSpPr>
         <p:spPr>
           <a:xfrm flipV="1">
-            <a:off x="6432302" y="2424253"/>
-            <a:ext cx="1321236" cy="33308"/>
+            <a:off x="6510816" y="2424253"/>
+            <a:ext cx="1242722" cy="70382"/>
           </a:xfrm>
           <a:prstGeom prst="bentConnector3">
             <a:avLst>
-              <a:gd name="adj1" fmla="val 15047"/>
+              <a:gd name="adj1" fmla="val 36622"/>
             </a:avLst>
           </a:prstGeom>
           <a:ln w="38100">
@@ -10551,6 +10236,329 @@
           </a:fontRef>
         </p:style>
       </p:cxnSp>
+      <p:cxnSp>
+        <p:nvCxnSpPr>
+          <p:cNvPr id="77" name="Elbow Connector 76">
+            <a:extLst>
+              <a:ext uri="{FF2B5EF4-FFF2-40B4-BE49-F238E27FC236}">
+                <a16:creationId xmlns:a16="http://schemas.microsoft.com/office/drawing/2014/main" id="{EFB9DCAC-D9DF-356F-214E-A86B9BC7E720}"/>
+              </a:ext>
+            </a:extLst>
+          </p:cNvPr>
+          <p:cNvCxnSpPr>
+            <a:cxnSpLocks/>
+            <a:stCxn id="38" idx="3"/>
+            <a:endCxn id="67" idx="1"/>
+          </p:cNvCxnSpPr>
+          <p:nvPr/>
+        </p:nvCxnSpPr>
+        <p:spPr>
+          <a:xfrm flipV="1">
+            <a:off x="4157209" y="1451905"/>
+            <a:ext cx="1084121" cy="196698"/>
+          </a:xfrm>
+          <a:prstGeom prst="bentConnector3">
+            <a:avLst>
+              <a:gd name="adj1" fmla="val 50000"/>
+            </a:avLst>
+          </a:prstGeom>
+          <a:ln w="38100">
+            <a:solidFill>
+              <a:srgbClr val="FF0000"/>
+            </a:solidFill>
+            <a:tailEnd type="triangle"/>
+          </a:ln>
+        </p:spPr>
+        <p:style>
+          <a:lnRef idx="2">
+            <a:schemeClr val="dk1"/>
+          </a:lnRef>
+          <a:fillRef idx="0">
+            <a:schemeClr val="dk1"/>
+          </a:fillRef>
+          <a:effectRef idx="1">
+            <a:schemeClr val="dk1"/>
+          </a:effectRef>
+          <a:fontRef idx="minor">
+            <a:schemeClr val="tx1"/>
+          </a:fontRef>
+        </p:style>
+      </p:cxnSp>
+      <p:cxnSp>
+        <p:nvCxnSpPr>
+          <p:cNvPr id="45" name="Elbow Connector 44">
+            <a:extLst>
+              <a:ext uri="{FF2B5EF4-FFF2-40B4-BE49-F238E27FC236}">
+                <a16:creationId xmlns:a16="http://schemas.microsoft.com/office/drawing/2014/main" id="{06259752-2039-425E-9397-5486DCC9D33E}"/>
+              </a:ext>
+            </a:extLst>
+          </p:cNvPr>
+          <p:cNvCxnSpPr>
+            <a:cxnSpLocks/>
+            <a:stCxn id="9" idx="3"/>
+            <a:endCxn id="38" idx="1"/>
+          </p:cNvCxnSpPr>
+          <p:nvPr/>
+        </p:nvCxnSpPr>
+        <p:spPr>
+          <a:xfrm flipV="1">
+            <a:off x="2030477" y="1648603"/>
+            <a:ext cx="1366809" cy="365194"/>
+          </a:xfrm>
+          <a:prstGeom prst="bentConnector3">
+            <a:avLst>
+              <a:gd name="adj1" fmla="val 50000"/>
+            </a:avLst>
+          </a:prstGeom>
+          <a:ln w="38100">
+            <a:solidFill>
+              <a:srgbClr val="FF0000"/>
+            </a:solidFill>
+            <a:tailEnd type="triangle"/>
+          </a:ln>
+        </p:spPr>
+        <p:style>
+          <a:lnRef idx="2">
+            <a:schemeClr val="dk1"/>
+          </a:lnRef>
+          <a:fillRef idx="0">
+            <a:schemeClr val="dk1"/>
+          </a:fillRef>
+          <a:effectRef idx="1">
+            <a:schemeClr val="dk1"/>
+          </a:effectRef>
+          <a:fontRef idx="minor">
+            <a:schemeClr val="tx1"/>
+          </a:fontRef>
+        </p:style>
+      </p:cxnSp>
+      <p:cxnSp>
+        <p:nvCxnSpPr>
+          <p:cNvPr id="140" name="Elbow Connector 139">
+            <a:extLst>
+              <a:ext uri="{FF2B5EF4-FFF2-40B4-BE49-F238E27FC236}">
+                <a16:creationId xmlns:a16="http://schemas.microsoft.com/office/drawing/2014/main" id="{F2BD8F2E-331B-FC73-1ED0-016EE89404B5}"/>
+              </a:ext>
+            </a:extLst>
+          </p:cNvPr>
+          <p:cNvCxnSpPr>
+            <a:cxnSpLocks/>
+            <a:stCxn id="67" idx="3"/>
+            <a:endCxn id="130" idx="1"/>
+          </p:cNvCxnSpPr>
+          <p:nvPr/>
+        </p:nvCxnSpPr>
+        <p:spPr>
+          <a:xfrm>
+            <a:off x="6397253" y="1451905"/>
+            <a:ext cx="1356285" cy="972348"/>
+          </a:xfrm>
+          <a:prstGeom prst="bentConnector3">
+            <a:avLst>
+              <a:gd name="adj1" fmla="val 42194"/>
+            </a:avLst>
+          </a:prstGeom>
+          <a:ln w="38100">
+            <a:solidFill>
+              <a:srgbClr val="FF0000"/>
+            </a:solidFill>
+            <a:tailEnd type="triangle"/>
+          </a:ln>
+        </p:spPr>
+        <p:style>
+          <a:lnRef idx="2">
+            <a:schemeClr val="dk1"/>
+          </a:lnRef>
+          <a:fillRef idx="0">
+            <a:schemeClr val="dk1"/>
+          </a:fillRef>
+          <a:effectRef idx="1">
+            <a:schemeClr val="dk1"/>
+          </a:effectRef>
+          <a:fontRef idx="minor">
+            <a:schemeClr val="tx1"/>
+          </a:fontRef>
+        </p:style>
+      </p:cxnSp>
+      <p:cxnSp>
+        <p:nvCxnSpPr>
+          <p:cNvPr id="161" name="Elbow Connector 160">
+            <a:extLst>
+              <a:ext uri="{FF2B5EF4-FFF2-40B4-BE49-F238E27FC236}">
+                <a16:creationId xmlns:a16="http://schemas.microsoft.com/office/drawing/2014/main" id="{871D9BCC-E78C-93BC-3871-5B4F055D0068}"/>
+              </a:ext>
+            </a:extLst>
+          </p:cNvPr>
+          <p:cNvCxnSpPr>
+            <a:cxnSpLocks/>
+            <a:stCxn id="150" idx="1"/>
+            <a:endCxn id="151" idx="1"/>
+          </p:cNvCxnSpPr>
+          <p:nvPr/>
+        </p:nvCxnSpPr>
+        <p:spPr>
+          <a:xfrm rot="10800000" flipV="1">
+            <a:off x="10357556" y="2850128"/>
+            <a:ext cx="1411" cy="464316"/>
+          </a:xfrm>
+          <a:prstGeom prst="bentConnector3">
+            <a:avLst>
+              <a:gd name="adj1" fmla="val 16301276"/>
+            </a:avLst>
+          </a:prstGeom>
+          <a:ln w="38100">
+            <a:solidFill>
+              <a:srgbClr val="FF0000"/>
+            </a:solidFill>
+            <a:tailEnd type="triangle"/>
+          </a:ln>
+        </p:spPr>
+        <p:style>
+          <a:lnRef idx="2">
+            <a:schemeClr val="dk1"/>
+          </a:lnRef>
+          <a:fillRef idx="0">
+            <a:schemeClr val="dk1"/>
+          </a:fillRef>
+          <a:effectRef idx="1">
+            <a:schemeClr val="dk1"/>
+          </a:effectRef>
+          <a:fontRef idx="minor">
+            <a:schemeClr val="tx1"/>
+          </a:fontRef>
+        </p:style>
+      </p:cxnSp>
+      <p:cxnSp>
+        <p:nvCxnSpPr>
+          <p:cNvPr id="30" name="Elbow Connector 29">
+            <a:extLst>
+              <a:ext uri="{FF2B5EF4-FFF2-40B4-BE49-F238E27FC236}">
+                <a16:creationId xmlns:a16="http://schemas.microsoft.com/office/drawing/2014/main" id="{51B8DDD4-A1D7-AABF-8BD3-71839D82721B}"/>
+              </a:ext>
+            </a:extLst>
+          </p:cNvPr>
+          <p:cNvCxnSpPr>
+            <a:cxnSpLocks/>
+            <a:stCxn id="24" idx="3"/>
+            <a:endCxn id="9" idx="1"/>
+          </p:cNvCxnSpPr>
+          <p:nvPr/>
+        </p:nvCxnSpPr>
+        <p:spPr>
+          <a:xfrm flipH="1">
+            <a:off x="959222" y="553392"/>
+            <a:ext cx="1934399" cy="1460405"/>
+          </a:xfrm>
+          <a:prstGeom prst="bentConnector5">
+            <a:avLst>
+              <a:gd name="adj1" fmla="val -11818"/>
+              <a:gd name="adj2" fmla="val 15650"/>
+              <a:gd name="adj3" fmla="val 121009"/>
+            </a:avLst>
+          </a:prstGeom>
+          <a:ln w="38100">
+            <a:solidFill>
+              <a:srgbClr val="FF0000"/>
+            </a:solidFill>
+            <a:tailEnd type="triangle"/>
+          </a:ln>
+        </p:spPr>
+        <p:style>
+          <a:lnRef idx="2">
+            <a:schemeClr val="dk1"/>
+          </a:lnRef>
+          <a:fillRef idx="0">
+            <a:schemeClr val="dk1"/>
+          </a:fillRef>
+          <a:effectRef idx="1">
+            <a:schemeClr val="dk1"/>
+          </a:effectRef>
+          <a:fontRef idx="minor">
+            <a:schemeClr val="tx1"/>
+          </a:fontRef>
+        </p:style>
+      </p:cxnSp>
+      <p:cxnSp>
+        <p:nvCxnSpPr>
+          <p:cNvPr id="214" name="Elbow Connector 213">
+            <a:extLst>
+              <a:ext uri="{FF2B5EF4-FFF2-40B4-BE49-F238E27FC236}">
+                <a16:creationId xmlns:a16="http://schemas.microsoft.com/office/drawing/2014/main" id="{31ED5637-5A55-6E0A-E3B9-8845F45468F8}"/>
+              </a:ext>
+            </a:extLst>
+          </p:cNvPr>
+          <p:cNvCxnSpPr>
+            <a:cxnSpLocks/>
+          </p:cNvCxnSpPr>
+          <p:nvPr/>
+        </p:nvCxnSpPr>
+        <p:spPr>
+          <a:xfrm>
+            <a:off x="113816" y="6557378"/>
+            <a:ext cx="973837" cy="12700"/>
+          </a:xfrm>
+          <a:prstGeom prst="bentConnector3">
+            <a:avLst>
+              <a:gd name="adj1" fmla="val 50000"/>
+            </a:avLst>
+          </a:prstGeom>
+          <a:ln w="38100">
+            <a:solidFill>
+              <a:srgbClr val="FF0000"/>
+            </a:solidFill>
+            <a:tailEnd type="triangle"/>
+          </a:ln>
+        </p:spPr>
+        <p:style>
+          <a:lnRef idx="2">
+            <a:schemeClr val="dk1"/>
+          </a:lnRef>
+          <a:fillRef idx="0">
+            <a:schemeClr val="dk1"/>
+          </a:fillRef>
+          <a:effectRef idx="1">
+            <a:schemeClr val="dk1"/>
+          </a:effectRef>
+          <a:fontRef idx="minor">
+            <a:schemeClr val="tx1"/>
+          </a:fontRef>
+        </p:style>
+      </p:cxnSp>
+      <p:sp>
+        <p:nvSpPr>
+          <p:cNvPr id="215" name="TextBox 214">
+            <a:extLst>
+              <a:ext uri="{FF2B5EF4-FFF2-40B4-BE49-F238E27FC236}">
+                <a16:creationId xmlns:a16="http://schemas.microsoft.com/office/drawing/2014/main" id="{1D62E90F-6AEF-3CEF-E96A-85934E6C9C7E}"/>
+              </a:ext>
+            </a:extLst>
+          </p:cNvPr>
+          <p:cNvSpPr txBox="1"/>
+          <p:nvPr/>
+        </p:nvSpPr>
+        <p:spPr>
+          <a:xfrm>
+            <a:off x="7087" y="6290346"/>
+            <a:ext cx="1007520" cy="276999"/>
+          </a:xfrm>
+          <a:prstGeom prst="rect">
+            <a:avLst/>
+          </a:prstGeom>
+          <a:noFill/>
+        </p:spPr>
+        <p:txBody>
+          <a:bodyPr wrap="none" rtlCol="0">
+            <a:spAutoFit/>
+          </a:bodyPr>
+          <a:lstStyle/>
+          <a:p>
+            <a:r>
+              <a:rPr lang="en-US" sz="1200" noProof="1"/>
+              <a:t>Default path</a:t>
+            </a:r>
+          </a:p>
+        </p:txBody>
+      </p:sp>
     </p:spTree>
     <p:extLst>
       <p:ext uri="{BB962C8B-B14F-4D97-AF65-F5344CB8AC3E}">
